--- a/GMcourse/Lectures/LectureData/04.groupdifferences/stats/stat slides.pptx
+++ b/GMcourse/Lectures/LectureData/04.groupdifferences/stats/stat slides.pptx
@@ -12,6 +12,8 @@
     <p:sldId id="314" r:id="rId6"/>
     <p:sldId id="310" r:id="rId7"/>
     <p:sldId id="292" r:id="rId8"/>
+    <p:sldId id="317" r:id="rId9"/>
+    <p:sldId id="316" r:id="rId10"/>
   </p:sldIdLst>
   <p:sldSz cx="9144000" cy="6858000" type="screen4x3"/>
   <p:notesSz cx="6858000" cy="9144000"/>
@@ -110,6 +112,11 @@
       </a:defRPr>
     </a:lvl9pPr>
   </p:defaultTextStyle>
+  <p:extLst>
+    <p:ext uri="{EFAFB233-063F-42B5-8137-9DF3F51BA10A}">
+      <p15:sldGuideLst xmlns:p15="http://schemas.microsoft.com/office/powerpoint/2012/main"/>
+    </p:ext>
+  </p:extLst>
 </p:presentation>
 </file>
 
@@ -244,7 +251,7 @@
           <a:p>
             <a:fld id="{DF1FEC42-DE82-D548-887A-A0A1819A413F}" type="datetimeFigureOut">
               <a:rPr lang="es-ES_tradnl" smtClean="0"/>
-              <a:t>18/5/26</a:t>
+              <a:t>20/5/26</a:t>
             </a:fld>
             <a:endParaRPr lang="es-ES_tradnl"/>
           </a:p>
@@ -414,7 +421,7 @@
           <a:p>
             <a:fld id="{DF1FEC42-DE82-D548-887A-A0A1819A413F}" type="datetimeFigureOut">
               <a:rPr lang="es-ES_tradnl" smtClean="0"/>
-              <a:t>18/5/26</a:t>
+              <a:t>20/5/26</a:t>
             </a:fld>
             <a:endParaRPr lang="es-ES_tradnl"/>
           </a:p>
@@ -594,7 +601,7 @@
           <a:p>
             <a:fld id="{DF1FEC42-DE82-D548-887A-A0A1819A413F}" type="datetimeFigureOut">
               <a:rPr lang="es-ES_tradnl" smtClean="0"/>
-              <a:t>18/5/26</a:t>
+              <a:t>20/5/26</a:t>
             </a:fld>
             <a:endParaRPr lang="es-ES_tradnl"/>
           </a:p>
@@ -764,7 +771,7 @@
           <a:p>
             <a:fld id="{DF1FEC42-DE82-D548-887A-A0A1819A413F}" type="datetimeFigureOut">
               <a:rPr lang="es-ES_tradnl" smtClean="0"/>
-              <a:t>18/5/26</a:t>
+              <a:t>20/5/26</a:t>
             </a:fld>
             <a:endParaRPr lang="es-ES_tradnl"/>
           </a:p>
@@ -1010,7 +1017,7 @@
           <a:p>
             <a:fld id="{DF1FEC42-DE82-D548-887A-A0A1819A413F}" type="datetimeFigureOut">
               <a:rPr lang="es-ES_tradnl" smtClean="0"/>
-              <a:t>18/5/26</a:t>
+              <a:t>20/5/26</a:t>
             </a:fld>
             <a:endParaRPr lang="es-ES_tradnl"/>
           </a:p>
@@ -1242,7 +1249,7 @@
           <a:p>
             <a:fld id="{DF1FEC42-DE82-D548-887A-A0A1819A413F}" type="datetimeFigureOut">
               <a:rPr lang="es-ES_tradnl" smtClean="0"/>
-              <a:t>18/5/26</a:t>
+              <a:t>20/5/26</a:t>
             </a:fld>
             <a:endParaRPr lang="es-ES_tradnl"/>
           </a:p>
@@ -1609,7 +1616,7 @@
           <a:p>
             <a:fld id="{DF1FEC42-DE82-D548-887A-A0A1819A413F}" type="datetimeFigureOut">
               <a:rPr lang="es-ES_tradnl" smtClean="0"/>
-              <a:t>18/5/26</a:t>
+              <a:t>20/5/26</a:t>
             </a:fld>
             <a:endParaRPr lang="es-ES_tradnl"/>
           </a:p>
@@ -1727,7 +1734,7 @@
           <a:p>
             <a:fld id="{DF1FEC42-DE82-D548-887A-A0A1819A413F}" type="datetimeFigureOut">
               <a:rPr lang="es-ES_tradnl" smtClean="0"/>
-              <a:t>18/5/26</a:t>
+              <a:t>20/5/26</a:t>
             </a:fld>
             <a:endParaRPr lang="es-ES_tradnl"/>
           </a:p>
@@ -1822,7 +1829,7 @@
           <a:p>
             <a:fld id="{DF1FEC42-DE82-D548-887A-A0A1819A413F}" type="datetimeFigureOut">
               <a:rPr lang="es-ES_tradnl" smtClean="0"/>
-              <a:t>18/5/26</a:t>
+              <a:t>20/5/26</a:t>
             </a:fld>
             <a:endParaRPr lang="es-ES_tradnl"/>
           </a:p>
@@ -2099,7 +2106,7 @@
           <a:p>
             <a:fld id="{DF1FEC42-DE82-D548-887A-A0A1819A413F}" type="datetimeFigureOut">
               <a:rPr lang="es-ES_tradnl" smtClean="0"/>
-              <a:t>18/5/26</a:t>
+              <a:t>20/5/26</a:t>
             </a:fld>
             <a:endParaRPr lang="es-ES_tradnl"/>
           </a:p>
@@ -2356,7 +2363,7 @@
           <a:p>
             <a:fld id="{DF1FEC42-DE82-D548-887A-A0A1819A413F}" type="datetimeFigureOut">
               <a:rPr lang="es-ES_tradnl" smtClean="0"/>
-              <a:t>18/5/26</a:t>
+              <a:t>20/5/26</a:t>
             </a:fld>
             <a:endParaRPr lang="es-ES_tradnl"/>
           </a:p>
@@ -2569,7 +2576,7 @@
           <a:p>
             <a:fld id="{DF1FEC42-DE82-D548-887A-A0A1819A413F}" type="datetimeFigureOut">
               <a:rPr lang="es-ES_tradnl" smtClean="0"/>
-              <a:t>18/5/26</a:t>
+              <a:t>20/5/26</a:t>
             </a:fld>
             <a:endParaRPr lang="es-ES_tradnl"/>
           </a:p>
@@ -3036,7 +3043,7 @@
                 </a:solidFill>
                 <a:latin typeface=""/>
               </a:rPr>
-              <a:t>When there is only a column of ones, the vector of coefficients is the mean vector</a:t>
+              <a:t>When there is only a column of ones, the vector of coefficients is the mean vector.</a:t>
             </a:r>
           </a:p>
           <a:p>
@@ -3762,7 +3769,7 @@
                 </a:solidFill>
                 <a:latin typeface=""/>
               </a:rPr>
-              <a:t>When there is only a column of ones, the vector of coefficients is the mean vector</a:t>
+              <a:t>When there is only a column of ones, the vector of coefficients is the mean vector.</a:t>
             </a:r>
           </a:p>
           <a:p>
@@ -6228,7 +6235,7 @@
                 </a:solidFill>
                 <a:latin typeface=""/>
               </a:rPr>
-              <a:t>Diagonal of outer-product of error represents distances from mean</a:t>
+              <a:t>Diagonal of outer-product of error represents distances from the mean.</a:t>
             </a:r>
           </a:p>
         </p:txBody>
@@ -11495,7 +11502,7 @@
         <p:spPr>
           <a:xfrm>
             <a:off x="2357096" y="4077004"/>
-            <a:ext cx="2712074" cy="738664"/>
+            <a:ext cx="2812432" cy="738664"/>
           </a:xfrm>
           <a:prstGeom prst="rect">
             <a:avLst/>
@@ -11521,17 +11528,6 @@
           <a:lstStyle/>
           <a:p>
             <a:r>
-              <a:rPr lang="en-US" sz="1400">
-                <a:solidFill>
-                  <a:schemeClr val="tx1">
-                    <a:lumMod val="75000"/>
-                    <a:lumOff val="25000"/>
-                  </a:schemeClr>
-                </a:solidFill>
-              </a:rPr>
-              <a:t>* If </a:t>
-            </a:r>
-            <a:r>
               <a:rPr lang="en-US" sz="1400" dirty="0">
                 <a:solidFill>
                   <a:schemeClr val="tx1">
@@ -11540,7 +11536,7 @@
                   </a:schemeClr>
                 </a:solidFill>
               </a:rPr>
-              <a:t>the reduced model is different, the coefficient of determination is evaluated using a null model</a:t>
+              <a:t>* If the reduced model is different, the coefficient of determination is evaluated using a null model</a:t>
             </a:r>
           </a:p>
         </p:txBody>
@@ -11657,35 +11653,35 @@
               <a:buFontTx/>
               <a:buChar char="-"/>
             </a:pPr>
-            <a:r>
-              <a:rPr lang="en-US" sz="2000" b="1" dirty="0">
-                <a:solidFill>
-                  <a:schemeClr val="tx1">
-                    <a:lumMod val="75000"/>
-                    <a:lumOff val="25000"/>
-                  </a:schemeClr>
-                </a:solidFill>
-                <a:latin typeface=""/>
-              </a:rPr>
-              <a:t>Use randomizations </a:t>
-            </a:r>
-            <a:r>
-              <a:rPr lang="en-US" sz="2000" dirty="0">
-                <a:solidFill>
-                  <a:schemeClr val="tx1">
-                    <a:lumMod val="75000"/>
-                    <a:lumOff val="25000"/>
-                  </a:schemeClr>
-                </a:solidFill>
-                <a:latin typeface=""/>
-              </a:rPr>
-              <a:t>to obtain an empirical distribution</a:t>
-            </a:r>
+            <a:endParaRPr lang="en-US" sz="2000" dirty="0">
+              <a:solidFill>
+                <a:schemeClr val="tx1">
+                  <a:lumMod val="75000"/>
+                  <a:lumOff val="25000"/>
+                </a:schemeClr>
+              </a:solidFill>
+              <a:latin typeface=""/>
+            </a:endParaRPr>
+          </a:p>
+          <a:p>
+            <a:pPr marL="285750" indent="-285750">
+              <a:buFontTx/>
+              <a:buChar char="-"/>
+            </a:pPr>
+            <a:endParaRPr lang="en-US" sz="2000" dirty="0">
+              <a:solidFill>
+                <a:schemeClr val="tx1">
+                  <a:lumMod val="75000"/>
+                  <a:lumOff val="25000"/>
+                </a:schemeClr>
+              </a:solidFill>
+              <a:latin typeface=""/>
+            </a:endParaRPr>
           </a:p>
         </p:txBody>
       </p:sp>
-      <mc:AlternateContent xmlns:mc="http://schemas.openxmlformats.org/markup-compatibility/2006">
-        <mc:Choice xmlns:a14="http://schemas.microsoft.com/office/drawing/2010/main" Requires="a14">
+      <mc:AlternateContent xmlns:mc="http://schemas.openxmlformats.org/markup-compatibility/2006" xmlns:a14="http://schemas.microsoft.com/office/drawing/2010/main">
+        <mc:Choice Requires="a14">
           <p:sp>
             <p:nvSpPr>
               <p:cNvPr id="13" name="TextBox 12"/>
@@ -11737,7 +11733,7 @@
                             <a:lumOff val="25000"/>
                           </a:schemeClr>
                         </a:solidFill>
-                        <a:latin typeface=""/>
+                        <a:latin typeface="Cambria Math" panose="02040503050406030204" pitchFamily="18" charset="0"/>
                       </a:rPr>
                       <m:t>𝛬</m:t>
                     </m:r>
@@ -11749,7 +11745,7 @@
                             <a:lumOff val="25000"/>
                           </a:schemeClr>
                         </a:solidFill>
-                        <a:latin typeface=""/>
+                        <a:latin typeface="Cambria Math" panose="02040503050406030204" pitchFamily="18" charset="0"/>
                       </a:rPr>
                       <m:t>= </m:t>
                     </m:r>
@@ -11763,7 +11759,7 @@
                                 <a:lumOff val="25000"/>
                               </a:schemeClr>
                             </a:solidFill>
-                            <a:latin typeface=""/>
+                            <a:latin typeface="Cambria Math" panose="02040503050406030204" pitchFamily="18" charset="0"/>
                           </a:rPr>
                         </m:ctrlPr>
                       </m:fPr>
@@ -11780,7 +11776,7 @@
                                     <a:lumOff val="25000"/>
                                   </a:schemeClr>
                                 </a:solidFill>
-                                <a:latin typeface=""/>
+                                <a:latin typeface="Cambria Math" panose="02040503050406030204" pitchFamily="18" charset="0"/>
                               </a:rPr>
                             </m:ctrlPr>
                           </m:dPr>
@@ -11795,7 +11791,7 @@
                                         <a:lumOff val="25000"/>
                                       </a:schemeClr>
                                     </a:solidFill>
-                                    <a:latin typeface=""/>
+                                    <a:latin typeface="Cambria Math" panose="02040503050406030204" pitchFamily="18" charset="0"/>
                                   </a:rPr>
                                 </m:ctrlPr>
                               </m:sSubPr>
@@ -11808,7 +11804,7 @@
                                         <a:lumOff val="25000"/>
                                       </a:schemeClr>
                                     </a:solidFill>
-                                    <a:latin typeface=""/>
+                                    <a:latin typeface="Cambria Math" panose="02040503050406030204" pitchFamily="18" charset="0"/>
                                   </a:rPr>
                                   <m:t>𝐒</m:t>
                                 </m:r>
@@ -11822,7 +11818,7 @@
                                         <a:lumOff val="25000"/>
                                       </a:schemeClr>
                                     </a:solidFill>
-                                    <a:latin typeface=""/>
+                                    <a:latin typeface="Cambria Math" panose="02040503050406030204" pitchFamily="18" charset="0"/>
                                   </a:rPr>
                                   <m:t>𝐅</m:t>
                                 </m:r>
@@ -11844,7 +11840,7 @@
                                     <a:lumOff val="25000"/>
                                   </a:schemeClr>
                                 </a:solidFill>
-                                <a:latin typeface=""/>
+                                <a:latin typeface="Cambria Math" panose="02040503050406030204" pitchFamily="18" charset="0"/>
                               </a:rPr>
                             </m:ctrlPr>
                           </m:dPr>
@@ -11859,7 +11855,7 @@
                                         <a:lumOff val="25000"/>
                                       </a:schemeClr>
                                     </a:solidFill>
-                                    <a:latin typeface=""/>
+                                    <a:latin typeface="Cambria Math" panose="02040503050406030204" pitchFamily="18" charset="0"/>
                                   </a:rPr>
                                 </m:ctrlPr>
                               </m:dPr>
@@ -11874,7 +11870,7 @@
                                             <a:lumOff val="25000"/>
                                           </a:schemeClr>
                                         </a:solidFill>
-                                        <a:latin typeface=""/>
+                                        <a:latin typeface="Cambria Math" panose="02040503050406030204" pitchFamily="18" charset="0"/>
                                       </a:rPr>
                                     </m:ctrlPr>
                                   </m:sSubPr>
@@ -11887,7 +11883,7 @@
                                             <a:lumOff val="25000"/>
                                           </a:schemeClr>
                                         </a:solidFill>
-                                        <a:latin typeface=""/>
+                                        <a:latin typeface="Cambria Math" panose="02040503050406030204" pitchFamily="18" charset="0"/>
                                       </a:rPr>
                                       <m:t>𝐒</m:t>
                                     </m:r>
@@ -11901,7 +11897,7 @@
                                             <a:lumOff val="25000"/>
                                           </a:schemeClr>
                                         </a:solidFill>
-                                        <a:latin typeface=""/>
+                                        <a:latin typeface="Cambria Math" panose="02040503050406030204" pitchFamily="18" charset="0"/>
                                       </a:rPr>
                                       <m:t>𝐍</m:t>
                                     </m:r>
@@ -11915,7 +11911,7 @@
                                         <a:lumOff val="25000"/>
                                       </a:schemeClr>
                                     </a:solidFill>
-                                    <a:latin typeface=""/>
+                                    <a:latin typeface="Cambria Math" panose="02040503050406030204" pitchFamily="18" charset="0"/>
                                   </a:rPr>
                                   <m:t>−</m:t>
                                 </m:r>
@@ -11929,7 +11925,7 @@
                                             <a:lumOff val="25000"/>
                                           </a:schemeClr>
                                         </a:solidFill>
-                                        <a:latin typeface=""/>
+                                        <a:latin typeface="Cambria Math" panose="02040503050406030204" pitchFamily="18" charset="0"/>
                                       </a:rPr>
                                     </m:ctrlPr>
                                   </m:sSubPr>
@@ -11942,7 +11938,7 @@
                                             <a:lumOff val="25000"/>
                                           </a:schemeClr>
                                         </a:solidFill>
-                                        <a:latin typeface=""/>
+                                        <a:latin typeface="Cambria Math" panose="02040503050406030204" pitchFamily="18" charset="0"/>
                                       </a:rPr>
                                       <m:t>𝐒</m:t>
                                     </m:r>
@@ -11956,7 +11952,7 @@
                                             <a:lumOff val="25000"/>
                                           </a:schemeClr>
                                         </a:solidFill>
-                                        <a:latin typeface=""/>
+                                        <a:latin typeface="Cambria Math" panose="02040503050406030204" pitchFamily="18" charset="0"/>
                                       </a:rPr>
                                       <m:t>𝐅</m:t>
                                     </m:r>
@@ -11972,7 +11968,7 @@
                                     <a:lumOff val="25000"/>
                                   </a:schemeClr>
                                 </a:solidFill>
-                                <a:latin typeface=""/>
+                                <a:latin typeface="Cambria Math" panose="02040503050406030204" pitchFamily="18" charset="0"/>
                               </a:rPr>
                               <m:t>+</m:t>
                             </m:r>
@@ -11986,7 +11982,7 @@
                                         <a:lumOff val="25000"/>
                                       </a:schemeClr>
                                     </a:solidFill>
-                                    <a:latin typeface=""/>
+                                    <a:latin typeface="Cambria Math" panose="02040503050406030204" pitchFamily="18" charset="0"/>
                                   </a:rPr>
                                 </m:ctrlPr>
                               </m:sSubPr>
@@ -11999,7 +11995,7 @@
                                         <a:lumOff val="25000"/>
                                       </a:schemeClr>
                                     </a:solidFill>
-                                    <a:latin typeface=""/>
+                                    <a:latin typeface="Cambria Math" panose="02040503050406030204" pitchFamily="18" charset="0"/>
                                   </a:rPr>
                                   <m:t>𝐒</m:t>
                                 </m:r>
@@ -12013,7 +12009,7 @@
                                         <a:lumOff val="25000"/>
                                       </a:schemeClr>
                                     </a:solidFill>
-                                    <a:latin typeface=""/>
+                                    <a:latin typeface="Cambria Math" panose="02040503050406030204" pitchFamily="18" charset="0"/>
                                   </a:rPr>
                                   <m:t>𝐅</m:t>
                                 </m:r>
@@ -12065,7 +12061,7 @@
                             <a:lumOff val="25000"/>
                           </a:schemeClr>
                         </a:solidFill>
-                        <a:latin typeface=""/>
+                        <a:latin typeface="Cambria Math" panose="02040503050406030204" pitchFamily="18" charset="0"/>
                       </a:rPr>
                       <m:t>𝑡𝑟</m:t>
                     </m:r>
@@ -12079,7 +12075,7 @@
                                 <a:lumOff val="25000"/>
                               </a:schemeClr>
                             </a:solidFill>
-                            <a:latin typeface=""/>
+                            <a:latin typeface="Cambria Math" panose="02040503050406030204" pitchFamily="18" charset="0"/>
                           </a:rPr>
                         </m:ctrlPr>
                       </m:dPr>
@@ -12092,7 +12088,7 @@
                                 <a:lumOff val="25000"/>
                               </a:schemeClr>
                             </a:solidFill>
-                            <a:latin typeface=""/>
+                            <a:latin typeface="Cambria Math" panose="02040503050406030204" pitchFamily="18" charset="0"/>
                           </a:rPr>
                           <m:t>(</m:t>
                         </m:r>
@@ -12106,7 +12102,7 @@
                                     <a:lumOff val="25000"/>
                                   </a:schemeClr>
                                 </a:solidFill>
-                                <a:latin typeface=""/>
+                                <a:latin typeface="Cambria Math" panose="02040503050406030204" pitchFamily="18" charset="0"/>
                               </a:rPr>
                             </m:ctrlPr>
                           </m:sSubPr>
@@ -12119,7 +12115,7 @@
                                     <a:lumOff val="25000"/>
                                   </a:schemeClr>
                                 </a:solidFill>
-                                <a:latin typeface=""/>
+                                <a:latin typeface="Cambria Math" panose="02040503050406030204" pitchFamily="18" charset="0"/>
                               </a:rPr>
                               <m:t>𝐒</m:t>
                             </m:r>
@@ -12133,7 +12129,7 @@
                                     <a:lumOff val="25000"/>
                                   </a:schemeClr>
                                 </a:solidFill>
-                                <a:latin typeface=""/>
+                                <a:latin typeface="Cambria Math" panose="02040503050406030204" pitchFamily="18" charset="0"/>
                               </a:rPr>
                               <m:t>𝐑</m:t>
                             </m:r>
@@ -12147,7 +12143,7 @@
                                 <a:lumOff val="25000"/>
                               </a:schemeClr>
                             </a:solidFill>
-                            <a:latin typeface=""/>
+                            <a:latin typeface="Cambria Math" panose="02040503050406030204" pitchFamily="18" charset="0"/>
                           </a:rPr>
                           <m:t>−</m:t>
                         </m:r>
@@ -12161,7 +12157,7 @@
                                     <a:lumOff val="25000"/>
                                   </a:schemeClr>
                                 </a:solidFill>
-                                <a:latin typeface=""/>
+                                <a:latin typeface="Cambria Math" panose="02040503050406030204" pitchFamily="18" charset="0"/>
                               </a:rPr>
                             </m:ctrlPr>
                           </m:sSubPr>
@@ -12174,7 +12170,7 @@
                                     <a:lumOff val="25000"/>
                                   </a:schemeClr>
                                 </a:solidFill>
-                                <a:latin typeface=""/>
+                                <a:latin typeface="Cambria Math" panose="02040503050406030204" pitchFamily="18" charset="0"/>
                               </a:rPr>
                               <m:t>𝐒</m:t>
                             </m:r>
@@ -12188,7 +12184,7 @@
                                     <a:lumOff val="25000"/>
                                   </a:schemeClr>
                                 </a:solidFill>
-                                <a:latin typeface=""/>
+                                <a:latin typeface="Cambria Math" panose="02040503050406030204" pitchFamily="18" charset="0"/>
                               </a:rPr>
                               <m:t>𝐅</m:t>
                             </m:r>
@@ -12202,7 +12198,7 @@
                                 <a:lumOff val="25000"/>
                               </a:schemeClr>
                             </a:solidFill>
-                            <a:latin typeface=""/>
+                            <a:latin typeface="Cambria Math" panose="02040503050406030204" pitchFamily="18" charset="0"/>
                           </a:rPr>
                           <m:t>)</m:t>
                         </m:r>
@@ -12216,7 +12212,7 @@
                                     <a:lumOff val="25000"/>
                                   </a:schemeClr>
                                 </a:solidFill>
-                                <a:latin typeface=""/>
+                                <a:latin typeface="Cambria Math" panose="02040503050406030204" pitchFamily="18" charset="0"/>
                               </a:rPr>
                             </m:ctrlPr>
                           </m:sSupPr>
@@ -12231,7 +12227,7 @@
                                         <a:lumOff val="25000"/>
                                       </a:schemeClr>
                                     </a:solidFill>
-                                    <a:latin typeface=""/>
+                                    <a:latin typeface="Cambria Math" panose="02040503050406030204" pitchFamily="18" charset="0"/>
                                   </a:rPr>
                                 </m:ctrlPr>
                               </m:sSubPr>
@@ -12244,7 +12240,7 @@
                                         <a:lumOff val="25000"/>
                                       </a:schemeClr>
                                     </a:solidFill>
-                                    <a:latin typeface=""/>
+                                    <a:latin typeface="Cambria Math" panose="02040503050406030204" pitchFamily="18" charset="0"/>
                                   </a:rPr>
                                   <m:t>𝐒</m:t>
                                 </m:r>
@@ -12258,7 +12254,7 @@
                                         <a:lumOff val="25000"/>
                                       </a:schemeClr>
                                     </a:solidFill>
-                                    <a:latin typeface=""/>
+                                    <a:latin typeface="Cambria Math" panose="02040503050406030204" pitchFamily="18" charset="0"/>
                                   </a:rPr>
                                   <m:t>𝐑</m:t>
                                 </m:r>
@@ -12274,7 +12270,7 @@
                                     <a:lumOff val="25000"/>
                                   </a:schemeClr>
                                 </a:solidFill>
-                                <a:latin typeface=""/>
+                                <a:latin typeface="Cambria Math" panose="02040503050406030204" pitchFamily="18" charset="0"/>
                               </a:rPr>
                               <m:t>−1</m:t>
                             </m:r>
@@ -12336,7 +12332,7 @@
                             <a:lumOff val="25000"/>
                           </a:schemeClr>
                         </a:solidFill>
-                        <a:latin typeface=""/>
+                        <a:latin typeface="Cambria Math" panose="02040503050406030204" pitchFamily="18" charset="0"/>
                       </a:rPr>
                       <m:t>𝑡𝑟</m:t>
                     </m:r>
@@ -12350,7 +12346,7 @@
                                 <a:lumOff val="25000"/>
                               </a:schemeClr>
                             </a:solidFill>
-                            <a:latin typeface=""/>
+                            <a:latin typeface="Cambria Math" panose="02040503050406030204" pitchFamily="18" charset="0"/>
                           </a:rPr>
                         </m:ctrlPr>
                       </m:dPr>
@@ -12363,7 +12359,7 @@
                                 <a:lumOff val="25000"/>
                               </a:schemeClr>
                             </a:solidFill>
-                            <a:latin typeface=""/>
+                            <a:latin typeface="Cambria Math" panose="02040503050406030204" pitchFamily="18" charset="0"/>
                           </a:rPr>
                           <m:t>(</m:t>
                         </m:r>
@@ -12377,7 +12373,7 @@
                                     <a:lumOff val="25000"/>
                                   </a:schemeClr>
                                 </a:solidFill>
-                                <a:latin typeface=""/>
+                                <a:latin typeface="Cambria Math" panose="02040503050406030204" pitchFamily="18" charset="0"/>
                               </a:rPr>
                             </m:ctrlPr>
                           </m:sSubPr>
@@ -12390,7 +12386,7 @@
                                     <a:lumOff val="25000"/>
                                   </a:schemeClr>
                                 </a:solidFill>
-                                <a:latin typeface=""/>
+                                <a:latin typeface="Cambria Math" panose="02040503050406030204" pitchFamily="18" charset="0"/>
                               </a:rPr>
                               <m:t>𝐒</m:t>
                             </m:r>
@@ -12404,7 +12400,7 @@
                                     <a:lumOff val="25000"/>
                                   </a:schemeClr>
                                 </a:solidFill>
-                                <a:latin typeface=""/>
+                                <a:latin typeface="Cambria Math" panose="02040503050406030204" pitchFamily="18" charset="0"/>
                               </a:rPr>
                               <m:t>𝐑</m:t>
                             </m:r>
@@ -12418,7 +12414,7 @@
                                 <a:lumOff val="25000"/>
                               </a:schemeClr>
                             </a:solidFill>
-                            <a:latin typeface=""/>
+                            <a:latin typeface="Cambria Math" panose="02040503050406030204" pitchFamily="18" charset="0"/>
                           </a:rPr>
                           <m:t>−</m:t>
                         </m:r>
@@ -12432,7 +12428,7 @@
                                     <a:lumOff val="25000"/>
                                   </a:schemeClr>
                                 </a:solidFill>
-                                <a:latin typeface=""/>
+                                <a:latin typeface="Cambria Math" panose="02040503050406030204" pitchFamily="18" charset="0"/>
                               </a:rPr>
                             </m:ctrlPr>
                           </m:sSubPr>
@@ -12445,7 +12441,7 @@
                                     <a:lumOff val="25000"/>
                                   </a:schemeClr>
                                 </a:solidFill>
-                                <a:latin typeface=""/>
+                                <a:latin typeface="Cambria Math" panose="02040503050406030204" pitchFamily="18" charset="0"/>
                               </a:rPr>
                               <m:t>𝐒</m:t>
                             </m:r>
@@ -12459,7 +12455,7 @@
                                     <a:lumOff val="25000"/>
                                   </a:schemeClr>
                                 </a:solidFill>
-                                <a:latin typeface=""/>
+                                <a:latin typeface="Cambria Math" panose="02040503050406030204" pitchFamily="18" charset="0"/>
                               </a:rPr>
                               <m:t>𝐅</m:t>
                             </m:r>
@@ -12473,7 +12469,7 @@
                                 <a:lumOff val="25000"/>
                               </a:schemeClr>
                             </a:solidFill>
-                            <a:latin typeface=""/>
+                            <a:latin typeface="Cambria Math" panose="02040503050406030204" pitchFamily="18" charset="0"/>
                           </a:rPr>
                           <m:t>)</m:t>
                         </m:r>
@@ -12487,7 +12483,7 @@
                                     <a:lumOff val="25000"/>
                                   </a:schemeClr>
                                 </a:solidFill>
-                                <a:latin typeface=""/>
+                                <a:latin typeface="Cambria Math" panose="02040503050406030204" pitchFamily="18" charset="0"/>
                               </a:rPr>
                             </m:ctrlPr>
                           </m:sSupPr>
@@ -12502,7 +12498,7 @@
                                         <a:lumOff val="25000"/>
                                       </a:schemeClr>
                                     </a:solidFill>
-                                    <a:latin typeface=""/>
+                                    <a:latin typeface="Cambria Math" panose="02040503050406030204" pitchFamily="18" charset="0"/>
                                   </a:rPr>
                                 </m:ctrlPr>
                               </m:sSubPr>
@@ -12515,7 +12511,7 @@
                                         <a:lumOff val="25000"/>
                                       </a:schemeClr>
                                     </a:solidFill>
-                                    <a:latin typeface=""/>
+                                    <a:latin typeface="Cambria Math" panose="02040503050406030204" pitchFamily="18" charset="0"/>
                                   </a:rPr>
                                   <m:t>𝐒</m:t>
                                 </m:r>
@@ -12529,7 +12525,7 @@
                                         <a:lumOff val="25000"/>
                                       </a:schemeClr>
                                     </a:solidFill>
-                                    <a:latin typeface=""/>
+                                    <a:latin typeface="Cambria Math" panose="02040503050406030204" pitchFamily="18" charset="0"/>
                                   </a:rPr>
                                   <m:t>𝐅</m:t>
                                 </m:r>
@@ -12545,7 +12541,7 @@
                                     <a:lumOff val="25000"/>
                                   </a:schemeClr>
                                 </a:solidFill>
-                                <a:latin typeface=""/>
+                                <a:latin typeface="Cambria Math" panose="02040503050406030204" pitchFamily="18" charset="0"/>
                               </a:rPr>
                               <m:t>−1</m:t>
                             </m:r>
@@ -12613,7 +12609,7 @@
                             <a:lumOff val="25000"/>
                           </a:schemeClr>
                         </a:solidFill>
-                        <a:latin typeface=""/>
+                        <a:latin typeface="Cambria Math" panose="02040503050406030204" pitchFamily="18" charset="0"/>
                       </a:rPr>
                       <m:t>𝐹</m:t>
                     </m:r>
@@ -12625,7 +12621,7 @@
                             <a:lumOff val="25000"/>
                           </a:schemeClr>
                         </a:solidFill>
-                        <a:latin typeface=""/>
+                        <a:latin typeface="Cambria Math" panose="02040503050406030204" pitchFamily="18" charset="0"/>
                       </a:rPr>
                       <m:t>=</m:t>
                     </m:r>
@@ -12639,7 +12635,7 @@
                                 <a:lumOff val="25000"/>
                               </a:schemeClr>
                             </a:solidFill>
-                            <a:latin typeface=""/>
+                            <a:latin typeface="Cambria Math" panose="02040503050406030204" pitchFamily="18" charset="0"/>
                           </a:rPr>
                         </m:ctrlPr>
                       </m:dPr>
@@ -12654,7 +12650,7 @@
                                     <a:lumOff val="25000"/>
                                   </a:schemeClr>
                                 </a:solidFill>
-                                <a:latin typeface=""/>
+                                <a:latin typeface="Cambria Math" panose="02040503050406030204" pitchFamily="18" charset="0"/>
                               </a:rPr>
                             </m:ctrlPr>
                           </m:fPr>
@@ -12667,7 +12663,7 @@
                                     <a:lumOff val="25000"/>
                                   </a:schemeClr>
                                 </a:solidFill>
-                                <a:latin typeface=""/>
+                                <a:latin typeface="Cambria Math" panose="02040503050406030204" pitchFamily="18" charset="0"/>
                               </a:rPr>
                               <m:t>1−</m:t>
                             </m:r>
@@ -12679,7 +12675,7 @@
                                     <a:lumOff val="25000"/>
                                   </a:schemeClr>
                                 </a:solidFill>
-                                <a:latin typeface=""/>
+                                <a:latin typeface="Cambria Math" panose="02040503050406030204" pitchFamily="18" charset="0"/>
                               </a:rPr>
                               <m:t>𝛬</m:t>
                             </m:r>
@@ -12693,7 +12689,7 @@
                                     <a:lumOff val="25000"/>
                                   </a:schemeClr>
                                 </a:solidFill>
-                                <a:latin typeface=""/>
+                                <a:latin typeface="Cambria Math" panose="02040503050406030204" pitchFamily="18" charset="0"/>
                               </a:rPr>
                               <m:t>𝛬</m:t>
                             </m:r>
@@ -12711,7 +12707,7 @@
                                 <a:lumOff val="25000"/>
                               </a:schemeClr>
                             </a:solidFill>
-                            <a:latin typeface=""/>
+                            <a:latin typeface="Cambria Math" panose="02040503050406030204" pitchFamily="18" charset="0"/>
                           </a:rPr>
                         </m:ctrlPr>
                       </m:dPr>
@@ -12726,7 +12722,7 @@
                                     <a:lumOff val="25000"/>
                                   </a:schemeClr>
                                 </a:solidFill>
-                                <a:latin typeface=""/>
+                                <a:latin typeface="Cambria Math" panose="02040503050406030204" pitchFamily="18" charset="0"/>
                               </a:rPr>
                             </m:ctrlPr>
                           </m:fPr>
@@ -12739,7 +12735,7 @@
                                     <a:lumOff val="25000"/>
                                   </a:schemeClr>
                                 </a:solidFill>
-                                <a:latin typeface=""/>
+                                <a:latin typeface="Cambria Math" panose="02040503050406030204" pitchFamily="18" charset="0"/>
                               </a:rPr>
                               <m:t>𝑛</m:t>
                             </m:r>
@@ -12751,7 +12747,7 @@
                                     <a:lumOff val="25000"/>
                                   </a:schemeClr>
                                 </a:solidFill>
-                                <a:latin typeface=""/>
+                                <a:latin typeface="Cambria Math" panose="02040503050406030204" pitchFamily="18" charset="0"/>
                               </a:rPr>
                               <m:t>−</m:t>
                             </m:r>
@@ -12763,7 +12759,7 @@
                                     <a:lumOff val="25000"/>
                                   </a:schemeClr>
                                 </a:solidFill>
-                                <a:latin typeface=""/>
+                                <a:latin typeface="Cambria Math" panose="02040503050406030204" pitchFamily="18" charset="0"/>
                               </a:rPr>
                               <m:t>𝑠</m:t>
                             </m:r>
@@ -12775,7 +12771,7 @@
                                     <a:lumOff val="25000"/>
                                   </a:schemeClr>
                                 </a:solidFill>
-                                <a:latin typeface=""/>
+                                <a:latin typeface="Cambria Math" panose="02040503050406030204" pitchFamily="18" charset="0"/>
                               </a:rPr>
                               <m:t>−</m:t>
                             </m:r>
@@ -12787,7 +12783,7 @@
                                     <a:lumOff val="25000"/>
                                   </a:schemeClr>
                                 </a:solidFill>
-                                <a:latin typeface=""/>
+                                <a:latin typeface="Cambria Math" panose="02040503050406030204" pitchFamily="18" charset="0"/>
                               </a:rPr>
                               <m:t>𝑝</m:t>
                             </m:r>
@@ -12801,7 +12797,7 @@
                                     <a:lumOff val="25000"/>
                                   </a:schemeClr>
                                 </a:solidFill>
-                                <a:latin typeface=""/>
+                                <a:latin typeface="Cambria Math" panose="02040503050406030204" pitchFamily="18" charset="0"/>
                               </a:rPr>
                               <m:t>𝑝</m:t>
                             </m:r>
@@ -12824,7 +12820,7 @@
             </p:txBody>
           </p:sp>
         </mc:Choice>
-        <mc:Fallback>
+        <mc:Fallback xmlns="">
           <p:sp>
             <p:nvSpPr>
               <p:cNvPr id="13" name="TextBox 12"/>
@@ -12969,228 +12965,6 @@
               </a:rPr>
               <a:t>(Y)</a:t>
             </a:r>
-          </a:p>
-        </p:txBody>
-      </p:sp>
-      <p:sp>
-        <p:nvSpPr>
-          <p:cNvPr id="14" name="TextBox 13"/>
-          <p:cNvSpPr txBox="1"/>
-          <p:nvPr/>
-        </p:nvSpPr>
-        <p:spPr>
-          <a:xfrm>
-            <a:off x="4815068" y="2941677"/>
-            <a:ext cx="2971800" cy="1015663"/>
-          </a:xfrm>
-          <a:prstGeom prst="rect">
-            <a:avLst/>
-          </a:prstGeom>
-          <a:noFill/>
-        </p:spPr>
-        <p:txBody>
-          <a:bodyPr wrap="square" rtlCol="0">
-            <a:spAutoFit/>
-          </a:bodyPr>
-          <a:lstStyle/>
-          <a:p>
-            <a:pPr algn="ctr"/>
-            <a:r>
-              <a:rPr lang="en-US" sz="2000" dirty="0">
-                <a:solidFill>
-                  <a:schemeClr val="tx1">
-                    <a:lumMod val="75000"/>
-                    <a:lumOff val="25000"/>
-                  </a:schemeClr>
-                </a:solidFill>
-                <a:latin typeface=""/>
-              </a:rPr>
-              <a:t>“Traditional” test statistics</a:t>
-            </a:r>
-          </a:p>
-          <a:p>
-            <a:pPr algn="ctr"/>
-            <a:r>
-              <a:rPr lang="en-US" sz="2000" b="1" dirty="0">
-                <a:solidFill>
-                  <a:schemeClr val="tx1">
-                    <a:lumMod val="75000"/>
-                    <a:lumOff val="25000"/>
-                  </a:schemeClr>
-                </a:solidFill>
-                <a:latin typeface=""/>
-              </a:rPr>
-              <a:t>Require </a:t>
-            </a:r>
-            <a:r>
-              <a:rPr lang="en-US" sz="2000" b="1" i="1" dirty="0">
-                <a:solidFill>
-                  <a:schemeClr val="tx1">
-                    <a:lumMod val="75000"/>
-                    <a:lumOff val="25000"/>
-                  </a:schemeClr>
-                </a:solidFill>
-                <a:latin typeface=""/>
-              </a:rPr>
-              <a:t>n</a:t>
-            </a:r>
-            <a:r>
-              <a:rPr lang="en-US" sz="2000" b="1" dirty="0">
-                <a:solidFill>
-                  <a:schemeClr val="tx1">
-                    <a:lumMod val="75000"/>
-                    <a:lumOff val="25000"/>
-                  </a:schemeClr>
-                </a:solidFill>
-                <a:latin typeface=""/>
-              </a:rPr>
-              <a:t> &gt;&gt; </a:t>
-            </a:r>
-            <a:r>
-              <a:rPr lang="en-US" sz="2000" b="1" i="1" dirty="0">
-                <a:solidFill>
-                  <a:schemeClr val="tx1">
-                    <a:lumMod val="75000"/>
-                    <a:lumOff val="25000"/>
-                  </a:schemeClr>
-                </a:solidFill>
-                <a:latin typeface=""/>
-              </a:rPr>
-              <a:t>p</a:t>
-            </a:r>
-            <a:endParaRPr lang="en-US" sz="2000" b="1" dirty="0">
-              <a:solidFill>
-                <a:schemeClr val="tx1">
-                  <a:lumMod val="75000"/>
-                  <a:lumOff val="25000"/>
-                </a:schemeClr>
-              </a:solidFill>
-              <a:latin typeface=""/>
-            </a:endParaRPr>
-          </a:p>
-        </p:txBody>
-      </p:sp>
-      <p:pic>
-        <p:nvPicPr>
-          <p:cNvPr id="19" name="Picture 18"/>
-          <p:cNvPicPr>
-            <a:picLocks noChangeAspect="1"/>
-          </p:cNvPicPr>
-          <p:nvPr/>
-        </p:nvPicPr>
-        <p:blipFill>
-          <a:blip r:embed="rId3"/>
-          <a:stretch>
-            <a:fillRect/>
-          </a:stretch>
-        </p:blipFill>
-        <p:spPr>
-          <a:xfrm>
-            <a:off x="7810982" y="2910216"/>
-            <a:ext cx="766355" cy="766355"/>
-          </a:xfrm>
-          <a:prstGeom prst="rect">
-            <a:avLst/>
-          </a:prstGeom>
-        </p:spPr>
-      </p:pic>
-      <p:sp>
-        <p:nvSpPr>
-          <p:cNvPr id="20" name="TextBox 19"/>
-          <p:cNvSpPr txBox="1"/>
-          <p:nvPr/>
-        </p:nvSpPr>
-        <p:spPr>
-          <a:xfrm>
-            <a:off x="5105975" y="4203249"/>
-            <a:ext cx="3809425" cy="1015663"/>
-          </a:xfrm>
-          <a:prstGeom prst="rect">
-            <a:avLst/>
-          </a:prstGeom>
-          <a:solidFill>
-            <a:schemeClr val="accent1">
-              <a:lumMod val="20000"/>
-              <a:lumOff val="80000"/>
-            </a:schemeClr>
-          </a:solidFill>
-          <a:ln>
-            <a:noFill/>
-          </a:ln>
-          <a:effectLst>
-            <a:outerShdw blurRad="50800" dist="76200" dir="18900000" algn="bl" rotWithShape="0">
-              <a:prstClr val="black">
-                <a:alpha val="40000"/>
-              </a:prstClr>
-            </a:outerShdw>
-          </a:effectLst>
-        </p:spPr>
-        <p:style>
-          <a:lnRef idx="1">
-            <a:schemeClr val="dk1"/>
-          </a:lnRef>
-          <a:fillRef idx="2">
-            <a:schemeClr val="dk1"/>
-          </a:fillRef>
-          <a:effectRef idx="1">
-            <a:schemeClr val="dk1"/>
-          </a:effectRef>
-          <a:fontRef idx="minor">
-            <a:schemeClr val="dk1"/>
-          </a:fontRef>
-        </p:style>
-        <p:txBody>
-          <a:bodyPr wrap="square" rtlCol="0">
-            <a:spAutoFit/>
-          </a:bodyPr>
-          <a:lstStyle/>
-          <a:p>
-            <a:pPr algn="ctr"/>
-            <a:r>
-              <a:rPr lang="en-US" sz="2000" dirty="0">
-                <a:solidFill>
-                  <a:schemeClr val="tx1">
-                    <a:lumMod val="75000"/>
-                    <a:lumOff val="25000"/>
-                  </a:schemeClr>
-                </a:solidFill>
-                <a:latin typeface=""/>
-              </a:rPr>
-              <a:t>Use randomization procedures, which are more powerful for </a:t>
-            </a:r>
-            <a:r>
-              <a:rPr lang="en-US" sz="2000">
-                <a:solidFill>
-                  <a:schemeClr val="tx1">
-                    <a:lumMod val="75000"/>
-                    <a:lumOff val="25000"/>
-                  </a:schemeClr>
-                </a:solidFill>
-                <a:latin typeface=""/>
-              </a:rPr>
-              <a:t>high-dimensional data</a:t>
-            </a:r>
-            <a:r>
-              <a:rPr lang="en-US" sz="1600">
-                <a:solidFill>
-                  <a:schemeClr val="tx1">
-                    <a:lumMod val="75000"/>
-                    <a:lumOff val="25000"/>
-                  </a:schemeClr>
-                </a:solidFill>
-                <a:latin typeface=""/>
-              </a:rPr>
-              <a:t> </a:t>
-            </a:r>
-            <a:endParaRPr lang="en-US" sz="1600" dirty="0">
-              <a:solidFill>
-                <a:schemeClr val="tx1">
-                  <a:lumMod val="75000"/>
-                  <a:lumOff val="25000"/>
-                </a:schemeClr>
-              </a:solidFill>
-              <a:latin typeface=""/>
-            </a:endParaRPr>
           </a:p>
         </p:txBody>
       </p:sp>
@@ -13330,9 +13104,1831 @@
           </a:p>
         </p:txBody>
       </p:sp>
+    </p:spTree>
+    <p:extLst>
+      <p:ext uri="{BB962C8B-B14F-4D97-AF65-F5344CB8AC3E}">
+        <p14:creationId xmlns:p14="http://schemas.microsoft.com/office/powerpoint/2010/main" val="1186799346"/>
+      </p:ext>
+    </p:extLst>
+  </p:cSld>
+  <p:clrMapOvr>
+    <a:masterClrMapping/>
+  </p:clrMapOvr>
+  <p:timing>
+    <p:tnLst>
+      <p:par>
+        <p:cTn id="1" dur="indefinite" restart="never" nodeType="tmRoot">
+          <p:childTnLst>
+            <p:seq concurrent="1" nextAc="seek">
+              <p:cTn id="2" dur="indefinite" nodeType="mainSeq">
+                <p:childTnLst>
+                  <p:par>
+                    <p:cTn id="3" fill="hold">
+                      <p:stCondLst>
+                        <p:cond delay="indefinite"/>
+                        <p:cond evt="onBegin" delay="0">
+                          <p:tn val="2"/>
+                        </p:cond>
+                      </p:stCondLst>
+                      <p:childTnLst>
+                        <p:par>
+                          <p:cTn id="4" fill="hold">
+                            <p:stCondLst>
+                              <p:cond delay="0"/>
+                            </p:stCondLst>
+                            <p:childTnLst>
+                              <p:par>
+                                <p:cTn id="5" presetID="10" presetClass="entr" presetSubtype="0" fill="hold" grpId="0" nodeType="withEffect">
+                                  <p:stCondLst>
+                                    <p:cond delay="0"/>
+                                  </p:stCondLst>
+                                  <p:childTnLst>
+                                    <p:set>
+                                      <p:cBhvr>
+                                        <p:cTn id="6" dur="1" fill="hold">
+                                          <p:stCondLst>
+                                            <p:cond delay="0"/>
+                                          </p:stCondLst>
+                                        </p:cTn>
+                                        <p:tgtEl>
+                                          <p:spTgt spid="5"/>
+                                        </p:tgtEl>
+                                        <p:attrNameLst>
+                                          <p:attrName>style.visibility</p:attrName>
+                                        </p:attrNameLst>
+                                      </p:cBhvr>
+                                      <p:to>
+                                        <p:strVal val="visible"/>
+                                      </p:to>
+                                    </p:set>
+                                    <p:animEffect transition="in" filter="fade">
+                                      <p:cBhvr>
+                                        <p:cTn id="7" dur="500"/>
+                                        <p:tgtEl>
+                                          <p:spTgt spid="5"/>
+                                        </p:tgtEl>
+                                      </p:cBhvr>
+                                    </p:animEffect>
+                                  </p:childTnLst>
+                                </p:cTn>
+                              </p:par>
+                            </p:childTnLst>
+                          </p:cTn>
+                        </p:par>
+                      </p:childTnLst>
+                    </p:cTn>
+                  </p:par>
+                </p:childTnLst>
+              </p:cTn>
+              <p:prevCondLst>
+                <p:cond evt="onPrev" delay="0">
+                  <p:tgtEl>
+                    <p:sldTgt/>
+                  </p:tgtEl>
+                </p:cond>
+              </p:prevCondLst>
+              <p:nextCondLst>
+                <p:cond evt="onNext" delay="0">
+                  <p:tgtEl>
+                    <p:sldTgt/>
+                  </p:tgtEl>
+                </p:cond>
+              </p:nextCondLst>
+            </p:seq>
+          </p:childTnLst>
+        </p:cTn>
+      </p:par>
+    </p:tnLst>
+    <p:bldLst>
+      <p:bldP spid="5" grpId="0"/>
+    </p:bldLst>
+  </p:timing>
+</p:sld>
+</file>
+
+<file path=ppt/slides/slide8.xml><?xml version="1.0" encoding="utf-8"?>
+<p:sld xmlns:a="http://schemas.openxmlformats.org/drawingml/2006/main" xmlns:r="http://schemas.openxmlformats.org/officeDocument/2006/relationships" xmlns:p="http://schemas.openxmlformats.org/presentationml/2006/main">
+  <p:cSld>
+    <p:spTree>
+      <p:nvGrpSpPr>
+        <p:cNvPr id="1" name="">
+          <a:extLst>
+            <a:ext uri="{FF2B5EF4-FFF2-40B4-BE49-F238E27FC236}">
+              <a16:creationId xmlns:a16="http://schemas.microsoft.com/office/drawing/2014/main" id="{06A6616B-8A7E-8CE5-934B-EDF8ADB72135}"/>
+            </a:ext>
+          </a:extLst>
+        </p:cNvPr>
+        <p:cNvGrpSpPr/>
+        <p:nvPr/>
+      </p:nvGrpSpPr>
+      <p:grpSpPr>
+        <a:xfrm>
+          <a:off x="0" y="0"/>
+          <a:ext cx="0" cy="0"/>
+          <a:chOff x="0" y="0"/>
+          <a:chExt cx="0" cy="0"/>
+        </a:xfrm>
+      </p:grpSpPr>
       <p:sp>
         <p:nvSpPr>
-          <p:cNvPr id="6" name="Right Brace 5"/>
+          <p:cNvPr id="12" name="TextBox 11">
+            <a:extLst>
+              <a:ext uri="{FF2B5EF4-FFF2-40B4-BE49-F238E27FC236}">
+                <a16:creationId xmlns:a16="http://schemas.microsoft.com/office/drawing/2014/main" id="{F2C13F36-2564-28A1-3EDD-66909C3348C0}"/>
+              </a:ext>
+            </a:extLst>
+          </p:cNvPr>
+          <p:cNvSpPr txBox="1"/>
+          <p:nvPr/>
+        </p:nvSpPr>
+        <p:spPr>
+          <a:xfrm>
+            <a:off x="152399" y="352924"/>
+            <a:ext cx="6549189" cy="1938992"/>
+          </a:xfrm>
+          <a:prstGeom prst="rect">
+            <a:avLst/>
+          </a:prstGeom>
+          <a:solidFill>
+            <a:schemeClr val="accent1">
+              <a:lumMod val="20000"/>
+              <a:lumOff val="80000"/>
+            </a:schemeClr>
+          </a:solidFill>
+          <a:effectLst>
+            <a:outerShdw blurRad="50800" dist="38100" dir="18900000" algn="bl" rotWithShape="0">
+              <a:prstClr val="black">
+                <a:alpha val="40000"/>
+              </a:prstClr>
+            </a:outerShdw>
+          </a:effectLst>
+        </p:spPr>
+        <p:txBody>
+          <a:bodyPr wrap="square" rtlCol="0">
+            <a:spAutoFit/>
+          </a:bodyPr>
+          <a:lstStyle/>
+          <a:p>
+            <a:r>
+              <a:rPr lang="en-US" sz="2000" b="1" dirty="0">
+                <a:solidFill>
+                  <a:schemeClr val="tx1">
+                    <a:lumMod val="75000"/>
+                    <a:lumOff val="25000"/>
+                  </a:schemeClr>
+                </a:solidFill>
+                <a:latin typeface=""/>
+              </a:rPr>
+              <a:t>However</a:t>
+            </a:r>
+            <a:r>
+              <a:rPr lang="en-US" sz="2000" dirty="0">
+                <a:solidFill>
+                  <a:schemeClr val="tx1">
+                    <a:lumMod val="75000"/>
+                    <a:lumOff val="25000"/>
+                  </a:schemeClr>
+                </a:solidFill>
+                <a:latin typeface=""/>
+              </a:rPr>
+              <a:t>: there is no multivariate F distribution! Solutions:</a:t>
+            </a:r>
+          </a:p>
+          <a:p>
+            <a:pPr marL="285750" indent="-285750">
+              <a:buFontTx/>
+              <a:buChar char="-"/>
+            </a:pPr>
+            <a:r>
+              <a:rPr lang="en-US" sz="2000" dirty="0">
+                <a:solidFill>
+                  <a:schemeClr val="tx1">
+                    <a:lumMod val="75000"/>
+                    <a:lumOff val="25000"/>
+                  </a:schemeClr>
+                </a:solidFill>
+                <a:latin typeface=""/>
+              </a:rPr>
+              <a:t>Use multivariate approximations and then apply a conversion to an approximate F-value</a:t>
+            </a:r>
+          </a:p>
+          <a:p>
+            <a:pPr marL="285750" indent="-285750">
+              <a:buFontTx/>
+              <a:buChar char="-"/>
+            </a:pPr>
+            <a:endParaRPr lang="en-US" sz="2000" dirty="0">
+              <a:solidFill>
+                <a:schemeClr val="tx1">
+                  <a:lumMod val="75000"/>
+                  <a:lumOff val="25000"/>
+                </a:schemeClr>
+              </a:solidFill>
+              <a:latin typeface=""/>
+            </a:endParaRPr>
+          </a:p>
+          <a:p>
+            <a:pPr marL="285750" indent="-285750">
+              <a:buFontTx/>
+              <a:buChar char="-"/>
+            </a:pPr>
+            <a:endParaRPr lang="en-US" sz="2000" dirty="0">
+              <a:solidFill>
+                <a:schemeClr val="tx1">
+                  <a:lumMod val="75000"/>
+                  <a:lumOff val="25000"/>
+                </a:schemeClr>
+              </a:solidFill>
+              <a:latin typeface=""/>
+            </a:endParaRPr>
+          </a:p>
+        </p:txBody>
+      </p:sp>
+      <mc:AlternateContent xmlns:mc="http://schemas.openxmlformats.org/markup-compatibility/2006" xmlns:a14="http://schemas.microsoft.com/office/drawing/2010/main">
+        <mc:Choice Requires="a14">
+          <p:sp>
+            <p:nvSpPr>
+              <p:cNvPr id="13" name="TextBox 12">
+                <a:extLst>
+                  <a:ext uri="{FF2B5EF4-FFF2-40B4-BE49-F238E27FC236}">
+                    <a16:creationId xmlns:a16="http://schemas.microsoft.com/office/drawing/2014/main" id="{126D547B-6877-1DB7-487F-C9D86DA596B5}"/>
+                  </a:ext>
+                </a:extLst>
+              </p:cNvPr>
+              <p:cNvSpPr txBox="1"/>
+              <p:nvPr/>
+            </p:nvSpPr>
+            <p:spPr>
+              <a:xfrm>
+                <a:off x="370574" y="2334124"/>
+                <a:ext cx="4800600" cy="3280963"/>
+              </a:xfrm>
+              <a:prstGeom prst="rect">
+                <a:avLst/>
+              </a:prstGeom>
+              <a:noFill/>
+            </p:spPr>
+            <p:txBody>
+              <a:bodyPr wrap="square" rtlCol="0">
+                <a:spAutoFit/>
+              </a:bodyPr>
+              <a:lstStyle/>
+              <a:p>
+                <a:pPr marL="285750" indent="-285750">
+                  <a:lnSpc>
+                    <a:spcPct val="150000"/>
+                  </a:lnSpc>
+                  <a:buFont typeface="Arial" panose="020B0604020202020204" pitchFamily="34" charset="0"/>
+                  <a:buChar char="•"/>
+                </a:pPr>
+                <a:r>
+                  <a:rPr lang="en-US" sz="2000" dirty="0">
+                    <a:solidFill>
+                      <a:schemeClr val="tx1">
+                        <a:lumMod val="75000"/>
+                        <a:lumOff val="25000"/>
+                      </a:schemeClr>
+                    </a:solidFill>
+                    <a:latin typeface=""/>
+                  </a:rPr>
+                  <a:t>Wilks’ lambda </a:t>
+                </a:r>
+                <a14:m>
+                  <m:oMath xmlns:m="http://schemas.openxmlformats.org/officeDocument/2006/math">
+                    <m:r>
+                      <a:rPr lang="el-GR" sz="2400" b="0" i="1" smtClean="0">
+                        <a:solidFill>
+                          <a:schemeClr val="tx1">
+                            <a:lumMod val="75000"/>
+                            <a:lumOff val="25000"/>
+                          </a:schemeClr>
+                        </a:solidFill>
+                        <a:latin typeface="Cambria Math" panose="02040503050406030204" pitchFamily="18" charset="0"/>
+                      </a:rPr>
+                      <m:t>𝛬</m:t>
+                    </m:r>
+                    <m:r>
+                      <a:rPr lang="el-GR" sz="2400" b="1" i="0" smtClean="0">
+                        <a:solidFill>
+                          <a:schemeClr val="tx1">
+                            <a:lumMod val="75000"/>
+                            <a:lumOff val="25000"/>
+                          </a:schemeClr>
+                        </a:solidFill>
+                        <a:latin typeface="Cambria Math" panose="02040503050406030204" pitchFamily="18" charset="0"/>
+                      </a:rPr>
+                      <m:t>= </m:t>
+                    </m:r>
+                    <m:f>
+                      <m:fPr>
+                        <m:ctrlPr>
+                          <a:rPr lang="el-GR" sz="2400" b="1" i="1" smtClean="0">
+                            <a:solidFill>
+                              <a:schemeClr val="tx1">
+                                <a:lumMod val="75000"/>
+                                <a:lumOff val="25000"/>
+                              </a:schemeClr>
+                            </a:solidFill>
+                            <a:latin typeface="Cambria Math" panose="02040503050406030204" pitchFamily="18" charset="0"/>
+                          </a:rPr>
+                        </m:ctrlPr>
+                      </m:fPr>
+                      <m:num>
+                        <m:d>
+                          <m:dPr>
+                            <m:begChr m:val="|"/>
+                            <m:endChr m:val="|"/>
+                            <m:ctrlPr>
+                              <a:rPr lang="el-GR" sz="2400" b="1" i="1" smtClean="0">
+                                <a:solidFill>
+                                  <a:schemeClr val="tx1">
+                                    <a:lumMod val="75000"/>
+                                    <a:lumOff val="25000"/>
+                                  </a:schemeClr>
+                                </a:solidFill>
+                                <a:latin typeface="Cambria Math" panose="02040503050406030204" pitchFamily="18" charset="0"/>
+                              </a:rPr>
+                            </m:ctrlPr>
+                          </m:dPr>
+                          <m:e>
+                            <m:sSub>
+                              <m:sSubPr>
+                                <m:ctrlPr>
+                                  <a:rPr lang="el-GR" sz="2400" b="1" i="1" smtClean="0">
+                                    <a:solidFill>
+                                      <a:schemeClr val="tx1">
+                                        <a:lumMod val="75000"/>
+                                        <a:lumOff val="25000"/>
+                                      </a:schemeClr>
+                                    </a:solidFill>
+                                    <a:latin typeface="Cambria Math" panose="02040503050406030204" pitchFamily="18" charset="0"/>
+                                  </a:rPr>
+                                </m:ctrlPr>
+                              </m:sSubPr>
+                              <m:e>
+                                <m:r>
+                                  <a:rPr lang="en-US" sz="2400" b="1" i="0" smtClean="0">
+                                    <a:solidFill>
+                                      <a:schemeClr val="tx1">
+                                        <a:lumMod val="75000"/>
+                                        <a:lumOff val="25000"/>
+                                      </a:schemeClr>
+                                    </a:solidFill>
+                                    <a:latin typeface="Cambria Math" panose="02040503050406030204" pitchFamily="18" charset="0"/>
+                                  </a:rPr>
+                                  <m:t>𝐒</m:t>
+                                </m:r>
+                              </m:e>
+                              <m:sub>
+                                <m:r>
+                                  <a:rPr lang="pt-PT" sz="2400" b="1" i="0" smtClean="0">
+                                    <a:solidFill>
+                                      <a:schemeClr val="tx1">
+                                        <a:lumMod val="75000"/>
+                                        <a:lumOff val="25000"/>
+                                      </a:schemeClr>
+                                    </a:solidFill>
+                                    <a:latin typeface="Cambria Math" panose="02040503050406030204" pitchFamily="18" charset="0"/>
+                                  </a:rPr>
+                                  <m:t>𝐅</m:t>
+                                </m:r>
+                              </m:sub>
+                            </m:sSub>
+                          </m:e>
+                        </m:d>
+                      </m:num>
+                      <m:den>
+                        <m:d>
+                          <m:dPr>
+                            <m:begChr m:val="|"/>
+                            <m:endChr m:val="|"/>
+                            <m:ctrlPr>
+                              <a:rPr lang="el-GR" sz="2400" b="1" i="1" smtClean="0">
+                                <a:solidFill>
+                                  <a:schemeClr val="tx1">
+                                    <a:lumMod val="75000"/>
+                                    <a:lumOff val="25000"/>
+                                  </a:schemeClr>
+                                </a:solidFill>
+                                <a:latin typeface="Cambria Math" panose="02040503050406030204" pitchFamily="18" charset="0"/>
+                              </a:rPr>
+                            </m:ctrlPr>
+                          </m:dPr>
+                          <m:e>
+                            <m:d>
+                              <m:dPr>
+                                <m:ctrlPr>
+                                  <a:rPr lang="en-US" sz="2400" b="1" i="1" smtClean="0">
+                                    <a:solidFill>
+                                      <a:schemeClr val="tx1">
+                                        <a:lumMod val="75000"/>
+                                        <a:lumOff val="25000"/>
+                                      </a:schemeClr>
+                                    </a:solidFill>
+                                    <a:latin typeface="Cambria Math" panose="02040503050406030204" pitchFamily="18" charset="0"/>
+                                  </a:rPr>
+                                </m:ctrlPr>
+                              </m:dPr>
+                              <m:e>
+                                <m:sSub>
+                                  <m:sSubPr>
+                                    <m:ctrlPr>
+                                      <a:rPr lang="en-US" sz="2400" b="1" i="1" smtClean="0">
+                                        <a:solidFill>
+                                          <a:schemeClr val="tx1">
+                                            <a:lumMod val="75000"/>
+                                            <a:lumOff val="25000"/>
+                                          </a:schemeClr>
+                                        </a:solidFill>
+                                        <a:latin typeface="Cambria Math" panose="02040503050406030204" pitchFamily="18" charset="0"/>
+                                      </a:rPr>
+                                    </m:ctrlPr>
+                                  </m:sSubPr>
+                                  <m:e>
+                                    <m:r>
+                                      <a:rPr lang="en-US" sz="2400" b="1" i="0" smtClean="0">
+                                        <a:solidFill>
+                                          <a:schemeClr val="tx1">
+                                            <a:lumMod val="75000"/>
+                                            <a:lumOff val="25000"/>
+                                          </a:schemeClr>
+                                        </a:solidFill>
+                                        <a:latin typeface="Cambria Math" panose="02040503050406030204" pitchFamily="18" charset="0"/>
+                                      </a:rPr>
+                                      <m:t>𝐒</m:t>
+                                    </m:r>
+                                  </m:e>
+                                  <m:sub>
+                                    <m:r>
+                                      <a:rPr lang="pt-PT" sz="2400" b="1" i="0" smtClean="0">
+                                        <a:solidFill>
+                                          <a:schemeClr val="tx1">
+                                            <a:lumMod val="75000"/>
+                                            <a:lumOff val="25000"/>
+                                          </a:schemeClr>
+                                        </a:solidFill>
+                                        <a:latin typeface="Cambria Math" panose="02040503050406030204" pitchFamily="18" charset="0"/>
+                                      </a:rPr>
+                                      <m:t>𝐍</m:t>
+                                    </m:r>
+                                  </m:sub>
+                                </m:sSub>
+                                <m:r>
+                                  <a:rPr lang="en-US" sz="2400" b="1" i="0" smtClean="0">
+                                    <a:solidFill>
+                                      <a:schemeClr val="tx1">
+                                        <a:lumMod val="75000"/>
+                                        <a:lumOff val="25000"/>
+                                      </a:schemeClr>
+                                    </a:solidFill>
+                                    <a:latin typeface="Cambria Math" panose="02040503050406030204" pitchFamily="18" charset="0"/>
+                                  </a:rPr>
+                                  <m:t>−</m:t>
+                                </m:r>
+                                <m:sSub>
+                                  <m:sSubPr>
+                                    <m:ctrlPr>
+                                      <a:rPr lang="en-US" sz="2400" b="1" i="1" smtClean="0">
+                                        <a:solidFill>
+                                          <a:schemeClr val="tx1">
+                                            <a:lumMod val="75000"/>
+                                            <a:lumOff val="25000"/>
+                                          </a:schemeClr>
+                                        </a:solidFill>
+                                        <a:latin typeface="Cambria Math" panose="02040503050406030204" pitchFamily="18" charset="0"/>
+                                      </a:rPr>
+                                    </m:ctrlPr>
+                                  </m:sSubPr>
+                                  <m:e>
+                                    <m:r>
+                                      <a:rPr lang="en-US" sz="2400" b="1" i="0" smtClean="0">
+                                        <a:solidFill>
+                                          <a:schemeClr val="tx1">
+                                            <a:lumMod val="75000"/>
+                                            <a:lumOff val="25000"/>
+                                          </a:schemeClr>
+                                        </a:solidFill>
+                                        <a:latin typeface="Cambria Math" panose="02040503050406030204" pitchFamily="18" charset="0"/>
+                                      </a:rPr>
+                                      <m:t>𝐒</m:t>
+                                    </m:r>
+                                  </m:e>
+                                  <m:sub>
+                                    <m:r>
+                                      <a:rPr lang="pt-PT" sz="2400" b="1" i="0" smtClean="0">
+                                        <a:solidFill>
+                                          <a:schemeClr val="tx1">
+                                            <a:lumMod val="75000"/>
+                                            <a:lumOff val="25000"/>
+                                          </a:schemeClr>
+                                        </a:solidFill>
+                                        <a:latin typeface="Cambria Math" panose="02040503050406030204" pitchFamily="18" charset="0"/>
+                                      </a:rPr>
+                                      <m:t>𝐅</m:t>
+                                    </m:r>
+                                  </m:sub>
+                                </m:sSub>
+                              </m:e>
+                            </m:d>
+                            <m:r>
+                              <a:rPr lang="en-US" sz="2400" b="1" i="0" smtClean="0">
+                                <a:solidFill>
+                                  <a:schemeClr val="tx1">
+                                    <a:lumMod val="75000"/>
+                                    <a:lumOff val="25000"/>
+                                  </a:schemeClr>
+                                </a:solidFill>
+                                <a:latin typeface="Cambria Math" panose="02040503050406030204" pitchFamily="18" charset="0"/>
+                              </a:rPr>
+                              <m:t>+</m:t>
+                            </m:r>
+                            <m:sSub>
+                              <m:sSubPr>
+                                <m:ctrlPr>
+                                  <a:rPr lang="en-US" sz="2400" b="1" i="1" smtClean="0">
+                                    <a:solidFill>
+                                      <a:schemeClr val="tx1">
+                                        <a:lumMod val="75000"/>
+                                        <a:lumOff val="25000"/>
+                                      </a:schemeClr>
+                                    </a:solidFill>
+                                    <a:latin typeface="Cambria Math" panose="02040503050406030204" pitchFamily="18" charset="0"/>
+                                  </a:rPr>
+                                </m:ctrlPr>
+                              </m:sSubPr>
+                              <m:e>
+                                <m:r>
+                                  <a:rPr lang="en-US" sz="2400" b="1" i="0" smtClean="0">
+                                    <a:solidFill>
+                                      <a:schemeClr val="tx1">
+                                        <a:lumMod val="75000"/>
+                                        <a:lumOff val="25000"/>
+                                      </a:schemeClr>
+                                    </a:solidFill>
+                                    <a:latin typeface="Cambria Math" panose="02040503050406030204" pitchFamily="18" charset="0"/>
+                                  </a:rPr>
+                                  <m:t>𝐒</m:t>
+                                </m:r>
+                              </m:e>
+                              <m:sub>
+                                <m:r>
+                                  <a:rPr lang="pt-PT" sz="2400" b="1" i="0" smtClean="0">
+                                    <a:solidFill>
+                                      <a:schemeClr val="tx1">
+                                        <a:lumMod val="75000"/>
+                                        <a:lumOff val="25000"/>
+                                      </a:schemeClr>
+                                    </a:solidFill>
+                                    <a:latin typeface="Cambria Math" panose="02040503050406030204" pitchFamily="18" charset="0"/>
+                                  </a:rPr>
+                                  <m:t>𝐅</m:t>
+                                </m:r>
+                              </m:sub>
+                            </m:sSub>
+                          </m:e>
+                        </m:d>
+                      </m:den>
+                    </m:f>
+                  </m:oMath>
+                </a14:m>
+                <a:endParaRPr lang="en-US" sz="2400" b="1" dirty="0">
+                  <a:solidFill>
+                    <a:schemeClr val="tx1">
+                      <a:lumMod val="75000"/>
+                      <a:lumOff val="25000"/>
+                    </a:schemeClr>
+                  </a:solidFill>
+                  <a:latin typeface=""/>
+                </a:endParaRPr>
+              </a:p>
+              <a:p>
+                <a:pPr marL="285750" indent="-285750">
+                  <a:lnSpc>
+                    <a:spcPct val="150000"/>
+                  </a:lnSpc>
+                  <a:buFont typeface="Arial" panose="020B0604020202020204" pitchFamily="34" charset="0"/>
+                  <a:buChar char="•"/>
+                </a:pPr>
+                <a:r>
+                  <a:rPr lang="en-US" sz="2000" dirty="0">
+                    <a:solidFill>
+                      <a:schemeClr val="tx1">
+                        <a:lumMod val="75000"/>
+                        <a:lumOff val="25000"/>
+                      </a:schemeClr>
+                    </a:solidFill>
+                    <a:latin typeface=""/>
+                  </a:rPr>
+                  <a:t>Pillai’s trace  </a:t>
+                </a:r>
+                <a14:m>
+                  <m:oMath xmlns:m="http://schemas.openxmlformats.org/officeDocument/2006/math">
+                    <m:r>
+                      <a:rPr lang="en-US" sz="2000" b="0" i="1" smtClean="0">
+                        <a:solidFill>
+                          <a:schemeClr val="tx1">
+                            <a:lumMod val="75000"/>
+                            <a:lumOff val="25000"/>
+                          </a:schemeClr>
+                        </a:solidFill>
+                        <a:latin typeface="Cambria Math" panose="02040503050406030204" pitchFamily="18" charset="0"/>
+                      </a:rPr>
+                      <m:t>𝑡𝑟</m:t>
+                    </m:r>
+                    <m:d>
+                      <m:dPr>
+                        <m:ctrlPr>
+                          <a:rPr lang="en-US" sz="2000" b="0" i="1" smtClean="0">
+                            <a:solidFill>
+                              <a:schemeClr val="tx1">
+                                <a:lumMod val="75000"/>
+                                <a:lumOff val="25000"/>
+                              </a:schemeClr>
+                            </a:solidFill>
+                            <a:latin typeface="Cambria Math" panose="02040503050406030204" pitchFamily="18" charset="0"/>
+                          </a:rPr>
+                        </m:ctrlPr>
+                      </m:dPr>
+                      <m:e>
+                        <m:r>
+                          <a:rPr lang="en-US" sz="2000" b="0" i="1" smtClean="0">
+                            <a:solidFill>
+                              <a:schemeClr val="tx1">
+                                <a:lumMod val="75000"/>
+                                <a:lumOff val="25000"/>
+                              </a:schemeClr>
+                            </a:solidFill>
+                            <a:latin typeface="Cambria Math" panose="02040503050406030204" pitchFamily="18" charset="0"/>
+                          </a:rPr>
+                          <m:t>(</m:t>
+                        </m:r>
+                        <m:sSub>
+                          <m:sSubPr>
+                            <m:ctrlPr>
+                              <a:rPr lang="en-US" sz="2000" b="1" i="1" smtClean="0">
+                                <a:solidFill>
+                                  <a:schemeClr val="tx1">
+                                    <a:lumMod val="75000"/>
+                                    <a:lumOff val="25000"/>
+                                  </a:schemeClr>
+                                </a:solidFill>
+                                <a:latin typeface="Cambria Math" panose="02040503050406030204" pitchFamily="18" charset="0"/>
+                              </a:rPr>
+                            </m:ctrlPr>
+                          </m:sSubPr>
+                          <m:e>
+                            <m:r>
+                              <a:rPr lang="en-US" sz="2000" b="1" i="0" smtClean="0">
+                                <a:solidFill>
+                                  <a:schemeClr val="tx1">
+                                    <a:lumMod val="75000"/>
+                                    <a:lumOff val="25000"/>
+                                  </a:schemeClr>
+                                </a:solidFill>
+                                <a:latin typeface="Cambria Math" panose="02040503050406030204" pitchFamily="18" charset="0"/>
+                              </a:rPr>
+                              <m:t>𝐒</m:t>
+                            </m:r>
+                          </m:e>
+                          <m:sub>
+                            <m:r>
+                              <a:rPr lang="pt-PT" sz="2000" b="1" i="0" smtClean="0">
+                                <a:solidFill>
+                                  <a:schemeClr val="tx1">
+                                    <a:lumMod val="75000"/>
+                                    <a:lumOff val="25000"/>
+                                  </a:schemeClr>
+                                </a:solidFill>
+                                <a:latin typeface="Cambria Math" panose="02040503050406030204" pitchFamily="18" charset="0"/>
+                              </a:rPr>
+                              <m:t>𝐑</m:t>
+                            </m:r>
+                          </m:sub>
+                        </m:sSub>
+                        <m:r>
+                          <a:rPr lang="en-US" sz="2000" b="0" i="1" smtClean="0">
+                            <a:solidFill>
+                              <a:schemeClr val="tx1">
+                                <a:lumMod val="75000"/>
+                                <a:lumOff val="25000"/>
+                              </a:schemeClr>
+                            </a:solidFill>
+                            <a:latin typeface="Cambria Math" panose="02040503050406030204" pitchFamily="18" charset="0"/>
+                          </a:rPr>
+                          <m:t>−</m:t>
+                        </m:r>
+                        <m:sSub>
+                          <m:sSubPr>
+                            <m:ctrlPr>
+                              <a:rPr lang="en-US" sz="2000" b="1" i="1">
+                                <a:solidFill>
+                                  <a:schemeClr val="tx1">
+                                    <a:lumMod val="75000"/>
+                                    <a:lumOff val="25000"/>
+                                  </a:schemeClr>
+                                </a:solidFill>
+                                <a:latin typeface="Cambria Math" panose="02040503050406030204" pitchFamily="18" charset="0"/>
+                              </a:rPr>
+                            </m:ctrlPr>
+                          </m:sSubPr>
+                          <m:e>
+                            <m:r>
+                              <a:rPr lang="en-US" sz="2000" b="1">
+                                <a:solidFill>
+                                  <a:schemeClr val="tx1">
+                                    <a:lumMod val="75000"/>
+                                    <a:lumOff val="25000"/>
+                                  </a:schemeClr>
+                                </a:solidFill>
+                                <a:latin typeface="Cambria Math" panose="02040503050406030204" pitchFamily="18" charset="0"/>
+                              </a:rPr>
+                              <m:t>𝐒</m:t>
+                            </m:r>
+                          </m:e>
+                          <m:sub>
+                            <m:r>
+                              <a:rPr lang="pt-PT" sz="2000" b="1" i="0" smtClean="0">
+                                <a:solidFill>
+                                  <a:schemeClr val="tx1">
+                                    <a:lumMod val="75000"/>
+                                    <a:lumOff val="25000"/>
+                                  </a:schemeClr>
+                                </a:solidFill>
+                                <a:latin typeface="Cambria Math" panose="02040503050406030204" pitchFamily="18" charset="0"/>
+                              </a:rPr>
+                              <m:t>𝐅</m:t>
+                            </m:r>
+                          </m:sub>
+                        </m:sSub>
+                        <m:r>
+                          <a:rPr lang="en-US" sz="2000" b="0" i="1" smtClean="0">
+                            <a:solidFill>
+                              <a:schemeClr val="tx1">
+                                <a:lumMod val="75000"/>
+                                <a:lumOff val="25000"/>
+                              </a:schemeClr>
+                            </a:solidFill>
+                            <a:latin typeface="Cambria Math" panose="02040503050406030204" pitchFamily="18" charset="0"/>
+                          </a:rPr>
+                          <m:t>)</m:t>
+                        </m:r>
+                        <m:sSup>
+                          <m:sSupPr>
+                            <m:ctrlPr>
+                              <a:rPr lang="en-US" sz="2000" b="0" i="1" smtClean="0">
+                                <a:solidFill>
+                                  <a:schemeClr val="tx1">
+                                    <a:lumMod val="75000"/>
+                                    <a:lumOff val="25000"/>
+                                  </a:schemeClr>
+                                </a:solidFill>
+                                <a:latin typeface="Cambria Math" panose="02040503050406030204" pitchFamily="18" charset="0"/>
+                              </a:rPr>
+                            </m:ctrlPr>
+                          </m:sSupPr>
+                          <m:e>
+                            <m:sSub>
+                              <m:sSubPr>
+                                <m:ctrlPr>
+                                  <a:rPr lang="en-US" sz="2000" b="1" i="1">
+                                    <a:solidFill>
+                                      <a:schemeClr val="tx1">
+                                        <a:lumMod val="75000"/>
+                                        <a:lumOff val="25000"/>
+                                      </a:schemeClr>
+                                    </a:solidFill>
+                                    <a:latin typeface="Cambria Math" panose="02040503050406030204" pitchFamily="18" charset="0"/>
+                                  </a:rPr>
+                                </m:ctrlPr>
+                              </m:sSubPr>
+                              <m:e>
+                                <m:r>
+                                  <a:rPr lang="en-US" sz="2000" b="1">
+                                    <a:solidFill>
+                                      <a:schemeClr val="tx1">
+                                        <a:lumMod val="75000"/>
+                                        <a:lumOff val="25000"/>
+                                      </a:schemeClr>
+                                    </a:solidFill>
+                                    <a:latin typeface="Cambria Math" panose="02040503050406030204" pitchFamily="18" charset="0"/>
+                                  </a:rPr>
+                                  <m:t>𝐒</m:t>
+                                </m:r>
+                              </m:e>
+                              <m:sub>
+                                <m:r>
+                                  <a:rPr lang="pt-PT" sz="2000" b="1" i="0" smtClean="0">
+                                    <a:solidFill>
+                                      <a:schemeClr val="tx1">
+                                        <a:lumMod val="75000"/>
+                                        <a:lumOff val="25000"/>
+                                      </a:schemeClr>
+                                    </a:solidFill>
+                                    <a:latin typeface="Cambria Math" panose="02040503050406030204" pitchFamily="18" charset="0"/>
+                                  </a:rPr>
+                                  <m:t>𝐑</m:t>
+                                </m:r>
+                              </m:sub>
+                            </m:sSub>
+                          </m:e>
+                          <m:sup>
+                            <m:r>
+                              <a:rPr lang="en-US" sz="2000" b="0" i="1" smtClean="0">
+                                <a:solidFill>
+                                  <a:schemeClr val="tx1">
+                                    <a:lumMod val="75000"/>
+                                    <a:lumOff val="25000"/>
+                                  </a:schemeClr>
+                                </a:solidFill>
+                                <a:latin typeface="Cambria Math" panose="02040503050406030204" pitchFamily="18" charset="0"/>
+                              </a:rPr>
+                              <m:t>−1</m:t>
+                            </m:r>
+                          </m:sup>
+                        </m:sSup>
+                      </m:e>
+                    </m:d>
+                  </m:oMath>
+                </a14:m>
+                <a:endParaRPr lang="en-US" sz="2000" dirty="0">
+                  <a:solidFill>
+                    <a:schemeClr val="tx1">
+                      <a:lumMod val="75000"/>
+                      <a:lumOff val="25000"/>
+                    </a:schemeClr>
+                  </a:solidFill>
+                  <a:latin typeface=""/>
+                </a:endParaRPr>
+              </a:p>
+              <a:p>
+                <a:pPr marL="285750" indent="-285750">
+                  <a:lnSpc>
+                    <a:spcPct val="150000"/>
+                  </a:lnSpc>
+                  <a:buFont typeface="Arial" panose="020B0604020202020204" pitchFamily="34" charset="0"/>
+                  <a:buChar char="•"/>
+                </a:pPr>
+                <a:r>
+                  <a:rPr lang="en-US" sz="2000" dirty="0" err="1">
+                    <a:solidFill>
+                      <a:schemeClr val="tx1">
+                        <a:lumMod val="75000"/>
+                        <a:lumOff val="25000"/>
+                      </a:schemeClr>
+                    </a:solidFill>
+                    <a:latin typeface=""/>
+                  </a:rPr>
+                  <a:t>Hotelling’s</a:t>
+                </a:r>
+                <a:r>
+                  <a:rPr lang="en-US" sz="2000" dirty="0">
+                    <a:solidFill>
+                      <a:schemeClr val="tx1">
+                        <a:lumMod val="75000"/>
+                        <a:lumOff val="25000"/>
+                      </a:schemeClr>
+                    </a:solidFill>
+                    <a:latin typeface=""/>
+                  </a:rPr>
+                  <a:t> trace </a:t>
+                </a:r>
+                <a14:m>
+                  <m:oMath xmlns:m="http://schemas.openxmlformats.org/officeDocument/2006/math">
+                    <m:r>
+                      <a:rPr lang="en-US" sz="2000" i="1">
+                        <a:solidFill>
+                          <a:schemeClr val="tx1">
+                            <a:lumMod val="75000"/>
+                            <a:lumOff val="25000"/>
+                          </a:schemeClr>
+                        </a:solidFill>
+                        <a:latin typeface="Cambria Math" panose="02040503050406030204" pitchFamily="18" charset="0"/>
+                      </a:rPr>
+                      <m:t>𝑡𝑟</m:t>
+                    </m:r>
+                    <m:d>
+                      <m:dPr>
+                        <m:ctrlPr>
+                          <a:rPr lang="en-US" sz="2000" i="1">
+                            <a:solidFill>
+                              <a:schemeClr val="tx1">
+                                <a:lumMod val="75000"/>
+                                <a:lumOff val="25000"/>
+                              </a:schemeClr>
+                            </a:solidFill>
+                            <a:latin typeface="Cambria Math" panose="02040503050406030204" pitchFamily="18" charset="0"/>
+                          </a:rPr>
+                        </m:ctrlPr>
+                      </m:dPr>
+                      <m:e>
+                        <m:r>
+                          <a:rPr lang="en-US" sz="2000" i="1">
+                            <a:solidFill>
+                              <a:schemeClr val="tx1">
+                                <a:lumMod val="75000"/>
+                                <a:lumOff val="25000"/>
+                              </a:schemeClr>
+                            </a:solidFill>
+                            <a:latin typeface="Cambria Math" panose="02040503050406030204" pitchFamily="18" charset="0"/>
+                          </a:rPr>
+                          <m:t>(</m:t>
+                        </m:r>
+                        <m:sSub>
+                          <m:sSubPr>
+                            <m:ctrlPr>
+                              <a:rPr lang="en-US" sz="2000" b="1" i="1">
+                                <a:solidFill>
+                                  <a:schemeClr val="tx1">
+                                    <a:lumMod val="75000"/>
+                                    <a:lumOff val="25000"/>
+                                  </a:schemeClr>
+                                </a:solidFill>
+                                <a:latin typeface="Cambria Math" panose="02040503050406030204" pitchFamily="18" charset="0"/>
+                              </a:rPr>
+                            </m:ctrlPr>
+                          </m:sSubPr>
+                          <m:e>
+                            <m:r>
+                              <a:rPr lang="en-US" sz="2000" b="1">
+                                <a:solidFill>
+                                  <a:schemeClr val="tx1">
+                                    <a:lumMod val="75000"/>
+                                    <a:lumOff val="25000"/>
+                                  </a:schemeClr>
+                                </a:solidFill>
+                                <a:latin typeface="Cambria Math" panose="02040503050406030204" pitchFamily="18" charset="0"/>
+                              </a:rPr>
+                              <m:t>𝐒</m:t>
+                            </m:r>
+                          </m:e>
+                          <m:sub>
+                            <m:r>
+                              <a:rPr lang="pt-PT" sz="2000" b="1" i="0" smtClean="0">
+                                <a:solidFill>
+                                  <a:schemeClr val="tx1">
+                                    <a:lumMod val="75000"/>
+                                    <a:lumOff val="25000"/>
+                                  </a:schemeClr>
+                                </a:solidFill>
+                                <a:latin typeface="Cambria Math" panose="02040503050406030204" pitchFamily="18" charset="0"/>
+                              </a:rPr>
+                              <m:t>𝐑</m:t>
+                            </m:r>
+                          </m:sub>
+                        </m:sSub>
+                        <m:r>
+                          <a:rPr lang="en-US" sz="2000" i="1">
+                            <a:solidFill>
+                              <a:schemeClr val="tx1">
+                                <a:lumMod val="75000"/>
+                                <a:lumOff val="25000"/>
+                              </a:schemeClr>
+                            </a:solidFill>
+                            <a:latin typeface="Cambria Math" panose="02040503050406030204" pitchFamily="18" charset="0"/>
+                          </a:rPr>
+                          <m:t>−</m:t>
+                        </m:r>
+                        <m:sSub>
+                          <m:sSubPr>
+                            <m:ctrlPr>
+                              <a:rPr lang="en-US" sz="2000" b="1" i="1" smtClean="0">
+                                <a:solidFill>
+                                  <a:schemeClr val="tx1">
+                                    <a:lumMod val="75000"/>
+                                    <a:lumOff val="25000"/>
+                                  </a:schemeClr>
+                                </a:solidFill>
+                                <a:latin typeface="Cambria Math" panose="02040503050406030204" pitchFamily="18" charset="0"/>
+                              </a:rPr>
+                            </m:ctrlPr>
+                          </m:sSubPr>
+                          <m:e>
+                            <m:r>
+                              <a:rPr lang="en-US" sz="2000" b="1">
+                                <a:solidFill>
+                                  <a:schemeClr val="tx1">
+                                    <a:lumMod val="75000"/>
+                                    <a:lumOff val="25000"/>
+                                  </a:schemeClr>
+                                </a:solidFill>
+                                <a:latin typeface="Cambria Math" panose="02040503050406030204" pitchFamily="18" charset="0"/>
+                              </a:rPr>
+                              <m:t>𝐒</m:t>
+                            </m:r>
+                          </m:e>
+                          <m:sub>
+                            <m:r>
+                              <a:rPr lang="pt-PT" sz="2000" b="1" i="0" smtClean="0">
+                                <a:solidFill>
+                                  <a:schemeClr val="tx1">
+                                    <a:lumMod val="75000"/>
+                                    <a:lumOff val="25000"/>
+                                  </a:schemeClr>
+                                </a:solidFill>
+                                <a:latin typeface="Cambria Math" panose="02040503050406030204" pitchFamily="18" charset="0"/>
+                              </a:rPr>
+                              <m:t>𝐅</m:t>
+                            </m:r>
+                          </m:sub>
+                        </m:sSub>
+                        <m:r>
+                          <a:rPr lang="en-US" sz="2000" i="1">
+                            <a:solidFill>
+                              <a:schemeClr val="tx1">
+                                <a:lumMod val="75000"/>
+                                <a:lumOff val="25000"/>
+                              </a:schemeClr>
+                            </a:solidFill>
+                            <a:latin typeface="Cambria Math" panose="02040503050406030204" pitchFamily="18" charset="0"/>
+                          </a:rPr>
+                          <m:t>)</m:t>
+                        </m:r>
+                        <m:sSup>
+                          <m:sSupPr>
+                            <m:ctrlPr>
+                              <a:rPr lang="en-US" sz="2000" i="1">
+                                <a:solidFill>
+                                  <a:schemeClr val="tx1">
+                                    <a:lumMod val="75000"/>
+                                    <a:lumOff val="25000"/>
+                                  </a:schemeClr>
+                                </a:solidFill>
+                                <a:latin typeface="Cambria Math" panose="02040503050406030204" pitchFamily="18" charset="0"/>
+                              </a:rPr>
+                            </m:ctrlPr>
+                          </m:sSupPr>
+                          <m:e>
+                            <m:sSub>
+                              <m:sSubPr>
+                                <m:ctrlPr>
+                                  <a:rPr lang="en-US" sz="2000" b="1" i="1">
+                                    <a:solidFill>
+                                      <a:schemeClr val="tx1">
+                                        <a:lumMod val="75000"/>
+                                        <a:lumOff val="25000"/>
+                                      </a:schemeClr>
+                                    </a:solidFill>
+                                    <a:latin typeface="Cambria Math" panose="02040503050406030204" pitchFamily="18" charset="0"/>
+                                  </a:rPr>
+                                </m:ctrlPr>
+                              </m:sSubPr>
+                              <m:e>
+                                <m:r>
+                                  <a:rPr lang="en-US" sz="2000" b="1">
+                                    <a:solidFill>
+                                      <a:schemeClr val="tx1">
+                                        <a:lumMod val="75000"/>
+                                        <a:lumOff val="25000"/>
+                                      </a:schemeClr>
+                                    </a:solidFill>
+                                    <a:latin typeface="Cambria Math" panose="02040503050406030204" pitchFamily="18" charset="0"/>
+                                  </a:rPr>
+                                  <m:t>𝐒</m:t>
+                                </m:r>
+                              </m:e>
+                              <m:sub>
+                                <m:r>
+                                  <a:rPr lang="pt-PT" sz="2000" b="1" i="1" smtClean="0">
+                                    <a:solidFill>
+                                      <a:schemeClr val="tx1">
+                                        <a:lumMod val="75000"/>
+                                        <a:lumOff val="25000"/>
+                                      </a:schemeClr>
+                                    </a:solidFill>
+                                    <a:latin typeface="Cambria Math" panose="02040503050406030204" pitchFamily="18" charset="0"/>
+                                  </a:rPr>
+                                  <m:t>𝐅</m:t>
+                                </m:r>
+                              </m:sub>
+                            </m:sSub>
+                          </m:e>
+                          <m:sup>
+                            <m:r>
+                              <a:rPr lang="en-US" sz="2000" i="1">
+                                <a:solidFill>
+                                  <a:schemeClr val="tx1">
+                                    <a:lumMod val="75000"/>
+                                    <a:lumOff val="25000"/>
+                                  </a:schemeClr>
+                                </a:solidFill>
+                                <a:latin typeface="Cambria Math" panose="02040503050406030204" pitchFamily="18" charset="0"/>
+                              </a:rPr>
+                              <m:t>−1</m:t>
+                            </m:r>
+                          </m:sup>
+                        </m:sSup>
+                      </m:e>
+                    </m:d>
+                  </m:oMath>
+                </a14:m>
+                <a:endParaRPr lang="en-US" sz="2000" dirty="0">
+                  <a:solidFill>
+                    <a:schemeClr val="tx1">
+                      <a:lumMod val="75000"/>
+                      <a:lumOff val="25000"/>
+                    </a:schemeClr>
+                  </a:solidFill>
+                  <a:latin typeface=""/>
+                </a:endParaRPr>
+              </a:p>
+              <a:p>
+                <a:pPr marL="285750" indent="-285750">
+                  <a:lnSpc>
+                    <a:spcPct val="150000"/>
+                  </a:lnSpc>
+                  <a:buFont typeface="Arial" panose="020B0604020202020204" pitchFamily="34" charset="0"/>
+                  <a:buChar char="•"/>
+                </a:pPr>
+                <a:endParaRPr lang="en-US" sz="2000" dirty="0">
+                  <a:solidFill>
+                    <a:schemeClr val="tx1">
+                      <a:lumMod val="75000"/>
+                      <a:lumOff val="25000"/>
+                    </a:schemeClr>
+                  </a:solidFill>
+                  <a:latin typeface=""/>
+                </a:endParaRPr>
+              </a:p>
+              <a:p>
+                <a:pPr marL="285750" indent="-285750">
+                  <a:lnSpc>
+                    <a:spcPct val="150000"/>
+                  </a:lnSpc>
+                  <a:buFont typeface="Arial" panose="020B0604020202020204" pitchFamily="34" charset="0"/>
+                  <a:buChar char="•"/>
+                </a:pPr>
+                <a:r>
+                  <a:rPr lang="en-US" sz="2000" dirty="0">
+                    <a:solidFill>
+                      <a:schemeClr val="tx1">
+                        <a:lumMod val="75000"/>
+                        <a:lumOff val="25000"/>
+                      </a:schemeClr>
+                    </a:solidFill>
+                    <a:latin typeface=""/>
+                  </a:rPr>
+                  <a:t>Converted as </a:t>
+                </a:r>
+                <a14:m>
+                  <m:oMath xmlns:m="http://schemas.openxmlformats.org/officeDocument/2006/math">
+                    <m:r>
+                      <a:rPr lang="en-US" sz="2000" b="0" i="1" smtClean="0">
+                        <a:solidFill>
+                          <a:schemeClr val="tx1">
+                            <a:lumMod val="75000"/>
+                            <a:lumOff val="25000"/>
+                          </a:schemeClr>
+                        </a:solidFill>
+                        <a:latin typeface="Cambria Math" panose="02040503050406030204" pitchFamily="18" charset="0"/>
+                      </a:rPr>
+                      <m:t>𝐹</m:t>
+                    </m:r>
+                    <m:r>
+                      <a:rPr lang="en-US" sz="2000" b="0" i="1" smtClean="0">
+                        <a:solidFill>
+                          <a:schemeClr val="tx1">
+                            <a:lumMod val="75000"/>
+                            <a:lumOff val="25000"/>
+                          </a:schemeClr>
+                        </a:solidFill>
+                        <a:latin typeface="Cambria Math" panose="02040503050406030204" pitchFamily="18" charset="0"/>
+                      </a:rPr>
+                      <m:t>=</m:t>
+                    </m:r>
+                    <m:d>
+                      <m:dPr>
+                        <m:ctrlPr>
+                          <a:rPr lang="en-US" sz="2000" b="0" i="1" smtClean="0">
+                            <a:solidFill>
+                              <a:schemeClr val="tx1">
+                                <a:lumMod val="75000"/>
+                                <a:lumOff val="25000"/>
+                              </a:schemeClr>
+                            </a:solidFill>
+                            <a:latin typeface="Cambria Math" panose="02040503050406030204" pitchFamily="18" charset="0"/>
+                          </a:rPr>
+                        </m:ctrlPr>
+                      </m:dPr>
+                      <m:e>
+                        <m:f>
+                          <m:fPr>
+                            <m:ctrlPr>
+                              <a:rPr lang="en-US" sz="2000" i="1">
+                                <a:solidFill>
+                                  <a:schemeClr val="tx1">
+                                    <a:lumMod val="75000"/>
+                                    <a:lumOff val="25000"/>
+                                  </a:schemeClr>
+                                </a:solidFill>
+                                <a:latin typeface="Cambria Math" panose="02040503050406030204" pitchFamily="18" charset="0"/>
+                              </a:rPr>
+                            </m:ctrlPr>
+                          </m:fPr>
+                          <m:num>
+                            <m:r>
+                              <a:rPr lang="en-US" sz="2000" i="1">
+                                <a:solidFill>
+                                  <a:schemeClr val="tx1">
+                                    <a:lumMod val="75000"/>
+                                    <a:lumOff val="25000"/>
+                                  </a:schemeClr>
+                                </a:solidFill>
+                                <a:latin typeface="Cambria Math" panose="02040503050406030204" pitchFamily="18" charset="0"/>
+                              </a:rPr>
+                              <m:t>1−</m:t>
+                            </m:r>
+                            <m:r>
+                              <a:rPr lang="el-GR" sz="2000" i="1">
+                                <a:solidFill>
+                                  <a:schemeClr val="tx1">
+                                    <a:lumMod val="75000"/>
+                                    <a:lumOff val="25000"/>
+                                  </a:schemeClr>
+                                </a:solidFill>
+                                <a:latin typeface="Cambria Math" panose="02040503050406030204" pitchFamily="18" charset="0"/>
+                              </a:rPr>
+                              <m:t>𝛬</m:t>
+                            </m:r>
+                          </m:num>
+                          <m:den>
+                            <m:r>
+                              <a:rPr lang="el-GR" sz="2000" i="1">
+                                <a:solidFill>
+                                  <a:schemeClr val="tx1">
+                                    <a:lumMod val="75000"/>
+                                    <a:lumOff val="25000"/>
+                                  </a:schemeClr>
+                                </a:solidFill>
+                                <a:latin typeface="Cambria Math" panose="02040503050406030204" pitchFamily="18" charset="0"/>
+                              </a:rPr>
+                              <m:t>𝛬</m:t>
+                            </m:r>
+                          </m:den>
+                        </m:f>
+                      </m:e>
+                    </m:d>
+                    <m:d>
+                      <m:dPr>
+                        <m:ctrlPr>
+                          <a:rPr lang="en-US" sz="2000" b="0" i="1" smtClean="0">
+                            <a:solidFill>
+                              <a:schemeClr val="tx1">
+                                <a:lumMod val="75000"/>
+                                <a:lumOff val="25000"/>
+                              </a:schemeClr>
+                            </a:solidFill>
+                            <a:latin typeface="Cambria Math" panose="02040503050406030204" pitchFamily="18" charset="0"/>
+                          </a:rPr>
+                        </m:ctrlPr>
+                      </m:dPr>
+                      <m:e>
+                        <m:f>
+                          <m:fPr>
+                            <m:ctrlPr>
+                              <a:rPr lang="en-US" sz="2000" i="1">
+                                <a:solidFill>
+                                  <a:schemeClr val="tx1">
+                                    <a:lumMod val="75000"/>
+                                    <a:lumOff val="25000"/>
+                                  </a:schemeClr>
+                                </a:solidFill>
+                                <a:latin typeface="Cambria Math" panose="02040503050406030204" pitchFamily="18" charset="0"/>
+                              </a:rPr>
+                            </m:ctrlPr>
+                          </m:fPr>
+                          <m:num>
+                            <m:r>
+                              <a:rPr lang="en-US" sz="2000" b="0" i="1" smtClean="0">
+                                <a:solidFill>
+                                  <a:schemeClr val="tx1">
+                                    <a:lumMod val="75000"/>
+                                    <a:lumOff val="25000"/>
+                                  </a:schemeClr>
+                                </a:solidFill>
+                                <a:latin typeface="Cambria Math" panose="02040503050406030204" pitchFamily="18" charset="0"/>
+                              </a:rPr>
+                              <m:t>𝑛</m:t>
+                            </m:r>
+                            <m:r>
+                              <a:rPr lang="en-US" sz="2000" b="0" i="1" smtClean="0">
+                                <a:solidFill>
+                                  <a:schemeClr val="tx1">
+                                    <a:lumMod val="75000"/>
+                                    <a:lumOff val="25000"/>
+                                  </a:schemeClr>
+                                </a:solidFill>
+                                <a:latin typeface="Cambria Math" panose="02040503050406030204" pitchFamily="18" charset="0"/>
+                              </a:rPr>
+                              <m:t>−</m:t>
+                            </m:r>
+                            <m:r>
+                              <a:rPr lang="en-US" sz="2000" b="0" i="1" smtClean="0">
+                                <a:solidFill>
+                                  <a:schemeClr val="tx1">
+                                    <a:lumMod val="75000"/>
+                                    <a:lumOff val="25000"/>
+                                  </a:schemeClr>
+                                </a:solidFill>
+                                <a:latin typeface="Cambria Math" panose="02040503050406030204" pitchFamily="18" charset="0"/>
+                              </a:rPr>
+                              <m:t>𝑠</m:t>
+                            </m:r>
+                            <m:r>
+                              <a:rPr lang="en-US" sz="2000" b="0" i="1" smtClean="0">
+                                <a:solidFill>
+                                  <a:schemeClr val="tx1">
+                                    <a:lumMod val="75000"/>
+                                    <a:lumOff val="25000"/>
+                                  </a:schemeClr>
+                                </a:solidFill>
+                                <a:latin typeface="Cambria Math" panose="02040503050406030204" pitchFamily="18" charset="0"/>
+                              </a:rPr>
+                              <m:t>−</m:t>
+                            </m:r>
+                            <m:r>
+                              <a:rPr lang="en-US" sz="2000" b="0" i="1" smtClean="0">
+                                <a:solidFill>
+                                  <a:schemeClr val="tx1">
+                                    <a:lumMod val="75000"/>
+                                    <a:lumOff val="25000"/>
+                                  </a:schemeClr>
+                                </a:solidFill>
+                                <a:latin typeface="Cambria Math" panose="02040503050406030204" pitchFamily="18" charset="0"/>
+                              </a:rPr>
+                              <m:t>𝑝</m:t>
+                            </m:r>
+                          </m:num>
+                          <m:den>
+                            <m:r>
+                              <a:rPr lang="en-US" sz="2000" b="0" i="1" smtClean="0">
+                                <a:solidFill>
+                                  <a:schemeClr val="tx1">
+                                    <a:lumMod val="75000"/>
+                                    <a:lumOff val="25000"/>
+                                  </a:schemeClr>
+                                </a:solidFill>
+                                <a:latin typeface="Cambria Math" panose="02040503050406030204" pitchFamily="18" charset="0"/>
+                              </a:rPr>
+                              <m:t>𝑝</m:t>
+                            </m:r>
+                          </m:den>
+                        </m:f>
+                      </m:e>
+                    </m:d>
+                  </m:oMath>
+                </a14:m>
+                <a:endParaRPr lang="en-US" sz="2000" i="1" dirty="0">
+                  <a:solidFill>
+                    <a:schemeClr val="tx1">
+                      <a:lumMod val="75000"/>
+                      <a:lumOff val="25000"/>
+                    </a:schemeClr>
+                  </a:solidFill>
+                  <a:latin typeface=""/>
+                </a:endParaRPr>
+              </a:p>
+            </p:txBody>
+          </p:sp>
+        </mc:Choice>
+        <mc:Fallback xmlns="">
+          <p:sp>
+            <p:nvSpPr>
+              <p:cNvPr id="13" name="TextBox 12"/>
+              <p:cNvSpPr txBox="1">
+                <a:spLocks noRot="1" noChangeAspect="1" noMove="1" noResize="1" noEditPoints="1" noAdjustHandles="1" noChangeArrowheads="1" noChangeShapeType="1" noTextEdit="1"/>
+              </p:cNvSpPr>
+              <p:nvPr/>
+            </p:nvSpPr>
+            <p:spPr>
+              <a:xfrm>
+                <a:off x="370574" y="2334124"/>
+                <a:ext cx="4800600" cy="3280963"/>
+              </a:xfrm>
+              <a:prstGeom prst="rect">
+                <a:avLst/>
+              </a:prstGeom>
+              <a:blipFill>
+                <a:blip r:embed="rId2"/>
+                <a:stretch>
+                  <a:fillRect l="-1319"/>
+                </a:stretch>
+              </a:blipFill>
+            </p:spPr>
+            <p:txBody>
+              <a:bodyPr/>
+              <a:lstStyle/>
+              <a:p>
+                <a:r>
+                  <a:rPr lang="es-ES_tradnl">
+                    <a:noFill/>
+                  </a:rPr>
+                  <a:t> </a:t>
+                </a:r>
+              </a:p>
+            </p:txBody>
+          </p:sp>
+        </mc:Fallback>
+      </mc:AlternateContent>
+      <p:sp>
+        <p:nvSpPr>
+          <p:cNvPr id="2" name="TextBox 1">
+            <a:extLst>
+              <a:ext uri="{FF2B5EF4-FFF2-40B4-BE49-F238E27FC236}">
+                <a16:creationId xmlns:a16="http://schemas.microsoft.com/office/drawing/2014/main" id="{D112F117-722C-5F71-A9D2-E80FC9A75B0B}"/>
+              </a:ext>
+            </a:extLst>
+          </p:cNvPr>
+          <p:cNvSpPr txBox="1"/>
+          <p:nvPr/>
+        </p:nvSpPr>
+        <p:spPr>
+          <a:xfrm>
+            <a:off x="1371600" y="5482241"/>
+            <a:ext cx="3299301" cy="307777"/>
+          </a:xfrm>
+          <a:prstGeom prst="rect">
+            <a:avLst/>
+          </a:prstGeom>
+          <a:noFill/>
+        </p:spPr>
+        <p:txBody>
+          <a:bodyPr wrap="none" rtlCol="0">
+            <a:spAutoFit/>
+          </a:bodyPr>
+          <a:lstStyle/>
+          <a:p>
+            <a:r>
+              <a:rPr lang="en-US" sz="1400" dirty="0">
+                <a:solidFill>
+                  <a:schemeClr val="tx1">
+                    <a:lumMod val="75000"/>
+                    <a:lumOff val="25000"/>
+                  </a:schemeClr>
+                </a:solidFill>
+                <a:latin typeface=""/>
+              </a:rPr>
+              <a:t>n: total sample size, s: </a:t>
+            </a:r>
+            <a:r>
+              <a:rPr lang="en-US" sz="1400" dirty="0" err="1">
+                <a:solidFill>
+                  <a:schemeClr val="tx1">
+                    <a:lumMod val="75000"/>
+                    <a:lumOff val="25000"/>
+                  </a:schemeClr>
+                </a:solidFill>
+                <a:latin typeface=""/>
+              </a:rPr>
+              <a:t>ncol</a:t>
+            </a:r>
+            <a:r>
+              <a:rPr lang="en-US" sz="1400" dirty="0">
+                <a:solidFill>
+                  <a:schemeClr val="tx1">
+                    <a:lumMod val="75000"/>
+                    <a:lumOff val="25000"/>
+                  </a:schemeClr>
+                </a:solidFill>
+                <a:latin typeface=""/>
+              </a:rPr>
+              <a:t>(</a:t>
+            </a:r>
+            <a:r>
+              <a:rPr lang="en-US" sz="1400" dirty="0" err="1">
+                <a:solidFill>
+                  <a:schemeClr val="tx1">
+                    <a:lumMod val="75000"/>
+                    <a:lumOff val="25000"/>
+                  </a:schemeClr>
+                </a:solidFill>
+                <a:latin typeface=""/>
+              </a:rPr>
+              <a:t>Xr</a:t>
+            </a:r>
+            <a:r>
+              <a:rPr lang="en-US" sz="1400" dirty="0">
+                <a:solidFill>
+                  <a:schemeClr val="tx1">
+                    <a:lumMod val="75000"/>
+                    <a:lumOff val="25000"/>
+                  </a:schemeClr>
+                </a:solidFill>
+                <a:latin typeface=""/>
+              </a:rPr>
+              <a:t>), </a:t>
+            </a:r>
+            <a:r>
+              <a:rPr lang="en-US" sz="1400" dirty="0" err="1">
+                <a:solidFill>
+                  <a:schemeClr val="tx1">
+                    <a:lumMod val="75000"/>
+                    <a:lumOff val="25000"/>
+                  </a:schemeClr>
+                </a:solidFill>
+                <a:latin typeface=""/>
+              </a:rPr>
+              <a:t>ncol</a:t>
+            </a:r>
+            <a:r>
+              <a:rPr lang="en-US" sz="1400" dirty="0">
+                <a:solidFill>
+                  <a:schemeClr val="tx1">
+                    <a:lumMod val="75000"/>
+                    <a:lumOff val="25000"/>
+                  </a:schemeClr>
+                </a:solidFill>
+                <a:latin typeface=""/>
+              </a:rPr>
+              <a:t>(Y)</a:t>
+            </a:r>
+          </a:p>
+        </p:txBody>
+      </p:sp>
+      <p:sp>
+        <p:nvSpPr>
+          <p:cNvPr id="14" name="TextBox 13">
+            <a:extLst>
+              <a:ext uri="{FF2B5EF4-FFF2-40B4-BE49-F238E27FC236}">
+                <a16:creationId xmlns:a16="http://schemas.microsoft.com/office/drawing/2014/main" id="{EFCC903A-59C5-4852-E3B3-F9C748603845}"/>
+              </a:ext>
+            </a:extLst>
+          </p:cNvPr>
+          <p:cNvSpPr txBox="1"/>
+          <p:nvPr/>
+        </p:nvSpPr>
+        <p:spPr>
+          <a:xfrm>
+            <a:off x="4815068" y="2941677"/>
+            <a:ext cx="2971800" cy="1015663"/>
+          </a:xfrm>
+          <a:prstGeom prst="rect">
+            <a:avLst/>
+          </a:prstGeom>
+          <a:noFill/>
+        </p:spPr>
+        <p:txBody>
+          <a:bodyPr wrap="square" rtlCol="0">
+            <a:spAutoFit/>
+          </a:bodyPr>
+          <a:lstStyle/>
+          <a:p>
+            <a:pPr algn="ctr"/>
+            <a:r>
+              <a:rPr lang="en-US" sz="2000" dirty="0">
+                <a:solidFill>
+                  <a:schemeClr val="tx1">
+                    <a:lumMod val="75000"/>
+                    <a:lumOff val="25000"/>
+                  </a:schemeClr>
+                </a:solidFill>
+                <a:latin typeface=""/>
+              </a:rPr>
+              <a:t>“Traditional” test statistics</a:t>
+            </a:r>
+          </a:p>
+          <a:p>
+            <a:pPr algn="ctr"/>
+            <a:r>
+              <a:rPr lang="en-US" sz="2000" b="1" dirty="0">
+                <a:solidFill>
+                  <a:schemeClr val="tx1">
+                    <a:lumMod val="75000"/>
+                    <a:lumOff val="25000"/>
+                  </a:schemeClr>
+                </a:solidFill>
+                <a:latin typeface=""/>
+              </a:rPr>
+              <a:t>Require </a:t>
+            </a:r>
+            <a:r>
+              <a:rPr lang="en-US" sz="2000" b="1" i="1" dirty="0">
+                <a:solidFill>
+                  <a:schemeClr val="tx1">
+                    <a:lumMod val="75000"/>
+                    <a:lumOff val="25000"/>
+                  </a:schemeClr>
+                </a:solidFill>
+                <a:latin typeface=""/>
+              </a:rPr>
+              <a:t>n</a:t>
+            </a:r>
+            <a:r>
+              <a:rPr lang="en-US" sz="2000" b="1" dirty="0">
+                <a:solidFill>
+                  <a:schemeClr val="tx1">
+                    <a:lumMod val="75000"/>
+                    <a:lumOff val="25000"/>
+                  </a:schemeClr>
+                </a:solidFill>
+                <a:latin typeface=""/>
+              </a:rPr>
+              <a:t> &gt;&gt; </a:t>
+            </a:r>
+            <a:r>
+              <a:rPr lang="en-US" sz="2000" b="1" i="1" dirty="0">
+                <a:solidFill>
+                  <a:schemeClr val="tx1">
+                    <a:lumMod val="75000"/>
+                    <a:lumOff val="25000"/>
+                  </a:schemeClr>
+                </a:solidFill>
+                <a:latin typeface=""/>
+              </a:rPr>
+              <a:t>p</a:t>
+            </a:r>
+            <a:endParaRPr lang="en-US" sz="2000" b="1" dirty="0">
+              <a:solidFill>
+                <a:schemeClr val="tx1">
+                  <a:lumMod val="75000"/>
+                  <a:lumOff val="25000"/>
+                </a:schemeClr>
+              </a:solidFill>
+              <a:latin typeface=""/>
+            </a:endParaRPr>
+          </a:p>
+        </p:txBody>
+      </p:sp>
+      <p:pic>
+        <p:nvPicPr>
+          <p:cNvPr id="19" name="Picture 18">
+            <a:extLst>
+              <a:ext uri="{FF2B5EF4-FFF2-40B4-BE49-F238E27FC236}">
+                <a16:creationId xmlns:a16="http://schemas.microsoft.com/office/drawing/2014/main" id="{D51D9485-66E7-0E66-2432-ECDB1E943FF8}"/>
+              </a:ext>
+            </a:extLst>
+          </p:cNvPr>
+          <p:cNvPicPr>
+            <a:picLocks noChangeAspect="1"/>
+          </p:cNvPicPr>
+          <p:nvPr/>
+        </p:nvPicPr>
+        <p:blipFill>
+          <a:blip r:embed="rId3"/>
+          <a:stretch>
+            <a:fillRect/>
+          </a:stretch>
+        </p:blipFill>
+        <p:spPr>
+          <a:xfrm>
+            <a:off x="7810982" y="2910216"/>
+            <a:ext cx="766355" cy="766355"/>
+          </a:xfrm>
+          <a:prstGeom prst="rect">
+            <a:avLst/>
+          </a:prstGeom>
+        </p:spPr>
+      </p:pic>
+      <p:sp>
+        <p:nvSpPr>
+          <p:cNvPr id="5" name="Rectangle 4">
+            <a:extLst>
+              <a:ext uri="{FF2B5EF4-FFF2-40B4-BE49-F238E27FC236}">
+                <a16:creationId xmlns:a16="http://schemas.microsoft.com/office/drawing/2014/main" id="{5DE5EEC4-A120-FC5C-2972-1748B9449CC3}"/>
+              </a:ext>
+            </a:extLst>
+          </p:cNvPr>
+          <p:cNvSpPr/>
+          <p:nvPr/>
+        </p:nvSpPr>
+        <p:spPr>
+          <a:xfrm>
+            <a:off x="4572000" y="6334780"/>
+            <a:ext cx="4572000" cy="523220"/>
+          </a:xfrm>
+          <a:prstGeom prst="rect">
+            <a:avLst/>
+          </a:prstGeom>
+        </p:spPr>
+        <p:txBody>
+          <a:bodyPr>
+            <a:spAutoFit/>
+          </a:bodyPr>
+          <a:lstStyle/>
+          <a:p>
+            <a:pPr algn="r"/>
+            <a:r>
+              <a:rPr lang="en-US" sz="1400" dirty="0">
+                <a:solidFill>
+                  <a:schemeClr val="tx1">
+                    <a:lumMod val="75000"/>
+                    <a:lumOff val="25000"/>
+                  </a:schemeClr>
+                </a:solidFill>
+                <a:latin typeface=""/>
+              </a:rPr>
+              <a:t>Anderson MJ, </a:t>
+            </a:r>
+            <a:r>
+              <a:rPr lang="en-US" sz="1400" dirty="0" err="1">
+                <a:solidFill>
+                  <a:schemeClr val="tx1">
+                    <a:lumMod val="75000"/>
+                    <a:lumOff val="25000"/>
+                  </a:schemeClr>
+                </a:solidFill>
+                <a:latin typeface=""/>
+              </a:rPr>
+              <a:t>Ter</a:t>
+            </a:r>
+            <a:r>
+              <a:rPr lang="en-US" sz="1400" dirty="0">
+                <a:solidFill>
+                  <a:schemeClr val="tx1">
+                    <a:lumMod val="75000"/>
+                    <a:lumOff val="25000"/>
+                  </a:schemeClr>
+                </a:solidFill>
+                <a:latin typeface=""/>
+              </a:rPr>
+              <a:t> </a:t>
+            </a:r>
+            <a:r>
+              <a:rPr lang="en-US" sz="1400" dirty="0" err="1">
+                <a:solidFill>
+                  <a:schemeClr val="tx1">
+                    <a:lumMod val="75000"/>
+                    <a:lumOff val="25000"/>
+                  </a:schemeClr>
+                </a:solidFill>
+                <a:latin typeface=""/>
+              </a:rPr>
+              <a:t>Braak</a:t>
+            </a:r>
+            <a:r>
+              <a:rPr lang="en-US" sz="1400" dirty="0">
+                <a:solidFill>
+                  <a:schemeClr val="tx1">
+                    <a:lumMod val="75000"/>
+                    <a:lumOff val="25000"/>
+                  </a:schemeClr>
+                </a:solidFill>
+                <a:latin typeface=""/>
+              </a:rPr>
+              <a:t> CJF (2003). </a:t>
+            </a:r>
+            <a:r>
+              <a:rPr lang="en-US" sz="1400" i="1" dirty="0">
+                <a:solidFill>
+                  <a:schemeClr val="tx1">
+                    <a:lumMod val="75000"/>
+                    <a:lumOff val="25000"/>
+                  </a:schemeClr>
+                </a:solidFill>
+                <a:latin typeface=""/>
+              </a:rPr>
+              <a:t>Journal of Statistical Computation and Simulation</a:t>
+            </a:r>
+            <a:r>
+              <a:rPr lang="en-US" sz="1400" dirty="0">
+                <a:solidFill>
+                  <a:schemeClr val="tx1">
+                    <a:lumMod val="75000"/>
+                    <a:lumOff val="25000"/>
+                  </a:schemeClr>
+                </a:solidFill>
+                <a:latin typeface=""/>
+              </a:rPr>
+              <a:t> 73</a:t>
+            </a:r>
+            <a:r>
+              <a:rPr lang="en-US" sz="1400" b="1" dirty="0">
+                <a:solidFill>
+                  <a:schemeClr val="tx1">
+                    <a:lumMod val="75000"/>
+                    <a:lumOff val="25000"/>
+                  </a:schemeClr>
+                </a:solidFill>
+                <a:latin typeface=""/>
+              </a:rPr>
+              <a:t>:</a:t>
+            </a:r>
+            <a:r>
+              <a:rPr lang="en-US" sz="1400" dirty="0">
+                <a:solidFill>
+                  <a:schemeClr val="tx1">
+                    <a:lumMod val="75000"/>
+                    <a:lumOff val="25000"/>
+                  </a:schemeClr>
+                </a:solidFill>
+                <a:latin typeface=""/>
+              </a:rPr>
+              <a:t> 85-113</a:t>
+            </a:r>
+            <a:endParaRPr lang="en-US" sz="1400" dirty="0">
+              <a:latin typeface=""/>
+            </a:endParaRPr>
+          </a:p>
+        </p:txBody>
+      </p:sp>
+      <p:sp>
+        <p:nvSpPr>
+          <p:cNvPr id="6" name="Right Brace 5">
+            <a:extLst>
+              <a:ext uri="{FF2B5EF4-FFF2-40B4-BE49-F238E27FC236}">
+                <a16:creationId xmlns:a16="http://schemas.microsoft.com/office/drawing/2014/main" id="{BB9FC6F4-2627-780F-5F11-648761BE6EC2}"/>
+              </a:ext>
+            </a:extLst>
+          </p:cNvPr>
           <p:cNvSpPr/>
           <p:nvPr/>
         </p:nvSpPr>
@@ -13377,7 +14973,2083 @@
     </p:spTree>
     <p:extLst>
       <p:ext uri="{BB962C8B-B14F-4D97-AF65-F5344CB8AC3E}">
-        <p14:creationId xmlns:p14="http://schemas.microsoft.com/office/powerpoint/2010/main" val="1186799346"/>
+        <p14:creationId xmlns:p14="http://schemas.microsoft.com/office/powerpoint/2010/main" val="1615790381"/>
+      </p:ext>
+    </p:extLst>
+  </p:cSld>
+  <p:clrMapOvr>
+    <a:masterClrMapping/>
+  </p:clrMapOvr>
+  <p:timing>
+    <p:tnLst>
+      <p:par>
+        <p:cTn id="1" dur="indefinite" restart="never" nodeType="tmRoot">
+          <p:childTnLst>
+            <p:seq concurrent="1" nextAc="seek">
+              <p:cTn id="2" dur="indefinite" nodeType="mainSeq">
+                <p:childTnLst>
+                  <p:par>
+                    <p:cTn id="3" fill="hold">
+                      <p:stCondLst>
+                        <p:cond delay="indefinite"/>
+                      </p:stCondLst>
+                      <p:childTnLst>
+                        <p:par>
+                          <p:cTn id="4" fill="hold">
+                            <p:stCondLst>
+                              <p:cond delay="0"/>
+                            </p:stCondLst>
+                            <p:childTnLst>
+                              <p:par>
+                                <p:cTn id="5" presetID="22" presetClass="entr" presetSubtype="8" fill="hold" grpId="0" nodeType="clickEffect">
+                                  <p:stCondLst>
+                                    <p:cond delay="0"/>
+                                  </p:stCondLst>
+                                  <p:childTnLst>
+                                    <p:set>
+                                      <p:cBhvr>
+                                        <p:cTn id="6" dur="1" fill="hold">
+                                          <p:stCondLst>
+                                            <p:cond delay="0"/>
+                                          </p:stCondLst>
+                                        </p:cTn>
+                                        <p:tgtEl>
+                                          <p:spTgt spid="6"/>
+                                        </p:tgtEl>
+                                        <p:attrNameLst>
+                                          <p:attrName>style.visibility</p:attrName>
+                                        </p:attrNameLst>
+                                      </p:cBhvr>
+                                      <p:to>
+                                        <p:strVal val="visible"/>
+                                      </p:to>
+                                    </p:set>
+                                    <p:animEffect transition="in" filter="wipe(left)">
+                                      <p:cBhvr>
+                                        <p:cTn id="7" dur="500"/>
+                                        <p:tgtEl>
+                                          <p:spTgt spid="6"/>
+                                        </p:tgtEl>
+                                      </p:cBhvr>
+                                    </p:animEffect>
+                                  </p:childTnLst>
+                                </p:cTn>
+                              </p:par>
+                              <p:par>
+                                <p:cTn id="8" presetID="10" presetClass="entr" presetSubtype="0" fill="hold" grpId="0" nodeType="withEffect">
+                                  <p:stCondLst>
+                                    <p:cond delay="0"/>
+                                  </p:stCondLst>
+                                  <p:childTnLst>
+                                    <p:set>
+                                      <p:cBhvr>
+                                        <p:cTn id="9" dur="1" fill="hold">
+                                          <p:stCondLst>
+                                            <p:cond delay="0"/>
+                                          </p:stCondLst>
+                                        </p:cTn>
+                                        <p:tgtEl>
+                                          <p:spTgt spid="14"/>
+                                        </p:tgtEl>
+                                        <p:attrNameLst>
+                                          <p:attrName>style.visibility</p:attrName>
+                                        </p:attrNameLst>
+                                      </p:cBhvr>
+                                      <p:to>
+                                        <p:strVal val="visible"/>
+                                      </p:to>
+                                    </p:set>
+                                    <p:animEffect transition="in" filter="fade">
+                                      <p:cBhvr>
+                                        <p:cTn id="10" dur="500"/>
+                                        <p:tgtEl>
+                                          <p:spTgt spid="14"/>
+                                        </p:tgtEl>
+                                      </p:cBhvr>
+                                    </p:animEffect>
+                                  </p:childTnLst>
+                                </p:cTn>
+                              </p:par>
+                              <p:par>
+                                <p:cTn id="11" presetID="10" presetClass="entr" presetSubtype="0" fill="hold" nodeType="withEffect">
+                                  <p:stCondLst>
+                                    <p:cond delay="0"/>
+                                  </p:stCondLst>
+                                  <p:childTnLst>
+                                    <p:set>
+                                      <p:cBhvr>
+                                        <p:cTn id="12" dur="1" fill="hold">
+                                          <p:stCondLst>
+                                            <p:cond delay="0"/>
+                                          </p:stCondLst>
+                                        </p:cTn>
+                                        <p:tgtEl>
+                                          <p:spTgt spid="19"/>
+                                        </p:tgtEl>
+                                        <p:attrNameLst>
+                                          <p:attrName>style.visibility</p:attrName>
+                                        </p:attrNameLst>
+                                      </p:cBhvr>
+                                      <p:to>
+                                        <p:strVal val="visible"/>
+                                      </p:to>
+                                    </p:set>
+                                    <p:animEffect transition="in" filter="fade">
+                                      <p:cBhvr>
+                                        <p:cTn id="13" dur="500"/>
+                                        <p:tgtEl>
+                                          <p:spTgt spid="19"/>
+                                        </p:tgtEl>
+                                      </p:cBhvr>
+                                    </p:animEffect>
+                                  </p:childTnLst>
+                                </p:cTn>
+                              </p:par>
+                              <p:par>
+                                <p:cTn id="14" presetID="10" presetClass="entr" presetSubtype="0" fill="hold" grpId="0" nodeType="withEffect">
+                                  <p:stCondLst>
+                                    <p:cond delay="0"/>
+                                  </p:stCondLst>
+                                  <p:childTnLst>
+                                    <p:set>
+                                      <p:cBhvr>
+                                        <p:cTn id="15" dur="1" fill="hold">
+                                          <p:stCondLst>
+                                            <p:cond delay="0"/>
+                                          </p:stCondLst>
+                                        </p:cTn>
+                                        <p:tgtEl>
+                                          <p:spTgt spid="5"/>
+                                        </p:tgtEl>
+                                        <p:attrNameLst>
+                                          <p:attrName>style.visibility</p:attrName>
+                                        </p:attrNameLst>
+                                      </p:cBhvr>
+                                      <p:to>
+                                        <p:strVal val="visible"/>
+                                      </p:to>
+                                    </p:set>
+                                    <p:animEffect transition="in" filter="fade">
+                                      <p:cBhvr>
+                                        <p:cTn id="16" dur="500"/>
+                                        <p:tgtEl>
+                                          <p:spTgt spid="5"/>
+                                        </p:tgtEl>
+                                      </p:cBhvr>
+                                    </p:animEffect>
+                                  </p:childTnLst>
+                                </p:cTn>
+                              </p:par>
+                            </p:childTnLst>
+                          </p:cTn>
+                        </p:par>
+                      </p:childTnLst>
+                    </p:cTn>
+                  </p:par>
+                </p:childTnLst>
+              </p:cTn>
+              <p:prevCondLst>
+                <p:cond evt="onPrev" delay="0">
+                  <p:tgtEl>
+                    <p:sldTgt/>
+                  </p:tgtEl>
+                </p:cond>
+              </p:prevCondLst>
+              <p:nextCondLst>
+                <p:cond evt="onNext" delay="0">
+                  <p:tgtEl>
+                    <p:sldTgt/>
+                  </p:tgtEl>
+                </p:cond>
+              </p:nextCondLst>
+            </p:seq>
+          </p:childTnLst>
+        </p:cTn>
+      </p:par>
+    </p:tnLst>
+    <p:bldLst>
+      <p:bldP spid="14" grpId="0"/>
+      <p:bldP spid="5" grpId="0"/>
+      <p:bldP spid="6" grpId="0" animBg="1"/>
+    </p:bldLst>
+  </p:timing>
+</p:sld>
+</file>
+
+<file path=ppt/slides/slide9.xml><?xml version="1.0" encoding="utf-8"?>
+<p:sld xmlns:a="http://schemas.openxmlformats.org/drawingml/2006/main" xmlns:r="http://schemas.openxmlformats.org/officeDocument/2006/relationships" xmlns:p="http://schemas.openxmlformats.org/presentationml/2006/main">
+  <p:cSld>
+    <p:spTree>
+      <p:nvGrpSpPr>
+        <p:cNvPr id="1" name="">
+          <a:extLst>
+            <a:ext uri="{FF2B5EF4-FFF2-40B4-BE49-F238E27FC236}">
+              <a16:creationId xmlns:a16="http://schemas.microsoft.com/office/drawing/2014/main" id="{374003A1-A63A-7BD1-9A7D-23AA41D13549}"/>
+            </a:ext>
+          </a:extLst>
+        </p:cNvPr>
+        <p:cNvGrpSpPr/>
+        <p:nvPr/>
+      </p:nvGrpSpPr>
+      <p:grpSpPr>
+        <a:xfrm>
+          <a:off x="0" y="0"/>
+          <a:ext cx="0" cy="0"/>
+          <a:chOff x="0" y="0"/>
+          <a:chExt cx="0" cy="0"/>
+        </a:xfrm>
+      </p:grpSpPr>
+      <p:sp>
+        <p:nvSpPr>
+          <p:cNvPr id="12" name="TextBox 11">
+            <a:extLst>
+              <a:ext uri="{FF2B5EF4-FFF2-40B4-BE49-F238E27FC236}">
+                <a16:creationId xmlns:a16="http://schemas.microsoft.com/office/drawing/2014/main" id="{FBAEAF19-56BC-C80D-7DF7-DEE4427791CB}"/>
+              </a:ext>
+            </a:extLst>
+          </p:cNvPr>
+          <p:cNvSpPr txBox="1"/>
+          <p:nvPr/>
+        </p:nvSpPr>
+        <p:spPr>
+          <a:xfrm>
+            <a:off x="152399" y="352924"/>
+            <a:ext cx="6549189" cy="1938992"/>
+          </a:xfrm>
+          <a:prstGeom prst="rect">
+            <a:avLst/>
+          </a:prstGeom>
+          <a:solidFill>
+            <a:schemeClr val="accent1">
+              <a:lumMod val="20000"/>
+              <a:lumOff val="80000"/>
+            </a:schemeClr>
+          </a:solidFill>
+          <a:effectLst>
+            <a:outerShdw blurRad="50800" dist="38100" dir="18900000" algn="bl" rotWithShape="0">
+              <a:prstClr val="black">
+                <a:alpha val="40000"/>
+              </a:prstClr>
+            </a:outerShdw>
+          </a:effectLst>
+        </p:spPr>
+        <p:txBody>
+          <a:bodyPr wrap="square" rtlCol="0">
+            <a:spAutoFit/>
+          </a:bodyPr>
+          <a:lstStyle/>
+          <a:p>
+            <a:r>
+              <a:rPr lang="en-US" sz="2000" b="1" dirty="0">
+                <a:solidFill>
+                  <a:schemeClr val="tx1">
+                    <a:lumMod val="75000"/>
+                    <a:lumOff val="25000"/>
+                  </a:schemeClr>
+                </a:solidFill>
+                <a:latin typeface=""/>
+              </a:rPr>
+              <a:t>However</a:t>
+            </a:r>
+            <a:r>
+              <a:rPr lang="en-US" sz="2000" dirty="0">
+                <a:solidFill>
+                  <a:schemeClr val="tx1">
+                    <a:lumMod val="75000"/>
+                    <a:lumOff val="25000"/>
+                  </a:schemeClr>
+                </a:solidFill>
+                <a:latin typeface=""/>
+              </a:rPr>
+              <a:t>: there is no multivariate F distribution! Solutions:</a:t>
+            </a:r>
+          </a:p>
+          <a:p>
+            <a:pPr marL="285750" indent="-285750">
+              <a:buFontTx/>
+              <a:buChar char="-"/>
+            </a:pPr>
+            <a:r>
+              <a:rPr lang="en-US" sz="2000" dirty="0">
+                <a:solidFill>
+                  <a:schemeClr val="tx1">
+                    <a:lumMod val="75000"/>
+                    <a:lumOff val="25000"/>
+                  </a:schemeClr>
+                </a:solidFill>
+                <a:latin typeface=""/>
+              </a:rPr>
+              <a:t>Use multivariate approximations and then apply a conversion to an approximate F-value</a:t>
+            </a:r>
+          </a:p>
+          <a:p>
+            <a:pPr marL="285750" indent="-285750">
+              <a:buFontTx/>
+              <a:buChar char="-"/>
+            </a:pPr>
+            <a:r>
+              <a:rPr lang="en-US" sz="2000" b="1" dirty="0">
+                <a:solidFill>
+                  <a:schemeClr val="tx1">
+                    <a:lumMod val="75000"/>
+                    <a:lumOff val="25000"/>
+                  </a:schemeClr>
+                </a:solidFill>
+                <a:latin typeface=""/>
+              </a:rPr>
+              <a:t>Use randomizations </a:t>
+            </a:r>
+            <a:r>
+              <a:rPr lang="en-US" sz="2000" dirty="0">
+                <a:solidFill>
+                  <a:schemeClr val="tx1">
+                    <a:lumMod val="75000"/>
+                    <a:lumOff val="25000"/>
+                  </a:schemeClr>
+                </a:solidFill>
+                <a:latin typeface=""/>
+              </a:rPr>
+              <a:t>to obtain an empirical distribution</a:t>
+            </a:r>
+          </a:p>
+        </p:txBody>
+      </p:sp>
+      <mc:AlternateContent xmlns:mc="http://schemas.openxmlformats.org/markup-compatibility/2006" xmlns:a14="http://schemas.microsoft.com/office/drawing/2010/main">
+        <mc:Choice Requires="a14">
+          <p:sp>
+            <p:nvSpPr>
+              <p:cNvPr id="13" name="TextBox 12">
+                <a:extLst>
+                  <a:ext uri="{FF2B5EF4-FFF2-40B4-BE49-F238E27FC236}">
+                    <a16:creationId xmlns:a16="http://schemas.microsoft.com/office/drawing/2014/main" id="{3E879D53-0B96-9E40-889C-F537CE86B260}"/>
+                  </a:ext>
+                </a:extLst>
+              </p:cNvPr>
+              <p:cNvSpPr txBox="1"/>
+              <p:nvPr/>
+            </p:nvSpPr>
+            <p:spPr>
+              <a:xfrm>
+                <a:off x="370574" y="2334124"/>
+                <a:ext cx="4800600" cy="3280963"/>
+              </a:xfrm>
+              <a:prstGeom prst="rect">
+                <a:avLst/>
+              </a:prstGeom>
+              <a:noFill/>
+            </p:spPr>
+            <p:txBody>
+              <a:bodyPr wrap="square" rtlCol="0">
+                <a:spAutoFit/>
+              </a:bodyPr>
+              <a:lstStyle/>
+              <a:p>
+                <a:pPr marL="285750" indent="-285750">
+                  <a:lnSpc>
+                    <a:spcPct val="150000"/>
+                  </a:lnSpc>
+                  <a:buFont typeface="Arial" panose="020B0604020202020204" pitchFamily="34" charset="0"/>
+                  <a:buChar char="•"/>
+                </a:pPr>
+                <a:r>
+                  <a:rPr lang="en-US" sz="2000" dirty="0">
+                    <a:solidFill>
+                      <a:schemeClr val="tx1">
+                        <a:lumMod val="75000"/>
+                        <a:lumOff val="25000"/>
+                      </a:schemeClr>
+                    </a:solidFill>
+                    <a:latin typeface=""/>
+                  </a:rPr>
+                  <a:t>Wilks’ lambda </a:t>
+                </a:r>
+                <a14:m>
+                  <m:oMath xmlns:m="http://schemas.openxmlformats.org/officeDocument/2006/math">
+                    <m:r>
+                      <a:rPr lang="el-GR" sz="2400" b="0" i="1" smtClean="0">
+                        <a:solidFill>
+                          <a:schemeClr val="tx1">
+                            <a:lumMod val="75000"/>
+                            <a:lumOff val="25000"/>
+                          </a:schemeClr>
+                        </a:solidFill>
+                        <a:latin typeface="Cambria Math" panose="02040503050406030204" pitchFamily="18" charset="0"/>
+                      </a:rPr>
+                      <m:t>𝛬</m:t>
+                    </m:r>
+                    <m:r>
+                      <a:rPr lang="el-GR" sz="2400" b="1" i="0" smtClean="0">
+                        <a:solidFill>
+                          <a:schemeClr val="tx1">
+                            <a:lumMod val="75000"/>
+                            <a:lumOff val="25000"/>
+                          </a:schemeClr>
+                        </a:solidFill>
+                        <a:latin typeface="Cambria Math" panose="02040503050406030204" pitchFamily="18" charset="0"/>
+                      </a:rPr>
+                      <m:t>= </m:t>
+                    </m:r>
+                    <m:f>
+                      <m:fPr>
+                        <m:ctrlPr>
+                          <a:rPr lang="el-GR" sz="2400" b="1" i="1" smtClean="0">
+                            <a:solidFill>
+                              <a:schemeClr val="tx1">
+                                <a:lumMod val="75000"/>
+                                <a:lumOff val="25000"/>
+                              </a:schemeClr>
+                            </a:solidFill>
+                            <a:latin typeface="Cambria Math" panose="02040503050406030204" pitchFamily="18" charset="0"/>
+                          </a:rPr>
+                        </m:ctrlPr>
+                      </m:fPr>
+                      <m:num>
+                        <m:d>
+                          <m:dPr>
+                            <m:begChr m:val="|"/>
+                            <m:endChr m:val="|"/>
+                            <m:ctrlPr>
+                              <a:rPr lang="el-GR" sz="2400" b="1" i="1" smtClean="0">
+                                <a:solidFill>
+                                  <a:schemeClr val="tx1">
+                                    <a:lumMod val="75000"/>
+                                    <a:lumOff val="25000"/>
+                                  </a:schemeClr>
+                                </a:solidFill>
+                                <a:latin typeface="Cambria Math" panose="02040503050406030204" pitchFamily="18" charset="0"/>
+                              </a:rPr>
+                            </m:ctrlPr>
+                          </m:dPr>
+                          <m:e>
+                            <m:sSub>
+                              <m:sSubPr>
+                                <m:ctrlPr>
+                                  <a:rPr lang="el-GR" sz="2400" b="1" i="1" smtClean="0">
+                                    <a:solidFill>
+                                      <a:schemeClr val="tx1">
+                                        <a:lumMod val="75000"/>
+                                        <a:lumOff val="25000"/>
+                                      </a:schemeClr>
+                                    </a:solidFill>
+                                    <a:latin typeface="Cambria Math" panose="02040503050406030204" pitchFamily="18" charset="0"/>
+                                  </a:rPr>
+                                </m:ctrlPr>
+                              </m:sSubPr>
+                              <m:e>
+                                <m:r>
+                                  <a:rPr lang="en-US" sz="2400" b="1" i="0" smtClean="0">
+                                    <a:solidFill>
+                                      <a:schemeClr val="tx1">
+                                        <a:lumMod val="75000"/>
+                                        <a:lumOff val="25000"/>
+                                      </a:schemeClr>
+                                    </a:solidFill>
+                                    <a:latin typeface="Cambria Math" panose="02040503050406030204" pitchFamily="18" charset="0"/>
+                                  </a:rPr>
+                                  <m:t>𝐒</m:t>
+                                </m:r>
+                              </m:e>
+                              <m:sub>
+                                <m:r>
+                                  <a:rPr lang="pt-PT" sz="2400" b="1" i="0" smtClean="0">
+                                    <a:solidFill>
+                                      <a:schemeClr val="tx1">
+                                        <a:lumMod val="75000"/>
+                                        <a:lumOff val="25000"/>
+                                      </a:schemeClr>
+                                    </a:solidFill>
+                                    <a:latin typeface="Cambria Math" panose="02040503050406030204" pitchFamily="18" charset="0"/>
+                                  </a:rPr>
+                                  <m:t>𝐅</m:t>
+                                </m:r>
+                              </m:sub>
+                            </m:sSub>
+                          </m:e>
+                        </m:d>
+                      </m:num>
+                      <m:den>
+                        <m:d>
+                          <m:dPr>
+                            <m:begChr m:val="|"/>
+                            <m:endChr m:val="|"/>
+                            <m:ctrlPr>
+                              <a:rPr lang="el-GR" sz="2400" b="1" i="1" smtClean="0">
+                                <a:solidFill>
+                                  <a:schemeClr val="tx1">
+                                    <a:lumMod val="75000"/>
+                                    <a:lumOff val="25000"/>
+                                  </a:schemeClr>
+                                </a:solidFill>
+                                <a:latin typeface="Cambria Math" panose="02040503050406030204" pitchFamily="18" charset="0"/>
+                              </a:rPr>
+                            </m:ctrlPr>
+                          </m:dPr>
+                          <m:e>
+                            <m:d>
+                              <m:dPr>
+                                <m:ctrlPr>
+                                  <a:rPr lang="en-US" sz="2400" b="1" i="1" smtClean="0">
+                                    <a:solidFill>
+                                      <a:schemeClr val="tx1">
+                                        <a:lumMod val="75000"/>
+                                        <a:lumOff val="25000"/>
+                                      </a:schemeClr>
+                                    </a:solidFill>
+                                    <a:latin typeface="Cambria Math" panose="02040503050406030204" pitchFamily="18" charset="0"/>
+                                  </a:rPr>
+                                </m:ctrlPr>
+                              </m:dPr>
+                              <m:e>
+                                <m:sSub>
+                                  <m:sSubPr>
+                                    <m:ctrlPr>
+                                      <a:rPr lang="en-US" sz="2400" b="1" i="1" smtClean="0">
+                                        <a:solidFill>
+                                          <a:schemeClr val="tx1">
+                                            <a:lumMod val="75000"/>
+                                            <a:lumOff val="25000"/>
+                                          </a:schemeClr>
+                                        </a:solidFill>
+                                        <a:latin typeface="Cambria Math" panose="02040503050406030204" pitchFamily="18" charset="0"/>
+                                      </a:rPr>
+                                    </m:ctrlPr>
+                                  </m:sSubPr>
+                                  <m:e>
+                                    <m:r>
+                                      <a:rPr lang="en-US" sz="2400" b="1" i="0" smtClean="0">
+                                        <a:solidFill>
+                                          <a:schemeClr val="tx1">
+                                            <a:lumMod val="75000"/>
+                                            <a:lumOff val="25000"/>
+                                          </a:schemeClr>
+                                        </a:solidFill>
+                                        <a:latin typeface="Cambria Math" panose="02040503050406030204" pitchFamily="18" charset="0"/>
+                                      </a:rPr>
+                                      <m:t>𝐒</m:t>
+                                    </m:r>
+                                  </m:e>
+                                  <m:sub>
+                                    <m:r>
+                                      <a:rPr lang="pt-PT" sz="2400" b="1" i="0" smtClean="0">
+                                        <a:solidFill>
+                                          <a:schemeClr val="tx1">
+                                            <a:lumMod val="75000"/>
+                                            <a:lumOff val="25000"/>
+                                          </a:schemeClr>
+                                        </a:solidFill>
+                                        <a:latin typeface="Cambria Math" panose="02040503050406030204" pitchFamily="18" charset="0"/>
+                                      </a:rPr>
+                                      <m:t>𝐍</m:t>
+                                    </m:r>
+                                  </m:sub>
+                                </m:sSub>
+                                <m:r>
+                                  <a:rPr lang="en-US" sz="2400" b="1" i="0" smtClean="0">
+                                    <a:solidFill>
+                                      <a:schemeClr val="tx1">
+                                        <a:lumMod val="75000"/>
+                                        <a:lumOff val="25000"/>
+                                      </a:schemeClr>
+                                    </a:solidFill>
+                                    <a:latin typeface="Cambria Math" panose="02040503050406030204" pitchFamily="18" charset="0"/>
+                                  </a:rPr>
+                                  <m:t>−</m:t>
+                                </m:r>
+                                <m:sSub>
+                                  <m:sSubPr>
+                                    <m:ctrlPr>
+                                      <a:rPr lang="en-US" sz="2400" b="1" i="1" smtClean="0">
+                                        <a:solidFill>
+                                          <a:schemeClr val="tx1">
+                                            <a:lumMod val="75000"/>
+                                            <a:lumOff val="25000"/>
+                                          </a:schemeClr>
+                                        </a:solidFill>
+                                        <a:latin typeface="Cambria Math" panose="02040503050406030204" pitchFamily="18" charset="0"/>
+                                      </a:rPr>
+                                    </m:ctrlPr>
+                                  </m:sSubPr>
+                                  <m:e>
+                                    <m:r>
+                                      <a:rPr lang="en-US" sz="2400" b="1" i="0" smtClean="0">
+                                        <a:solidFill>
+                                          <a:schemeClr val="tx1">
+                                            <a:lumMod val="75000"/>
+                                            <a:lumOff val="25000"/>
+                                          </a:schemeClr>
+                                        </a:solidFill>
+                                        <a:latin typeface="Cambria Math" panose="02040503050406030204" pitchFamily="18" charset="0"/>
+                                      </a:rPr>
+                                      <m:t>𝐒</m:t>
+                                    </m:r>
+                                  </m:e>
+                                  <m:sub>
+                                    <m:r>
+                                      <a:rPr lang="pt-PT" sz="2400" b="1" i="0" smtClean="0">
+                                        <a:solidFill>
+                                          <a:schemeClr val="tx1">
+                                            <a:lumMod val="75000"/>
+                                            <a:lumOff val="25000"/>
+                                          </a:schemeClr>
+                                        </a:solidFill>
+                                        <a:latin typeface="Cambria Math" panose="02040503050406030204" pitchFamily="18" charset="0"/>
+                                      </a:rPr>
+                                      <m:t>𝐅</m:t>
+                                    </m:r>
+                                  </m:sub>
+                                </m:sSub>
+                              </m:e>
+                            </m:d>
+                            <m:r>
+                              <a:rPr lang="en-US" sz="2400" b="1" i="0" smtClean="0">
+                                <a:solidFill>
+                                  <a:schemeClr val="tx1">
+                                    <a:lumMod val="75000"/>
+                                    <a:lumOff val="25000"/>
+                                  </a:schemeClr>
+                                </a:solidFill>
+                                <a:latin typeface="Cambria Math" panose="02040503050406030204" pitchFamily="18" charset="0"/>
+                              </a:rPr>
+                              <m:t>+</m:t>
+                            </m:r>
+                            <m:sSub>
+                              <m:sSubPr>
+                                <m:ctrlPr>
+                                  <a:rPr lang="en-US" sz="2400" b="1" i="1" smtClean="0">
+                                    <a:solidFill>
+                                      <a:schemeClr val="tx1">
+                                        <a:lumMod val="75000"/>
+                                        <a:lumOff val="25000"/>
+                                      </a:schemeClr>
+                                    </a:solidFill>
+                                    <a:latin typeface="Cambria Math" panose="02040503050406030204" pitchFamily="18" charset="0"/>
+                                  </a:rPr>
+                                </m:ctrlPr>
+                              </m:sSubPr>
+                              <m:e>
+                                <m:r>
+                                  <a:rPr lang="en-US" sz="2400" b="1" i="0" smtClean="0">
+                                    <a:solidFill>
+                                      <a:schemeClr val="tx1">
+                                        <a:lumMod val="75000"/>
+                                        <a:lumOff val="25000"/>
+                                      </a:schemeClr>
+                                    </a:solidFill>
+                                    <a:latin typeface="Cambria Math" panose="02040503050406030204" pitchFamily="18" charset="0"/>
+                                  </a:rPr>
+                                  <m:t>𝐒</m:t>
+                                </m:r>
+                              </m:e>
+                              <m:sub>
+                                <m:r>
+                                  <a:rPr lang="pt-PT" sz="2400" b="1" i="0" smtClean="0">
+                                    <a:solidFill>
+                                      <a:schemeClr val="tx1">
+                                        <a:lumMod val="75000"/>
+                                        <a:lumOff val="25000"/>
+                                      </a:schemeClr>
+                                    </a:solidFill>
+                                    <a:latin typeface="Cambria Math" panose="02040503050406030204" pitchFamily="18" charset="0"/>
+                                  </a:rPr>
+                                  <m:t>𝐅</m:t>
+                                </m:r>
+                              </m:sub>
+                            </m:sSub>
+                          </m:e>
+                        </m:d>
+                      </m:den>
+                    </m:f>
+                  </m:oMath>
+                </a14:m>
+                <a:endParaRPr lang="en-US" sz="2400" b="1" dirty="0">
+                  <a:solidFill>
+                    <a:schemeClr val="tx1">
+                      <a:lumMod val="75000"/>
+                      <a:lumOff val="25000"/>
+                    </a:schemeClr>
+                  </a:solidFill>
+                  <a:latin typeface=""/>
+                </a:endParaRPr>
+              </a:p>
+              <a:p>
+                <a:pPr marL="285750" indent="-285750">
+                  <a:lnSpc>
+                    <a:spcPct val="150000"/>
+                  </a:lnSpc>
+                  <a:buFont typeface="Arial" panose="020B0604020202020204" pitchFamily="34" charset="0"/>
+                  <a:buChar char="•"/>
+                </a:pPr>
+                <a:r>
+                  <a:rPr lang="en-US" sz="2000" dirty="0">
+                    <a:solidFill>
+                      <a:schemeClr val="tx1">
+                        <a:lumMod val="75000"/>
+                        <a:lumOff val="25000"/>
+                      </a:schemeClr>
+                    </a:solidFill>
+                    <a:latin typeface=""/>
+                  </a:rPr>
+                  <a:t>Pillai’s trace  </a:t>
+                </a:r>
+                <a14:m>
+                  <m:oMath xmlns:m="http://schemas.openxmlformats.org/officeDocument/2006/math">
+                    <m:r>
+                      <a:rPr lang="en-US" sz="2000" b="0" i="1" smtClean="0">
+                        <a:solidFill>
+                          <a:schemeClr val="tx1">
+                            <a:lumMod val="75000"/>
+                            <a:lumOff val="25000"/>
+                          </a:schemeClr>
+                        </a:solidFill>
+                        <a:latin typeface="Cambria Math" panose="02040503050406030204" pitchFamily="18" charset="0"/>
+                      </a:rPr>
+                      <m:t>𝑡𝑟</m:t>
+                    </m:r>
+                    <m:d>
+                      <m:dPr>
+                        <m:ctrlPr>
+                          <a:rPr lang="en-US" sz="2000" b="0" i="1" smtClean="0">
+                            <a:solidFill>
+                              <a:schemeClr val="tx1">
+                                <a:lumMod val="75000"/>
+                                <a:lumOff val="25000"/>
+                              </a:schemeClr>
+                            </a:solidFill>
+                            <a:latin typeface="Cambria Math" panose="02040503050406030204" pitchFamily="18" charset="0"/>
+                          </a:rPr>
+                        </m:ctrlPr>
+                      </m:dPr>
+                      <m:e>
+                        <m:r>
+                          <a:rPr lang="en-US" sz="2000" b="0" i="1" smtClean="0">
+                            <a:solidFill>
+                              <a:schemeClr val="tx1">
+                                <a:lumMod val="75000"/>
+                                <a:lumOff val="25000"/>
+                              </a:schemeClr>
+                            </a:solidFill>
+                            <a:latin typeface="Cambria Math" panose="02040503050406030204" pitchFamily="18" charset="0"/>
+                          </a:rPr>
+                          <m:t>(</m:t>
+                        </m:r>
+                        <m:sSub>
+                          <m:sSubPr>
+                            <m:ctrlPr>
+                              <a:rPr lang="en-US" sz="2000" b="1" i="1" smtClean="0">
+                                <a:solidFill>
+                                  <a:schemeClr val="tx1">
+                                    <a:lumMod val="75000"/>
+                                    <a:lumOff val="25000"/>
+                                  </a:schemeClr>
+                                </a:solidFill>
+                                <a:latin typeface="Cambria Math" panose="02040503050406030204" pitchFamily="18" charset="0"/>
+                              </a:rPr>
+                            </m:ctrlPr>
+                          </m:sSubPr>
+                          <m:e>
+                            <m:r>
+                              <a:rPr lang="en-US" sz="2000" b="1" i="0" smtClean="0">
+                                <a:solidFill>
+                                  <a:schemeClr val="tx1">
+                                    <a:lumMod val="75000"/>
+                                    <a:lumOff val="25000"/>
+                                  </a:schemeClr>
+                                </a:solidFill>
+                                <a:latin typeface="Cambria Math" panose="02040503050406030204" pitchFamily="18" charset="0"/>
+                              </a:rPr>
+                              <m:t>𝐒</m:t>
+                            </m:r>
+                          </m:e>
+                          <m:sub>
+                            <m:r>
+                              <a:rPr lang="pt-PT" sz="2000" b="1" i="0" smtClean="0">
+                                <a:solidFill>
+                                  <a:schemeClr val="tx1">
+                                    <a:lumMod val="75000"/>
+                                    <a:lumOff val="25000"/>
+                                  </a:schemeClr>
+                                </a:solidFill>
+                                <a:latin typeface="Cambria Math" panose="02040503050406030204" pitchFamily="18" charset="0"/>
+                              </a:rPr>
+                              <m:t>𝐑</m:t>
+                            </m:r>
+                          </m:sub>
+                        </m:sSub>
+                        <m:r>
+                          <a:rPr lang="en-US" sz="2000" b="0" i="1" smtClean="0">
+                            <a:solidFill>
+                              <a:schemeClr val="tx1">
+                                <a:lumMod val="75000"/>
+                                <a:lumOff val="25000"/>
+                              </a:schemeClr>
+                            </a:solidFill>
+                            <a:latin typeface="Cambria Math" panose="02040503050406030204" pitchFamily="18" charset="0"/>
+                          </a:rPr>
+                          <m:t>−</m:t>
+                        </m:r>
+                        <m:sSub>
+                          <m:sSubPr>
+                            <m:ctrlPr>
+                              <a:rPr lang="en-US" sz="2000" b="1" i="1">
+                                <a:solidFill>
+                                  <a:schemeClr val="tx1">
+                                    <a:lumMod val="75000"/>
+                                    <a:lumOff val="25000"/>
+                                  </a:schemeClr>
+                                </a:solidFill>
+                                <a:latin typeface="Cambria Math" panose="02040503050406030204" pitchFamily="18" charset="0"/>
+                              </a:rPr>
+                            </m:ctrlPr>
+                          </m:sSubPr>
+                          <m:e>
+                            <m:r>
+                              <a:rPr lang="en-US" sz="2000" b="1">
+                                <a:solidFill>
+                                  <a:schemeClr val="tx1">
+                                    <a:lumMod val="75000"/>
+                                    <a:lumOff val="25000"/>
+                                  </a:schemeClr>
+                                </a:solidFill>
+                                <a:latin typeface="Cambria Math" panose="02040503050406030204" pitchFamily="18" charset="0"/>
+                              </a:rPr>
+                              <m:t>𝐒</m:t>
+                            </m:r>
+                          </m:e>
+                          <m:sub>
+                            <m:r>
+                              <a:rPr lang="pt-PT" sz="2000" b="1" i="0" smtClean="0">
+                                <a:solidFill>
+                                  <a:schemeClr val="tx1">
+                                    <a:lumMod val="75000"/>
+                                    <a:lumOff val="25000"/>
+                                  </a:schemeClr>
+                                </a:solidFill>
+                                <a:latin typeface="Cambria Math" panose="02040503050406030204" pitchFamily="18" charset="0"/>
+                              </a:rPr>
+                              <m:t>𝐅</m:t>
+                            </m:r>
+                          </m:sub>
+                        </m:sSub>
+                        <m:r>
+                          <a:rPr lang="en-US" sz="2000" b="0" i="1" smtClean="0">
+                            <a:solidFill>
+                              <a:schemeClr val="tx1">
+                                <a:lumMod val="75000"/>
+                                <a:lumOff val="25000"/>
+                              </a:schemeClr>
+                            </a:solidFill>
+                            <a:latin typeface="Cambria Math" panose="02040503050406030204" pitchFamily="18" charset="0"/>
+                          </a:rPr>
+                          <m:t>)</m:t>
+                        </m:r>
+                        <m:sSup>
+                          <m:sSupPr>
+                            <m:ctrlPr>
+                              <a:rPr lang="en-US" sz="2000" b="0" i="1" smtClean="0">
+                                <a:solidFill>
+                                  <a:schemeClr val="tx1">
+                                    <a:lumMod val="75000"/>
+                                    <a:lumOff val="25000"/>
+                                  </a:schemeClr>
+                                </a:solidFill>
+                                <a:latin typeface="Cambria Math" panose="02040503050406030204" pitchFamily="18" charset="0"/>
+                              </a:rPr>
+                            </m:ctrlPr>
+                          </m:sSupPr>
+                          <m:e>
+                            <m:sSub>
+                              <m:sSubPr>
+                                <m:ctrlPr>
+                                  <a:rPr lang="en-US" sz="2000" b="1" i="1">
+                                    <a:solidFill>
+                                      <a:schemeClr val="tx1">
+                                        <a:lumMod val="75000"/>
+                                        <a:lumOff val="25000"/>
+                                      </a:schemeClr>
+                                    </a:solidFill>
+                                    <a:latin typeface="Cambria Math" panose="02040503050406030204" pitchFamily="18" charset="0"/>
+                                  </a:rPr>
+                                </m:ctrlPr>
+                              </m:sSubPr>
+                              <m:e>
+                                <m:r>
+                                  <a:rPr lang="en-US" sz="2000" b="1">
+                                    <a:solidFill>
+                                      <a:schemeClr val="tx1">
+                                        <a:lumMod val="75000"/>
+                                        <a:lumOff val="25000"/>
+                                      </a:schemeClr>
+                                    </a:solidFill>
+                                    <a:latin typeface="Cambria Math" panose="02040503050406030204" pitchFamily="18" charset="0"/>
+                                  </a:rPr>
+                                  <m:t>𝐒</m:t>
+                                </m:r>
+                              </m:e>
+                              <m:sub>
+                                <m:r>
+                                  <a:rPr lang="pt-PT" sz="2000" b="1" i="0" smtClean="0">
+                                    <a:solidFill>
+                                      <a:schemeClr val="tx1">
+                                        <a:lumMod val="75000"/>
+                                        <a:lumOff val="25000"/>
+                                      </a:schemeClr>
+                                    </a:solidFill>
+                                    <a:latin typeface="Cambria Math" panose="02040503050406030204" pitchFamily="18" charset="0"/>
+                                  </a:rPr>
+                                  <m:t>𝐑</m:t>
+                                </m:r>
+                              </m:sub>
+                            </m:sSub>
+                          </m:e>
+                          <m:sup>
+                            <m:r>
+                              <a:rPr lang="en-US" sz="2000" b="0" i="1" smtClean="0">
+                                <a:solidFill>
+                                  <a:schemeClr val="tx1">
+                                    <a:lumMod val="75000"/>
+                                    <a:lumOff val="25000"/>
+                                  </a:schemeClr>
+                                </a:solidFill>
+                                <a:latin typeface="Cambria Math" panose="02040503050406030204" pitchFamily="18" charset="0"/>
+                              </a:rPr>
+                              <m:t>−1</m:t>
+                            </m:r>
+                          </m:sup>
+                        </m:sSup>
+                      </m:e>
+                    </m:d>
+                  </m:oMath>
+                </a14:m>
+                <a:endParaRPr lang="en-US" sz="2000" dirty="0">
+                  <a:solidFill>
+                    <a:schemeClr val="tx1">
+                      <a:lumMod val="75000"/>
+                      <a:lumOff val="25000"/>
+                    </a:schemeClr>
+                  </a:solidFill>
+                  <a:latin typeface=""/>
+                </a:endParaRPr>
+              </a:p>
+              <a:p>
+                <a:pPr marL="285750" indent="-285750">
+                  <a:lnSpc>
+                    <a:spcPct val="150000"/>
+                  </a:lnSpc>
+                  <a:buFont typeface="Arial" panose="020B0604020202020204" pitchFamily="34" charset="0"/>
+                  <a:buChar char="•"/>
+                </a:pPr>
+                <a:r>
+                  <a:rPr lang="en-US" sz="2000" dirty="0" err="1">
+                    <a:solidFill>
+                      <a:schemeClr val="tx1">
+                        <a:lumMod val="75000"/>
+                        <a:lumOff val="25000"/>
+                      </a:schemeClr>
+                    </a:solidFill>
+                    <a:latin typeface=""/>
+                  </a:rPr>
+                  <a:t>Hotelling’s</a:t>
+                </a:r>
+                <a:r>
+                  <a:rPr lang="en-US" sz="2000" dirty="0">
+                    <a:solidFill>
+                      <a:schemeClr val="tx1">
+                        <a:lumMod val="75000"/>
+                        <a:lumOff val="25000"/>
+                      </a:schemeClr>
+                    </a:solidFill>
+                    <a:latin typeface=""/>
+                  </a:rPr>
+                  <a:t> trace </a:t>
+                </a:r>
+                <a14:m>
+                  <m:oMath xmlns:m="http://schemas.openxmlformats.org/officeDocument/2006/math">
+                    <m:r>
+                      <a:rPr lang="en-US" sz="2000" i="1">
+                        <a:solidFill>
+                          <a:schemeClr val="tx1">
+                            <a:lumMod val="75000"/>
+                            <a:lumOff val="25000"/>
+                          </a:schemeClr>
+                        </a:solidFill>
+                        <a:latin typeface="Cambria Math" panose="02040503050406030204" pitchFamily="18" charset="0"/>
+                      </a:rPr>
+                      <m:t>𝑡𝑟</m:t>
+                    </m:r>
+                    <m:d>
+                      <m:dPr>
+                        <m:ctrlPr>
+                          <a:rPr lang="en-US" sz="2000" i="1">
+                            <a:solidFill>
+                              <a:schemeClr val="tx1">
+                                <a:lumMod val="75000"/>
+                                <a:lumOff val="25000"/>
+                              </a:schemeClr>
+                            </a:solidFill>
+                            <a:latin typeface="Cambria Math" panose="02040503050406030204" pitchFamily="18" charset="0"/>
+                          </a:rPr>
+                        </m:ctrlPr>
+                      </m:dPr>
+                      <m:e>
+                        <m:r>
+                          <a:rPr lang="en-US" sz="2000" i="1">
+                            <a:solidFill>
+                              <a:schemeClr val="tx1">
+                                <a:lumMod val="75000"/>
+                                <a:lumOff val="25000"/>
+                              </a:schemeClr>
+                            </a:solidFill>
+                            <a:latin typeface="Cambria Math" panose="02040503050406030204" pitchFamily="18" charset="0"/>
+                          </a:rPr>
+                          <m:t>(</m:t>
+                        </m:r>
+                        <m:sSub>
+                          <m:sSubPr>
+                            <m:ctrlPr>
+                              <a:rPr lang="en-US" sz="2000" b="1" i="1">
+                                <a:solidFill>
+                                  <a:schemeClr val="tx1">
+                                    <a:lumMod val="75000"/>
+                                    <a:lumOff val="25000"/>
+                                  </a:schemeClr>
+                                </a:solidFill>
+                                <a:latin typeface="Cambria Math" panose="02040503050406030204" pitchFamily="18" charset="0"/>
+                              </a:rPr>
+                            </m:ctrlPr>
+                          </m:sSubPr>
+                          <m:e>
+                            <m:r>
+                              <a:rPr lang="en-US" sz="2000" b="1">
+                                <a:solidFill>
+                                  <a:schemeClr val="tx1">
+                                    <a:lumMod val="75000"/>
+                                    <a:lumOff val="25000"/>
+                                  </a:schemeClr>
+                                </a:solidFill>
+                                <a:latin typeface="Cambria Math" panose="02040503050406030204" pitchFamily="18" charset="0"/>
+                              </a:rPr>
+                              <m:t>𝐒</m:t>
+                            </m:r>
+                          </m:e>
+                          <m:sub>
+                            <m:r>
+                              <a:rPr lang="pt-PT" sz="2000" b="1" i="0" smtClean="0">
+                                <a:solidFill>
+                                  <a:schemeClr val="tx1">
+                                    <a:lumMod val="75000"/>
+                                    <a:lumOff val="25000"/>
+                                  </a:schemeClr>
+                                </a:solidFill>
+                                <a:latin typeface="Cambria Math" panose="02040503050406030204" pitchFamily="18" charset="0"/>
+                              </a:rPr>
+                              <m:t>𝐑</m:t>
+                            </m:r>
+                          </m:sub>
+                        </m:sSub>
+                        <m:r>
+                          <a:rPr lang="en-US" sz="2000" i="1">
+                            <a:solidFill>
+                              <a:schemeClr val="tx1">
+                                <a:lumMod val="75000"/>
+                                <a:lumOff val="25000"/>
+                              </a:schemeClr>
+                            </a:solidFill>
+                            <a:latin typeface="Cambria Math" panose="02040503050406030204" pitchFamily="18" charset="0"/>
+                          </a:rPr>
+                          <m:t>−</m:t>
+                        </m:r>
+                        <m:sSub>
+                          <m:sSubPr>
+                            <m:ctrlPr>
+                              <a:rPr lang="en-US" sz="2000" b="1" i="1" smtClean="0">
+                                <a:solidFill>
+                                  <a:schemeClr val="tx1">
+                                    <a:lumMod val="75000"/>
+                                    <a:lumOff val="25000"/>
+                                  </a:schemeClr>
+                                </a:solidFill>
+                                <a:latin typeface="Cambria Math" panose="02040503050406030204" pitchFamily="18" charset="0"/>
+                              </a:rPr>
+                            </m:ctrlPr>
+                          </m:sSubPr>
+                          <m:e>
+                            <m:r>
+                              <a:rPr lang="en-US" sz="2000" b="1">
+                                <a:solidFill>
+                                  <a:schemeClr val="tx1">
+                                    <a:lumMod val="75000"/>
+                                    <a:lumOff val="25000"/>
+                                  </a:schemeClr>
+                                </a:solidFill>
+                                <a:latin typeface="Cambria Math" panose="02040503050406030204" pitchFamily="18" charset="0"/>
+                              </a:rPr>
+                              <m:t>𝐒</m:t>
+                            </m:r>
+                          </m:e>
+                          <m:sub>
+                            <m:r>
+                              <a:rPr lang="pt-PT" sz="2000" b="1" i="0" smtClean="0">
+                                <a:solidFill>
+                                  <a:schemeClr val="tx1">
+                                    <a:lumMod val="75000"/>
+                                    <a:lumOff val="25000"/>
+                                  </a:schemeClr>
+                                </a:solidFill>
+                                <a:latin typeface="Cambria Math" panose="02040503050406030204" pitchFamily="18" charset="0"/>
+                              </a:rPr>
+                              <m:t>𝐅</m:t>
+                            </m:r>
+                          </m:sub>
+                        </m:sSub>
+                        <m:r>
+                          <a:rPr lang="en-US" sz="2000" i="1">
+                            <a:solidFill>
+                              <a:schemeClr val="tx1">
+                                <a:lumMod val="75000"/>
+                                <a:lumOff val="25000"/>
+                              </a:schemeClr>
+                            </a:solidFill>
+                            <a:latin typeface="Cambria Math" panose="02040503050406030204" pitchFamily="18" charset="0"/>
+                          </a:rPr>
+                          <m:t>)</m:t>
+                        </m:r>
+                        <m:sSup>
+                          <m:sSupPr>
+                            <m:ctrlPr>
+                              <a:rPr lang="en-US" sz="2000" i="1">
+                                <a:solidFill>
+                                  <a:schemeClr val="tx1">
+                                    <a:lumMod val="75000"/>
+                                    <a:lumOff val="25000"/>
+                                  </a:schemeClr>
+                                </a:solidFill>
+                                <a:latin typeface="Cambria Math" panose="02040503050406030204" pitchFamily="18" charset="0"/>
+                              </a:rPr>
+                            </m:ctrlPr>
+                          </m:sSupPr>
+                          <m:e>
+                            <m:sSub>
+                              <m:sSubPr>
+                                <m:ctrlPr>
+                                  <a:rPr lang="en-US" sz="2000" b="1" i="1">
+                                    <a:solidFill>
+                                      <a:schemeClr val="tx1">
+                                        <a:lumMod val="75000"/>
+                                        <a:lumOff val="25000"/>
+                                      </a:schemeClr>
+                                    </a:solidFill>
+                                    <a:latin typeface="Cambria Math" panose="02040503050406030204" pitchFamily="18" charset="0"/>
+                                  </a:rPr>
+                                </m:ctrlPr>
+                              </m:sSubPr>
+                              <m:e>
+                                <m:r>
+                                  <a:rPr lang="en-US" sz="2000" b="1">
+                                    <a:solidFill>
+                                      <a:schemeClr val="tx1">
+                                        <a:lumMod val="75000"/>
+                                        <a:lumOff val="25000"/>
+                                      </a:schemeClr>
+                                    </a:solidFill>
+                                    <a:latin typeface="Cambria Math" panose="02040503050406030204" pitchFamily="18" charset="0"/>
+                                  </a:rPr>
+                                  <m:t>𝐒</m:t>
+                                </m:r>
+                              </m:e>
+                              <m:sub>
+                                <m:r>
+                                  <a:rPr lang="pt-PT" sz="2000" b="1" i="1" smtClean="0">
+                                    <a:solidFill>
+                                      <a:schemeClr val="tx1">
+                                        <a:lumMod val="75000"/>
+                                        <a:lumOff val="25000"/>
+                                      </a:schemeClr>
+                                    </a:solidFill>
+                                    <a:latin typeface="Cambria Math" panose="02040503050406030204" pitchFamily="18" charset="0"/>
+                                  </a:rPr>
+                                  <m:t>𝐅</m:t>
+                                </m:r>
+                              </m:sub>
+                            </m:sSub>
+                          </m:e>
+                          <m:sup>
+                            <m:r>
+                              <a:rPr lang="en-US" sz="2000" i="1">
+                                <a:solidFill>
+                                  <a:schemeClr val="tx1">
+                                    <a:lumMod val="75000"/>
+                                    <a:lumOff val="25000"/>
+                                  </a:schemeClr>
+                                </a:solidFill>
+                                <a:latin typeface="Cambria Math" panose="02040503050406030204" pitchFamily="18" charset="0"/>
+                              </a:rPr>
+                              <m:t>−1</m:t>
+                            </m:r>
+                          </m:sup>
+                        </m:sSup>
+                      </m:e>
+                    </m:d>
+                  </m:oMath>
+                </a14:m>
+                <a:endParaRPr lang="en-US" sz="2000" dirty="0">
+                  <a:solidFill>
+                    <a:schemeClr val="tx1">
+                      <a:lumMod val="75000"/>
+                      <a:lumOff val="25000"/>
+                    </a:schemeClr>
+                  </a:solidFill>
+                  <a:latin typeface=""/>
+                </a:endParaRPr>
+              </a:p>
+              <a:p>
+                <a:pPr marL="285750" indent="-285750">
+                  <a:lnSpc>
+                    <a:spcPct val="150000"/>
+                  </a:lnSpc>
+                  <a:buFont typeface="Arial" panose="020B0604020202020204" pitchFamily="34" charset="0"/>
+                  <a:buChar char="•"/>
+                </a:pPr>
+                <a:endParaRPr lang="en-US" sz="2000" dirty="0">
+                  <a:solidFill>
+                    <a:schemeClr val="tx1">
+                      <a:lumMod val="75000"/>
+                      <a:lumOff val="25000"/>
+                    </a:schemeClr>
+                  </a:solidFill>
+                  <a:latin typeface=""/>
+                </a:endParaRPr>
+              </a:p>
+              <a:p>
+                <a:pPr marL="285750" indent="-285750">
+                  <a:lnSpc>
+                    <a:spcPct val="150000"/>
+                  </a:lnSpc>
+                  <a:buFont typeface="Arial" panose="020B0604020202020204" pitchFamily="34" charset="0"/>
+                  <a:buChar char="•"/>
+                </a:pPr>
+                <a:r>
+                  <a:rPr lang="en-US" sz="2000" dirty="0">
+                    <a:solidFill>
+                      <a:schemeClr val="tx1">
+                        <a:lumMod val="75000"/>
+                        <a:lumOff val="25000"/>
+                      </a:schemeClr>
+                    </a:solidFill>
+                    <a:latin typeface=""/>
+                  </a:rPr>
+                  <a:t>Converted as </a:t>
+                </a:r>
+                <a14:m>
+                  <m:oMath xmlns:m="http://schemas.openxmlformats.org/officeDocument/2006/math">
+                    <m:r>
+                      <a:rPr lang="en-US" sz="2000" b="0" i="1" smtClean="0">
+                        <a:solidFill>
+                          <a:schemeClr val="tx1">
+                            <a:lumMod val="75000"/>
+                            <a:lumOff val="25000"/>
+                          </a:schemeClr>
+                        </a:solidFill>
+                        <a:latin typeface="Cambria Math" panose="02040503050406030204" pitchFamily="18" charset="0"/>
+                      </a:rPr>
+                      <m:t>𝐹</m:t>
+                    </m:r>
+                    <m:r>
+                      <a:rPr lang="en-US" sz="2000" b="0" i="1" smtClean="0">
+                        <a:solidFill>
+                          <a:schemeClr val="tx1">
+                            <a:lumMod val="75000"/>
+                            <a:lumOff val="25000"/>
+                          </a:schemeClr>
+                        </a:solidFill>
+                        <a:latin typeface="Cambria Math" panose="02040503050406030204" pitchFamily="18" charset="0"/>
+                      </a:rPr>
+                      <m:t>=</m:t>
+                    </m:r>
+                    <m:d>
+                      <m:dPr>
+                        <m:ctrlPr>
+                          <a:rPr lang="en-US" sz="2000" b="0" i="1" smtClean="0">
+                            <a:solidFill>
+                              <a:schemeClr val="tx1">
+                                <a:lumMod val="75000"/>
+                                <a:lumOff val="25000"/>
+                              </a:schemeClr>
+                            </a:solidFill>
+                            <a:latin typeface="Cambria Math" panose="02040503050406030204" pitchFamily="18" charset="0"/>
+                          </a:rPr>
+                        </m:ctrlPr>
+                      </m:dPr>
+                      <m:e>
+                        <m:f>
+                          <m:fPr>
+                            <m:ctrlPr>
+                              <a:rPr lang="en-US" sz="2000" i="1">
+                                <a:solidFill>
+                                  <a:schemeClr val="tx1">
+                                    <a:lumMod val="75000"/>
+                                    <a:lumOff val="25000"/>
+                                  </a:schemeClr>
+                                </a:solidFill>
+                                <a:latin typeface="Cambria Math" panose="02040503050406030204" pitchFamily="18" charset="0"/>
+                              </a:rPr>
+                            </m:ctrlPr>
+                          </m:fPr>
+                          <m:num>
+                            <m:r>
+                              <a:rPr lang="en-US" sz="2000" i="1">
+                                <a:solidFill>
+                                  <a:schemeClr val="tx1">
+                                    <a:lumMod val="75000"/>
+                                    <a:lumOff val="25000"/>
+                                  </a:schemeClr>
+                                </a:solidFill>
+                                <a:latin typeface="Cambria Math" panose="02040503050406030204" pitchFamily="18" charset="0"/>
+                              </a:rPr>
+                              <m:t>1−</m:t>
+                            </m:r>
+                            <m:r>
+                              <a:rPr lang="el-GR" sz="2000" i="1">
+                                <a:solidFill>
+                                  <a:schemeClr val="tx1">
+                                    <a:lumMod val="75000"/>
+                                    <a:lumOff val="25000"/>
+                                  </a:schemeClr>
+                                </a:solidFill>
+                                <a:latin typeface="Cambria Math" panose="02040503050406030204" pitchFamily="18" charset="0"/>
+                              </a:rPr>
+                              <m:t>𝛬</m:t>
+                            </m:r>
+                          </m:num>
+                          <m:den>
+                            <m:r>
+                              <a:rPr lang="el-GR" sz="2000" i="1">
+                                <a:solidFill>
+                                  <a:schemeClr val="tx1">
+                                    <a:lumMod val="75000"/>
+                                    <a:lumOff val="25000"/>
+                                  </a:schemeClr>
+                                </a:solidFill>
+                                <a:latin typeface="Cambria Math" panose="02040503050406030204" pitchFamily="18" charset="0"/>
+                              </a:rPr>
+                              <m:t>𝛬</m:t>
+                            </m:r>
+                          </m:den>
+                        </m:f>
+                      </m:e>
+                    </m:d>
+                    <m:d>
+                      <m:dPr>
+                        <m:ctrlPr>
+                          <a:rPr lang="en-US" sz="2000" b="0" i="1" smtClean="0">
+                            <a:solidFill>
+                              <a:schemeClr val="tx1">
+                                <a:lumMod val="75000"/>
+                                <a:lumOff val="25000"/>
+                              </a:schemeClr>
+                            </a:solidFill>
+                            <a:latin typeface="Cambria Math" panose="02040503050406030204" pitchFamily="18" charset="0"/>
+                          </a:rPr>
+                        </m:ctrlPr>
+                      </m:dPr>
+                      <m:e>
+                        <m:f>
+                          <m:fPr>
+                            <m:ctrlPr>
+                              <a:rPr lang="en-US" sz="2000" i="1">
+                                <a:solidFill>
+                                  <a:schemeClr val="tx1">
+                                    <a:lumMod val="75000"/>
+                                    <a:lumOff val="25000"/>
+                                  </a:schemeClr>
+                                </a:solidFill>
+                                <a:latin typeface="Cambria Math" panose="02040503050406030204" pitchFamily="18" charset="0"/>
+                              </a:rPr>
+                            </m:ctrlPr>
+                          </m:fPr>
+                          <m:num>
+                            <m:r>
+                              <a:rPr lang="en-US" sz="2000" b="0" i="1" smtClean="0">
+                                <a:solidFill>
+                                  <a:schemeClr val="tx1">
+                                    <a:lumMod val="75000"/>
+                                    <a:lumOff val="25000"/>
+                                  </a:schemeClr>
+                                </a:solidFill>
+                                <a:latin typeface="Cambria Math" panose="02040503050406030204" pitchFamily="18" charset="0"/>
+                              </a:rPr>
+                              <m:t>𝑛</m:t>
+                            </m:r>
+                            <m:r>
+                              <a:rPr lang="en-US" sz="2000" b="0" i="1" smtClean="0">
+                                <a:solidFill>
+                                  <a:schemeClr val="tx1">
+                                    <a:lumMod val="75000"/>
+                                    <a:lumOff val="25000"/>
+                                  </a:schemeClr>
+                                </a:solidFill>
+                                <a:latin typeface="Cambria Math" panose="02040503050406030204" pitchFamily="18" charset="0"/>
+                              </a:rPr>
+                              <m:t>−</m:t>
+                            </m:r>
+                            <m:r>
+                              <a:rPr lang="en-US" sz="2000" b="0" i="1" smtClean="0">
+                                <a:solidFill>
+                                  <a:schemeClr val="tx1">
+                                    <a:lumMod val="75000"/>
+                                    <a:lumOff val="25000"/>
+                                  </a:schemeClr>
+                                </a:solidFill>
+                                <a:latin typeface="Cambria Math" panose="02040503050406030204" pitchFamily="18" charset="0"/>
+                              </a:rPr>
+                              <m:t>𝑠</m:t>
+                            </m:r>
+                            <m:r>
+                              <a:rPr lang="en-US" sz="2000" b="0" i="1" smtClean="0">
+                                <a:solidFill>
+                                  <a:schemeClr val="tx1">
+                                    <a:lumMod val="75000"/>
+                                    <a:lumOff val="25000"/>
+                                  </a:schemeClr>
+                                </a:solidFill>
+                                <a:latin typeface="Cambria Math" panose="02040503050406030204" pitchFamily="18" charset="0"/>
+                              </a:rPr>
+                              <m:t>−</m:t>
+                            </m:r>
+                            <m:r>
+                              <a:rPr lang="en-US" sz="2000" b="0" i="1" smtClean="0">
+                                <a:solidFill>
+                                  <a:schemeClr val="tx1">
+                                    <a:lumMod val="75000"/>
+                                    <a:lumOff val="25000"/>
+                                  </a:schemeClr>
+                                </a:solidFill>
+                                <a:latin typeface="Cambria Math" panose="02040503050406030204" pitchFamily="18" charset="0"/>
+                              </a:rPr>
+                              <m:t>𝑝</m:t>
+                            </m:r>
+                          </m:num>
+                          <m:den>
+                            <m:r>
+                              <a:rPr lang="en-US" sz="2000" b="0" i="1" smtClean="0">
+                                <a:solidFill>
+                                  <a:schemeClr val="tx1">
+                                    <a:lumMod val="75000"/>
+                                    <a:lumOff val="25000"/>
+                                  </a:schemeClr>
+                                </a:solidFill>
+                                <a:latin typeface="Cambria Math" panose="02040503050406030204" pitchFamily="18" charset="0"/>
+                              </a:rPr>
+                              <m:t>𝑝</m:t>
+                            </m:r>
+                          </m:den>
+                        </m:f>
+                      </m:e>
+                    </m:d>
+                  </m:oMath>
+                </a14:m>
+                <a:endParaRPr lang="en-US" sz="2000" i="1" dirty="0">
+                  <a:solidFill>
+                    <a:schemeClr val="tx1">
+                      <a:lumMod val="75000"/>
+                      <a:lumOff val="25000"/>
+                    </a:schemeClr>
+                  </a:solidFill>
+                  <a:latin typeface=""/>
+                </a:endParaRPr>
+              </a:p>
+            </p:txBody>
+          </p:sp>
+        </mc:Choice>
+        <mc:Fallback xmlns="">
+          <p:sp>
+            <p:nvSpPr>
+              <p:cNvPr id="13" name="TextBox 12"/>
+              <p:cNvSpPr txBox="1">
+                <a:spLocks noRot="1" noChangeAspect="1" noMove="1" noResize="1" noEditPoints="1" noAdjustHandles="1" noChangeArrowheads="1" noChangeShapeType="1" noTextEdit="1"/>
+              </p:cNvSpPr>
+              <p:nvPr/>
+            </p:nvSpPr>
+            <p:spPr>
+              <a:xfrm>
+                <a:off x="370574" y="2334124"/>
+                <a:ext cx="4800600" cy="3280963"/>
+              </a:xfrm>
+              <a:prstGeom prst="rect">
+                <a:avLst/>
+              </a:prstGeom>
+              <a:blipFill>
+                <a:blip r:embed="rId2"/>
+                <a:stretch>
+                  <a:fillRect l="-1319"/>
+                </a:stretch>
+              </a:blipFill>
+            </p:spPr>
+            <p:txBody>
+              <a:bodyPr/>
+              <a:lstStyle/>
+              <a:p>
+                <a:r>
+                  <a:rPr lang="es-ES_tradnl">
+                    <a:noFill/>
+                  </a:rPr>
+                  <a:t> </a:t>
+                </a:r>
+              </a:p>
+            </p:txBody>
+          </p:sp>
+        </mc:Fallback>
+      </mc:AlternateContent>
+      <p:sp>
+        <p:nvSpPr>
+          <p:cNvPr id="2" name="TextBox 1">
+            <a:extLst>
+              <a:ext uri="{FF2B5EF4-FFF2-40B4-BE49-F238E27FC236}">
+                <a16:creationId xmlns:a16="http://schemas.microsoft.com/office/drawing/2014/main" id="{E0C60D1C-159E-8E76-62E6-920C8DD11414}"/>
+              </a:ext>
+            </a:extLst>
+          </p:cNvPr>
+          <p:cNvSpPr txBox="1"/>
+          <p:nvPr/>
+        </p:nvSpPr>
+        <p:spPr>
+          <a:xfrm>
+            <a:off x="1371600" y="5482241"/>
+            <a:ext cx="3299301" cy="307777"/>
+          </a:xfrm>
+          <a:prstGeom prst="rect">
+            <a:avLst/>
+          </a:prstGeom>
+          <a:noFill/>
+        </p:spPr>
+        <p:txBody>
+          <a:bodyPr wrap="none" rtlCol="0">
+            <a:spAutoFit/>
+          </a:bodyPr>
+          <a:lstStyle/>
+          <a:p>
+            <a:r>
+              <a:rPr lang="en-US" sz="1400" dirty="0">
+                <a:solidFill>
+                  <a:schemeClr val="tx1">
+                    <a:lumMod val="75000"/>
+                    <a:lumOff val="25000"/>
+                  </a:schemeClr>
+                </a:solidFill>
+                <a:latin typeface=""/>
+              </a:rPr>
+              <a:t>n: total sample size, s: </a:t>
+            </a:r>
+            <a:r>
+              <a:rPr lang="en-US" sz="1400" dirty="0" err="1">
+                <a:solidFill>
+                  <a:schemeClr val="tx1">
+                    <a:lumMod val="75000"/>
+                    <a:lumOff val="25000"/>
+                  </a:schemeClr>
+                </a:solidFill>
+                <a:latin typeface=""/>
+              </a:rPr>
+              <a:t>ncol</a:t>
+            </a:r>
+            <a:r>
+              <a:rPr lang="en-US" sz="1400" dirty="0">
+                <a:solidFill>
+                  <a:schemeClr val="tx1">
+                    <a:lumMod val="75000"/>
+                    <a:lumOff val="25000"/>
+                  </a:schemeClr>
+                </a:solidFill>
+                <a:latin typeface=""/>
+              </a:rPr>
+              <a:t>(</a:t>
+            </a:r>
+            <a:r>
+              <a:rPr lang="en-US" sz="1400" dirty="0" err="1">
+                <a:solidFill>
+                  <a:schemeClr val="tx1">
+                    <a:lumMod val="75000"/>
+                    <a:lumOff val="25000"/>
+                  </a:schemeClr>
+                </a:solidFill>
+                <a:latin typeface=""/>
+              </a:rPr>
+              <a:t>Xr</a:t>
+            </a:r>
+            <a:r>
+              <a:rPr lang="en-US" sz="1400" dirty="0">
+                <a:solidFill>
+                  <a:schemeClr val="tx1">
+                    <a:lumMod val="75000"/>
+                    <a:lumOff val="25000"/>
+                  </a:schemeClr>
+                </a:solidFill>
+                <a:latin typeface=""/>
+              </a:rPr>
+              <a:t>), </a:t>
+            </a:r>
+            <a:r>
+              <a:rPr lang="en-US" sz="1400" dirty="0" err="1">
+                <a:solidFill>
+                  <a:schemeClr val="tx1">
+                    <a:lumMod val="75000"/>
+                    <a:lumOff val="25000"/>
+                  </a:schemeClr>
+                </a:solidFill>
+                <a:latin typeface=""/>
+              </a:rPr>
+              <a:t>ncol</a:t>
+            </a:r>
+            <a:r>
+              <a:rPr lang="en-US" sz="1400" dirty="0">
+                <a:solidFill>
+                  <a:schemeClr val="tx1">
+                    <a:lumMod val="75000"/>
+                    <a:lumOff val="25000"/>
+                  </a:schemeClr>
+                </a:solidFill>
+                <a:latin typeface=""/>
+              </a:rPr>
+              <a:t>(Y)</a:t>
+            </a:r>
+          </a:p>
+        </p:txBody>
+      </p:sp>
+      <p:sp>
+        <p:nvSpPr>
+          <p:cNvPr id="14" name="TextBox 13">
+            <a:extLst>
+              <a:ext uri="{FF2B5EF4-FFF2-40B4-BE49-F238E27FC236}">
+                <a16:creationId xmlns:a16="http://schemas.microsoft.com/office/drawing/2014/main" id="{AF48C682-111D-6AF8-973E-0C7AC25E367C}"/>
+              </a:ext>
+            </a:extLst>
+          </p:cNvPr>
+          <p:cNvSpPr txBox="1"/>
+          <p:nvPr/>
+        </p:nvSpPr>
+        <p:spPr>
+          <a:xfrm>
+            <a:off x="4815068" y="2941677"/>
+            <a:ext cx="2971800" cy="1015663"/>
+          </a:xfrm>
+          <a:prstGeom prst="rect">
+            <a:avLst/>
+          </a:prstGeom>
+          <a:noFill/>
+        </p:spPr>
+        <p:txBody>
+          <a:bodyPr wrap="square" rtlCol="0">
+            <a:spAutoFit/>
+          </a:bodyPr>
+          <a:lstStyle/>
+          <a:p>
+            <a:pPr algn="ctr"/>
+            <a:r>
+              <a:rPr lang="en-US" sz="2000" dirty="0">
+                <a:solidFill>
+                  <a:schemeClr val="tx1">
+                    <a:lumMod val="75000"/>
+                    <a:lumOff val="25000"/>
+                  </a:schemeClr>
+                </a:solidFill>
+                <a:latin typeface=""/>
+              </a:rPr>
+              <a:t>“Traditional” test statistics</a:t>
+            </a:r>
+          </a:p>
+          <a:p>
+            <a:pPr algn="ctr"/>
+            <a:r>
+              <a:rPr lang="en-US" sz="2000" b="1" dirty="0">
+                <a:solidFill>
+                  <a:schemeClr val="tx1">
+                    <a:lumMod val="75000"/>
+                    <a:lumOff val="25000"/>
+                  </a:schemeClr>
+                </a:solidFill>
+                <a:latin typeface=""/>
+              </a:rPr>
+              <a:t>Require </a:t>
+            </a:r>
+            <a:r>
+              <a:rPr lang="en-US" sz="2000" b="1" i="1" dirty="0">
+                <a:solidFill>
+                  <a:schemeClr val="tx1">
+                    <a:lumMod val="75000"/>
+                    <a:lumOff val="25000"/>
+                  </a:schemeClr>
+                </a:solidFill>
+                <a:latin typeface=""/>
+              </a:rPr>
+              <a:t>n</a:t>
+            </a:r>
+            <a:r>
+              <a:rPr lang="en-US" sz="2000" b="1" dirty="0">
+                <a:solidFill>
+                  <a:schemeClr val="tx1">
+                    <a:lumMod val="75000"/>
+                    <a:lumOff val="25000"/>
+                  </a:schemeClr>
+                </a:solidFill>
+                <a:latin typeface=""/>
+              </a:rPr>
+              <a:t> &gt;&gt; </a:t>
+            </a:r>
+            <a:r>
+              <a:rPr lang="en-US" sz="2000" b="1" i="1" dirty="0">
+                <a:solidFill>
+                  <a:schemeClr val="tx1">
+                    <a:lumMod val="75000"/>
+                    <a:lumOff val="25000"/>
+                  </a:schemeClr>
+                </a:solidFill>
+                <a:latin typeface=""/>
+              </a:rPr>
+              <a:t>p</a:t>
+            </a:r>
+            <a:endParaRPr lang="en-US" sz="2000" b="1" dirty="0">
+              <a:solidFill>
+                <a:schemeClr val="tx1">
+                  <a:lumMod val="75000"/>
+                  <a:lumOff val="25000"/>
+                </a:schemeClr>
+              </a:solidFill>
+              <a:latin typeface=""/>
+            </a:endParaRPr>
+          </a:p>
+        </p:txBody>
+      </p:sp>
+      <p:pic>
+        <p:nvPicPr>
+          <p:cNvPr id="19" name="Picture 18">
+            <a:extLst>
+              <a:ext uri="{FF2B5EF4-FFF2-40B4-BE49-F238E27FC236}">
+                <a16:creationId xmlns:a16="http://schemas.microsoft.com/office/drawing/2014/main" id="{2A0C2BD8-6CA9-2108-2D32-6E1F5AA90DA6}"/>
+              </a:ext>
+            </a:extLst>
+          </p:cNvPr>
+          <p:cNvPicPr>
+            <a:picLocks noChangeAspect="1"/>
+          </p:cNvPicPr>
+          <p:nvPr/>
+        </p:nvPicPr>
+        <p:blipFill>
+          <a:blip r:embed="rId3"/>
+          <a:stretch>
+            <a:fillRect/>
+          </a:stretch>
+        </p:blipFill>
+        <p:spPr>
+          <a:xfrm>
+            <a:off x="7810982" y="2910216"/>
+            <a:ext cx="766355" cy="766355"/>
+          </a:xfrm>
+          <a:prstGeom prst="rect">
+            <a:avLst/>
+          </a:prstGeom>
+        </p:spPr>
+      </p:pic>
+      <p:sp>
+        <p:nvSpPr>
+          <p:cNvPr id="20" name="TextBox 19">
+            <a:extLst>
+              <a:ext uri="{FF2B5EF4-FFF2-40B4-BE49-F238E27FC236}">
+                <a16:creationId xmlns:a16="http://schemas.microsoft.com/office/drawing/2014/main" id="{04C7B755-E85A-C42D-BE19-E1A81808E3E8}"/>
+              </a:ext>
+            </a:extLst>
+          </p:cNvPr>
+          <p:cNvSpPr txBox="1"/>
+          <p:nvPr/>
+        </p:nvSpPr>
+        <p:spPr>
+          <a:xfrm>
+            <a:off x="5105975" y="4203249"/>
+            <a:ext cx="3809425" cy="1015663"/>
+          </a:xfrm>
+          <a:prstGeom prst="rect">
+            <a:avLst/>
+          </a:prstGeom>
+          <a:solidFill>
+            <a:schemeClr val="accent1">
+              <a:lumMod val="20000"/>
+              <a:lumOff val="80000"/>
+            </a:schemeClr>
+          </a:solidFill>
+          <a:ln>
+            <a:noFill/>
+          </a:ln>
+          <a:effectLst>
+            <a:outerShdw blurRad="50800" dist="76200" dir="18900000" algn="bl" rotWithShape="0">
+              <a:prstClr val="black">
+                <a:alpha val="40000"/>
+              </a:prstClr>
+            </a:outerShdw>
+          </a:effectLst>
+        </p:spPr>
+        <p:style>
+          <a:lnRef idx="1">
+            <a:schemeClr val="dk1"/>
+          </a:lnRef>
+          <a:fillRef idx="2">
+            <a:schemeClr val="dk1"/>
+          </a:fillRef>
+          <a:effectRef idx="1">
+            <a:schemeClr val="dk1"/>
+          </a:effectRef>
+          <a:fontRef idx="minor">
+            <a:schemeClr val="dk1"/>
+          </a:fontRef>
+        </p:style>
+        <p:txBody>
+          <a:bodyPr wrap="square" rtlCol="0">
+            <a:spAutoFit/>
+          </a:bodyPr>
+          <a:lstStyle/>
+          <a:p>
+            <a:pPr algn="ctr"/>
+            <a:r>
+              <a:rPr lang="en-US" sz="2000" dirty="0">
+                <a:solidFill>
+                  <a:schemeClr val="tx1">
+                    <a:lumMod val="75000"/>
+                    <a:lumOff val="25000"/>
+                  </a:schemeClr>
+                </a:solidFill>
+                <a:latin typeface=""/>
+              </a:rPr>
+              <a:t>Use randomization procedures, which are more powerful for </a:t>
+            </a:r>
+            <a:r>
+              <a:rPr lang="en-US" sz="2000">
+                <a:solidFill>
+                  <a:schemeClr val="tx1">
+                    <a:lumMod val="75000"/>
+                    <a:lumOff val="25000"/>
+                  </a:schemeClr>
+                </a:solidFill>
+                <a:latin typeface=""/>
+              </a:rPr>
+              <a:t>high-dimensional data</a:t>
+            </a:r>
+            <a:r>
+              <a:rPr lang="en-US" sz="1600">
+                <a:solidFill>
+                  <a:schemeClr val="tx1">
+                    <a:lumMod val="75000"/>
+                    <a:lumOff val="25000"/>
+                  </a:schemeClr>
+                </a:solidFill>
+                <a:latin typeface=""/>
+              </a:rPr>
+              <a:t> </a:t>
+            </a:r>
+            <a:endParaRPr lang="en-US" sz="1600" dirty="0">
+              <a:solidFill>
+                <a:schemeClr val="tx1">
+                  <a:lumMod val="75000"/>
+                  <a:lumOff val="25000"/>
+                </a:schemeClr>
+              </a:solidFill>
+              <a:latin typeface=""/>
+            </a:endParaRPr>
+          </a:p>
+        </p:txBody>
+      </p:sp>
+      <p:sp>
+        <p:nvSpPr>
+          <p:cNvPr id="5" name="Rectangle 4">
+            <a:extLst>
+              <a:ext uri="{FF2B5EF4-FFF2-40B4-BE49-F238E27FC236}">
+                <a16:creationId xmlns:a16="http://schemas.microsoft.com/office/drawing/2014/main" id="{F5C8E609-3B6B-3CD6-3B87-5BAF11D5D914}"/>
+              </a:ext>
+            </a:extLst>
+          </p:cNvPr>
+          <p:cNvSpPr/>
+          <p:nvPr/>
+        </p:nvSpPr>
+        <p:spPr>
+          <a:xfrm>
+            <a:off x="4572000" y="6334780"/>
+            <a:ext cx="4572000" cy="523220"/>
+          </a:xfrm>
+          <a:prstGeom prst="rect">
+            <a:avLst/>
+          </a:prstGeom>
+        </p:spPr>
+        <p:txBody>
+          <a:bodyPr>
+            <a:spAutoFit/>
+          </a:bodyPr>
+          <a:lstStyle/>
+          <a:p>
+            <a:pPr algn="r"/>
+            <a:r>
+              <a:rPr lang="en-US" sz="1400" dirty="0">
+                <a:solidFill>
+                  <a:schemeClr val="tx1">
+                    <a:lumMod val="75000"/>
+                    <a:lumOff val="25000"/>
+                  </a:schemeClr>
+                </a:solidFill>
+                <a:latin typeface=""/>
+              </a:rPr>
+              <a:t>Anderson MJ, </a:t>
+            </a:r>
+            <a:r>
+              <a:rPr lang="en-US" sz="1400" dirty="0" err="1">
+                <a:solidFill>
+                  <a:schemeClr val="tx1">
+                    <a:lumMod val="75000"/>
+                    <a:lumOff val="25000"/>
+                  </a:schemeClr>
+                </a:solidFill>
+                <a:latin typeface=""/>
+              </a:rPr>
+              <a:t>Ter</a:t>
+            </a:r>
+            <a:r>
+              <a:rPr lang="en-US" sz="1400" dirty="0">
+                <a:solidFill>
+                  <a:schemeClr val="tx1">
+                    <a:lumMod val="75000"/>
+                    <a:lumOff val="25000"/>
+                  </a:schemeClr>
+                </a:solidFill>
+                <a:latin typeface=""/>
+              </a:rPr>
+              <a:t> </a:t>
+            </a:r>
+            <a:r>
+              <a:rPr lang="en-US" sz="1400" dirty="0" err="1">
+                <a:solidFill>
+                  <a:schemeClr val="tx1">
+                    <a:lumMod val="75000"/>
+                    <a:lumOff val="25000"/>
+                  </a:schemeClr>
+                </a:solidFill>
+                <a:latin typeface=""/>
+              </a:rPr>
+              <a:t>Braak</a:t>
+            </a:r>
+            <a:r>
+              <a:rPr lang="en-US" sz="1400" dirty="0">
+                <a:solidFill>
+                  <a:schemeClr val="tx1">
+                    <a:lumMod val="75000"/>
+                    <a:lumOff val="25000"/>
+                  </a:schemeClr>
+                </a:solidFill>
+                <a:latin typeface=""/>
+              </a:rPr>
+              <a:t> CJF (2003). </a:t>
+            </a:r>
+            <a:r>
+              <a:rPr lang="en-US" sz="1400" i="1" dirty="0">
+                <a:solidFill>
+                  <a:schemeClr val="tx1">
+                    <a:lumMod val="75000"/>
+                    <a:lumOff val="25000"/>
+                  </a:schemeClr>
+                </a:solidFill>
+                <a:latin typeface=""/>
+              </a:rPr>
+              <a:t>Journal of Statistical Computation and Simulation</a:t>
+            </a:r>
+            <a:r>
+              <a:rPr lang="en-US" sz="1400" dirty="0">
+                <a:solidFill>
+                  <a:schemeClr val="tx1">
+                    <a:lumMod val="75000"/>
+                    <a:lumOff val="25000"/>
+                  </a:schemeClr>
+                </a:solidFill>
+                <a:latin typeface=""/>
+              </a:rPr>
+              <a:t> 73</a:t>
+            </a:r>
+            <a:r>
+              <a:rPr lang="en-US" sz="1400" b="1" dirty="0">
+                <a:solidFill>
+                  <a:schemeClr val="tx1">
+                    <a:lumMod val="75000"/>
+                    <a:lumOff val="25000"/>
+                  </a:schemeClr>
+                </a:solidFill>
+                <a:latin typeface=""/>
+              </a:rPr>
+              <a:t>:</a:t>
+            </a:r>
+            <a:r>
+              <a:rPr lang="en-US" sz="1400" dirty="0">
+                <a:solidFill>
+                  <a:schemeClr val="tx1">
+                    <a:lumMod val="75000"/>
+                    <a:lumOff val="25000"/>
+                  </a:schemeClr>
+                </a:solidFill>
+                <a:latin typeface=""/>
+              </a:rPr>
+              <a:t> 85-113</a:t>
+            </a:r>
+            <a:endParaRPr lang="en-US" sz="1400" dirty="0">
+              <a:latin typeface=""/>
+            </a:endParaRPr>
+          </a:p>
+        </p:txBody>
+      </p:sp>
+      <p:sp>
+        <p:nvSpPr>
+          <p:cNvPr id="6" name="Right Brace 5">
+            <a:extLst>
+              <a:ext uri="{FF2B5EF4-FFF2-40B4-BE49-F238E27FC236}">
+                <a16:creationId xmlns:a16="http://schemas.microsoft.com/office/drawing/2014/main" id="{17C58962-0DE0-017E-433C-15E64773288B}"/>
+              </a:ext>
+            </a:extLst>
+          </p:cNvPr>
+          <p:cNvSpPr/>
+          <p:nvPr/>
+        </p:nvSpPr>
+        <p:spPr>
+          <a:xfrm>
+            <a:off x="4495800" y="2562724"/>
+            <a:ext cx="319268" cy="2919517"/>
+          </a:xfrm>
+          <a:prstGeom prst="rightBrace">
+            <a:avLst>
+              <a:gd name="adj1" fmla="val 8333"/>
+              <a:gd name="adj2" fmla="val 23834"/>
+            </a:avLst>
+          </a:prstGeom>
+          <a:ln w="19050"/>
+        </p:spPr>
+        <p:style>
+          <a:lnRef idx="1">
+            <a:schemeClr val="accent1"/>
+          </a:lnRef>
+          <a:fillRef idx="0">
+            <a:schemeClr val="accent1"/>
+          </a:fillRef>
+          <a:effectRef idx="0">
+            <a:schemeClr val="accent1"/>
+          </a:effectRef>
+          <a:fontRef idx="minor">
+            <a:schemeClr val="tx1"/>
+          </a:fontRef>
+        </p:style>
+        <p:txBody>
+          <a:bodyPr rtlCol="0" anchor="ctr"/>
+          <a:lstStyle/>
+          <a:p>
+            <a:pPr algn="ctr"/>
+            <a:endParaRPr lang="en-US">
+              <a:latin typeface=""/>
+            </a:endParaRPr>
+          </a:p>
+        </p:txBody>
+      </p:sp>
+    </p:spTree>
+    <p:extLst>
+      <p:ext uri="{BB962C8B-B14F-4D97-AF65-F5344CB8AC3E}">
+        <p14:creationId xmlns:p14="http://schemas.microsoft.com/office/powerpoint/2010/main" val="4060840929"/>
       </p:ext>
     </p:extLst>
   </p:cSld>

--- a/GMcourse/Lectures/LectureData/04.groupdifferences/stats/stat slides.pptx
+++ b/GMcourse/Lectures/LectureData/04.groupdifferences/stats/stat slides.pptx
@@ -251,7 +251,7 @@
           <a:p>
             <a:fld id="{DF1FEC42-DE82-D548-887A-A0A1819A413F}" type="datetimeFigureOut">
               <a:rPr lang="es-ES_tradnl" smtClean="0"/>
-              <a:t>20/5/26</a:t>
+              <a:t>1/6/26</a:t>
             </a:fld>
             <a:endParaRPr lang="es-ES_tradnl"/>
           </a:p>
@@ -421,7 +421,7 @@
           <a:p>
             <a:fld id="{DF1FEC42-DE82-D548-887A-A0A1819A413F}" type="datetimeFigureOut">
               <a:rPr lang="es-ES_tradnl" smtClean="0"/>
-              <a:t>20/5/26</a:t>
+              <a:t>1/6/26</a:t>
             </a:fld>
             <a:endParaRPr lang="es-ES_tradnl"/>
           </a:p>
@@ -601,7 +601,7 @@
           <a:p>
             <a:fld id="{DF1FEC42-DE82-D548-887A-A0A1819A413F}" type="datetimeFigureOut">
               <a:rPr lang="es-ES_tradnl" smtClean="0"/>
-              <a:t>20/5/26</a:t>
+              <a:t>1/6/26</a:t>
             </a:fld>
             <a:endParaRPr lang="es-ES_tradnl"/>
           </a:p>
@@ -771,7 +771,7 @@
           <a:p>
             <a:fld id="{DF1FEC42-DE82-D548-887A-A0A1819A413F}" type="datetimeFigureOut">
               <a:rPr lang="es-ES_tradnl" smtClean="0"/>
-              <a:t>20/5/26</a:t>
+              <a:t>1/6/26</a:t>
             </a:fld>
             <a:endParaRPr lang="es-ES_tradnl"/>
           </a:p>
@@ -1017,7 +1017,7 @@
           <a:p>
             <a:fld id="{DF1FEC42-DE82-D548-887A-A0A1819A413F}" type="datetimeFigureOut">
               <a:rPr lang="es-ES_tradnl" smtClean="0"/>
-              <a:t>20/5/26</a:t>
+              <a:t>1/6/26</a:t>
             </a:fld>
             <a:endParaRPr lang="es-ES_tradnl"/>
           </a:p>
@@ -1249,7 +1249,7 @@
           <a:p>
             <a:fld id="{DF1FEC42-DE82-D548-887A-A0A1819A413F}" type="datetimeFigureOut">
               <a:rPr lang="es-ES_tradnl" smtClean="0"/>
-              <a:t>20/5/26</a:t>
+              <a:t>1/6/26</a:t>
             </a:fld>
             <a:endParaRPr lang="es-ES_tradnl"/>
           </a:p>
@@ -1616,7 +1616,7 @@
           <a:p>
             <a:fld id="{DF1FEC42-DE82-D548-887A-A0A1819A413F}" type="datetimeFigureOut">
               <a:rPr lang="es-ES_tradnl" smtClean="0"/>
-              <a:t>20/5/26</a:t>
+              <a:t>1/6/26</a:t>
             </a:fld>
             <a:endParaRPr lang="es-ES_tradnl"/>
           </a:p>
@@ -1734,7 +1734,7 @@
           <a:p>
             <a:fld id="{DF1FEC42-DE82-D548-887A-A0A1819A413F}" type="datetimeFigureOut">
               <a:rPr lang="es-ES_tradnl" smtClean="0"/>
-              <a:t>20/5/26</a:t>
+              <a:t>1/6/26</a:t>
             </a:fld>
             <a:endParaRPr lang="es-ES_tradnl"/>
           </a:p>
@@ -1829,7 +1829,7 @@
           <a:p>
             <a:fld id="{DF1FEC42-DE82-D548-887A-A0A1819A413F}" type="datetimeFigureOut">
               <a:rPr lang="es-ES_tradnl" smtClean="0"/>
-              <a:t>20/5/26</a:t>
+              <a:t>1/6/26</a:t>
             </a:fld>
             <a:endParaRPr lang="es-ES_tradnl"/>
           </a:p>
@@ -2106,7 +2106,7 @@
           <a:p>
             <a:fld id="{DF1FEC42-DE82-D548-887A-A0A1819A413F}" type="datetimeFigureOut">
               <a:rPr lang="es-ES_tradnl" smtClean="0"/>
-              <a:t>20/5/26</a:t>
+              <a:t>1/6/26</a:t>
             </a:fld>
             <a:endParaRPr lang="es-ES_tradnl"/>
           </a:p>
@@ -2363,7 +2363,7 @@
           <a:p>
             <a:fld id="{DF1FEC42-DE82-D548-887A-A0A1819A413F}" type="datetimeFigureOut">
               <a:rPr lang="es-ES_tradnl" smtClean="0"/>
-              <a:t>20/5/26</a:t>
+              <a:t>1/6/26</a:t>
             </a:fld>
             <a:endParaRPr lang="es-ES_tradnl"/>
           </a:p>
@@ -2576,7 +2576,7 @@
           <a:p>
             <a:fld id="{DF1FEC42-DE82-D548-887A-A0A1819A413F}" type="datetimeFigureOut">
               <a:rPr lang="es-ES_tradnl" smtClean="0"/>
-              <a:t>20/5/26</a:t>
+              <a:t>1/6/26</a:t>
             </a:fld>
             <a:endParaRPr lang="es-ES_tradnl"/>
           </a:p>
@@ -2981,6 +2981,3247 @@
           <a:chExt cx="0" cy="0"/>
         </a:xfrm>
       </p:grpSpPr>
+      <p:grpSp>
+        <p:nvGrpSpPr>
+          <p:cNvPr id="2" name="Group 1">
+            <a:extLst>
+              <a:ext uri="{FF2B5EF4-FFF2-40B4-BE49-F238E27FC236}">
+                <a16:creationId xmlns:a16="http://schemas.microsoft.com/office/drawing/2014/main" id="{2EE4CDF5-C366-4DF2-CAE4-10D5989F0298}"/>
+              </a:ext>
+            </a:extLst>
+          </p:cNvPr>
+          <p:cNvGrpSpPr/>
+          <p:nvPr/>
+        </p:nvGrpSpPr>
+        <p:grpSpPr>
+          <a:xfrm>
+            <a:off x="832895" y="799617"/>
+            <a:ext cx="3525255" cy="2510544"/>
+            <a:chOff x="5353163" y="937163"/>
+            <a:chExt cx="3525255" cy="2510544"/>
+          </a:xfrm>
+        </p:grpSpPr>
+        <p:sp>
+          <p:nvSpPr>
+            <p:cNvPr id="3" name="Rectangle 2">
+              <a:extLst>
+                <a:ext uri="{FF2B5EF4-FFF2-40B4-BE49-F238E27FC236}">
+                  <a16:creationId xmlns:a16="http://schemas.microsoft.com/office/drawing/2014/main" id="{B25B015B-9CE3-84DC-4BAA-20AFC7F77426}"/>
+                </a:ext>
+              </a:extLst>
+            </p:cNvPr>
+            <p:cNvSpPr/>
+            <p:nvPr/>
+          </p:nvSpPr>
+          <p:spPr>
+            <a:xfrm>
+              <a:off x="5353163" y="937163"/>
+              <a:ext cx="3525255" cy="2510544"/>
+            </a:xfrm>
+            <a:prstGeom prst="rect">
+              <a:avLst/>
+            </a:prstGeom>
+            <a:noFill/>
+          </p:spPr>
+          <p:style>
+            <a:lnRef idx="1">
+              <a:schemeClr val="accent1"/>
+            </a:lnRef>
+            <a:fillRef idx="3">
+              <a:schemeClr val="accent1"/>
+            </a:fillRef>
+            <a:effectRef idx="2">
+              <a:schemeClr val="accent1"/>
+            </a:effectRef>
+            <a:fontRef idx="minor">
+              <a:schemeClr val="lt1"/>
+            </a:fontRef>
+          </p:style>
+          <p:txBody>
+            <a:bodyPr rtlCol="0" anchor="ctr"/>
+            <a:lstStyle/>
+            <a:p>
+              <a:pPr algn="ctr"/>
+              <a:endParaRPr lang="en-US"/>
+            </a:p>
+          </p:txBody>
+        </p:sp>
+        <p:sp>
+          <p:nvSpPr>
+            <p:cNvPr id="4" name="Oval 3">
+              <a:extLst>
+                <a:ext uri="{FF2B5EF4-FFF2-40B4-BE49-F238E27FC236}">
+                  <a16:creationId xmlns:a16="http://schemas.microsoft.com/office/drawing/2014/main" id="{C17CD00B-3F2D-1BCF-02D8-F25BE4A8C963}"/>
+                </a:ext>
+              </a:extLst>
+            </p:cNvPr>
+            <p:cNvSpPr/>
+            <p:nvPr/>
+          </p:nvSpPr>
+          <p:spPr>
+            <a:xfrm>
+              <a:off x="6765658" y="1880839"/>
+              <a:ext cx="112761" cy="112767"/>
+            </a:xfrm>
+            <a:prstGeom prst="ellipse">
+              <a:avLst/>
+            </a:prstGeom>
+          </p:spPr>
+          <p:style>
+            <a:lnRef idx="1">
+              <a:schemeClr val="accent1"/>
+            </a:lnRef>
+            <a:fillRef idx="3">
+              <a:schemeClr val="accent1"/>
+            </a:fillRef>
+            <a:effectRef idx="2">
+              <a:schemeClr val="accent1"/>
+            </a:effectRef>
+            <a:fontRef idx="minor">
+              <a:schemeClr val="lt1"/>
+            </a:fontRef>
+          </p:style>
+          <p:txBody>
+            <a:bodyPr rtlCol="0" anchor="ctr"/>
+            <a:lstStyle/>
+            <a:p>
+              <a:pPr algn="ctr"/>
+              <a:endParaRPr lang="en-US"/>
+            </a:p>
+          </p:txBody>
+        </p:sp>
+        <p:cxnSp>
+          <p:nvCxnSpPr>
+            <p:cNvPr id="5" name="Straight Connector 4">
+              <a:extLst>
+                <a:ext uri="{FF2B5EF4-FFF2-40B4-BE49-F238E27FC236}">
+                  <a16:creationId xmlns:a16="http://schemas.microsoft.com/office/drawing/2014/main" id="{630C9263-035B-0286-BF3A-2071615C5A64}"/>
+                </a:ext>
+              </a:extLst>
+            </p:cNvPr>
+            <p:cNvCxnSpPr>
+              <a:stCxn id="3" idx="0"/>
+              <a:endCxn id="3" idx="2"/>
+            </p:cNvCxnSpPr>
+            <p:nvPr/>
+          </p:nvCxnSpPr>
+          <p:spPr>
+            <a:xfrm>
+              <a:off x="7115791" y="937163"/>
+              <a:ext cx="0" cy="2510544"/>
+            </a:xfrm>
+            <a:prstGeom prst="line">
+              <a:avLst/>
+            </a:prstGeom>
+            <a:ln>
+              <a:prstDash val="dot"/>
+            </a:ln>
+          </p:spPr>
+          <p:style>
+            <a:lnRef idx="2">
+              <a:schemeClr val="accent1"/>
+            </a:lnRef>
+            <a:fillRef idx="0">
+              <a:schemeClr val="accent1"/>
+            </a:fillRef>
+            <a:effectRef idx="1">
+              <a:schemeClr val="accent1"/>
+            </a:effectRef>
+            <a:fontRef idx="minor">
+              <a:schemeClr val="tx1"/>
+            </a:fontRef>
+          </p:style>
+        </p:cxnSp>
+        <p:cxnSp>
+          <p:nvCxnSpPr>
+            <p:cNvPr id="6" name="Straight Connector 5">
+              <a:extLst>
+                <a:ext uri="{FF2B5EF4-FFF2-40B4-BE49-F238E27FC236}">
+                  <a16:creationId xmlns:a16="http://schemas.microsoft.com/office/drawing/2014/main" id="{B18125FB-163E-73D5-BD96-3A94E71A21C2}"/>
+                </a:ext>
+              </a:extLst>
+            </p:cNvPr>
+            <p:cNvCxnSpPr>
+              <a:stCxn id="3" idx="1"/>
+              <a:endCxn id="3" idx="3"/>
+            </p:cNvCxnSpPr>
+            <p:nvPr/>
+          </p:nvCxnSpPr>
+          <p:spPr>
+            <a:xfrm>
+              <a:off x="5353163" y="2192435"/>
+              <a:ext cx="3525255" cy="0"/>
+            </a:xfrm>
+            <a:prstGeom prst="line">
+              <a:avLst/>
+            </a:prstGeom>
+            <a:ln>
+              <a:prstDash val="dot"/>
+            </a:ln>
+          </p:spPr>
+          <p:style>
+            <a:lnRef idx="2">
+              <a:schemeClr val="accent1"/>
+            </a:lnRef>
+            <a:fillRef idx="0">
+              <a:schemeClr val="accent1"/>
+            </a:fillRef>
+            <a:effectRef idx="1">
+              <a:schemeClr val="accent1"/>
+            </a:effectRef>
+            <a:fontRef idx="minor">
+              <a:schemeClr val="tx1"/>
+            </a:fontRef>
+          </p:style>
+        </p:cxnSp>
+        <p:cxnSp>
+          <p:nvCxnSpPr>
+            <p:cNvPr id="7" name="Straight Arrow Connector 6">
+              <a:extLst>
+                <a:ext uri="{FF2B5EF4-FFF2-40B4-BE49-F238E27FC236}">
+                  <a16:creationId xmlns:a16="http://schemas.microsoft.com/office/drawing/2014/main" id="{D84BFF5A-EB09-3423-602A-370DA9FA5147}"/>
+                </a:ext>
+              </a:extLst>
+            </p:cNvPr>
+            <p:cNvCxnSpPr/>
+            <p:nvPr/>
+          </p:nvCxnSpPr>
+          <p:spPr>
+            <a:xfrm flipH="1" flipV="1">
+              <a:off x="6860596" y="1982321"/>
+              <a:ext cx="249560" cy="206359"/>
+            </a:xfrm>
+            <a:prstGeom prst="straightConnector1">
+              <a:avLst/>
+            </a:prstGeom>
+            <a:ln>
+              <a:solidFill>
+                <a:srgbClr val="000000"/>
+              </a:solidFill>
+              <a:tailEnd type="arrow"/>
+            </a:ln>
+          </p:spPr>
+          <p:style>
+            <a:lnRef idx="2">
+              <a:schemeClr val="accent1"/>
+            </a:lnRef>
+            <a:fillRef idx="0">
+              <a:schemeClr val="accent1"/>
+            </a:fillRef>
+            <a:effectRef idx="1">
+              <a:schemeClr val="accent1"/>
+            </a:effectRef>
+            <a:fontRef idx="minor">
+              <a:schemeClr val="tx1"/>
+            </a:fontRef>
+          </p:style>
+        </p:cxnSp>
+      </p:grpSp>
+      <p:grpSp>
+        <p:nvGrpSpPr>
+          <p:cNvPr id="8" name="Group 7">
+            <a:extLst>
+              <a:ext uri="{FF2B5EF4-FFF2-40B4-BE49-F238E27FC236}">
+                <a16:creationId xmlns:a16="http://schemas.microsoft.com/office/drawing/2014/main" id="{AAFF0C09-8B8B-251B-5F06-BD8C5B427003}"/>
+              </a:ext>
+            </a:extLst>
+          </p:cNvPr>
+          <p:cNvGrpSpPr>
+            <a:grpSpLocks noChangeAspect="1"/>
+          </p:cNvGrpSpPr>
+          <p:nvPr/>
+        </p:nvGrpSpPr>
+        <p:grpSpPr>
+          <a:xfrm>
+            <a:off x="4882433" y="798616"/>
+            <a:ext cx="3525255" cy="2510544"/>
+            <a:chOff x="1068858" y="2184115"/>
+            <a:chExt cx="7050509" cy="5021088"/>
+          </a:xfrm>
+        </p:grpSpPr>
+        <p:sp>
+          <p:nvSpPr>
+            <p:cNvPr id="9" name="Rectangle 8">
+              <a:extLst>
+                <a:ext uri="{FF2B5EF4-FFF2-40B4-BE49-F238E27FC236}">
+                  <a16:creationId xmlns:a16="http://schemas.microsoft.com/office/drawing/2014/main" id="{81455C72-376B-F801-D8E0-F93B5AA5913D}"/>
+                </a:ext>
+              </a:extLst>
+            </p:cNvPr>
+            <p:cNvSpPr/>
+            <p:nvPr/>
+          </p:nvSpPr>
+          <p:spPr>
+            <a:xfrm>
+              <a:off x="1068858" y="2184115"/>
+              <a:ext cx="7050509" cy="5021088"/>
+            </a:xfrm>
+            <a:prstGeom prst="rect">
+              <a:avLst/>
+            </a:prstGeom>
+            <a:noFill/>
+          </p:spPr>
+          <p:style>
+            <a:lnRef idx="1">
+              <a:schemeClr val="accent1"/>
+            </a:lnRef>
+            <a:fillRef idx="3">
+              <a:schemeClr val="accent1"/>
+            </a:fillRef>
+            <a:effectRef idx="2">
+              <a:schemeClr val="accent1"/>
+            </a:effectRef>
+            <a:fontRef idx="minor">
+              <a:schemeClr val="lt1"/>
+            </a:fontRef>
+          </p:style>
+          <p:txBody>
+            <a:bodyPr rtlCol="0" anchor="ctr"/>
+            <a:lstStyle/>
+            <a:p>
+              <a:pPr algn="ctr"/>
+              <a:endParaRPr lang="en-US"/>
+            </a:p>
+          </p:txBody>
+        </p:sp>
+        <p:sp>
+          <p:nvSpPr>
+            <p:cNvPr id="10" name="Oval 9">
+              <a:extLst>
+                <a:ext uri="{FF2B5EF4-FFF2-40B4-BE49-F238E27FC236}">
+                  <a16:creationId xmlns:a16="http://schemas.microsoft.com/office/drawing/2014/main" id="{CD37D2B3-4D9A-05DB-6E5C-7E9158890ABC}"/>
+                </a:ext>
+              </a:extLst>
+            </p:cNvPr>
+            <p:cNvSpPr/>
+            <p:nvPr/>
+          </p:nvSpPr>
+          <p:spPr>
+            <a:xfrm>
+              <a:off x="2873028" y="3620407"/>
+              <a:ext cx="225522" cy="225534"/>
+            </a:xfrm>
+            <a:prstGeom prst="ellipse">
+              <a:avLst/>
+            </a:prstGeom>
+          </p:spPr>
+          <p:style>
+            <a:lnRef idx="1">
+              <a:schemeClr val="accent1"/>
+            </a:lnRef>
+            <a:fillRef idx="3">
+              <a:schemeClr val="accent1"/>
+            </a:fillRef>
+            <a:effectRef idx="2">
+              <a:schemeClr val="accent1"/>
+            </a:effectRef>
+            <a:fontRef idx="minor">
+              <a:schemeClr val="lt1"/>
+            </a:fontRef>
+          </p:style>
+          <p:txBody>
+            <a:bodyPr rtlCol="0" anchor="ctr"/>
+            <a:lstStyle/>
+            <a:p>
+              <a:pPr algn="ctr"/>
+              <a:endParaRPr lang="en-US"/>
+            </a:p>
+          </p:txBody>
+        </p:sp>
+        <p:cxnSp>
+          <p:nvCxnSpPr>
+            <p:cNvPr id="11" name="Straight Connector 10">
+              <a:extLst>
+                <a:ext uri="{FF2B5EF4-FFF2-40B4-BE49-F238E27FC236}">
+                  <a16:creationId xmlns:a16="http://schemas.microsoft.com/office/drawing/2014/main" id="{AAB1BC70-786E-724B-18CE-4C7CB292514B}"/>
+                </a:ext>
+              </a:extLst>
+            </p:cNvPr>
+            <p:cNvCxnSpPr>
+              <a:stCxn id="9" idx="0"/>
+              <a:endCxn id="9" idx="2"/>
+            </p:cNvCxnSpPr>
+            <p:nvPr/>
+          </p:nvCxnSpPr>
+          <p:spPr>
+            <a:xfrm>
+              <a:off x="4594113" y="2184115"/>
+              <a:ext cx="0" cy="5021088"/>
+            </a:xfrm>
+            <a:prstGeom prst="line">
+              <a:avLst/>
+            </a:prstGeom>
+            <a:ln>
+              <a:prstDash val="dot"/>
+            </a:ln>
+          </p:spPr>
+          <p:style>
+            <a:lnRef idx="2">
+              <a:schemeClr val="accent1"/>
+            </a:lnRef>
+            <a:fillRef idx="0">
+              <a:schemeClr val="accent1"/>
+            </a:fillRef>
+            <a:effectRef idx="1">
+              <a:schemeClr val="accent1"/>
+            </a:effectRef>
+            <a:fontRef idx="minor">
+              <a:schemeClr val="tx1"/>
+            </a:fontRef>
+          </p:style>
+        </p:cxnSp>
+        <p:cxnSp>
+          <p:nvCxnSpPr>
+            <p:cNvPr id="12" name="Straight Connector 11">
+              <a:extLst>
+                <a:ext uri="{FF2B5EF4-FFF2-40B4-BE49-F238E27FC236}">
+                  <a16:creationId xmlns:a16="http://schemas.microsoft.com/office/drawing/2014/main" id="{57178237-5FDC-DDCD-1B20-BFCBE51E00CB}"/>
+                </a:ext>
+              </a:extLst>
+            </p:cNvPr>
+            <p:cNvCxnSpPr>
+              <a:stCxn id="9" idx="1"/>
+              <a:endCxn id="9" idx="3"/>
+            </p:cNvCxnSpPr>
+            <p:nvPr/>
+          </p:nvCxnSpPr>
+          <p:spPr>
+            <a:xfrm>
+              <a:off x="1068858" y="4694659"/>
+              <a:ext cx="7050509" cy="0"/>
+            </a:xfrm>
+            <a:prstGeom prst="line">
+              <a:avLst/>
+            </a:prstGeom>
+            <a:ln>
+              <a:prstDash val="dot"/>
+            </a:ln>
+          </p:spPr>
+          <p:style>
+            <a:lnRef idx="2">
+              <a:schemeClr val="accent1"/>
+            </a:lnRef>
+            <a:fillRef idx="0">
+              <a:schemeClr val="accent1"/>
+            </a:fillRef>
+            <a:effectRef idx="1">
+              <a:schemeClr val="accent1"/>
+            </a:effectRef>
+            <a:fontRef idx="minor">
+              <a:schemeClr val="tx1"/>
+            </a:fontRef>
+          </p:style>
+        </p:cxnSp>
+        <p:cxnSp>
+          <p:nvCxnSpPr>
+            <p:cNvPr id="13" name="Straight Arrow Connector 12">
+              <a:extLst>
+                <a:ext uri="{FF2B5EF4-FFF2-40B4-BE49-F238E27FC236}">
+                  <a16:creationId xmlns:a16="http://schemas.microsoft.com/office/drawing/2014/main" id="{9A578224-8D88-C340-6848-21A28D84EACF}"/>
+                </a:ext>
+              </a:extLst>
+            </p:cNvPr>
+            <p:cNvCxnSpPr>
+              <a:endCxn id="10" idx="5"/>
+            </p:cNvCxnSpPr>
+            <p:nvPr/>
+          </p:nvCxnSpPr>
+          <p:spPr>
+            <a:xfrm flipH="1" flipV="1">
+              <a:off x="3065523" y="3812912"/>
+              <a:ext cx="1517319" cy="874234"/>
+            </a:xfrm>
+            <a:prstGeom prst="straightConnector1">
+              <a:avLst/>
+            </a:prstGeom>
+            <a:ln>
+              <a:solidFill>
+                <a:srgbClr val="000000"/>
+              </a:solidFill>
+              <a:tailEnd type="arrow"/>
+            </a:ln>
+          </p:spPr>
+          <p:style>
+            <a:lnRef idx="2">
+              <a:schemeClr val="accent1"/>
+            </a:lnRef>
+            <a:fillRef idx="0">
+              <a:schemeClr val="accent1"/>
+            </a:fillRef>
+            <a:effectRef idx="1">
+              <a:schemeClr val="accent1"/>
+            </a:effectRef>
+            <a:fontRef idx="minor">
+              <a:schemeClr val="tx1"/>
+            </a:fontRef>
+          </p:style>
+        </p:cxnSp>
+        <p:sp>
+          <p:nvSpPr>
+            <p:cNvPr id="14" name="Oval 13">
+              <a:extLst>
+                <a:ext uri="{FF2B5EF4-FFF2-40B4-BE49-F238E27FC236}">
+                  <a16:creationId xmlns:a16="http://schemas.microsoft.com/office/drawing/2014/main" id="{BCEC3B85-9E8A-C7AB-4935-1453F5AA4832}"/>
+                </a:ext>
+              </a:extLst>
+            </p:cNvPr>
+            <p:cNvSpPr/>
+            <p:nvPr/>
+          </p:nvSpPr>
+          <p:spPr>
+            <a:xfrm>
+              <a:off x="6479465" y="2573918"/>
+              <a:ext cx="225522" cy="225534"/>
+            </a:xfrm>
+            <a:prstGeom prst="ellipse">
+              <a:avLst/>
+            </a:prstGeom>
+            <a:solidFill>
+              <a:srgbClr val="CCFFCC"/>
+            </a:solidFill>
+          </p:spPr>
+          <p:style>
+            <a:lnRef idx="1">
+              <a:schemeClr val="accent1"/>
+            </a:lnRef>
+            <a:fillRef idx="3">
+              <a:schemeClr val="accent1"/>
+            </a:fillRef>
+            <a:effectRef idx="2">
+              <a:schemeClr val="accent1"/>
+            </a:effectRef>
+            <a:fontRef idx="minor">
+              <a:schemeClr val="lt1"/>
+            </a:fontRef>
+          </p:style>
+          <p:txBody>
+            <a:bodyPr rtlCol="0" anchor="ctr"/>
+            <a:lstStyle/>
+            <a:p>
+              <a:pPr algn="ctr"/>
+              <a:endParaRPr lang="en-US"/>
+            </a:p>
+          </p:txBody>
+        </p:sp>
+        <p:cxnSp>
+          <p:nvCxnSpPr>
+            <p:cNvPr id="15" name="Straight Arrow Connector 14">
+              <a:extLst>
+                <a:ext uri="{FF2B5EF4-FFF2-40B4-BE49-F238E27FC236}">
+                  <a16:creationId xmlns:a16="http://schemas.microsoft.com/office/drawing/2014/main" id="{850EB41D-38DB-6704-053B-54BEC4535436}"/>
+                </a:ext>
+              </a:extLst>
+            </p:cNvPr>
+            <p:cNvCxnSpPr/>
+            <p:nvPr/>
+          </p:nvCxnSpPr>
+          <p:spPr>
+            <a:xfrm flipV="1">
+              <a:off x="3098550" y="2730813"/>
+              <a:ext cx="3413942" cy="966751"/>
+            </a:xfrm>
+            <a:prstGeom prst="straightConnector1">
+              <a:avLst/>
+            </a:prstGeom>
+            <a:ln>
+              <a:tailEnd type="arrow"/>
+            </a:ln>
+          </p:spPr>
+          <p:style>
+            <a:lnRef idx="2">
+              <a:schemeClr val="accent1"/>
+            </a:lnRef>
+            <a:fillRef idx="0">
+              <a:schemeClr val="accent1"/>
+            </a:fillRef>
+            <a:effectRef idx="1">
+              <a:schemeClr val="accent1"/>
+            </a:effectRef>
+            <a:fontRef idx="minor">
+              <a:schemeClr val="tx1"/>
+            </a:fontRef>
+          </p:style>
+        </p:cxnSp>
+        <p:sp>
+          <p:nvSpPr>
+            <p:cNvPr id="16" name="Oval 15">
+              <a:extLst>
+                <a:ext uri="{FF2B5EF4-FFF2-40B4-BE49-F238E27FC236}">
+                  <a16:creationId xmlns:a16="http://schemas.microsoft.com/office/drawing/2014/main" id="{625E1222-A0AF-01AC-5870-BA0F89A55863}"/>
+                </a:ext>
+              </a:extLst>
+            </p:cNvPr>
+            <p:cNvSpPr/>
+            <p:nvPr/>
+          </p:nvSpPr>
+          <p:spPr>
+            <a:xfrm>
+              <a:off x="2952762" y="6004874"/>
+              <a:ext cx="225522" cy="225534"/>
+            </a:xfrm>
+            <a:prstGeom prst="ellipse">
+              <a:avLst/>
+            </a:prstGeom>
+            <a:solidFill>
+              <a:schemeClr val="accent2">
+                <a:lumMod val="60000"/>
+                <a:lumOff val="40000"/>
+              </a:schemeClr>
+            </a:solidFill>
+          </p:spPr>
+          <p:style>
+            <a:lnRef idx="1">
+              <a:schemeClr val="accent1"/>
+            </a:lnRef>
+            <a:fillRef idx="3">
+              <a:schemeClr val="accent1"/>
+            </a:fillRef>
+            <a:effectRef idx="2">
+              <a:schemeClr val="accent1"/>
+            </a:effectRef>
+            <a:fontRef idx="minor">
+              <a:schemeClr val="lt1"/>
+            </a:fontRef>
+          </p:style>
+          <p:txBody>
+            <a:bodyPr rtlCol="0" anchor="ctr"/>
+            <a:lstStyle/>
+            <a:p>
+              <a:pPr algn="ctr"/>
+              <a:endParaRPr lang="en-US"/>
+            </a:p>
+          </p:txBody>
+        </p:sp>
+        <p:cxnSp>
+          <p:nvCxnSpPr>
+            <p:cNvPr id="17" name="Straight Arrow Connector 16">
+              <a:extLst>
+                <a:ext uri="{FF2B5EF4-FFF2-40B4-BE49-F238E27FC236}">
+                  <a16:creationId xmlns:a16="http://schemas.microsoft.com/office/drawing/2014/main" id="{816FF7DF-20CA-A3E9-D4D6-742FFB3C3A09}"/>
+                </a:ext>
+              </a:extLst>
+            </p:cNvPr>
+            <p:cNvCxnSpPr>
+              <a:stCxn id="10" idx="4"/>
+              <a:endCxn id="16" idx="0"/>
+            </p:cNvCxnSpPr>
+            <p:nvPr/>
+          </p:nvCxnSpPr>
+          <p:spPr>
+            <a:xfrm>
+              <a:off x="2985789" y="3845941"/>
+              <a:ext cx="79734" cy="2158933"/>
+            </a:xfrm>
+            <a:prstGeom prst="straightConnector1">
+              <a:avLst/>
+            </a:prstGeom>
+            <a:ln>
+              <a:tailEnd type="arrow"/>
+            </a:ln>
+          </p:spPr>
+          <p:style>
+            <a:lnRef idx="2">
+              <a:schemeClr val="accent1"/>
+            </a:lnRef>
+            <a:fillRef idx="0">
+              <a:schemeClr val="accent1"/>
+            </a:fillRef>
+            <a:effectRef idx="1">
+              <a:schemeClr val="accent1"/>
+            </a:effectRef>
+            <a:fontRef idx="minor">
+              <a:schemeClr val="tx1"/>
+            </a:fontRef>
+          </p:style>
+        </p:cxnSp>
+      </p:grpSp>
+      <p:grpSp>
+        <p:nvGrpSpPr>
+          <p:cNvPr id="19" name="Group 18">
+            <a:extLst>
+              <a:ext uri="{FF2B5EF4-FFF2-40B4-BE49-F238E27FC236}">
+                <a16:creationId xmlns:a16="http://schemas.microsoft.com/office/drawing/2014/main" id="{2F421061-750D-FF54-FAE1-022CF563F1DD}"/>
+              </a:ext>
+            </a:extLst>
+          </p:cNvPr>
+          <p:cNvGrpSpPr/>
+          <p:nvPr/>
+        </p:nvGrpSpPr>
+        <p:grpSpPr>
+          <a:xfrm>
+            <a:off x="836898" y="3833997"/>
+            <a:ext cx="3525255" cy="2510544"/>
+            <a:chOff x="5353163" y="780747"/>
+            <a:chExt cx="3525255" cy="2510544"/>
+          </a:xfrm>
+        </p:grpSpPr>
+        <p:sp>
+          <p:nvSpPr>
+            <p:cNvPr id="20" name="Rectangle 19">
+              <a:extLst>
+                <a:ext uri="{FF2B5EF4-FFF2-40B4-BE49-F238E27FC236}">
+                  <a16:creationId xmlns:a16="http://schemas.microsoft.com/office/drawing/2014/main" id="{9DC01262-D6AE-EF1C-069D-CE1BB56045CF}"/>
+                </a:ext>
+              </a:extLst>
+            </p:cNvPr>
+            <p:cNvSpPr/>
+            <p:nvPr/>
+          </p:nvSpPr>
+          <p:spPr>
+            <a:xfrm>
+              <a:off x="5353163" y="780747"/>
+              <a:ext cx="3525255" cy="2510544"/>
+            </a:xfrm>
+            <a:prstGeom prst="rect">
+              <a:avLst/>
+            </a:prstGeom>
+            <a:noFill/>
+          </p:spPr>
+          <p:style>
+            <a:lnRef idx="1">
+              <a:schemeClr val="accent1"/>
+            </a:lnRef>
+            <a:fillRef idx="3">
+              <a:schemeClr val="accent1"/>
+            </a:fillRef>
+            <a:effectRef idx="2">
+              <a:schemeClr val="accent1"/>
+            </a:effectRef>
+            <a:fontRef idx="minor">
+              <a:schemeClr val="lt1"/>
+            </a:fontRef>
+          </p:style>
+          <p:txBody>
+            <a:bodyPr rtlCol="0" anchor="ctr"/>
+            <a:lstStyle/>
+            <a:p>
+              <a:pPr algn="ctr"/>
+              <a:endParaRPr lang="en-US"/>
+            </a:p>
+          </p:txBody>
+        </p:sp>
+        <p:sp>
+          <p:nvSpPr>
+            <p:cNvPr id="21" name="Oval 20">
+              <a:extLst>
+                <a:ext uri="{FF2B5EF4-FFF2-40B4-BE49-F238E27FC236}">
+                  <a16:creationId xmlns:a16="http://schemas.microsoft.com/office/drawing/2014/main" id="{0020215E-5FB5-07F5-FA19-CB91BBFC039C}"/>
+                </a:ext>
+              </a:extLst>
+            </p:cNvPr>
+            <p:cNvSpPr/>
+            <p:nvPr/>
+          </p:nvSpPr>
+          <p:spPr>
+            <a:xfrm>
+              <a:off x="6765658" y="1724423"/>
+              <a:ext cx="112761" cy="112767"/>
+            </a:xfrm>
+            <a:prstGeom prst="ellipse">
+              <a:avLst/>
+            </a:prstGeom>
+          </p:spPr>
+          <p:style>
+            <a:lnRef idx="1">
+              <a:schemeClr val="accent1"/>
+            </a:lnRef>
+            <a:fillRef idx="3">
+              <a:schemeClr val="accent1"/>
+            </a:fillRef>
+            <a:effectRef idx="2">
+              <a:schemeClr val="accent1"/>
+            </a:effectRef>
+            <a:fontRef idx="minor">
+              <a:schemeClr val="lt1"/>
+            </a:fontRef>
+          </p:style>
+          <p:txBody>
+            <a:bodyPr rtlCol="0" anchor="ctr"/>
+            <a:lstStyle/>
+            <a:p>
+              <a:pPr algn="ctr"/>
+              <a:endParaRPr lang="en-US"/>
+            </a:p>
+          </p:txBody>
+        </p:sp>
+        <p:cxnSp>
+          <p:nvCxnSpPr>
+            <p:cNvPr id="22" name="Straight Connector 21">
+              <a:extLst>
+                <a:ext uri="{FF2B5EF4-FFF2-40B4-BE49-F238E27FC236}">
+                  <a16:creationId xmlns:a16="http://schemas.microsoft.com/office/drawing/2014/main" id="{802BDA28-2440-123E-9036-CD7A404F6B6E}"/>
+                </a:ext>
+              </a:extLst>
+            </p:cNvPr>
+            <p:cNvCxnSpPr>
+              <a:cxnSpLocks/>
+              <a:stCxn id="20" idx="0"/>
+              <a:endCxn id="20" idx="2"/>
+            </p:cNvCxnSpPr>
+            <p:nvPr/>
+          </p:nvCxnSpPr>
+          <p:spPr>
+            <a:xfrm>
+              <a:off x="7115791" y="780747"/>
+              <a:ext cx="0" cy="2510544"/>
+            </a:xfrm>
+            <a:prstGeom prst="line">
+              <a:avLst/>
+            </a:prstGeom>
+            <a:ln>
+              <a:prstDash val="dot"/>
+            </a:ln>
+          </p:spPr>
+          <p:style>
+            <a:lnRef idx="2">
+              <a:schemeClr val="accent1"/>
+            </a:lnRef>
+            <a:fillRef idx="0">
+              <a:schemeClr val="accent1"/>
+            </a:fillRef>
+            <a:effectRef idx="1">
+              <a:schemeClr val="accent1"/>
+            </a:effectRef>
+            <a:fontRef idx="minor">
+              <a:schemeClr val="tx1"/>
+            </a:fontRef>
+          </p:style>
+        </p:cxnSp>
+        <p:cxnSp>
+          <p:nvCxnSpPr>
+            <p:cNvPr id="23" name="Straight Connector 22">
+              <a:extLst>
+                <a:ext uri="{FF2B5EF4-FFF2-40B4-BE49-F238E27FC236}">
+                  <a16:creationId xmlns:a16="http://schemas.microsoft.com/office/drawing/2014/main" id="{D0E0039B-C46F-D855-82BA-A6DD904DF4CA}"/>
+                </a:ext>
+              </a:extLst>
+            </p:cNvPr>
+            <p:cNvCxnSpPr>
+              <a:cxnSpLocks/>
+              <a:stCxn id="20" idx="1"/>
+              <a:endCxn id="20" idx="3"/>
+            </p:cNvCxnSpPr>
+            <p:nvPr/>
+          </p:nvCxnSpPr>
+          <p:spPr>
+            <a:xfrm>
+              <a:off x="5353163" y="2036019"/>
+              <a:ext cx="3525255" cy="0"/>
+            </a:xfrm>
+            <a:prstGeom prst="line">
+              <a:avLst/>
+            </a:prstGeom>
+            <a:ln>
+              <a:prstDash val="dot"/>
+            </a:ln>
+          </p:spPr>
+          <p:style>
+            <a:lnRef idx="2">
+              <a:schemeClr val="accent1"/>
+            </a:lnRef>
+            <a:fillRef idx="0">
+              <a:schemeClr val="accent1"/>
+            </a:fillRef>
+            <a:effectRef idx="1">
+              <a:schemeClr val="accent1"/>
+            </a:effectRef>
+            <a:fontRef idx="minor">
+              <a:schemeClr val="tx1"/>
+            </a:fontRef>
+          </p:style>
+        </p:cxnSp>
+        <p:sp>
+          <p:nvSpPr>
+            <p:cNvPr id="24" name="Oval 23">
+              <a:extLst>
+                <a:ext uri="{FF2B5EF4-FFF2-40B4-BE49-F238E27FC236}">
+                  <a16:creationId xmlns:a16="http://schemas.microsoft.com/office/drawing/2014/main" id="{7A520B67-B4FA-5553-1C89-CEAE7BCD1651}"/>
+                </a:ext>
+              </a:extLst>
+            </p:cNvPr>
+            <p:cNvSpPr/>
+            <p:nvPr/>
+          </p:nvSpPr>
+          <p:spPr>
+            <a:xfrm>
+              <a:off x="6051561" y="2665996"/>
+              <a:ext cx="45719" cy="45719"/>
+            </a:xfrm>
+            <a:prstGeom prst="ellipse">
+              <a:avLst/>
+            </a:prstGeom>
+            <a:solidFill>
+              <a:schemeClr val="tx1"/>
+            </a:solidFill>
+            <a:ln>
+              <a:solidFill>
+                <a:srgbClr val="000000"/>
+              </a:solidFill>
+            </a:ln>
+          </p:spPr>
+          <p:style>
+            <a:lnRef idx="1">
+              <a:schemeClr val="accent1"/>
+            </a:lnRef>
+            <a:fillRef idx="3">
+              <a:schemeClr val="accent1"/>
+            </a:fillRef>
+            <a:effectRef idx="2">
+              <a:schemeClr val="accent1"/>
+            </a:effectRef>
+            <a:fontRef idx="minor">
+              <a:schemeClr val="lt1"/>
+            </a:fontRef>
+          </p:style>
+          <p:txBody>
+            <a:bodyPr rtlCol="0" anchor="ctr"/>
+            <a:lstStyle/>
+            <a:p>
+              <a:pPr algn="ctr"/>
+              <a:endParaRPr lang="en-US"/>
+            </a:p>
+          </p:txBody>
+        </p:sp>
+        <p:sp>
+          <p:nvSpPr>
+            <p:cNvPr id="25" name="Oval 24">
+              <a:extLst>
+                <a:ext uri="{FF2B5EF4-FFF2-40B4-BE49-F238E27FC236}">
+                  <a16:creationId xmlns:a16="http://schemas.microsoft.com/office/drawing/2014/main" id="{E088A1B9-8498-5538-0FA1-2946C2AA0D29}"/>
+                </a:ext>
+              </a:extLst>
+            </p:cNvPr>
+            <p:cNvSpPr/>
+            <p:nvPr/>
+          </p:nvSpPr>
+          <p:spPr>
+            <a:xfrm>
+              <a:off x="6631281" y="2818396"/>
+              <a:ext cx="45719" cy="45719"/>
+            </a:xfrm>
+            <a:prstGeom prst="ellipse">
+              <a:avLst/>
+            </a:prstGeom>
+            <a:solidFill>
+              <a:schemeClr val="tx1"/>
+            </a:solidFill>
+            <a:ln>
+              <a:solidFill>
+                <a:srgbClr val="000000"/>
+              </a:solidFill>
+            </a:ln>
+          </p:spPr>
+          <p:style>
+            <a:lnRef idx="1">
+              <a:schemeClr val="accent1"/>
+            </a:lnRef>
+            <a:fillRef idx="3">
+              <a:schemeClr val="accent1"/>
+            </a:fillRef>
+            <a:effectRef idx="2">
+              <a:schemeClr val="accent1"/>
+            </a:effectRef>
+            <a:fontRef idx="minor">
+              <a:schemeClr val="lt1"/>
+            </a:fontRef>
+          </p:style>
+          <p:txBody>
+            <a:bodyPr rtlCol="0" anchor="ctr"/>
+            <a:lstStyle/>
+            <a:p>
+              <a:pPr algn="ctr"/>
+              <a:endParaRPr lang="en-US"/>
+            </a:p>
+          </p:txBody>
+        </p:sp>
+        <p:sp>
+          <p:nvSpPr>
+            <p:cNvPr id="26" name="Oval 25">
+              <a:extLst>
+                <a:ext uri="{FF2B5EF4-FFF2-40B4-BE49-F238E27FC236}">
+                  <a16:creationId xmlns:a16="http://schemas.microsoft.com/office/drawing/2014/main" id="{D307727A-56CF-8D34-E359-568D1E53FA02}"/>
+                </a:ext>
+              </a:extLst>
+            </p:cNvPr>
+            <p:cNvSpPr/>
+            <p:nvPr/>
+          </p:nvSpPr>
+          <p:spPr>
+            <a:xfrm>
+              <a:off x="6320751" y="2757136"/>
+              <a:ext cx="45719" cy="45719"/>
+            </a:xfrm>
+            <a:prstGeom prst="ellipse">
+              <a:avLst/>
+            </a:prstGeom>
+            <a:solidFill>
+              <a:schemeClr val="tx1"/>
+            </a:solidFill>
+            <a:ln>
+              <a:solidFill>
+                <a:srgbClr val="000000"/>
+              </a:solidFill>
+            </a:ln>
+          </p:spPr>
+          <p:style>
+            <a:lnRef idx="1">
+              <a:schemeClr val="accent1"/>
+            </a:lnRef>
+            <a:fillRef idx="3">
+              <a:schemeClr val="accent1"/>
+            </a:fillRef>
+            <a:effectRef idx="2">
+              <a:schemeClr val="accent1"/>
+            </a:effectRef>
+            <a:fontRef idx="minor">
+              <a:schemeClr val="lt1"/>
+            </a:fontRef>
+          </p:style>
+          <p:txBody>
+            <a:bodyPr rtlCol="0" anchor="ctr"/>
+            <a:lstStyle/>
+            <a:p>
+              <a:pPr algn="ctr"/>
+              <a:endParaRPr lang="en-US"/>
+            </a:p>
+          </p:txBody>
+        </p:sp>
+        <p:sp>
+          <p:nvSpPr>
+            <p:cNvPr id="27" name="Oval 26">
+              <a:extLst>
+                <a:ext uri="{FF2B5EF4-FFF2-40B4-BE49-F238E27FC236}">
+                  <a16:creationId xmlns:a16="http://schemas.microsoft.com/office/drawing/2014/main" id="{897731D1-CA50-5D21-7997-124C4CBCCC09}"/>
+                </a:ext>
+              </a:extLst>
+            </p:cNvPr>
+            <p:cNvSpPr/>
+            <p:nvPr/>
+          </p:nvSpPr>
+          <p:spPr>
+            <a:xfrm>
+              <a:off x="6203961" y="1370256"/>
+              <a:ext cx="45719" cy="45719"/>
+            </a:xfrm>
+            <a:prstGeom prst="ellipse">
+              <a:avLst/>
+            </a:prstGeom>
+            <a:solidFill>
+              <a:schemeClr val="tx1"/>
+            </a:solidFill>
+            <a:ln>
+              <a:solidFill>
+                <a:srgbClr val="000000"/>
+              </a:solidFill>
+            </a:ln>
+          </p:spPr>
+          <p:style>
+            <a:lnRef idx="1">
+              <a:schemeClr val="accent1"/>
+            </a:lnRef>
+            <a:fillRef idx="3">
+              <a:schemeClr val="accent1"/>
+            </a:fillRef>
+            <a:effectRef idx="2">
+              <a:schemeClr val="accent1"/>
+            </a:effectRef>
+            <a:fontRef idx="minor">
+              <a:schemeClr val="lt1"/>
+            </a:fontRef>
+          </p:style>
+          <p:txBody>
+            <a:bodyPr rtlCol="0" anchor="ctr"/>
+            <a:lstStyle/>
+            <a:p>
+              <a:pPr algn="ctr"/>
+              <a:endParaRPr lang="en-US"/>
+            </a:p>
+          </p:txBody>
+        </p:sp>
+        <p:sp>
+          <p:nvSpPr>
+            <p:cNvPr id="28" name="Oval 27">
+              <a:extLst>
+                <a:ext uri="{FF2B5EF4-FFF2-40B4-BE49-F238E27FC236}">
+                  <a16:creationId xmlns:a16="http://schemas.microsoft.com/office/drawing/2014/main" id="{64B519C5-8733-D0C9-A933-528B0CF6804F}"/>
+                </a:ext>
+              </a:extLst>
+            </p:cNvPr>
+            <p:cNvSpPr/>
+            <p:nvPr/>
+          </p:nvSpPr>
+          <p:spPr>
+            <a:xfrm>
+              <a:off x="6103603" y="1630928"/>
+              <a:ext cx="45719" cy="45719"/>
+            </a:xfrm>
+            <a:prstGeom prst="ellipse">
+              <a:avLst/>
+            </a:prstGeom>
+            <a:solidFill>
+              <a:schemeClr val="tx1"/>
+            </a:solidFill>
+            <a:ln>
+              <a:solidFill>
+                <a:srgbClr val="000000"/>
+              </a:solidFill>
+            </a:ln>
+          </p:spPr>
+          <p:style>
+            <a:lnRef idx="1">
+              <a:schemeClr val="accent1"/>
+            </a:lnRef>
+            <a:fillRef idx="3">
+              <a:schemeClr val="accent1"/>
+            </a:fillRef>
+            <a:effectRef idx="2">
+              <a:schemeClr val="accent1"/>
+            </a:effectRef>
+            <a:fontRef idx="minor">
+              <a:schemeClr val="lt1"/>
+            </a:fontRef>
+          </p:style>
+          <p:txBody>
+            <a:bodyPr rtlCol="0" anchor="ctr"/>
+            <a:lstStyle/>
+            <a:p>
+              <a:pPr algn="ctr"/>
+              <a:endParaRPr lang="en-US"/>
+            </a:p>
+          </p:txBody>
+        </p:sp>
+        <p:sp>
+          <p:nvSpPr>
+            <p:cNvPr id="29" name="Oval 28">
+              <a:extLst>
+                <a:ext uri="{FF2B5EF4-FFF2-40B4-BE49-F238E27FC236}">
+                  <a16:creationId xmlns:a16="http://schemas.microsoft.com/office/drawing/2014/main" id="{413C74B2-3BFE-AB82-94D5-6FECBDC8A3A7}"/>
+                </a:ext>
+              </a:extLst>
+            </p:cNvPr>
+            <p:cNvSpPr/>
+            <p:nvPr/>
+          </p:nvSpPr>
+          <p:spPr>
+            <a:xfrm>
+              <a:off x="6473151" y="1461396"/>
+              <a:ext cx="45719" cy="45719"/>
+            </a:xfrm>
+            <a:prstGeom prst="ellipse">
+              <a:avLst/>
+            </a:prstGeom>
+            <a:solidFill>
+              <a:schemeClr val="tx1"/>
+            </a:solidFill>
+            <a:ln>
+              <a:solidFill>
+                <a:srgbClr val="000000"/>
+              </a:solidFill>
+            </a:ln>
+          </p:spPr>
+          <p:style>
+            <a:lnRef idx="1">
+              <a:schemeClr val="accent1"/>
+            </a:lnRef>
+            <a:fillRef idx="3">
+              <a:schemeClr val="accent1"/>
+            </a:fillRef>
+            <a:effectRef idx="2">
+              <a:schemeClr val="accent1"/>
+            </a:effectRef>
+            <a:fontRef idx="minor">
+              <a:schemeClr val="lt1"/>
+            </a:fontRef>
+          </p:style>
+          <p:txBody>
+            <a:bodyPr rtlCol="0" anchor="ctr"/>
+            <a:lstStyle/>
+            <a:p>
+              <a:pPr algn="ctr"/>
+              <a:endParaRPr lang="en-US"/>
+            </a:p>
+          </p:txBody>
+        </p:sp>
+        <p:sp>
+          <p:nvSpPr>
+            <p:cNvPr id="30" name="Oval 29">
+              <a:extLst>
+                <a:ext uri="{FF2B5EF4-FFF2-40B4-BE49-F238E27FC236}">
+                  <a16:creationId xmlns:a16="http://schemas.microsoft.com/office/drawing/2014/main" id="{BAB7F785-2F90-F506-1CD5-B2EBB579AEB1}"/>
+                </a:ext>
+              </a:extLst>
+            </p:cNvPr>
+            <p:cNvSpPr/>
+            <p:nvPr/>
+          </p:nvSpPr>
+          <p:spPr>
+            <a:xfrm>
+              <a:off x="8006291" y="1451436"/>
+              <a:ext cx="45719" cy="45719"/>
+            </a:xfrm>
+            <a:prstGeom prst="ellipse">
+              <a:avLst/>
+            </a:prstGeom>
+            <a:solidFill>
+              <a:schemeClr val="tx1"/>
+            </a:solidFill>
+            <a:ln>
+              <a:solidFill>
+                <a:srgbClr val="000000"/>
+              </a:solidFill>
+            </a:ln>
+          </p:spPr>
+          <p:style>
+            <a:lnRef idx="1">
+              <a:schemeClr val="accent1"/>
+            </a:lnRef>
+            <a:fillRef idx="3">
+              <a:schemeClr val="accent1"/>
+            </a:fillRef>
+            <a:effectRef idx="2">
+              <a:schemeClr val="accent1"/>
+            </a:effectRef>
+            <a:fontRef idx="minor">
+              <a:schemeClr val="lt1"/>
+            </a:fontRef>
+          </p:style>
+          <p:txBody>
+            <a:bodyPr rtlCol="0" anchor="ctr"/>
+            <a:lstStyle/>
+            <a:p>
+              <a:pPr algn="ctr"/>
+              <a:endParaRPr lang="en-US"/>
+            </a:p>
+          </p:txBody>
+        </p:sp>
+        <p:sp>
+          <p:nvSpPr>
+            <p:cNvPr id="31" name="Oval 30">
+              <a:extLst>
+                <a:ext uri="{FF2B5EF4-FFF2-40B4-BE49-F238E27FC236}">
+                  <a16:creationId xmlns:a16="http://schemas.microsoft.com/office/drawing/2014/main" id="{7297359E-95D9-5CE9-B74B-87064EBDBD3B}"/>
+                </a:ext>
+              </a:extLst>
+            </p:cNvPr>
+            <p:cNvSpPr/>
+            <p:nvPr/>
+          </p:nvSpPr>
+          <p:spPr>
+            <a:xfrm>
+              <a:off x="8538531" y="856026"/>
+              <a:ext cx="45719" cy="45719"/>
+            </a:xfrm>
+            <a:prstGeom prst="ellipse">
+              <a:avLst/>
+            </a:prstGeom>
+            <a:solidFill>
+              <a:schemeClr val="tx1"/>
+            </a:solidFill>
+            <a:ln>
+              <a:solidFill>
+                <a:srgbClr val="000000"/>
+              </a:solidFill>
+            </a:ln>
+          </p:spPr>
+          <p:style>
+            <a:lnRef idx="1">
+              <a:schemeClr val="accent1"/>
+            </a:lnRef>
+            <a:fillRef idx="3">
+              <a:schemeClr val="accent1"/>
+            </a:fillRef>
+            <a:effectRef idx="2">
+              <a:schemeClr val="accent1"/>
+            </a:effectRef>
+            <a:fontRef idx="minor">
+              <a:schemeClr val="lt1"/>
+            </a:fontRef>
+          </p:style>
+          <p:txBody>
+            <a:bodyPr rtlCol="0" anchor="ctr"/>
+            <a:lstStyle/>
+            <a:p>
+              <a:pPr algn="ctr"/>
+              <a:endParaRPr lang="en-US"/>
+            </a:p>
+          </p:txBody>
+        </p:sp>
+        <p:sp>
+          <p:nvSpPr>
+            <p:cNvPr id="32" name="Oval 31">
+              <a:extLst>
+                <a:ext uri="{FF2B5EF4-FFF2-40B4-BE49-F238E27FC236}">
+                  <a16:creationId xmlns:a16="http://schemas.microsoft.com/office/drawing/2014/main" id="{56AB65F0-6C2E-7BD0-5FA0-01873DD91321}"/>
+                </a:ext>
+              </a:extLst>
+            </p:cNvPr>
+            <p:cNvSpPr/>
+            <p:nvPr/>
+          </p:nvSpPr>
+          <p:spPr>
+            <a:xfrm>
+              <a:off x="7776941" y="830376"/>
+              <a:ext cx="45719" cy="45719"/>
+            </a:xfrm>
+            <a:prstGeom prst="ellipse">
+              <a:avLst/>
+            </a:prstGeom>
+            <a:solidFill>
+              <a:schemeClr val="tx1"/>
+            </a:solidFill>
+            <a:ln>
+              <a:solidFill>
+                <a:srgbClr val="000000"/>
+              </a:solidFill>
+            </a:ln>
+          </p:spPr>
+          <p:style>
+            <a:lnRef idx="1">
+              <a:schemeClr val="accent1"/>
+            </a:lnRef>
+            <a:fillRef idx="3">
+              <a:schemeClr val="accent1"/>
+            </a:fillRef>
+            <a:effectRef idx="2">
+              <a:schemeClr val="accent1"/>
+            </a:effectRef>
+            <a:fontRef idx="minor">
+              <a:schemeClr val="lt1"/>
+            </a:fontRef>
+          </p:style>
+          <p:txBody>
+            <a:bodyPr rtlCol="0" anchor="ctr"/>
+            <a:lstStyle/>
+            <a:p>
+              <a:pPr algn="ctr"/>
+              <a:endParaRPr lang="en-US"/>
+            </a:p>
+          </p:txBody>
+        </p:sp>
+        <p:cxnSp>
+          <p:nvCxnSpPr>
+            <p:cNvPr id="33" name="Straight Arrow Connector 32">
+              <a:extLst>
+                <a:ext uri="{FF2B5EF4-FFF2-40B4-BE49-F238E27FC236}">
+                  <a16:creationId xmlns:a16="http://schemas.microsoft.com/office/drawing/2014/main" id="{79CC1293-596D-523C-7238-AD2D4ECB5850}"/>
+                </a:ext>
+              </a:extLst>
+            </p:cNvPr>
+            <p:cNvCxnSpPr>
+              <a:cxnSpLocks/>
+              <a:stCxn id="24" idx="0"/>
+              <a:endCxn id="21" idx="3"/>
+            </p:cNvCxnSpPr>
+            <p:nvPr/>
+          </p:nvCxnSpPr>
+          <p:spPr>
+            <a:xfrm flipV="1">
+              <a:off x="6074421" y="1820676"/>
+              <a:ext cx="707750" cy="845320"/>
+            </a:xfrm>
+            <a:prstGeom prst="straightConnector1">
+              <a:avLst/>
+            </a:prstGeom>
+            <a:ln>
+              <a:headEnd type="arrow"/>
+              <a:tailEnd type="arrow"/>
+            </a:ln>
+          </p:spPr>
+          <p:style>
+            <a:lnRef idx="2">
+              <a:schemeClr val="accent1"/>
+            </a:lnRef>
+            <a:fillRef idx="0">
+              <a:schemeClr val="accent1"/>
+            </a:fillRef>
+            <a:effectRef idx="1">
+              <a:schemeClr val="accent1"/>
+            </a:effectRef>
+            <a:fontRef idx="minor">
+              <a:schemeClr val="tx1"/>
+            </a:fontRef>
+          </p:style>
+        </p:cxnSp>
+        <p:cxnSp>
+          <p:nvCxnSpPr>
+            <p:cNvPr id="34" name="Straight Arrow Connector 33">
+              <a:extLst>
+                <a:ext uri="{FF2B5EF4-FFF2-40B4-BE49-F238E27FC236}">
+                  <a16:creationId xmlns:a16="http://schemas.microsoft.com/office/drawing/2014/main" id="{D04BF104-8509-EB14-0F52-6C00A5AF50C3}"/>
+                </a:ext>
+              </a:extLst>
+            </p:cNvPr>
+            <p:cNvCxnSpPr>
+              <a:cxnSpLocks/>
+              <a:stCxn id="26" idx="7"/>
+              <a:endCxn id="21" idx="4"/>
+            </p:cNvCxnSpPr>
+            <p:nvPr/>
+          </p:nvCxnSpPr>
+          <p:spPr>
+            <a:xfrm flipV="1">
+              <a:off x="6359775" y="1837190"/>
+              <a:ext cx="462264" cy="926641"/>
+            </a:xfrm>
+            <a:prstGeom prst="straightConnector1">
+              <a:avLst/>
+            </a:prstGeom>
+            <a:ln>
+              <a:headEnd type="arrow"/>
+              <a:tailEnd type="arrow"/>
+            </a:ln>
+          </p:spPr>
+          <p:style>
+            <a:lnRef idx="2">
+              <a:schemeClr val="accent1"/>
+            </a:lnRef>
+            <a:fillRef idx="0">
+              <a:schemeClr val="accent1"/>
+            </a:fillRef>
+            <a:effectRef idx="1">
+              <a:schemeClr val="accent1"/>
+            </a:effectRef>
+            <a:fontRef idx="minor">
+              <a:schemeClr val="tx1"/>
+            </a:fontRef>
+          </p:style>
+        </p:cxnSp>
+        <p:cxnSp>
+          <p:nvCxnSpPr>
+            <p:cNvPr id="35" name="Straight Arrow Connector 34">
+              <a:extLst>
+                <a:ext uri="{FF2B5EF4-FFF2-40B4-BE49-F238E27FC236}">
+                  <a16:creationId xmlns:a16="http://schemas.microsoft.com/office/drawing/2014/main" id="{98A811E4-94AF-6BC4-1F8F-67DAD860244B}"/>
+                </a:ext>
+              </a:extLst>
+            </p:cNvPr>
+            <p:cNvCxnSpPr>
+              <a:cxnSpLocks/>
+              <a:stCxn id="25" idx="0"/>
+              <a:endCxn id="21" idx="4"/>
+            </p:cNvCxnSpPr>
+            <p:nvPr/>
+          </p:nvCxnSpPr>
+          <p:spPr>
+            <a:xfrm flipV="1">
+              <a:off x="6654141" y="1837190"/>
+              <a:ext cx="167898" cy="981206"/>
+            </a:xfrm>
+            <a:prstGeom prst="straightConnector1">
+              <a:avLst/>
+            </a:prstGeom>
+            <a:ln>
+              <a:headEnd type="arrow"/>
+              <a:tailEnd type="arrow"/>
+            </a:ln>
+          </p:spPr>
+          <p:style>
+            <a:lnRef idx="2">
+              <a:schemeClr val="accent1"/>
+            </a:lnRef>
+            <a:fillRef idx="0">
+              <a:schemeClr val="accent1"/>
+            </a:fillRef>
+            <a:effectRef idx="1">
+              <a:schemeClr val="accent1"/>
+            </a:effectRef>
+            <a:fontRef idx="minor">
+              <a:schemeClr val="tx1"/>
+            </a:fontRef>
+          </p:style>
+        </p:cxnSp>
+        <p:cxnSp>
+          <p:nvCxnSpPr>
+            <p:cNvPr id="36" name="Straight Arrow Connector 35">
+              <a:extLst>
+                <a:ext uri="{FF2B5EF4-FFF2-40B4-BE49-F238E27FC236}">
+                  <a16:creationId xmlns:a16="http://schemas.microsoft.com/office/drawing/2014/main" id="{53D58716-6D57-8D41-4F87-C760E76E9353}"/>
+                </a:ext>
+              </a:extLst>
+            </p:cNvPr>
+            <p:cNvCxnSpPr>
+              <a:cxnSpLocks/>
+              <a:stCxn id="21" idx="7"/>
+              <a:endCxn id="32" idx="3"/>
+            </p:cNvCxnSpPr>
+            <p:nvPr/>
+          </p:nvCxnSpPr>
+          <p:spPr>
+            <a:xfrm flipV="1">
+              <a:off x="6861906" y="869400"/>
+              <a:ext cx="921730" cy="871537"/>
+            </a:xfrm>
+            <a:prstGeom prst="straightConnector1">
+              <a:avLst/>
+            </a:prstGeom>
+            <a:ln>
+              <a:headEnd type="arrow"/>
+              <a:tailEnd type="arrow"/>
+            </a:ln>
+          </p:spPr>
+          <p:style>
+            <a:lnRef idx="2">
+              <a:schemeClr val="accent1"/>
+            </a:lnRef>
+            <a:fillRef idx="0">
+              <a:schemeClr val="accent1"/>
+            </a:fillRef>
+            <a:effectRef idx="1">
+              <a:schemeClr val="accent1"/>
+            </a:effectRef>
+            <a:fontRef idx="minor">
+              <a:schemeClr val="tx1"/>
+            </a:fontRef>
+          </p:style>
+        </p:cxnSp>
+        <p:cxnSp>
+          <p:nvCxnSpPr>
+            <p:cNvPr id="37" name="Straight Arrow Connector 36">
+              <a:extLst>
+                <a:ext uri="{FF2B5EF4-FFF2-40B4-BE49-F238E27FC236}">
+                  <a16:creationId xmlns:a16="http://schemas.microsoft.com/office/drawing/2014/main" id="{FF2F31D2-C7B5-CFA8-8B41-603E0293EC0F}"/>
+                </a:ext>
+              </a:extLst>
+            </p:cNvPr>
+            <p:cNvCxnSpPr>
+              <a:cxnSpLocks/>
+              <a:stCxn id="21" idx="6"/>
+              <a:endCxn id="31" idx="3"/>
+            </p:cNvCxnSpPr>
+            <p:nvPr/>
+          </p:nvCxnSpPr>
+          <p:spPr>
+            <a:xfrm flipV="1">
+              <a:off x="6878419" y="895050"/>
+              <a:ext cx="1666807" cy="885757"/>
+            </a:xfrm>
+            <a:prstGeom prst="straightConnector1">
+              <a:avLst/>
+            </a:prstGeom>
+            <a:ln>
+              <a:headEnd type="arrow"/>
+              <a:tailEnd type="arrow"/>
+            </a:ln>
+          </p:spPr>
+          <p:style>
+            <a:lnRef idx="2">
+              <a:schemeClr val="accent1"/>
+            </a:lnRef>
+            <a:fillRef idx="0">
+              <a:schemeClr val="accent1"/>
+            </a:fillRef>
+            <a:effectRef idx="1">
+              <a:schemeClr val="accent1"/>
+            </a:effectRef>
+            <a:fontRef idx="minor">
+              <a:schemeClr val="tx1"/>
+            </a:fontRef>
+          </p:style>
+        </p:cxnSp>
+        <p:cxnSp>
+          <p:nvCxnSpPr>
+            <p:cNvPr id="38" name="Straight Arrow Connector 37">
+              <a:extLst>
+                <a:ext uri="{FF2B5EF4-FFF2-40B4-BE49-F238E27FC236}">
+                  <a16:creationId xmlns:a16="http://schemas.microsoft.com/office/drawing/2014/main" id="{32959019-3787-EEA4-6FFF-255AC78F978A}"/>
+                </a:ext>
+              </a:extLst>
+            </p:cNvPr>
+            <p:cNvCxnSpPr>
+              <a:cxnSpLocks/>
+              <a:stCxn id="21" idx="6"/>
+              <a:endCxn id="30" idx="3"/>
+            </p:cNvCxnSpPr>
+            <p:nvPr/>
+          </p:nvCxnSpPr>
+          <p:spPr>
+            <a:xfrm flipV="1">
+              <a:off x="6878419" y="1490460"/>
+              <a:ext cx="1134567" cy="290347"/>
+            </a:xfrm>
+            <a:prstGeom prst="straightConnector1">
+              <a:avLst/>
+            </a:prstGeom>
+            <a:ln>
+              <a:headEnd type="arrow"/>
+              <a:tailEnd type="arrow"/>
+            </a:ln>
+          </p:spPr>
+          <p:style>
+            <a:lnRef idx="2">
+              <a:schemeClr val="accent1"/>
+            </a:lnRef>
+            <a:fillRef idx="0">
+              <a:schemeClr val="accent1"/>
+            </a:fillRef>
+            <a:effectRef idx="1">
+              <a:schemeClr val="accent1"/>
+            </a:effectRef>
+            <a:fontRef idx="minor">
+              <a:schemeClr val="tx1"/>
+            </a:fontRef>
+          </p:style>
+        </p:cxnSp>
+        <p:cxnSp>
+          <p:nvCxnSpPr>
+            <p:cNvPr id="39" name="Straight Arrow Connector 38">
+              <a:extLst>
+                <a:ext uri="{FF2B5EF4-FFF2-40B4-BE49-F238E27FC236}">
+                  <a16:creationId xmlns:a16="http://schemas.microsoft.com/office/drawing/2014/main" id="{D222E692-5B3B-E76C-52C9-7913CC87F4EA}"/>
+                </a:ext>
+              </a:extLst>
+            </p:cNvPr>
+            <p:cNvCxnSpPr>
+              <a:cxnSpLocks/>
+              <a:stCxn id="28" idx="6"/>
+              <a:endCxn id="21" idx="2"/>
+            </p:cNvCxnSpPr>
+            <p:nvPr/>
+          </p:nvCxnSpPr>
+          <p:spPr>
+            <a:xfrm>
+              <a:off x="6149322" y="1653788"/>
+              <a:ext cx="616336" cy="127019"/>
+            </a:xfrm>
+            <a:prstGeom prst="straightConnector1">
+              <a:avLst/>
+            </a:prstGeom>
+            <a:ln>
+              <a:headEnd type="arrow"/>
+              <a:tailEnd type="arrow"/>
+            </a:ln>
+          </p:spPr>
+          <p:style>
+            <a:lnRef idx="2">
+              <a:schemeClr val="accent1"/>
+            </a:lnRef>
+            <a:fillRef idx="0">
+              <a:schemeClr val="accent1"/>
+            </a:fillRef>
+            <a:effectRef idx="1">
+              <a:schemeClr val="accent1"/>
+            </a:effectRef>
+            <a:fontRef idx="minor">
+              <a:schemeClr val="tx1"/>
+            </a:fontRef>
+          </p:style>
+        </p:cxnSp>
+        <p:cxnSp>
+          <p:nvCxnSpPr>
+            <p:cNvPr id="40" name="Straight Arrow Connector 39">
+              <a:extLst>
+                <a:ext uri="{FF2B5EF4-FFF2-40B4-BE49-F238E27FC236}">
+                  <a16:creationId xmlns:a16="http://schemas.microsoft.com/office/drawing/2014/main" id="{1D6EEF67-D596-2C8C-B4E3-1EB89293E2ED}"/>
+                </a:ext>
+              </a:extLst>
+            </p:cNvPr>
+            <p:cNvCxnSpPr>
+              <a:cxnSpLocks/>
+              <a:stCxn id="27" idx="5"/>
+              <a:endCxn id="21" idx="1"/>
+            </p:cNvCxnSpPr>
+            <p:nvPr/>
+          </p:nvCxnSpPr>
+          <p:spPr>
+            <a:xfrm>
+              <a:off x="6242985" y="1409280"/>
+              <a:ext cx="539186" cy="331657"/>
+            </a:xfrm>
+            <a:prstGeom prst="straightConnector1">
+              <a:avLst/>
+            </a:prstGeom>
+            <a:ln>
+              <a:headEnd type="arrow"/>
+              <a:tailEnd type="arrow"/>
+            </a:ln>
+          </p:spPr>
+          <p:style>
+            <a:lnRef idx="2">
+              <a:schemeClr val="accent1"/>
+            </a:lnRef>
+            <a:fillRef idx="0">
+              <a:schemeClr val="accent1"/>
+            </a:fillRef>
+            <a:effectRef idx="1">
+              <a:schemeClr val="accent1"/>
+            </a:effectRef>
+            <a:fontRef idx="minor">
+              <a:schemeClr val="tx1"/>
+            </a:fontRef>
+          </p:style>
+        </p:cxnSp>
+        <p:cxnSp>
+          <p:nvCxnSpPr>
+            <p:cNvPr id="41" name="Straight Arrow Connector 40">
+              <a:extLst>
+                <a:ext uri="{FF2B5EF4-FFF2-40B4-BE49-F238E27FC236}">
+                  <a16:creationId xmlns:a16="http://schemas.microsoft.com/office/drawing/2014/main" id="{7EBC503E-C2AC-B5F0-B0F7-507F4B478C2A}"/>
+                </a:ext>
+              </a:extLst>
+            </p:cNvPr>
+            <p:cNvCxnSpPr>
+              <a:cxnSpLocks/>
+              <a:stCxn id="29" idx="5"/>
+              <a:endCxn id="21" idx="1"/>
+            </p:cNvCxnSpPr>
+            <p:nvPr/>
+          </p:nvCxnSpPr>
+          <p:spPr>
+            <a:xfrm>
+              <a:off x="6512175" y="1500420"/>
+              <a:ext cx="269996" cy="240517"/>
+            </a:xfrm>
+            <a:prstGeom prst="straightConnector1">
+              <a:avLst/>
+            </a:prstGeom>
+            <a:ln>
+              <a:headEnd type="arrow"/>
+              <a:tailEnd type="arrow"/>
+            </a:ln>
+          </p:spPr>
+          <p:style>
+            <a:lnRef idx="2">
+              <a:schemeClr val="accent1"/>
+            </a:lnRef>
+            <a:fillRef idx="0">
+              <a:schemeClr val="accent1"/>
+            </a:fillRef>
+            <a:effectRef idx="1">
+              <a:schemeClr val="accent1"/>
+            </a:effectRef>
+            <a:fontRef idx="minor">
+              <a:schemeClr val="tx1"/>
+            </a:fontRef>
+          </p:style>
+        </p:cxnSp>
+      </p:grpSp>
+      <p:grpSp>
+        <p:nvGrpSpPr>
+          <p:cNvPr id="70" name="Group 69">
+            <a:extLst>
+              <a:ext uri="{FF2B5EF4-FFF2-40B4-BE49-F238E27FC236}">
+                <a16:creationId xmlns:a16="http://schemas.microsoft.com/office/drawing/2014/main" id="{2F0F3EE9-ACC3-40AE-B1A8-DFEE93D4AD2B}"/>
+              </a:ext>
+            </a:extLst>
+          </p:cNvPr>
+          <p:cNvGrpSpPr/>
+          <p:nvPr/>
+        </p:nvGrpSpPr>
+        <p:grpSpPr>
+          <a:xfrm>
+            <a:off x="4876798" y="3833997"/>
+            <a:ext cx="3525255" cy="2510544"/>
+            <a:chOff x="4876798" y="3958176"/>
+            <a:chExt cx="3525255" cy="2510544"/>
+          </a:xfrm>
+        </p:grpSpPr>
+        <p:sp>
+          <p:nvSpPr>
+            <p:cNvPr id="42" name="Rectangle 41">
+              <a:extLst>
+                <a:ext uri="{FF2B5EF4-FFF2-40B4-BE49-F238E27FC236}">
+                  <a16:creationId xmlns:a16="http://schemas.microsoft.com/office/drawing/2014/main" id="{D4FE0E6F-FB09-481C-7FD3-34A089039D20}"/>
+                </a:ext>
+              </a:extLst>
+            </p:cNvPr>
+            <p:cNvSpPr/>
+            <p:nvPr/>
+          </p:nvSpPr>
+          <p:spPr>
+            <a:xfrm>
+              <a:off x="4876798" y="3958176"/>
+              <a:ext cx="3525255" cy="2510544"/>
+            </a:xfrm>
+            <a:prstGeom prst="rect">
+              <a:avLst/>
+            </a:prstGeom>
+            <a:noFill/>
+          </p:spPr>
+          <p:style>
+            <a:lnRef idx="1">
+              <a:schemeClr val="accent1"/>
+            </a:lnRef>
+            <a:fillRef idx="3">
+              <a:schemeClr val="accent1"/>
+            </a:fillRef>
+            <a:effectRef idx="2">
+              <a:schemeClr val="accent1"/>
+            </a:effectRef>
+            <a:fontRef idx="minor">
+              <a:schemeClr val="lt1"/>
+            </a:fontRef>
+          </p:style>
+          <p:txBody>
+            <a:bodyPr rtlCol="0" anchor="ctr"/>
+            <a:lstStyle/>
+            <a:p>
+              <a:pPr algn="ctr"/>
+              <a:endParaRPr lang="en-US"/>
+            </a:p>
+          </p:txBody>
+        </p:sp>
+        <p:sp>
+          <p:nvSpPr>
+            <p:cNvPr id="43" name="Oval 42">
+              <a:extLst>
+                <a:ext uri="{FF2B5EF4-FFF2-40B4-BE49-F238E27FC236}">
+                  <a16:creationId xmlns:a16="http://schemas.microsoft.com/office/drawing/2014/main" id="{6B8F5EF2-B855-970C-23E2-5E61DFC52A1C}"/>
+                </a:ext>
+              </a:extLst>
+            </p:cNvPr>
+            <p:cNvSpPr/>
+            <p:nvPr/>
+          </p:nvSpPr>
+          <p:spPr>
+            <a:xfrm>
+              <a:off x="5778883" y="4676322"/>
+              <a:ext cx="112761" cy="112767"/>
+            </a:xfrm>
+            <a:prstGeom prst="ellipse">
+              <a:avLst/>
+            </a:prstGeom>
+          </p:spPr>
+          <p:style>
+            <a:lnRef idx="1">
+              <a:schemeClr val="accent1"/>
+            </a:lnRef>
+            <a:fillRef idx="3">
+              <a:schemeClr val="accent1"/>
+            </a:fillRef>
+            <a:effectRef idx="2">
+              <a:schemeClr val="accent1"/>
+            </a:effectRef>
+            <a:fontRef idx="minor">
+              <a:schemeClr val="lt1"/>
+            </a:fontRef>
+          </p:style>
+          <p:txBody>
+            <a:bodyPr rtlCol="0" anchor="ctr"/>
+            <a:lstStyle/>
+            <a:p>
+              <a:pPr algn="ctr"/>
+              <a:endParaRPr lang="en-US"/>
+            </a:p>
+          </p:txBody>
+        </p:sp>
+        <p:cxnSp>
+          <p:nvCxnSpPr>
+            <p:cNvPr id="44" name="Straight Connector 43">
+              <a:extLst>
+                <a:ext uri="{FF2B5EF4-FFF2-40B4-BE49-F238E27FC236}">
+                  <a16:creationId xmlns:a16="http://schemas.microsoft.com/office/drawing/2014/main" id="{D042950C-062F-966D-9FBA-966F0C5E062F}"/>
+                </a:ext>
+              </a:extLst>
+            </p:cNvPr>
+            <p:cNvCxnSpPr>
+              <a:cxnSpLocks/>
+              <a:stCxn id="42" idx="0"/>
+              <a:endCxn id="42" idx="2"/>
+            </p:cNvCxnSpPr>
+            <p:nvPr/>
+          </p:nvCxnSpPr>
+          <p:spPr>
+            <a:xfrm>
+              <a:off x="6639426" y="3958176"/>
+              <a:ext cx="0" cy="2510544"/>
+            </a:xfrm>
+            <a:prstGeom prst="line">
+              <a:avLst/>
+            </a:prstGeom>
+            <a:ln>
+              <a:prstDash val="dot"/>
+            </a:ln>
+          </p:spPr>
+          <p:style>
+            <a:lnRef idx="2">
+              <a:schemeClr val="accent1"/>
+            </a:lnRef>
+            <a:fillRef idx="0">
+              <a:schemeClr val="accent1"/>
+            </a:fillRef>
+            <a:effectRef idx="1">
+              <a:schemeClr val="accent1"/>
+            </a:effectRef>
+            <a:fontRef idx="minor">
+              <a:schemeClr val="tx1"/>
+            </a:fontRef>
+          </p:style>
+        </p:cxnSp>
+        <p:cxnSp>
+          <p:nvCxnSpPr>
+            <p:cNvPr id="45" name="Straight Connector 44">
+              <a:extLst>
+                <a:ext uri="{FF2B5EF4-FFF2-40B4-BE49-F238E27FC236}">
+                  <a16:creationId xmlns:a16="http://schemas.microsoft.com/office/drawing/2014/main" id="{74C55899-DBE0-093A-3F31-6048890026EC}"/>
+                </a:ext>
+              </a:extLst>
+            </p:cNvPr>
+            <p:cNvCxnSpPr>
+              <a:cxnSpLocks/>
+              <a:stCxn id="42" idx="1"/>
+              <a:endCxn id="42" idx="3"/>
+            </p:cNvCxnSpPr>
+            <p:nvPr/>
+          </p:nvCxnSpPr>
+          <p:spPr>
+            <a:xfrm>
+              <a:off x="4876798" y="5213448"/>
+              <a:ext cx="3525255" cy="0"/>
+            </a:xfrm>
+            <a:prstGeom prst="line">
+              <a:avLst/>
+            </a:prstGeom>
+            <a:ln>
+              <a:prstDash val="dot"/>
+            </a:ln>
+          </p:spPr>
+          <p:style>
+            <a:lnRef idx="2">
+              <a:schemeClr val="accent1"/>
+            </a:lnRef>
+            <a:fillRef idx="0">
+              <a:schemeClr val="accent1"/>
+            </a:fillRef>
+            <a:effectRef idx="1">
+              <a:schemeClr val="accent1"/>
+            </a:effectRef>
+            <a:fontRef idx="minor">
+              <a:schemeClr val="tx1"/>
+            </a:fontRef>
+          </p:style>
+        </p:cxnSp>
+        <p:sp>
+          <p:nvSpPr>
+            <p:cNvPr id="46" name="Oval 45">
+              <a:extLst>
+                <a:ext uri="{FF2B5EF4-FFF2-40B4-BE49-F238E27FC236}">
+                  <a16:creationId xmlns:a16="http://schemas.microsoft.com/office/drawing/2014/main" id="{F6DECEAF-0E19-7006-759B-CA4EAD83368F}"/>
+                </a:ext>
+              </a:extLst>
+            </p:cNvPr>
+            <p:cNvSpPr/>
+            <p:nvPr/>
+          </p:nvSpPr>
+          <p:spPr>
+            <a:xfrm>
+              <a:off x="7582102" y="4153078"/>
+              <a:ext cx="112761" cy="112767"/>
+            </a:xfrm>
+            <a:prstGeom prst="ellipse">
+              <a:avLst/>
+            </a:prstGeom>
+            <a:solidFill>
+              <a:srgbClr val="CCFFCC"/>
+            </a:solidFill>
+          </p:spPr>
+          <p:style>
+            <a:lnRef idx="1">
+              <a:schemeClr val="accent1"/>
+            </a:lnRef>
+            <a:fillRef idx="3">
+              <a:schemeClr val="accent1"/>
+            </a:fillRef>
+            <a:effectRef idx="2">
+              <a:schemeClr val="accent1"/>
+            </a:effectRef>
+            <a:fontRef idx="minor">
+              <a:schemeClr val="lt1"/>
+            </a:fontRef>
+          </p:style>
+          <p:txBody>
+            <a:bodyPr rtlCol="0" anchor="ctr"/>
+            <a:lstStyle/>
+            <a:p>
+              <a:pPr algn="ctr"/>
+              <a:endParaRPr lang="en-US"/>
+            </a:p>
+          </p:txBody>
+        </p:sp>
+        <p:sp>
+          <p:nvSpPr>
+            <p:cNvPr id="47" name="Oval 46">
+              <a:extLst>
+                <a:ext uri="{FF2B5EF4-FFF2-40B4-BE49-F238E27FC236}">
+                  <a16:creationId xmlns:a16="http://schemas.microsoft.com/office/drawing/2014/main" id="{B5BEE760-5B65-1274-B57B-55E1E6F76648}"/>
+                </a:ext>
+              </a:extLst>
+            </p:cNvPr>
+            <p:cNvSpPr/>
+            <p:nvPr/>
+          </p:nvSpPr>
+          <p:spPr>
+            <a:xfrm>
+              <a:off x="5818750" y="5868556"/>
+              <a:ext cx="112761" cy="112767"/>
+            </a:xfrm>
+            <a:prstGeom prst="ellipse">
+              <a:avLst/>
+            </a:prstGeom>
+            <a:solidFill>
+              <a:schemeClr val="accent2">
+                <a:lumMod val="60000"/>
+                <a:lumOff val="40000"/>
+              </a:schemeClr>
+            </a:solidFill>
+          </p:spPr>
+          <p:style>
+            <a:lnRef idx="1">
+              <a:schemeClr val="accent1"/>
+            </a:lnRef>
+            <a:fillRef idx="3">
+              <a:schemeClr val="accent1"/>
+            </a:fillRef>
+            <a:effectRef idx="2">
+              <a:schemeClr val="accent1"/>
+            </a:effectRef>
+            <a:fontRef idx="minor">
+              <a:schemeClr val="lt1"/>
+            </a:fontRef>
+          </p:style>
+          <p:txBody>
+            <a:bodyPr rtlCol="0" anchor="ctr"/>
+            <a:lstStyle/>
+            <a:p>
+              <a:pPr algn="ctr"/>
+              <a:endParaRPr lang="en-US"/>
+            </a:p>
+          </p:txBody>
+        </p:sp>
+        <p:sp>
+          <p:nvSpPr>
+            <p:cNvPr id="48" name="Oval 47">
+              <a:extLst>
+                <a:ext uri="{FF2B5EF4-FFF2-40B4-BE49-F238E27FC236}">
+                  <a16:creationId xmlns:a16="http://schemas.microsoft.com/office/drawing/2014/main" id="{F9192D85-CAAE-8F1B-D5AF-865518EC741E}"/>
+                </a:ext>
+              </a:extLst>
+            </p:cNvPr>
+            <p:cNvSpPr/>
+            <p:nvPr/>
+          </p:nvSpPr>
+          <p:spPr>
+            <a:xfrm>
+              <a:off x="5582741" y="5832946"/>
+              <a:ext cx="45719" cy="45719"/>
+            </a:xfrm>
+            <a:prstGeom prst="ellipse">
+              <a:avLst/>
+            </a:prstGeom>
+            <a:solidFill>
+              <a:schemeClr val="tx1"/>
+            </a:solidFill>
+            <a:ln>
+              <a:solidFill>
+                <a:srgbClr val="000000"/>
+              </a:solidFill>
+            </a:ln>
+          </p:spPr>
+          <p:style>
+            <a:lnRef idx="1">
+              <a:schemeClr val="accent1"/>
+            </a:lnRef>
+            <a:fillRef idx="3">
+              <a:schemeClr val="accent1"/>
+            </a:fillRef>
+            <a:effectRef idx="2">
+              <a:schemeClr val="accent1"/>
+            </a:effectRef>
+            <a:fontRef idx="minor">
+              <a:schemeClr val="lt1"/>
+            </a:fontRef>
+          </p:style>
+          <p:txBody>
+            <a:bodyPr rtlCol="0" anchor="ctr"/>
+            <a:lstStyle/>
+            <a:p>
+              <a:pPr algn="ctr"/>
+              <a:endParaRPr lang="en-US"/>
+            </a:p>
+          </p:txBody>
+        </p:sp>
+        <p:sp>
+          <p:nvSpPr>
+            <p:cNvPr id="49" name="Oval 48">
+              <a:extLst>
+                <a:ext uri="{FF2B5EF4-FFF2-40B4-BE49-F238E27FC236}">
+                  <a16:creationId xmlns:a16="http://schemas.microsoft.com/office/drawing/2014/main" id="{EDE1CC8D-4626-B5F9-04CD-3477AF04A80E}"/>
+                </a:ext>
+              </a:extLst>
+            </p:cNvPr>
+            <p:cNvSpPr/>
+            <p:nvPr/>
+          </p:nvSpPr>
+          <p:spPr>
+            <a:xfrm>
+              <a:off x="6162461" y="5985346"/>
+              <a:ext cx="45719" cy="45719"/>
+            </a:xfrm>
+            <a:prstGeom prst="ellipse">
+              <a:avLst/>
+            </a:prstGeom>
+            <a:solidFill>
+              <a:schemeClr val="tx1"/>
+            </a:solidFill>
+            <a:ln>
+              <a:solidFill>
+                <a:srgbClr val="000000"/>
+              </a:solidFill>
+            </a:ln>
+          </p:spPr>
+          <p:style>
+            <a:lnRef idx="1">
+              <a:schemeClr val="accent1"/>
+            </a:lnRef>
+            <a:fillRef idx="3">
+              <a:schemeClr val="accent1"/>
+            </a:fillRef>
+            <a:effectRef idx="2">
+              <a:schemeClr val="accent1"/>
+            </a:effectRef>
+            <a:fontRef idx="minor">
+              <a:schemeClr val="lt1"/>
+            </a:fontRef>
+          </p:style>
+          <p:txBody>
+            <a:bodyPr rtlCol="0" anchor="ctr"/>
+            <a:lstStyle/>
+            <a:p>
+              <a:pPr algn="ctr"/>
+              <a:endParaRPr lang="en-US"/>
+            </a:p>
+          </p:txBody>
+        </p:sp>
+        <p:sp>
+          <p:nvSpPr>
+            <p:cNvPr id="50" name="Oval 49">
+              <a:extLst>
+                <a:ext uri="{FF2B5EF4-FFF2-40B4-BE49-F238E27FC236}">
+                  <a16:creationId xmlns:a16="http://schemas.microsoft.com/office/drawing/2014/main" id="{262EF221-FC52-8331-8E0C-3EBA20915833}"/>
+                </a:ext>
+              </a:extLst>
+            </p:cNvPr>
+            <p:cNvSpPr/>
+            <p:nvPr/>
+          </p:nvSpPr>
+          <p:spPr>
+            <a:xfrm>
+              <a:off x="5851931" y="5924086"/>
+              <a:ext cx="45719" cy="45719"/>
+            </a:xfrm>
+            <a:prstGeom prst="ellipse">
+              <a:avLst/>
+            </a:prstGeom>
+            <a:solidFill>
+              <a:schemeClr val="tx1"/>
+            </a:solidFill>
+            <a:ln>
+              <a:solidFill>
+                <a:srgbClr val="000000"/>
+              </a:solidFill>
+            </a:ln>
+          </p:spPr>
+          <p:style>
+            <a:lnRef idx="1">
+              <a:schemeClr val="accent1"/>
+            </a:lnRef>
+            <a:fillRef idx="3">
+              <a:schemeClr val="accent1"/>
+            </a:fillRef>
+            <a:effectRef idx="2">
+              <a:schemeClr val="accent1"/>
+            </a:effectRef>
+            <a:fontRef idx="minor">
+              <a:schemeClr val="lt1"/>
+            </a:fontRef>
+          </p:style>
+          <p:txBody>
+            <a:bodyPr rtlCol="0" anchor="ctr"/>
+            <a:lstStyle/>
+            <a:p>
+              <a:pPr algn="ctr"/>
+              <a:endParaRPr lang="en-US"/>
+            </a:p>
+          </p:txBody>
+        </p:sp>
+        <p:sp>
+          <p:nvSpPr>
+            <p:cNvPr id="51" name="Oval 50">
+              <a:extLst>
+                <a:ext uri="{FF2B5EF4-FFF2-40B4-BE49-F238E27FC236}">
+                  <a16:creationId xmlns:a16="http://schemas.microsoft.com/office/drawing/2014/main" id="{E54673F7-340C-D17F-A74B-D4184BDEE174}"/>
+                </a:ext>
+              </a:extLst>
+            </p:cNvPr>
+            <p:cNvSpPr/>
+            <p:nvPr/>
+          </p:nvSpPr>
+          <p:spPr>
+            <a:xfrm>
+              <a:off x="5735141" y="4537206"/>
+              <a:ext cx="45719" cy="45719"/>
+            </a:xfrm>
+            <a:prstGeom prst="ellipse">
+              <a:avLst/>
+            </a:prstGeom>
+            <a:solidFill>
+              <a:schemeClr val="tx1"/>
+            </a:solidFill>
+            <a:ln>
+              <a:solidFill>
+                <a:srgbClr val="000000"/>
+              </a:solidFill>
+            </a:ln>
+          </p:spPr>
+          <p:style>
+            <a:lnRef idx="1">
+              <a:schemeClr val="accent1"/>
+            </a:lnRef>
+            <a:fillRef idx="3">
+              <a:schemeClr val="accent1"/>
+            </a:fillRef>
+            <a:effectRef idx="2">
+              <a:schemeClr val="accent1"/>
+            </a:effectRef>
+            <a:fontRef idx="minor">
+              <a:schemeClr val="lt1"/>
+            </a:fontRef>
+          </p:style>
+          <p:txBody>
+            <a:bodyPr rtlCol="0" anchor="ctr"/>
+            <a:lstStyle/>
+            <a:p>
+              <a:pPr algn="ctr"/>
+              <a:endParaRPr lang="en-US"/>
+            </a:p>
+          </p:txBody>
+        </p:sp>
+        <p:sp>
+          <p:nvSpPr>
+            <p:cNvPr id="52" name="Oval 51">
+              <a:extLst>
+                <a:ext uri="{FF2B5EF4-FFF2-40B4-BE49-F238E27FC236}">
+                  <a16:creationId xmlns:a16="http://schemas.microsoft.com/office/drawing/2014/main" id="{04F4F7BA-B8C9-2965-6185-5C00D3B063A4}"/>
+                </a:ext>
+              </a:extLst>
+            </p:cNvPr>
+            <p:cNvSpPr/>
+            <p:nvPr/>
+          </p:nvSpPr>
+          <p:spPr>
+            <a:xfrm>
+              <a:off x="5634783" y="4797878"/>
+              <a:ext cx="45719" cy="45719"/>
+            </a:xfrm>
+            <a:prstGeom prst="ellipse">
+              <a:avLst/>
+            </a:prstGeom>
+            <a:solidFill>
+              <a:schemeClr val="tx1"/>
+            </a:solidFill>
+            <a:ln>
+              <a:solidFill>
+                <a:srgbClr val="000000"/>
+              </a:solidFill>
+            </a:ln>
+          </p:spPr>
+          <p:style>
+            <a:lnRef idx="1">
+              <a:schemeClr val="accent1"/>
+            </a:lnRef>
+            <a:fillRef idx="3">
+              <a:schemeClr val="accent1"/>
+            </a:fillRef>
+            <a:effectRef idx="2">
+              <a:schemeClr val="accent1"/>
+            </a:effectRef>
+            <a:fontRef idx="minor">
+              <a:schemeClr val="lt1"/>
+            </a:fontRef>
+          </p:style>
+          <p:txBody>
+            <a:bodyPr rtlCol="0" anchor="ctr"/>
+            <a:lstStyle/>
+            <a:p>
+              <a:pPr algn="ctr"/>
+              <a:endParaRPr lang="en-US"/>
+            </a:p>
+          </p:txBody>
+        </p:sp>
+        <p:sp>
+          <p:nvSpPr>
+            <p:cNvPr id="53" name="Oval 52">
+              <a:extLst>
+                <a:ext uri="{FF2B5EF4-FFF2-40B4-BE49-F238E27FC236}">
+                  <a16:creationId xmlns:a16="http://schemas.microsoft.com/office/drawing/2014/main" id="{34E19C67-6C7D-44B1-A505-7C6F36A2D43B}"/>
+                </a:ext>
+              </a:extLst>
+            </p:cNvPr>
+            <p:cNvSpPr/>
+            <p:nvPr/>
+          </p:nvSpPr>
+          <p:spPr>
+            <a:xfrm>
+              <a:off x="6004331" y="4628346"/>
+              <a:ext cx="45719" cy="45719"/>
+            </a:xfrm>
+            <a:prstGeom prst="ellipse">
+              <a:avLst/>
+            </a:prstGeom>
+            <a:solidFill>
+              <a:schemeClr val="tx1"/>
+            </a:solidFill>
+            <a:ln>
+              <a:solidFill>
+                <a:srgbClr val="000000"/>
+              </a:solidFill>
+            </a:ln>
+          </p:spPr>
+          <p:style>
+            <a:lnRef idx="1">
+              <a:schemeClr val="accent1"/>
+            </a:lnRef>
+            <a:fillRef idx="3">
+              <a:schemeClr val="accent1"/>
+            </a:fillRef>
+            <a:effectRef idx="2">
+              <a:schemeClr val="accent1"/>
+            </a:effectRef>
+            <a:fontRef idx="minor">
+              <a:schemeClr val="lt1"/>
+            </a:fontRef>
+          </p:style>
+          <p:txBody>
+            <a:bodyPr rtlCol="0" anchor="ctr"/>
+            <a:lstStyle/>
+            <a:p>
+              <a:pPr algn="ctr"/>
+              <a:endParaRPr lang="en-US"/>
+            </a:p>
+          </p:txBody>
+        </p:sp>
+        <p:sp>
+          <p:nvSpPr>
+            <p:cNvPr id="54" name="Oval 53">
+              <a:extLst>
+                <a:ext uri="{FF2B5EF4-FFF2-40B4-BE49-F238E27FC236}">
+                  <a16:creationId xmlns:a16="http://schemas.microsoft.com/office/drawing/2014/main" id="{A90C8A3D-F471-F194-D18C-FF45D08FBE93}"/>
+                </a:ext>
+              </a:extLst>
+            </p:cNvPr>
+            <p:cNvSpPr/>
+            <p:nvPr/>
+          </p:nvSpPr>
+          <p:spPr>
+            <a:xfrm>
+              <a:off x="7537471" y="4618386"/>
+              <a:ext cx="45719" cy="45719"/>
+            </a:xfrm>
+            <a:prstGeom prst="ellipse">
+              <a:avLst/>
+            </a:prstGeom>
+            <a:solidFill>
+              <a:schemeClr val="tx1"/>
+            </a:solidFill>
+            <a:ln>
+              <a:solidFill>
+                <a:srgbClr val="000000"/>
+              </a:solidFill>
+            </a:ln>
+          </p:spPr>
+          <p:style>
+            <a:lnRef idx="1">
+              <a:schemeClr val="accent1"/>
+            </a:lnRef>
+            <a:fillRef idx="3">
+              <a:schemeClr val="accent1"/>
+            </a:fillRef>
+            <a:effectRef idx="2">
+              <a:schemeClr val="accent1"/>
+            </a:effectRef>
+            <a:fontRef idx="minor">
+              <a:schemeClr val="lt1"/>
+            </a:fontRef>
+          </p:style>
+          <p:txBody>
+            <a:bodyPr rtlCol="0" anchor="ctr"/>
+            <a:lstStyle/>
+            <a:p>
+              <a:pPr algn="ctr"/>
+              <a:endParaRPr lang="en-US"/>
+            </a:p>
+          </p:txBody>
+        </p:sp>
+        <p:sp>
+          <p:nvSpPr>
+            <p:cNvPr id="55" name="Oval 54">
+              <a:extLst>
+                <a:ext uri="{FF2B5EF4-FFF2-40B4-BE49-F238E27FC236}">
+                  <a16:creationId xmlns:a16="http://schemas.microsoft.com/office/drawing/2014/main" id="{4B727DCF-917D-4A90-31D3-418F0DE6985D}"/>
+                </a:ext>
+              </a:extLst>
+            </p:cNvPr>
+            <p:cNvSpPr/>
+            <p:nvPr/>
+          </p:nvSpPr>
+          <p:spPr>
+            <a:xfrm>
+              <a:off x="8069711" y="4022976"/>
+              <a:ext cx="45719" cy="45719"/>
+            </a:xfrm>
+            <a:prstGeom prst="ellipse">
+              <a:avLst/>
+            </a:prstGeom>
+            <a:solidFill>
+              <a:schemeClr val="tx1"/>
+            </a:solidFill>
+            <a:ln>
+              <a:solidFill>
+                <a:srgbClr val="000000"/>
+              </a:solidFill>
+            </a:ln>
+          </p:spPr>
+          <p:style>
+            <a:lnRef idx="1">
+              <a:schemeClr val="accent1"/>
+            </a:lnRef>
+            <a:fillRef idx="3">
+              <a:schemeClr val="accent1"/>
+            </a:fillRef>
+            <a:effectRef idx="2">
+              <a:schemeClr val="accent1"/>
+            </a:effectRef>
+            <a:fontRef idx="minor">
+              <a:schemeClr val="lt1"/>
+            </a:fontRef>
+          </p:style>
+          <p:txBody>
+            <a:bodyPr rtlCol="0" anchor="ctr"/>
+            <a:lstStyle/>
+            <a:p>
+              <a:pPr algn="ctr"/>
+              <a:endParaRPr lang="en-US"/>
+            </a:p>
+          </p:txBody>
+        </p:sp>
+        <p:sp>
+          <p:nvSpPr>
+            <p:cNvPr id="56" name="Oval 55">
+              <a:extLst>
+                <a:ext uri="{FF2B5EF4-FFF2-40B4-BE49-F238E27FC236}">
+                  <a16:creationId xmlns:a16="http://schemas.microsoft.com/office/drawing/2014/main" id="{63A64A85-5E9F-50EC-EE1E-713624209CE5}"/>
+                </a:ext>
+              </a:extLst>
+            </p:cNvPr>
+            <p:cNvSpPr/>
+            <p:nvPr/>
+          </p:nvSpPr>
+          <p:spPr>
+            <a:xfrm>
+              <a:off x="7308121" y="3997326"/>
+              <a:ext cx="45719" cy="45719"/>
+            </a:xfrm>
+            <a:prstGeom prst="ellipse">
+              <a:avLst/>
+            </a:prstGeom>
+            <a:solidFill>
+              <a:schemeClr val="tx1"/>
+            </a:solidFill>
+            <a:ln>
+              <a:solidFill>
+                <a:srgbClr val="000000"/>
+              </a:solidFill>
+            </a:ln>
+          </p:spPr>
+          <p:style>
+            <a:lnRef idx="1">
+              <a:schemeClr val="accent1"/>
+            </a:lnRef>
+            <a:fillRef idx="3">
+              <a:schemeClr val="accent1"/>
+            </a:fillRef>
+            <a:effectRef idx="2">
+              <a:schemeClr val="accent1"/>
+            </a:effectRef>
+            <a:fontRef idx="minor">
+              <a:schemeClr val="lt1"/>
+            </a:fontRef>
+          </p:style>
+          <p:txBody>
+            <a:bodyPr rtlCol="0" anchor="ctr"/>
+            <a:lstStyle/>
+            <a:p>
+              <a:pPr algn="ctr"/>
+              <a:endParaRPr lang="en-US"/>
+            </a:p>
+          </p:txBody>
+        </p:sp>
+        <p:cxnSp>
+          <p:nvCxnSpPr>
+            <p:cNvPr id="57" name="Straight Arrow Connector 56">
+              <a:extLst>
+                <a:ext uri="{FF2B5EF4-FFF2-40B4-BE49-F238E27FC236}">
+                  <a16:creationId xmlns:a16="http://schemas.microsoft.com/office/drawing/2014/main" id="{0448444B-0AA6-2415-9C91-F32CE71ABD8C}"/>
+                </a:ext>
+              </a:extLst>
+            </p:cNvPr>
+            <p:cNvCxnSpPr>
+              <a:stCxn id="48" idx="6"/>
+              <a:endCxn id="47" idx="2"/>
+            </p:cNvCxnSpPr>
+            <p:nvPr/>
+          </p:nvCxnSpPr>
+          <p:spPr>
+            <a:xfrm>
+              <a:off x="5628460" y="5855806"/>
+              <a:ext cx="190290" cy="69134"/>
+            </a:xfrm>
+            <a:prstGeom prst="straightConnector1">
+              <a:avLst/>
+            </a:prstGeom>
+            <a:ln>
+              <a:headEnd type="arrow" w="sm" len="sm"/>
+              <a:tailEnd type="arrow" w="sm" len="sm"/>
+            </a:ln>
+          </p:spPr>
+          <p:style>
+            <a:lnRef idx="2">
+              <a:schemeClr val="accent1"/>
+            </a:lnRef>
+            <a:fillRef idx="0">
+              <a:schemeClr val="accent1"/>
+            </a:fillRef>
+            <a:effectRef idx="1">
+              <a:schemeClr val="accent1"/>
+            </a:effectRef>
+            <a:fontRef idx="minor">
+              <a:schemeClr val="tx1"/>
+            </a:fontRef>
+          </p:style>
+        </p:cxnSp>
+        <p:cxnSp>
+          <p:nvCxnSpPr>
+            <p:cNvPr id="58" name="Straight Arrow Connector 57">
+              <a:extLst>
+                <a:ext uri="{FF2B5EF4-FFF2-40B4-BE49-F238E27FC236}">
+                  <a16:creationId xmlns:a16="http://schemas.microsoft.com/office/drawing/2014/main" id="{D7C35C29-5809-A52D-B696-1F835F1C7F30}"/>
+                </a:ext>
+              </a:extLst>
+            </p:cNvPr>
+            <p:cNvCxnSpPr>
+              <a:endCxn id="49" idx="6"/>
+            </p:cNvCxnSpPr>
+            <p:nvPr/>
+          </p:nvCxnSpPr>
+          <p:spPr>
+            <a:xfrm>
+              <a:off x="5931511" y="5928353"/>
+              <a:ext cx="276669" cy="79853"/>
+            </a:xfrm>
+            <a:prstGeom prst="straightConnector1">
+              <a:avLst/>
+            </a:prstGeom>
+            <a:ln>
+              <a:headEnd type="arrow" w="sm" len="sm"/>
+              <a:tailEnd type="arrow" w="sm" len="sm"/>
+            </a:ln>
+          </p:spPr>
+          <p:style>
+            <a:lnRef idx="2">
+              <a:schemeClr val="accent1"/>
+            </a:lnRef>
+            <a:fillRef idx="0">
+              <a:schemeClr val="accent1"/>
+            </a:fillRef>
+            <a:effectRef idx="1">
+              <a:schemeClr val="accent1"/>
+            </a:effectRef>
+            <a:fontRef idx="minor">
+              <a:schemeClr val="tx1"/>
+            </a:fontRef>
+          </p:style>
+        </p:cxnSp>
+        <p:cxnSp>
+          <p:nvCxnSpPr>
+            <p:cNvPr id="59" name="Straight Arrow Connector 58">
+              <a:extLst>
+                <a:ext uri="{FF2B5EF4-FFF2-40B4-BE49-F238E27FC236}">
+                  <a16:creationId xmlns:a16="http://schemas.microsoft.com/office/drawing/2014/main" id="{AEF3E66E-D197-DC21-7A86-22026B349B27}"/>
+                </a:ext>
+              </a:extLst>
+            </p:cNvPr>
+            <p:cNvCxnSpPr>
+              <a:endCxn id="46" idx="1"/>
+            </p:cNvCxnSpPr>
+            <p:nvPr/>
+          </p:nvCxnSpPr>
+          <p:spPr>
+            <a:xfrm>
+              <a:off x="7336057" y="4022976"/>
+              <a:ext cx="262558" cy="146616"/>
+            </a:xfrm>
+            <a:prstGeom prst="straightConnector1">
+              <a:avLst/>
+            </a:prstGeom>
+            <a:ln>
+              <a:headEnd type="arrow" w="sm" len="sm"/>
+              <a:tailEnd type="arrow" w="sm" len="sm"/>
+            </a:ln>
+          </p:spPr>
+          <p:style>
+            <a:lnRef idx="2">
+              <a:schemeClr val="accent1"/>
+            </a:lnRef>
+            <a:fillRef idx="0">
+              <a:schemeClr val="accent1"/>
+            </a:fillRef>
+            <a:effectRef idx="1">
+              <a:schemeClr val="accent1"/>
+            </a:effectRef>
+            <a:fontRef idx="minor">
+              <a:schemeClr val="tx1"/>
+            </a:fontRef>
+          </p:style>
+        </p:cxnSp>
+        <p:cxnSp>
+          <p:nvCxnSpPr>
+            <p:cNvPr id="60" name="Straight Arrow Connector 59">
+              <a:extLst>
+                <a:ext uri="{FF2B5EF4-FFF2-40B4-BE49-F238E27FC236}">
+                  <a16:creationId xmlns:a16="http://schemas.microsoft.com/office/drawing/2014/main" id="{32A685D6-2A3A-D0B3-EC97-27EFE655907B}"/>
+                </a:ext>
+              </a:extLst>
+            </p:cNvPr>
+            <p:cNvCxnSpPr>
+              <a:stCxn id="54" idx="0"/>
+              <a:endCxn id="46" idx="4"/>
+            </p:cNvCxnSpPr>
+            <p:nvPr/>
+          </p:nvCxnSpPr>
+          <p:spPr>
+            <a:xfrm flipV="1">
+              <a:off x="7560331" y="4265845"/>
+              <a:ext cx="78152" cy="352541"/>
+            </a:xfrm>
+            <a:prstGeom prst="straightConnector1">
+              <a:avLst/>
+            </a:prstGeom>
+            <a:ln>
+              <a:headEnd type="arrow" w="sm" len="sm"/>
+              <a:tailEnd type="arrow" w="sm" len="sm"/>
+            </a:ln>
+          </p:spPr>
+          <p:style>
+            <a:lnRef idx="2">
+              <a:schemeClr val="accent1"/>
+            </a:lnRef>
+            <a:fillRef idx="0">
+              <a:schemeClr val="accent1"/>
+            </a:fillRef>
+            <a:effectRef idx="1">
+              <a:schemeClr val="accent1"/>
+            </a:effectRef>
+            <a:fontRef idx="minor">
+              <a:schemeClr val="tx1"/>
+            </a:fontRef>
+          </p:style>
+        </p:cxnSp>
+        <p:cxnSp>
+          <p:nvCxnSpPr>
+            <p:cNvPr id="61" name="Straight Arrow Connector 60">
+              <a:extLst>
+                <a:ext uri="{FF2B5EF4-FFF2-40B4-BE49-F238E27FC236}">
+                  <a16:creationId xmlns:a16="http://schemas.microsoft.com/office/drawing/2014/main" id="{C151C0B6-641C-B6D0-3197-C8005364CA15}"/>
+                </a:ext>
+              </a:extLst>
+            </p:cNvPr>
+            <p:cNvCxnSpPr>
+              <a:stCxn id="46" idx="6"/>
+              <a:endCxn id="55" idx="3"/>
+            </p:cNvCxnSpPr>
+            <p:nvPr/>
+          </p:nvCxnSpPr>
+          <p:spPr>
+            <a:xfrm flipV="1">
+              <a:off x="7694863" y="4062000"/>
+              <a:ext cx="381543" cy="147462"/>
+            </a:xfrm>
+            <a:prstGeom prst="straightConnector1">
+              <a:avLst/>
+            </a:prstGeom>
+            <a:ln>
+              <a:headEnd type="arrow" w="sm" len="sm"/>
+              <a:tailEnd type="arrow" w="sm" len="sm"/>
+            </a:ln>
+          </p:spPr>
+          <p:style>
+            <a:lnRef idx="2">
+              <a:schemeClr val="accent1"/>
+            </a:lnRef>
+            <a:fillRef idx="0">
+              <a:schemeClr val="accent1"/>
+            </a:fillRef>
+            <a:effectRef idx="1">
+              <a:schemeClr val="accent1"/>
+            </a:effectRef>
+            <a:fontRef idx="minor">
+              <a:schemeClr val="tx1"/>
+            </a:fontRef>
+          </p:style>
+        </p:cxnSp>
+        <p:cxnSp>
+          <p:nvCxnSpPr>
+            <p:cNvPr id="62" name="Straight Arrow Connector 61">
+              <a:extLst>
+                <a:ext uri="{FF2B5EF4-FFF2-40B4-BE49-F238E27FC236}">
+                  <a16:creationId xmlns:a16="http://schemas.microsoft.com/office/drawing/2014/main" id="{E37129CC-57F5-C8A0-2863-7B896630C321}"/>
+                </a:ext>
+              </a:extLst>
+            </p:cNvPr>
+            <p:cNvCxnSpPr>
+              <a:stCxn id="43" idx="1"/>
+            </p:cNvCxnSpPr>
+            <p:nvPr/>
+          </p:nvCxnSpPr>
+          <p:spPr>
+            <a:xfrm flipH="1" flipV="1">
+              <a:off x="5758654" y="4555355"/>
+              <a:ext cx="36742" cy="137481"/>
+            </a:xfrm>
+            <a:prstGeom prst="straightConnector1">
+              <a:avLst/>
+            </a:prstGeom>
+            <a:ln>
+              <a:headEnd type="arrow" w="sm" len="sm"/>
+              <a:tailEnd type="arrow" w="sm" len="sm"/>
+            </a:ln>
+          </p:spPr>
+          <p:style>
+            <a:lnRef idx="2">
+              <a:schemeClr val="accent1"/>
+            </a:lnRef>
+            <a:fillRef idx="0">
+              <a:schemeClr val="accent1"/>
+            </a:fillRef>
+            <a:effectRef idx="1">
+              <a:schemeClr val="accent1"/>
+            </a:effectRef>
+            <a:fontRef idx="minor">
+              <a:schemeClr val="tx1"/>
+            </a:fontRef>
+          </p:style>
+        </p:cxnSp>
+        <p:cxnSp>
+          <p:nvCxnSpPr>
+            <p:cNvPr id="63" name="Straight Arrow Connector 62">
+              <a:extLst>
+                <a:ext uri="{FF2B5EF4-FFF2-40B4-BE49-F238E27FC236}">
+                  <a16:creationId xmlns:a16="http://schemas.microsoft.com/office/drawing/2014/main" id="{9401020C-4A43-1187-91E0-29EE3FE8FE8E}"/>
+                </a:ext>
+              </a:extLst>
+            </p:cNvPr>
+            <p:cNvCxnSpPr>
+              <a:stCxn id="43" idx="3"/>
+            </p:cNvCxnSpPr>
+            <p:nvPr/>
+          </p:nvCxnSpPr>
+          <p:spPr>
+            <a:xfrm flipH="1">
+              <a:off x="5661755" y="4772575"/>
+              <a:ext cx="133641" cy="41869"/>
+            </a:xfrm>
+            <a:prstGeom prst="straightConnector1">
+              <a:avLst/>
+            </a:prstGeom>
+            <a:ln>
+              <a:headEnd type="arrow" w="sm" len="sm"/>
+              <a:tailEnd type="arrow" w="sm" len="sm"/>
+            </a:ln>
+          </p:spPr>
+          <p:style>
+            <a:lnRef idx="2">
+              <a:schemeClr val="accent1"/>
+            </a:lnRef>
+            <a:fillRef idx="0">
+              <a:schemeClr val="accent1"/>
+            </a:fillRef>
+            <a:effectRef idx="1">
+              <a:schemeClr val="accent1"/>
+            </a:effectRef>
+            <a:fontRef idx="minor">
+              <a:schemeClr val="tx1"/>
+            </a:fontRef>
+          </p:style>
+        </p:cxnSp>
+        <p:cxnSp>
+          <p:nvCxnSpPr>
+            <p:cNvPr id="64" name="Straight Arrow Connector 63">
+              <a:extLst>
+                <a:ext uri="{FF2B5EF4-FFF2-40B4-BE49-F238E27FC236}">
+                  <a16:creationId xmlns:a16="http://schemas.microsoft.com/office/drawing/2014/main" id="{26999F3B-6FC6-5F54-D9F6-D88D489E0DEA}"/>
+                </a:ext>
+              </a:extLst>
+            </p:cNvPr>
+            <p:cNvCxnSpPr/>
+            <p:nvPr/>
+          </p:nvCxnSpPr>
+          <p:spPr>
+            <a:xfrm flipH="1">
+              <a:off x="5882574" y="4664105"/>
+              <a:ext cx="133641" cy="41869"/>
+            </a:xfrm>
+            <a:prstGeom prst="straightConnector1">
+              <a:avLst/>
+            </a:prstGeom>
+            <a:ln>
+              <a:headEnd type="arrow" w="sm" len="sm"/>
+              <a:tailEnd type="arrow" w="sm" len="sm"/>
+            </a:ln>
+          </p:spPr>
+          <p:style>
+            <a:lnRef idx="2">
+              <a:schemeClr val="accent1"/>
+            </a:lnRef>
+            <a:fillRef idx="0">
+              <a:schemeClr val="accent1"/>
+            </a:fillRef>
+            <a:effectRef idx="1">
+              <a:schemeClr val="accent1"/>
+            </a:effectRef>
+            <a:fontRef idx="minor">
+              <a:schemeClr val="tx1"/>
+            </a:fontRef>
+          </p:style>
+        </p:cxnSp>
+        <p:cxnSp>
+          <p:nvCxnSpPr>
+            <p:cNvPr id="65" name="Straight Arrow Connector 64">
+              <a:extLst>
+                <a:ext uri="{FF2B5EF4-FFF2-40B4-BE49-F238E27FC236}">
+                  <a16:creationId xmlns:a16="http://schemas.microsoft.com/office/drawing/2014/main" id="{770377BA-5FFF-EAD9-98B1-BEB24068A93C}"/>
+                </a:ext>
+              </a:extLst>
+            </p:cNvPr>
+            <p:cNvCxnSpPr/>
+            <p:nvPr/>
+          </p:nvCxnSpPr>
+          <p:spPr>
+            <a:xfrm>
+              <a:off x="5866593" y="4772575"/>
+              <a:ext cx="442938" cy="155232"/>
+            </a:xfrm>
+            <a:prstGeom prst="straightConnector1">
+              <a:avLst/>
+            </a:prstGeom>
+            <a:ln>
+              <a:headEnd type="arrow"/>
+              <a:tailEnd type="arrow"/>
+            </a:ln>
+          </p:spPr>
+          <p:style>
+            <a:lnRef idx="3">
+              <a:schemeClr val="accent2"/>
+            </a:lnRef>
+            <a:fillRef idx="0">
+              <a:schemeClr val="accent2"/>
+            </a:fillRef>
+            <a:effectRef idx="2">
+              <a:schemeClr val="accent2"/>
+            </a:effectRef>
+            <a:fontRef idx="minor">
+              <a:schemeClr val="tx1"/>
+            </a:fontRef>
+          </p:style>
+        </p:cxnSp>
+        <p:cxnSp>
+          <p:nvCxnSpPr>
+            <p:cNvPr id="66" name="Straight Arrow Connector 65">
+              <a:extLst>
+                <a:ext uri="{FF2B5EF4-FFF2-40B4-BE49-F238E27FC236}">
+                  <a16:creationId xmlns:a16="http://schemas.microsoft.com/office/drawing/2014/main" id="{839E598B-5418-4715-003F-8FEFCB487AE4}"/>
+                </a:ext>
+              </a:extLst>
+            </p:cNvPr>
+            <p:cNvCxnSpPr/>
+            <p:nvPr/>
+          </p:nvCxnSpPr>
+          <p:spPr>
+            <a:xfrm flipV="1">
+              <a:off x="5902844" y="5048364"/>
+              <a:ext cx="434401" cy="808886"/>
+            </a:xfrm>
+            <a:prstGeom prst="straightConnector1">
+              <a:avLst/>
+            </a:prstGeom>
+            <a:ln>
+              <a:headEnd type="arrow"/>
+              <a:tailEnd type="arrow"/>
+            </a:ln>
+          </p:spPr>
+          <p:style>
+            <a:lnRef idx="3">
+              <a:schemeClr val="accent2"/>
+            </a:lnRef>
+            <a:fillRef idx="0">
+              <a:schemeClr val="accent2"/>
+            </a:fillRef>
+            <a:effectRef idx="2">
+              <a:schemeClr val="accent2"/>
+            </a:effectRef>
+            <a:fontRef idx="minor">
+              <a:schemeClr val="tx1"/>
+            </a:fontRef>
+          </p:style>
+        </p:cxnSp>
+        <p:cxnSp>
+          <p:nvCxnSpPr>
+            <p:cNvPr id="67" name="Straight Arrow Connector 66">
+              <a:extLst>
+                <a:ext uri="{FF2B5EF4-FFF2-40B4-BE49-F238E27FC236}">
+                  <a16:creationId xmlns:a16="http://schemas.microsoft.com/office/drawing/2014/main" id="{F5B760BD-8572-9D7B-0415-AADC33017AE8}"/>
+                </a:ext>
+              </a:extLst>
+            </p:cNvPr>
+            <p:cNvCxnSpPr/>
+            <p:nvPr/>
+          </p:nvCxnSpPr>
+          <p:spPr>
+            <a:xfrm flipV="1">
+              <a:off x="6406289" y="4249331"/>
+              <a:ext cx="1192326" cy="692168"/>
+            </a:xfrm>
+            <a:prstGeom prst="straightConnector1">
+              <a:avLst/>
+            </a:prstGeom>
+            <a:ln>
+              <a:headEnd type="arrow"/>
+              <a:tailEnd type="arrow"/>
+            </a:ln>
+          </p:spPr>
+          <p:style>
+            <a:lnRef idx="3">
+              <a:schemeClr val="accent2"/>
+            </a:lnRef>
+            <a:fillRef idx="0">
+              <a:schemeClr val="accent2"/>
+            </a:fillRef>
+            <a:effectRef idx="2">
+              <a:schemeClr val="accent2"/>
+            </a:effectRef>
+            <a:fontRef idx="minor">
+              <a:schemeClr val="tx1"/>
+            </a:fontRef>
+          </p:style>
+        </p:cxnSp>
+        <p:sp>
+          <p:nvSpPr>
+            <p:cNvPr id="69" name="Oval 68">
+              <a:extLst>
+                <a:ext uri="{FF2B5EF4-FFF2-40B4-BE49-F238E27FC236}">
+                  <a16:creationId xmlns:a16="http://schemas.microsoft.com/office/drawing/2014/main" id="{20EE0F99-76B9-6352-A300-1E442F8381EC}"/>
+                </a:ext>
+              </a:extLst>
+            </p:cNvPr>
+            <p:cNvSpPr/>
+            <p:nvPr/>
+          </p:nvSpPr>
+          <p:spPr>
+            <a:xfrm>
+              <a:off x="6293018" y="4911293"/>
+              <a:ext cx="112761" cy="112767"/>
+            </a:xfrm>
+            <a:prstGeom prst="ellipse">
+              <a:avLst/>
+            </a:prstGeom>
+            <a:solidFill>
+              <a:schemeClr val="tx1"/>
+            </a:solidFill>
+            <a:ln>
+              <a:solidFill>
+                <a:srgbClr val="000000"/>
+              </a:solidFill>
+            </a:ln>
+          </p:spPr>
+          <p:style>
+            <a:lnRef idx="1">
+              <a:schemeClr val="accent1"/>
+            </a:lnRef>
+            <a:fillRef idx="3">
+              <a:schemeClr val="accent1"/>
+            </a:fillRef>
+            <a:effectRef idx="2">
+              <a:schemeClr val="accent1"/>
+            </a:effectRef>
+            <a:fontRef idx="minor">
+              <a:schemeClr val="lt1"/>
+            </a:fontRef>
+          </p:style>
+          <p:txBody>
+            <a:bodyPr rtlCol="0" anchor="ctr"/>
+            <a:lstStyle/>
+            <a:p>
+              <a:pPr algn="ctr"/>
+              <a:endParaRPr lang="en-US"/>
+            </a:p>
+          </p:txBody>
+        </p:sp>
+      </p:grpSp>
+      <p:sp>
+        <p:nvSpPr>
+          <p:cNvPr id="71" name="TextBox 70">
+            <a:extLst>
+              <a:ext uri="{FF2B5EF4-FFF2-40B4-BE49-F238E27FC236}">
+                <a16:creationId xmlns:a16="http://schemas.microsoft.com/office/drawing/2014/main" id="{8E0ADC2E-48F4-BA14-3EC3-28439C4E3064}"/>
+              </a:ext>
+            </a:extLst>
+          </p:cNvPr>
+          <p:cNvSpPr txBox="1"/>
+          <p:nvPr/>
+        </p:nvSpPr>
+        <p:spPr>
+          <a:xfrm>
+            <a:off x="1414643" y="303254"/>
+            <a:ext cx="2369763" cy="400110"/>
+          </a:xfrm>
+          <a:prstGeom prst="rect">
+            <a:avLst/>
+          </a:prstGeom>
+          <a:noFill/>
+        </p:spPr>
+        <p:txBody>
+          <a:bodyPr wrap="square" rtlCol="0">
+            <a:spAutoFit/>
+          </a:bodyPr>
+          <a:lstStyle/>
+          <a:p>
+            <a:r>
+              <a:rPr lang="en-US" sz="2000">
+                <a:solidFill>
+                  <a:schemeClr val="tx1">
+                    <a:lumMod val="75000"/>
+                    <a:lumOff val="25000"/>
+                  </a:schemeClr>
+                </a:solidFill>
+                <a:latin typeface=""/>
+              </a:rPr>
+              <a:t>ONE GROUP (H</a:t>
+            </a:r>
+            <a:r>
+              <a:rPr lang="en-US" sz="2000" baseline="-25000">
+                <a:solidFill>
+                  <a:schemeClr val="tx1">
+                    <a:lumMod val="75000"/>
+                    <a:lumOff val="25000"/>
+                  </a:schemeClr>
+                </a:solidFill>
+                <a:latin typeface=""/>
+              </a:rPr>
+              <a:t>0</a:t>
+            </a:r>
+            <a:r>
+              <a:rPr lang="en-US" sz="2000">
+                <a:solidFill>
+                  <a:schemeClr val="tx1">
+                    <a:lumMod val="75000"/>
+                    <a:lumOff val="25000"/>
+                  </a:schemeClr>
+                </a:solidFill>
+                <a:latin typeface=""/>
+              </a:rPr>
+              <a:t>)</a:t>
+            </a:r>
+            <a:endParaRPr lang="en-US" sz="2000" dirty="0">
+              <a:solidFill>
+                <a:schemeClr val="tx1">
+                  <a:lumMod val="75000"/>
+                  <a:lumOff val="25000"/>
+                </a:schemeClr>
+              </a:solidFill>
+              <a:latin typeface=""/>
+            </a:endParaRPr>
+          </a:p>
+        </p:txBody>
+      </p:sp>
+      <p:sp>
+        <p:nvSpPr>
+          <p:cNvPr id="72" name="TextBox 71">
+            <a:extLst>
+              <a:ext uri="{FF2B5EF4-FFF2-40B4-BE49-F238E27FC236}">
+                <a16:creationId xmlns:a16="http://schemas.microsoft.com/office/drawing/2014/main" id="{0F381F8C-7008-01ED-50A5-F9A1089BED51}"/>
+              </a:ext>
+            </a:extLst>
+          </p:cNvPr>
+          <p:cNvSpPr txBox="1"/>
+          <p:nvPr/>
+        </p:nvSpPr>
+        <p:spPr>
+          <a:xfrm>
+            <a:off x="5325100" y="278849"/>
+            <a:ext cx="2725269" cy="400110"/>
+          </a:xfrm>
+          <a:prstGeom prst="rect">
+            <a:avLst/>
+          </a:prstGeom>
+          <a:noFill/>
+        </p:spPr>
+        <p:txBody>
+          <a:bodyPr wrap="square" rtlCol="0">
+            <a:spAutoFit/>
+          </a:bodyPr>
+          <a:lstStyle/>
+          <a:p>
+            <a:r>
+              <a:rPr lang="en-US" sz="2000">
+                <a:solidFill>
+                  <a:schemeClr val="tx1">
+                    <a:lumMod val="75000"/>
+                    <a:lumOff val="25000"/>
+                  </a:schemeClr>
+                </a:solidFill>
+                <a:latin typeface=""/>
+              </a:rPr>
+              <a:t>MANY GROUPS (H</a:t>
+            </a:r>
+            <a:r>
+              <a:rPr lang="en-US" sz="2000" baseline="-25000">
+                <a:solidFill>
+                  <a:schemeClr val="tx1">
+                    <a:lumMod val="75000"/>
+                    <a:lumOff val="25000"/>
+                  </a:schemeClr>
+                </a:solidFill>
+                <a:latin typeface=""/>
+              </a:rPr>
+              <a:t>A</a:t>
+            </a:r>
+            <a:r>
+              <a:rPr lang="en-US" sz="2000">
+                <a:solidFill>
+                  <a:schemeClr val="tx1">
+                    <a:lumMod val="75000"/>
+                    <a:lumOff val="25000"/>
+                  </a:schemeClr>
+                </a:solidFill>
+                <a:latin typeface=""/>
+              </a:rPr>
+              <a:t>)</a:t>
+            </a:r>
+            <a:endParaRPr lang="en-US" sz="2000" dirty="0">
+              <a:solidFill>
+                <a:schemeClr val="tx1">
+                  <a:lumMod val="75000"/>
+                  <a:lumOff val="25000"/>
+                </a:schemeClr>
+              </a:solidFill>
+              <a:latin typeface=""/>
+            </a:endParaRPr>
+          </a:p>
+        </p:txBody>
+      </p:sp>
+      <p:sp>
+        <p:nvSpPr>
+          <p:cNvPr id="73" name="TextBox 72">
+            <a:extLst>
+              <a:ext uri="{FF2B5EF4-FFF2-40B4-BE49-F238E27FC236}">
+                <a16:creationId xmlns:a16="http://schemas.microsoft.com/office/drawing/2014/main" id="{220CE109-BD81-4906-EB5C-36B0ADCC6F3D}"/>
+              </a:ext>
+            </a:extLst>
+          </p:cNvPr>
+          <p:cNvSpPr txBox="1"/>
+          <p:nvPr/>
+        </p:nvSpPr>
+        <p:spPr>
+          <a:xfrm rot="16200000">
+            <a:off x="-863386" y="1860849"/>
+            <a:ext cx="2733111" cy="369332"/>
+          </a:xfrm>
+          <a:prstGeom prst="rect">
+            <a:avLst/>
+          </a:prstGeom>
+          <a:noFill/>
+        </p:spPr>
+        <p:txBody>
+          <a:bodyPr wrap="square" rtlCol="0">
+            <a:spAutoFit/>
+          </a:bodyPr>
+          <a:lstStyle/>
+          <a:p>
+            <a:r>
+              <a:rPr lang="en-US">
+                <a:solidFill>
+                  <a:schemeClr val="tx1">
+                    <a:lumMod val="75000"/>
+                    <a:lumOff val="25000"/>
+                  </a:schemeClr>
+                </a:solidFill>
+                <a:latin typeface=""/>
+              </a:rPr>
+              <a:t>PREDICTED VALUES</a:t>
+            </a:r>
+            <a:endParaRPr lang="en-US" dirty="0">
+              <a:solidFill>
+                <a:schemeClr val="tx1">
+                  <a:lumMod val="75000"/>
+                  <a:lumOff val="25000"/>
+                </a:schemeClr>
+              </a:solidFill>
+              <a:latin typeface=""/>
+            </a:endParaRPr>
+          </a:p>
+        </p:txBody>
+      </p:sp>
+      <p:sp>
+        <p:nvSpPr>
+          <p:cNvPr id="74" name="TextBox 73">
+            <a:extLst>
+              <a:ext uri="{FF2B5EF4-FFF2-40B4-BE49-F238E27FC236}">
+                <a16:creationId xmlns:a16="http://schemas.microsoft.com/office/drawing/2014/main" id="{3CCE53D3-D7DF-405B-169C-42C467477BA0}"/>
+              </a:ext>
+            </a:extLst>
+          </p:cNvPr>
+          <p:cNvSpPr txBox="1"/>
+          <p:nvPr/>
+        </p:nvSpPr>
+        <p:spPr>
+          <a:xfrm rot="16200000">
+            <a:off x="-870351" y="4904603"/>
+            <a:ext cx="2733111" cy="369332"/>
+          </a:xfrm>
+          <a:prstGeom prst="rect">
+            <a:avLst/>
+          </a:prstGeom>
+          <a:noFill/>
+        </p:spPr>
+        <p:txBody>
+          <a:bodyPr wrap="square" rtlCol="0">
+            <a:spAutoFit/>
+          </a:bodyPr>
+          <a:lstStyle/>
+          <a:p>
+            <a:pPr algn="ctr"/>
+            <a:r>
+              <a:rPr lang="en-US">
+                <a:solidFill>
+                  <a:schemeClr val="tx1">
+                    <a:lumMod val="75000"/>
+                    <a:lumOff val="25000"/>
+                  </a:schemeClr>
+                </a:solidFill>
+                <a:latin typeface=""/>
+              </a:rPr>
+              <a:t>RESIDUALS</a:t>
+            </a:r>
+            <a:endParaRPr lang="en-US" dirty="0">
+              <a:solidFill>
+                <a:schemeClr val="tx1">
+                  <a:lumMod val="75000"/>
+                  <a:lumOff val="25000"/>
+                </a:schemeClr>
+              </a:solidFill>
+              <a:latin typeface=""/>
+            </a:endParaRPr>
+          </a:p>
+        </p:txBody>
+      </p:sp>
     </p:spTree>
     <p:extLst>
       <p:ext uri="{BB962C8B-B14F-4D97-AF65-F5344CB8AC3E}">
@@ -2991,6 +6232,299 @@
   <p:clrMapOvr>
     <a:masterClrMapping/>
   </p:clrMapOvr>
+  <p:timing>
+    <p:tnLst>
+      <p:par>
+        <p:cTn id="1" dur="indefinite" restart="never" nodeType="tmRoot">
+          <p:childTnLst>
+            <p:seq concurrent="1" nextAc="seek">
+              <p:cTn id="2" dur="indefinite" nodeType="mainSeq">
+                <p:childTnLst>
+                  <p:par>
+                    <p:cTn id="3" fill="hold">
+                      <p:stCondLst>
+                        <p:cond delay="indefinite"/>
+                        <p:cond evt="onBegin" delay="0">
+                          <p:tn val="2"/>
+                        </p:cond>
+                      </p:stCondLst>
+                      <p:childTnLst>
+                        <p:par>
+                          <p:cTn id="4" fill="hold">
+                            <p:stCondLst>
+                              <p:cond delay="0"/>
+                            </p:stCondLst>
+                            <p:childTnLst>
+                              <p:par>
+                                <p:cTn id="5" presetID="10" presetClass="entr" presetSubtype="0" fill="hold" nodeType="withEffect">
+                                  <p:stCondLst>
+                                    <p:cond delay="0"/>
+                                  </p:stCondLst>
+                                  <p:childTnLst>
+                                    <p:set>
+                                      <p:cBhvr>
+                                        <p:cTn id="6" dur="1" fill="hold">
+                                          <p:stCondLst>
+                                            <p:cond delay="0"/>
+                                          </p:stCondLst>
+                                        </p:cTn>
+                                        <p:tgtEl>
+                                          <p:spTgt spid="2"/>
+                                        </p:tgtEl>
+                                        <p:attrNameLst>
+                                          <p:attrName>style.visibility</p:attrName>
+                                        </p:attrNameLst>
+                                      </p:cBhvr>
+                                      <p:to>
+                                        <p:strVal val="visible"/>
+                                      </p:to>
+                                    </p:set>
+                                    <p:animEffect transition="in" filter="fade">
+                                      <p:cBhvr>
+                                        <p:cTn id="7" dur="500"/>
+                                        <p:tgtEl>
+                                          <p:spTgt spid="2"/>
+                                        </p:tgtEl>
+                                      </p:cBhvr>
+                                    </p:animEffect>
+                                  </p:childTnLst>
+                                </p:cTn>
+                              </p:par>
+                              <p:par>
+                                <p:cTn id="8" presetID="10" presetClass="entr" presetSubtype="0" fill="hold" nodeType="withEffect">
+                                  <p:stCondLst>
+                                    <p:cond delay="0"/>
+                                  </p:stCondLst>
+                                  <p:childTnLst>
+                                    <p:set>
+                                      <p:cBhvr>
+                                        <p:cTn id="9" dur="1" fill="hold">
+                                          <p:stCondLst>
+                                            <p:cond delay="0"/>
+                                          </p:stCondLst>
+                                        </p:cTn>
+                                        <p:tgtEl>
+                                          <p:spTgt spid="8"/>
+                                        </p:tgtEl>
+                                        <p:attrNameLst>
+                                          <p:attrName>style.visibility</p:attrName>
+                                        </p:attrNameLst>
+                                      </p:cBhvr>
+                                      <p:to>
+                                        <p:strVal val="visible"/>
+                                      </p:to>
+                                    </p:set>
+                                    <p:animEffect transition="in" filter="fade">
+                                      <p:cBhvr>
+                                        <p:cTn id="10" dur="500"/>
+                                        <p:tgtEl>
+                                          <p:spTgt spid="8"/>
+                                        </p:tgtEl>
+                                      </p:cBhvr>
+                                    </p:animEffect>
+                                  </p:childTnLst>
+                                </p:cTn>
+                              </p:par>
+                              <p:par>
+                                <p:cTn id="11" presetID="10" presetClass="entr" presetSubtype="0" fill="hold" nodeType="withEffect">
+                                  <p:stCondLst>
+                                    <p:cond delay="0"/>
+                                  </p:stCondLst>
+                                  <p:childTnLst>
+                                    <p:set>
+                                      <p:cBhvr>
+                                        <p:cTn id="12" dur="1" fill="hold">
+                                          <p:stCondLst>
+                                            <p:cond delay="0"/>
+                                          </p:stCondLst>
+                                        </p:cTn>
+                                        <p:tgtEl>
+                                          <p:spTgt spid="71">
+                                            <p:txEl>
+                                              <p:pRg st="0" end="0"/>
+                                            </p:txEl>
+                                          </p:spTgt>
+                                        </p:tgtEl>
+                                        <p:attrNameLst>
+                                          <p:attrName>style.visibility</p:attrName>
+                                        </p:attrNameLst>
+                                      </p:cBhvr>
+                                      <p:to>
+                                        <p:strVal val="visible"/>
+                                      </p:to>
+                                    </p:set>
+                                    <p:animEffect transition="in" filter="fade">
+                                      <p:cBhvr>
+                                        <p:cTn id="13" dur="500"/>
+                                        <p:tgtEl>
+                                          <p:spTgt spid="71">
+                                            <p:txEl>
+                                              <p:pRg st="0" end="0"/>
+                                            </p:txEl>
+                                          </p:spTgt>
+                                        </p:tgtEl>
+                                      </p:cBhvr>
+                                    </p:animEffect>
+                                  </p:childTnLst>
+                                </p:cTn>
+                              </p:par>
+                              <p:par>
+                                <p:cTn id="14" presetID="10" presetClass="entr" presetSubtype="0" fill="hold" nodeType="withEffect">
+                                  <p:stCondLst>
+                                    <p:cond delay="0"/>
+                                  </p:stCondLst>
+                                  <p:childTnLst>
+                                    <p:set>
+                                      <p:cBhvr>
+                                        <p:cTn id="15" dur="1" fill="hold">
+                                          <p:stCondLst>
+                                            <p:cond delay="0"/>
+                                          </p:stCondLst>
+                                        </p:cTn>
+                                        <p:tgtEl>
+                                          <p:spTgt spid="72">
+                                            <p:txEl>
+                                              <p:pRg st="0" end="0"/>
+                                            </p:txEl>
+                                          </p:spTgt>
+                                        </p:tgtEl>
+                                        <p:attrNameLst>
+                                          <p:attrName>style.visibility</p:attrName>
+                                        </p:attrNameLst>
+                                      </p:cBhvr>
+                                      <p:to>
+                                        <p:strVal val="visible"/>
+                                      </p:to>
+                                    </p:set>
+                                    <p:animEffect transition="in" filter="fade">
+                                      <p:cBhvr>
+                                        <p:cTn id="16" dur="500"/>
+                                        <p:tgtEl>
+                                          <p:spTgt spid="72">
+                                            <p:txEl>
+                                              <p:pRg st="0" end="0"/>
+                                            </p:txEl>
+                                          </p:spTgt>
+                                        </p:tgtEl>
+                                      </p:cBhvr>
+                                    </p:animEffect>
+                                  </p:childTnLst>
+                                </p:cTn>
+                              </p:par>
+                              <p:par>
+                                <p:cTn id="17" presetID="10" presetClass="entr" presetSubtype="0" fill="hold" nodeType="withEffect">
+                                  <p:stCondLst>
+                                    <p:cond delay="0"/>
+                                  </p:stCondLst>
+                                  <p:childTnLst>
+                                    <p:set>
+                                      <p:cBhvr>
+                                        <p:cTn id="18" dur="1" fill="hold">
+                                          <p:stCondLst>
+                                            <p:cond delay="0"/>
+                                          </p:stCondLst>
+                                        </p:cTn>
+                                        <p:tgtEl>
+                                          <p:spTgt spid="73">
+                                            <p:txEl>
+                                              <p:pRg st="0" end="0"/>
+                                            </p:txEl>
+                                          </p:spTgt>
+                                        </p:tgtEl>
+                                        <p:attrNameLst>
+                                          <p:attrName>style.visibility</p:attrName>
+                                        </p:attrNameLst>
+                                      </p:cBhvr>
+                                      <p:to>
+                                        <p:strVal val="visible"/>
+                                      </p:to>
+                                    </p:set>
+                                    <p:animEffect transition="in" filter="fade">
+                                      <p:cBhvr>
+                                        <p:cTn id="19" dur="500"/>
+                                        <p:tgtEl>
+                                          <p:spTgt spid="73">
+                                            <p:txEl>
+                                              <p:pRg st="0" end="0"/>
+                                            </p:txEl>
+                                          </p:spTgt>
+                                        </p:tgtEl>
+                                      </p:cBhvr>
+                                    </p:animEffect>
+                                  </p:childTnLst>
+                                </p:cTn>
+                              </p:par>
+                              <p:par>
+                                <p:cTn id="20" presetID="10" presetClass="entr" presetSubtype="0" fill="hold" nodeType="withEffect">
+                                  <p:stCondLst>
+                                    <p:cond delay="0"/>
+                                  </p:stCondLst>
+                                  <p:childTnLst>
+                                    <p:set>
+                                      <p:cBhvr>
+                                        <p:cTn id="21" dur="1" fill="hold">
+                                          <p:stCondLst>
+                                            <p:cond delay="0"/>
+                                          </p:stCondLst>
+                                        </p:cTn>
+                                        <p:tgtEl>
+                                          <p:spTgt spid="74">
+                                            <p:txEl>
+                                              <p:pRg st="0" end="0"/>
+                                            </p:txEl>
+                                          </p:spTgt>
+                                        </p:tgtEl>
+                                        <p:attrNameLst>
+                                          <p:attrName>style.visibility</p:attrName>
+                                        </p:attrNameLst>
+                                      </p:cBhvr>
+                                      <p:to>
+                                        <p:strVal val="visible"/>
+                                      </p:to>
+                                    </p:set>
+                                    <p:animEffect transition="in" filter="fade">
+                                      <p:cBhvr>
+                                        <p:cTn id="22" dur="500"/>
+                                        <p:tgtEl>
+                                          <p:spTgt spid="74">
+                                            <p:txEl>
+                                              <p:pRg st="0" end="0"/>
+                                            </p:txEl>
+                                          </p:spTgt>
+                                        </p:tgtEl>
+                                      </p:cBhvr>
+                                    </p:animEffect>
+                                  </p:childTnLst>
+                                </p:cTn>
+                              </p:par>
+                            </p:childTnLst>
+                          </p:cTn>
+                        </p:par>
+                      </p:childTnLst>
+                    </p:cTn>
+                  </p:par>
+                </p:childTnLst>
+              </p:cTn>
+              <p:prevCondLst>
+                <p:cond evt="onPrev" delay="0">
+                  <p:tgtEl>
+                    <p:sldTgt/>
+                  </p:tgtEl>
+                </p:cond>
+              </p:prevCondLst>
+              <p:nextCondLst>
+                <p:cond evt="onNext" delay="0">
+                  <p:tgtEl>
+                    <p:sldTgt/>
+                  </p:tgtEl>
+                </p:cond>
+              </p:nextCondLst>
+            </p:seq>
+          </p:childTnLst>
+        </p:cTn>
+      </p:par>
+    </p:tnLst>
+  </p:timing>
 </p:sld>
 </file>
 
@@ -6321,6 +9855,7 @@
         <p:nvCxnSpPr>
           <p:cNvPr id="22" name="Straight Connector 21"/>
           <p:cNvCxnSpPr>
+            <a:cxnSpLocks/>
             <a:stCxn id="19" idx="0"/>
             <a:endCxn id="19" idx="2"/>
           </p:cNvCxnSpPr>
@@ -6357,6 +9892,7 @@
         <p:nvCxnSpPr>
           <p:cNvPr id="23" name="Straight Connector 22"/>
           <p:cNvCxnSpPr>
+            <a:cxnSpLocks/>
             <a:stCxn id="19" idx="1"/>
             <a:endCxn id="19" idx="3"/>
           </p:cNvCxnSpPr>
@@ -6531,155 +10067,6 @@
           </a:graphicData>
         </a:graphic>
       </p:graphicFrame>
-      <p:sp>
-        <p:nvSpPr>
-          <p:cNvPr id="39" name="Rectangle 38"/>
-          <p:cNvSpPr/>
-          <p:nvPr/>
-        </p:nvSpPr>
-        <p:spPr>
-          <a:xfrm>
-            <a:off x="5353163" y="780747"/>
-            <a:ext cx="3525255" cy="2510544"/>
-          </a:xfrm>
-          <a:prstGeom prst="rect">
-            <a:avLst/>
-          </a:prstGeom>
-          <a:noFill/>
-        </p:spPr>
-        <p:style>
-          <a:lnRef idx="1">
-            <a:schemeClr val="accent1"/>
-          </a:lnRef>
-          <a:fillRef idx="3">
-            <a:schemeClr val="accent1"/>
-          </a:fillRef>
-          <a:effectRef idx="2">
-            <a:schemeClr val="accent1"/>
-          </a:effectRef>
-          <a:fontRef idx="minor">
-            <a:schemeClr val="lt1"/>
-          </a:fontRef>
-        </p:style>
-        <p:txBody>
-          <a:bodyPr rtlCol="0" anchor="ctr"/>
-          <a:lstStyle/>
-          <a:p>
-            <a:pPr algn="ctr"/>
-            <a:endParaRPr lang="en-US"/>
-          </a:p>
-        </p:txBody>
-      </p:sp>
-      <p:sp>
-        <p:nvSpPr>
-          <p:cNvPr id="40" name="Oval 39"/>
-          <p:cNvSpPr/>
-          <p:nvPr/>
-        </p:nvSpPr>
-        <p:spPr>
-          <a:xfrm>
-            <a:off x="6765658" y="1724423"/>
-            <a:ext cx="112761" cy="112767"/>
-          </a:xfrm>
-          <a:prstGeom prst="ellipse">
-            <a:avLst/>
-          </a:prstGeom>
-        </p:spPr>
-        <p:style>
-          <a:lnRef idx="1">
-            <a:schemeClr val="accent1"/>
-          </a:lnRef>
-          <a:fillRef idx="3">
-            <a:schemeClr val="accent1"/>
-          </a:fillRef>
-          <a:effectRef idx="2">
-            <a:schemeClr val="accent1"/>
-          </a:effectRef>
-          <a:fontRef idx="minor">
-            <a:schemeClr val="lt1"/>
-          </a:fontRef>
-        </p:style>
-        <p:txBody>
-          <a:bodyPr rtlCol="0" anchor="ctr"/>
-          <a:lstStyle/>
-          <a:p>
-            <a:pPr algn="ctr"/>
-            <a:endParaRPr lang="en-US"/>
-          </a:p>
-        </p:txBody>
-      </p:sp>
-      <p:cxnSp>
-        <p:nvCxnSpPr>
-          <p:cNvPr id="41" name="Straight Connector 40"/>
-          <p:cNvCxnSpPr>
-            <a:stCxn id="39" idx="0"/>
-            <a:endCxn id="39" idx="2"/>
-          </p:cNvCxnSpPr>
-          <p:nvPr/>
-        </p:nvCxnSpPr>
-        <p:spPr>
-          <a:xfrm>
-            <a:off x="7115791" y="780747"/>
-            <a:ext cx="0" cy="2510544"/>
-          </a:xfrm>
-          <a:prstGeom prst="line">
-            <a:avLst/>
-          </a:prstGeom>
-          <a:ln>
-            <a:prstDash val="dot"/>
-          </a:ln>
-        </p:spPr>
-        <p:style>
-          <a:lnRef idx="2">
-            <a:schemeClr val="accent1"/>
-          </a:lnRef>
-          <a:fillRef idx="0">
-            <a:schemeClr val="accent1"/>
-          </a:fillRef>
-          <a:effectRef idx="1">
-            <a:schemeClr val="accent1"/>
-          </a:effectRef>
-          <a:fontRef idx="minor">
-            <a:schemeClr val="tx1"/>
-          </a:fontRef>
-        </p:style>
-      </p:cxnSp>
-      <p:cxnSp>
-        <p:nvCxnSpPr>
-          <p:cNvPr id="42" name="Straight Connector 41"/>
-          <p:cNvCxnSpPr>
-            <a:stCxn id="39" idx="1"/>
-            <a:endCxn id="39" idx="3"/>
-          </p:cNvCxnSpPr>
-          <p:nvPr/>
-        </p:nvCxnSpPr>
-        <p:spPr>
-          <a:xfrm>
-            <a:off x="5353163" y="2036019"/>
-            <a:ext cx="3525255" cy="0"/>
-          </a:xfrm>
-          <a:prstGeom prst="line">
-            <a:avLst/>
-          </a:prstGeom>
-          <a:ln>
-            <a:prstDash val="dot"/>
-          </a:ln>
-        </p:spPr>
-        <p:style>
-          <a:lnRef idx="2">
-            <a:schemeClr val="accent1"/>
-          </a:lnRef>
-          <a:fillRef idx="0">
-            <a:schemeClr val="accent1"/>
-          </a:fillRef>
-          <a:effectRef idx="1">
-            <a:schemeClr val="accent1"/>
-          </a:effectRef>
-          <a:fontRef idx="minor">
-            <a:schemeClr val="tx1"/>
-          </a:fontRef>
-        </p:style>
-      </p:cxnSp>
       <p:graphicFrame>
         <p:nvGraphicFramePr>
           <p:cNvPr id="30" name="Object 29"/>
@@ -7151,753 +10538,934 @@
           </a:p>
         </p:txBody>
       </p:sp>
-      <p:sp>
-        <p:nvSpPr>
-          <p:cNvPr id="58" name="Oval 57"/>
-          <p:cNvSpPr/>
+      <p:grpSp>
+        <p:nvGrpSpPr>
+          <p:cNvPr id="2" name="Group 1">
+            <a:extLst>
+              <a:ext uri="{FF2B5EF4-FFF2-40B4-BE49-F238E27FC236}">
+                <a16:creationId xmlns:a16="http://schemas.microsoft.com/office/drawing/2014/main" id="{215E315A-59E3-F908-047D-FF2E22139247}"/>
+              </a:ext>
+            </a:extLst>
+          </p:cNvPr>
+          <p:cNvGrpSpPr/>
           <p:nvPr/>
-        </p:nvSpPr>
-        <p:spPr>
+        </p:nvGrpSpPr>
+        <p:grpSpPr>
           <a:xfrm>
-            <a:off x="6051561" y="2665996"/>
-            <a:ext cx="45719" cy="45719"/>
+            <a:off x="5353163" y="780747"/>
+            <a:ext cx="3525255" cy="2510544"/>
+            <a:chOff x="5353163" y="780747"/>
+            <a:chExt cx="3525255" cy="2510544"/>
           </a:xfrm>
-          <a:prstGeom prst="ellipse">
-            <a:avLst/>
-          </a:prstGeom>
-          <a:solidFill>
-            <a:schemeClr val="tx1"/>
-          </a:solidFill>
-          <a:ln>
+        </p:grpSpPr>
+        <p:sp>
+          <p:nvSpPr>
+            <p:cNvPr id="39" name="Rectangle 38"/>
+            <p:cNvSpPr/>
+            <p:nvPr/>
+          </p:nvSpPr>
+          <p:spPr>
+            <a:xfrm>
+              <a:off x="5353163" y="780747"/>
+              <a:ext cx="3525255" cy="2510544"/>
+            </a:xfrm>
+            <a:prstGeom prst="rect">
+              <a:avLst/>
+            </a:prstGeom>
+            <a:noFill/>
+          </p:spPr>
+          <p:style>
+            <a:lnRef idx="1">
+              <a:schemeClr val="accent1"/>
+            </a:lnRef>
+            <a:fillRef idx="3">
+              <a:schemeClr val="accent1"/>
+            </a:fillRef>
+            <a:effectRef idx="2">
+              <a:schemeClr val="accent1"/>
+            </a:effectRef>
+            <a:fontRef idx="minor">
+              <a:schemeClr val="lt1"/>
+            </a:fontRef>
+          </p:style>
+          <p:txBody>
+            <a:bodyPr rtlCol="0" anchor="ctr"/>
+            <a:lstStyle/>
+            <a:p>
+              <a:pPr algn="ctr"/>
+              <a:endParaRPr lang="en-US"/>
+            </a:p>
+          </p:txBody>
+        </p:sp>
+        <p:sp>
+          <p:nvSpPr>
+            <p:cNvPr id="40" name="Oval 39"/>
+            <p:cNvSpPr/>
+            <p:nvPr/>
+          </p:nvSpPr>
+          <p:spPr>
+            <a:xfrm>
+              <a:off x="6765658" y="1724423"/>
+              <a:ext cx="112761" cy="112767"/>
+            </a:xfrm>
+            <a:prstGeom prst="ellipse">
+              <a:avLst/>
+            </a:prstGeom>
+          </p:spPr>
+          <p:style>
+            <a:lnRef idx="1">
+              <a:schemeClr val="accent1"/>
+            </a:lnRef>
+            <a:fillRef idx="3">
+              <a:schemeClr val="accent1"/>
+            </a:fillRef>
+            <a:effectRef idx="2">
+              <a:schemeClr val="accent1"/>
+            </a:effectRef>
+            <a:fontRef idx="minor">
+              <a:schemeClr val="lt1"/>
+            </a:fontRef>
+          </p:style>
+          <p:txBody>
+            <a:bodyPr rtlCol="0" anchor="ctr"/>
+            <a:lstStyle/>
+            <a:p>
+              <a:pPr algn="ctr"/>
+              <a:endParaRPr lang="en-US"/>
+            </a:p>
+          </p:txBody>
+        </p:sp>
+        <p:cxnSp>
+          <p:nvCxnSpPr>
+            <p:cNvPr id="41" name="Straight Connector 40"/>
+            <p:cNvCxnSpPr>
+              <a:cxnSpLocks/>
+              <a:stCxn id="39" idx="0"/>
+              <a:endCxn id="39" idx="2"/>
+            </p:cNvCxnSpPr>
+            <p:nvPr/>
+          </p:nvCxnSpPr>
+          <p:spPr>
+            <a:xfrm>
+              <a:off x="7115791" y="780747"/>
+              <a:ext cx="0" cy="2510544"/>
+            </a:xfrm>
+            <a:prstGeom prst="line">
+              <a:avLst/>
+            </a:prstGeom>
+            <a:ln>
+              <a:prstDash val="dot"/>
+            </a:ln>
+          </p:spPr>
+          <p:style>
+            <a:lnRef idx="2">
+              <a:schemeClr val="accent1"/>
+            </a:lnRef>
+            <a:fillRef idx="0">
+              <a:schemeClr val="accent1"/>
+            </a:fillRef>
+            <a:effectRef idx="1">
+              <a:schemeClr val="accent1"/>
+            </a:effectRef>
+            <a:fontRef idx="minor">
+              <a:schemeClr val="tx1"/>
+            </a:fontRef>
+          </p:style>
+        </p:cxnSp>
+        <p:cxnSp>
+          <p:nvCxnSpPr>
+            <p:cNvPr id="42" name="Straight Connector 41"/>
+            <p:cNvCxnSpPr>
+              <a:cxnSpLocks/>
+              <a:stCxn id="39" idx="1"/>
+              <a:endCxn id="39" idx="3"/>
+            </p:cNvCxnSpPr>
+            <p:nvPr/>
+          </p:nvCxnSpPr>
+          <p:spPr>
+            <a:xfrm>
+              <a:off x="5353163" y="2036019"/>
+              <a:ext cx="3525255" cy="0"/>
+            </a:xfrm>
+            <a:prstGeom prst="line">
+              <a:avLst/>
+            </a:prstGeom>
+            <a:ln>
+              <a:prstDash val="dot"/>
+            </a:ln>
+          </p:spPr>
+          <p:style>
+            <a:lnRef idx="2">
+              <a:schemeClr val="accent1"/>
+            </a:lnRef>
+            <a:fillRef idx="0">
+              <a:schemeClr val="accent1"/>
+            </a:fillRef>
+            <a:effectRef idx="1">
+              <a:schemeClr val="accent1"/>
+            </a:effectRef>
+            <a:fontRef idx="minor">
+              <a:schemeClr val="tx1"/>
+            </a:fontRef>
+          </p:style>
+        </p:cxnSp>
+        <p:sp>
+          <p:nvSpPr>
+            <p:cNvPr id="58" name="Oval 57"/>
+            <p:cNvSpPr/>
+            <p:nvPr/>
+          </p:nvSpPr>
+          <p:spPr>
+            <a:xfrm>
+              <a:off x="6051561" y="2665996"/>
+              <a:ext cx="45719" cy="45719"/>
+            </a:xfrm>
+            <a:prstGeom prst="ellipse">
+              <a:avLst/>
+            </a:prstGeom>
             <a:solidFill>
-              <a:srgbClr val="000000"/>
+              <a:schemeClr val="tx1"/>
             </a:solidFill>
-          </a:ln>
-        </p:spPr>
-        <p:style>
-          <a:lnRef idx="1">
-            <a:schemeClr val="accent1"/>
-          </a:lnRef>
-          <a:fillRef idx="3">
-            <a:schemeClr val="accent1"/>
-          </a:fillRef>
-          <a:effectRef idx="2">
-            <a:schemeClr val="accent1"/>
-          </a:effectRef>
-          <a:fontRef idx="minor">
-            <a:schemeClr val="lt1"/>
-          </a:fontRef>
-        </p:style>
-        <p:txBody>
-          <a:bodyPr rtlCol="0" anchor="ctr"/>
-          <a:lstStyle/>
-          <a:p>
-            <a:pPr algn="ctr"/>
-            <a:endParaRPr lang="en-US"/>
-          </a:p>
-        </p:txBody>
-      </p:sp>
-      <p:sp>
-        <p:nvSpPr>
-          <p:cNvPr id="59" name="Oval 58"/>
-          <p:cNvSpPr/>
-          <p:nvPr/>
-        </p:nvSpPr>
-        <p:spPr>
-          <a:xfrm>
-            <a:off x="6631281" y="2818396"/>
-            <a:ext cx="45719" cy="45719"/>
-          </a:xfrm>
-          <a:prstGeom prst="ellipse">
-            <a:avLst/>
-          </a:prstGeom>
-          <a:solidFill>
-            <a:schemeClr val="tx1"/>
-          </a:solidFill>
-          <a:ln>
+            <a:ln>
+              <a:solidFill>
+                <a:srgbClr val="000000"/>
+              </a:solidFill>
+            </a:ln>
+          </p:spPr>
+          <p:style>
+            <a:lnRef idx="1">
+              <a:schemeClr val="accent1"/>
+            </a:lnRef>
+            <a:fillRef idx="3">
+              <a:schemeClr val="accent1"/>
+            </a:fillRef>
+            <a:effectRef idx="2">
+              <a:schemeClr val="accent1"/>
+            </a:effectRef>
+            <a:fontRef idx="minor">
+              <a:schemeClr val="lt1"/>
+            </a:fontRef>
+          </p:style>
+          <p:txBody>
+            <a:bodyPr rtlCol="0" anchor="ctr"/>
+            <a:lstStyle/>
+            <a:p>
+              <a:pPr algn="ctr"/>
+              <a:endParaRPr lang="en-US"/>
+            </a:p>
+          </p:txBody>
+        </p:sp>
+        <p:sp>
+          <p:nvSpPr>
+            <p:cNvPr id="59" name="Oval 58"/>
+            <p:cNvSpPr/>
+            <p:nvPr/>
+          </p:nvSpPr>
+          <p:spPr>
+            <a:xfrm>
+              <a:off x="6631281" y="2818396"/>
+              <a:ext cx="45719" cy="45719"/>
+            </a:xfrm>
+            <a:prstGeom prst="ellipse">
+              <a:avLst/>
+            </a:prstGeom>
             <a:solidFill>
-              <a:srgbClr val="000000"/>
+              <a:schemeClr val="tx1"/>
             </a:solidFill>
-          </a:ln>
-        </p:spPr>
-        <p:style>
-          <a:lnRef idx="1">
-            <a:schemeClr val="accent1"/>
-          </a:lnRef>
-          <a:fillRef idx="3">
-            <a:schemeClr val="accent1"/>
-          </a:fillRef>
-          <a:effectRef idx="2">
-            <a:schemeClr val="accent1"/>
-          </a:effectRef>
-          <a:fontRef idx="minor">
-            <a:schemeClr val="lt1"/>
-          </a:fontRef>
-        </p:style>
-        <p:txBody>
-          <a:bodyPr rtlCol="0" anchor="ctr"/>
-          <a:lstStyle/>
-          <a:p>
-            <a:pPr algn="ctr"/>
-            <a:endParaRPr lang="en-US"/>
-          </a:p>
-        </p:txBody>
-      </p:sp>
-      <p:sp>
-        <p:nvSpPr>
-          <p:cNvPr id="60" name="Oval 59"/>
-          <p:cNvSpPr/>
-          <p:nvPr/>
-        </p:nvSpPr>
-        <p:spPr>
-          <a:xfrm>
-            <a:off x="6320751" y="2757136"/>
-            <a:ext cx="45719" cy="45719"/>
-          </a:xfrm>
-          <a:prstGeom prst="ellipse">
-            <a:avLst/>
-          </a:prstGeom>
-          <a:solidFill>
-            <a:schemeClr val="tx1"/>
-          </a:solidFill>
-          <a:ln>
+            <a:ln>
+              <a:solidFill>
+                <a:srgbClr val="000000"/>
+              </a:solidFill>
+            </a:ln>
+          </p:spPr>
+          <p:style>
+            <a:lnRef idx="1">
+              <a:schemeClr val="accent1"/>
+            </a:lnRef>
+            <a:fillRef idx="3">
+              <a:schemeClr val="accent1"/>
+            </a:fillRef>
+            <a:effectRef idx="2">
+              <a:schemeClr val="accent1"/>
+            </a:effectRef>
+            <a:fontRef idx="minor">
+              <a:schemeClr val="lt1"/>
+            </a:fontRef>
+          </p:style>
+          <p:txBody>
+            <a:bodyPr rtlCol="0" anchor="ctr"/>
+            <a:lstStyle/>
+            <a:p>
+              <a:pPr algn="ctr"/>
+              <a:endParaRPr lang="en-US"/>
+            </a:p>
+          </p:txBody>
+        </p:sp>
+        <p:sp>
+          <p:nvSpPr>
+            <p:cNvPr id="60" name="Oval 59"/>
+            <p:cNvSpPr/>
+            <p:nvPr/>
+          </p:nvSpPr>
+          <p:spPr>
+            <a:xfrm>
+              <a:off x="6320751" y="2757136"/>
+              <a:ext cx="45719" cy="45719"/>
+            </a:xfrm>
+            <a:prstGeom prst="ellipse">
+              <a:avLst/>
+            </a:prstGeom>
             <a:solidFill>
-              <a:srgbClr val="000000"/>
+              <a:schemeClr val="tx1"/>
             </a:solidFill>
-          </a:ln>
-        </p:spPr>
-        <p:style>
-          <a:lnRef idx="1">
-            <a:schemeClr val="accent1"/>
-          </a:lnRef>
-          <a:fillRef idx="3">
-            <a:schemeClr val="accent1"/>
-          </a:fillRef>
-          <a:effectRef idx="2">
-            <a:schemeClr val="accent1"/>
-          </a:effectRef>
-          <a:fontRef idx="minor">
-            <a:schemeClr val="lt1"/>
-          </a:fontRef>
-        </p:style>
-        <p:txBody>
-          <a:bodyPr rtlCol="0" anchor="ctr"/>
-          <a:lstStyle/>
-          <a:p>
-            <a:pPr algn="ctr"/>
-            <a:endParaRPr lang="en-US"/>
-          </a:p>
-        </p:txBody>
-      </p:sp>
-      <p:sp>
-        <p:nvSpPr>
-          <p:cNvPr id="61" name="Oval 60"/>
-          <p:cNvSpPr/>
-          <p:nvPr/>
-        </p:nvSpPr>
-        <p:spPr>
-          <a:xfrm>
-            <a:off x="6203961" y="1370256"/>
-            <a:ext cx="45719" cy="45719"/>
-          </a:xfrm>
-          <a:prstGeom prst="ellipse">
-            <a:avLst/>
-          </a:prstGeom>
-          <a:solidFill>
-            <a:schemeClr val="tx1"/>
-          </a:solidFill>
-          <a:ln>
+            <a:ln>
+              <a:solidFill>
+                <a:srgbClr val="000000"/>
+              </a:solidFill>
+            </a:ln>
+          </p:spPr>
+          <p:style>
+            <a:lnRef idx="1">
+              <a:schemeClr val="accent1"/>
+            </a:lnRef>
+            <a:fillRef idx="3">
+              <a:schemeClr val="accent1"/>
+            </a:fillRef>
+            <a:effectRef idx="2">
+              <a:schemeClr val="accent1"/>
+            </a:effectRef>
+            <a:fontRef idx="minor">
+              <a:schemeClr val="lt1"/>
+            </a:fontRef>
+          </p:style>
+          <p:txBody>
+            <a:bodyPr rtlCol="0" anchor="ctr"/>
+            <a:lstStyle/>
+            <a:p>
+              <a:pPr algn="ctr"/>
+              <a:endParaRPr lang="en-US"/>
+            </a:p>
+          </p:txBody>
+        </p:sp>
+        <p:sp>
+          <p:nvSpPr>
+            <p:cNvPr id="61" name="Oval 60"/>
+            <p:cNvSpPr/>
+            <p:nvPr/>
+          </p:nvSpPr>
+          <p:spPr>
+            <a:xfrm>
+              <a:off x="6203961" y="1370256"/>
+              <a:ext cx="45719" cy="45719"/>
+            </a:xfrm>
+            <a:prstGeom prst="ellipse">
+              <a:avLst/>
+            </a:prstGeom>
             <a:solidFill>
-              <a:srgbClr val="000000"/>
+              <a:schemeClr val="tx1"/>
             </a:solidFill>
-          </a:ln>
-        </p:spPr>
-        <p:style>
-          <a:lnRef idx="1">
-            <a:schemeClr val="accent1"/>
-          </a:lnRef>
-          <a:fillRef idx="3">
-            <a:schemeClr val="accent1"/>
-          </a:fillRef>
-          <a:effectRef idx="2">
-            <a:schemeClr val="accent1"/>
-          </a:effectRef>
-          <a:fontRef idx="minor">
-            <a:schemeClr val="lt1"/>
-          </a:fontRef>
-        </p:style>
-        <p:txBody>
-          <a:bodyPr rtlCol="0" anchor="ctr"/>
-          <a:lstStyle/>
-          <a:p>
-            <a:pPr algn="ctr"/>
-            <a:endParaRPr lang="en-US"/>
-          </a:p>
-        </p:txBody>
-      </p:sp>
-      <p:sp>
-        <p:nvSpPr>
-          <p:cNvPr id="62" name="Oval 61"/>
-          <p:cNvSpPr/>
-          <p:nvPr/>
-        </p:nvSpPr>
-        <p:spPr>
-          <a:xfrm>
-            <a:off x="6103603" y="1630928"/>
-            <a:ext cx="45719" cy="45719"/>
-          </a:xfrm>
-          <a:prstGeom prst="ellipse">
-            <a:avLst/>
-          </a:prstGeom>
-          <a:solidFill>
-            <a:schemeClr val="tx1"/>
-          </a:solidFill>
-          <a:ln>
+            <a:ln>
+              <a:solidFill>
+                <a:srgbClr val="000000"/>
+              </a:solidFill>
+            </a:ln>
+          </p:spPr>
+          <p:style>
+            <a:lnRef idx="1">
+              <a:schemeClr val="accent1"/>
+            </a:lnRef>
+            <a:fillRef idx="3">
+              <a:schemeClr val="accent1"/>
+            </a:fillRef>
+            <a:effectRef idx="2">
+              <a:schemeClr val="accent1"/>
+            </a:effectRef>
+            <a:fontRef idx="minor">
+              <a:schemeClr val="lt1"/>
+            </a:fontRef>
+          </p:style>
+          <p:txBody>
+            <a:bodyPr rtlCol="0" anchor="ctr"/>
+            <a:lstStyle/>
+            <a:p>
+              <a:pPr algn="ctr"/>
+              <a:endParaRPr lang="en-US"/>
+            </a:p>
+          </p:txBody>
+        </p:sp>
+        <p:sp>
+          <p:nvSpPr>
+            <p:cNvPr id="62" name="Oval 61"/>
+            <p:cNvSpPr/>
+            <p:nvPr/>
+          </p:nvSpPr>
+          <p:spPr>
+            <a:xfrm>
+              <a:off x="6103603" y="1630928"/>
+              <a:ext cx="45719" cy="45719"/>
+            </a:xfrm>
+            <a:prstGeom prst="ellipse">
+              <a:avLst/>
+            </a:prstGeom>
             <a:solidFill>
-              <a:srgbClr val="000000"/>
+              <a:schemeClr val="tx1"/>
             </a:solidFill>
-          </a:ln>
-        </p:spPr>
-        <p:style>
-          <a:lnRef idx="1">
-            <a:schemeClr val="accent1"/>
-          </a:lnRef>
-          <a:fillRef idx="3">
-            <a:schemeClr val="accent1"/>
-          </a:fillRef>
-          <a:effectRef idx="2">
-            <a:schemeClr val="accent1"/>
-          </a:effectRef>
-          <a:fontRef idx="minor">
-            <a:schemeClr val="lt1"/>
-          </a:fontRef>
-        </p:style>
-        <p:txBody>
-          <a:bodyPr rtlCol="0" anchor="ctr"/>
-          <a:lstStyle/>
-          <a:p>
-            <a:pPr algn="ctr"/>
-            <a:endParaRPr lang="en-US"/>
-          </a:p>
-        </p:txBody>
-      </p:sp>
-      <p:sp>
-        <p:nvSpPr>
-          <p:cNvPr id="63" name="Oval 62"/>
-          <p:cNvSpPr/>
-          <p:nvPr/>
-        </p:nvSpPr>
-        <p:spPr>
-          <a:xfrm>
-            <a:off x="6473151" y="1461396"/>
-            <a:ext cx="45719" cy="45719"/>
-          </a:xfrm>
-          <a:prstGeom prst="ellipse">
-            <a:avLst/>
-          </a:prstGeom>
-          <a:solidFill>
-            <a:schemeClr val="tx1"/>
-          </a:solidFill>
-          <a:ln>
+            <a:ln>
+              <a:solidFill>
+                <a:srgbClr val="000000"/>
+              </a:solidFill>
+            </a:ln>
+          </p:spPr>
+          <p:style>
+            <a:lnRef idx="1">
+              <a:schemeClr val="accent1"/>
+            </a:lnRef>
+            <a:fillRef idx="3">
+              <a:schemeClr val="accent1"/>
+            </a:fillRef>
+            <a:effectRef idx="2">
+              <a:schemeClr val="accent1"/>
+            </a:effectRef>
+            <a:fontRef idx="minor">
+              <a:schemeClr val="lt1"/>
+            </a:fontRef>
+          </p:style>
+          <p:txBody>
+            <a:bodyPr rtlCol="0" anchor="ctr"/>
+            <a:lstStyle/>
+            <a:p>
+              <a:pPr algn="ctr"/>
+              <a:endParaRPr lang="en-US"/>
+            </a:p>
+          </p:txBody>
+        </p:sp>
+        <p:sp>
+          <p:nvSpPr>
+            <p:cNvPr id="63" name="Oval 62"/>
+            <p:cNvSpPr/>
+            <p:nvPr/>
+          </p:nvSpPr>
+          <p:spPr>
+            <a:xfrm>
+              <a:off x="6473151" y="1461396"/>
+              <a:ext cx="45719" cy="45719"/>
+            </a:xfrm>
+            <a:prstGeom prst="ellipse">
+              <a:avLst/>
+            </a:prstGeom>
             <a:solidFill>
-              <a:srgbClr val="000000"/>
+              <a:schemeClr val="tx1"/>
             </a:solidFill>
-          </a:ln>
-        </p:spPr>
-        <p:style>
-          <a:lnRef idx="1">
-            <a:schemeClr val="accent1"/>
-          </a:lnRef>
-          <a:fillRef idx="3">
-            <a:schemeClr val="accent1"/>
-          </a:fillRef>
-          <a:effectRef idx="2">
-            <a:schemeClr val="accent1"/>
-          </a:effectRef>
-          <a:fontRef idx="minor">
-            <a:schemeClr val="lt1"/>
-          </a:fontRef>
-        </p:style>
-        <p:txBody>
-          <a:bodyPr rtlCol="0" anchor="ctr"/>
-          <a:lstStyle/>
-          <a:p>
-            <a:pPr algn="ctr"/>
-            <a:endParaRPr lang="en-US"/>
-          </a:p>
-        </p:txBody>
-      </p:sp>
-      <p:sp>
-        <p:nvSpPr>
-          <p:cNvPr id="64" name="Oval 63"/>
-          <p:cNvSpPr/>
-          <p:nvPr/>
-        </p:nvSpPr>
-        <p:spPr>
-          <a:xfrm>
-            <a:off x="8006291" y="1451436"/>
-            <a:ext cx="45719" cy="45719"/>
-          </a:xfrm>
-          <a:prstGeom prst="ellipse">
-            <a:avLst/>
-          </a:prstGeom>
-          <a:solidFill>
-            <a:schemeClr val="tx1"/>
-          </a:solidFill>
-          <a:ln>
+            <a:ln>
+              <a:solidFill>
+                <a:srgbClr val="000000"/>
+              </a:solidFill>
+            </a:ln>
+          </p:spPr>
+          <p:style>
+            <a:lnRef idx="1">
+              <a:schemeClr val="accent1"/>
+            </a:lnRef>
+            <a:fillRef idx="3">
+              <a:schemeClr val="accent1"/>
+            </a:fillRef>
+            <a:effectRef idx="2">
+              <a:schemeClr val="accent1"/>
+            </a:effectRef>
+            <a:fontRef idx="minor">
+              <a:schemeClr val="lt1"/>
+            </a:fontRef>
+          </p:style>
+          <p:txBody>
+            <a:bodyPr rtlCol="0" anchor="ctr"/>
+            <a:lstStyle/>
+            <a:p>
+              <a:pPr algn="ctr"/>
+              <a:endParaRPr lang="en-US"/>
+            </a:p>
+          </p:txBody>
+        </p:sp>
+        <p:sp>
+          <p:nvSpPr>
+            <p:cNvPr id="64" name="Oval 63"/>
+            <p:cNvSpPr/>
+            <p:nvPr/>
+          </p:nvSpPr>
+          <p:spPr>
+            <a:xfrm>
+              <a:off x="8006291" y="1451436"/>
+              <a:ext cx="45719" cy="45719"/>
+            </a:xfrm>
+            <a:prstGeom prst="ellipse">
+              <a:avLst/>
+            </a:prstGeom>
             <a:solidFill>
-              <a:srgbClr val="000000"/>
+              <a:schemeClr val="tx1"/>
             </a:solidFill>
-          </a:ln>
-        </p:spPr>
-        <p:style>
-          <a:lnRef idx="1">
-            <a:schemeClr val="accent1"/>
-          </a:lnRef>
-          <a:fillRef idx="3">
-            <a:schemeClr val="accent1"/>
-          </a:fillRef>
-          <a:effectRef idx="2">
-            <a:schemeClr val="accent1"/>
-          </a:effectRef>
-          <a:fontRef idx="minor">
-            <a:schemeClr val="lt1"/>
-          </a:fontRef>
-        </p:style>
-        <p:txBody>
-          <a:bodyPr rtlCol="0" anchor="ctr"/>
-          <a:lstStyle/>
-          <a:p>
-            <a:pPr algn="ctr"/>
-            <a:endParaRPr lang="en-US"/>
-          </a:p>
-        </p:txBody>
-      </p:sp>
-      <p:sp>
-        <p:nvSpPr>
-          <p:cNvPr id="65" name="Oval 64"/>
-          <p:cNvSpPr/>
-          <p:nvPr/>
-        </p:nvSpPr>
-        <p:spPr>
-          <a:xfrm>
-            <a:off x="8538531" y="856026"/>
-            <a:ext cx="45719" cy="45719"/>
-          </a:xfrm>
-          <a:prstGeom prst="ellipse">
-            <a:avLst/>
-          </a:prstGeom>
-          <a:solidFill>
-            <a:schemeClr val="tx1"/>
-          </a:solidFill>
-          <a:ln>
+            <a:ln>
+              <a:solidFill>
+                <a:srgbClr val="000000"/>
+              </a:solidFill>
+            </a:ln>
+          </p:spPr>
+          <p:style>
+            <a:lnRef idx="1">
+              <a:schemeClr val="accent1"/>
+            </a:lnRef>
+            <a:fillRef idx="3">
+              <a:schemeClr val="accent1"/>
+            </a:fillRef>
+            <a:effectRef idx="2">
+              <a:schemeClr val="accent1"/>
+            </a:effectRef>
+            <a:fontRef idx="minor">
+              <a:schemeClr val="lt1"/>
+            </a:fontRef>
+          </p:style>
+          <p:txBody>
+            <a:bodyPr rtlCol="0" anchor="ctr"/>
+            <a:lstStyle/>
+            <a:p>
+              <a:pPr algn="ctr"/>
+              <a:endParaRPr lang="en-US"/>
+            </a:p>
+          </p:txBody>
+        </p:sp>
+        <p:sp>
+          <p:nvSpPr>
+            <p:cNvPr id="65" name="Oval 64"/>
+            <p:cNvSpPr/>
+            <p:nvPr/>
+          </p:nvSpPr>
+          <p:spPr>
+            <a:xfrm>
+              <a:off x="8538531" y="856026"/>
+              <a:ext cx="45719" cy="45719"/>
+            </a:xfrm>
+            <a:prstGeom prst="ellipse">
+              <a:avLst/>
+            </a:prstGeom>
             <a:solidFill>
-              <a:srgbClr val="000000"/>
+              <a:schemeClr val="tx1"/>
             </a:solidFill>
-          </a:ln>
-        </p:spPr>
-        <p:style>
-          <a:lnRef idx="1">
-            <a:schemeClr val="accent1"/>
-          </a:lnRef>
-          <a:fillRef idx="3">
-            <a:schemeClr val="accent1"/>
-          </a:fillRef>
-          <a:effectRef idx="2">
-            <a:schemeClr val="accent1"/>
-          </a:effectRef>
-          <a:fontRef idx="minor">
-            <a:schemeClr val="lt1"/>
-          </a:fontRef>
-        </p:style>
-        <p:txBody>
-          <a:bodyPr rtlCol="0" anchor="ctr"/>
-          <a:lstStyle/>
-          <a:p>
-            <a:pPr algn="ctr"/>
-            <a:endParaRPr lang="en-US"/>
-          </a:p>
-        </p:txBody>
-      </p:sp>
-      <p:sp>
-        <p:nvSpPr>
-          <p:cNvPr id="66" name="Oval 65"/>
-          <p:cNvSpPr/>
-          <p:nvPr/>
-        </p:nvSpPr>
-        <p:spPr>
-          <a:xfrm>
-            <a:off x="7776941" y="830376"/>
-            <a:ext cx="45719" cy="45719"/>
-          </a:xfrm>
-          <a:prstGeom prst="ellipse">
-            <a:avLst/>
-          </a:prstGeom>
-          <a:solidFill>
-            <a:schemeClr val="tx1"/>
-          </a:solidFill>
-          <a:ln>
+            <a:ln>
+              <a:solidFill>
+                <a:srgbClr val="000000"/>
+              </a:solidFill>
+            </a:ln>
+          </p:spPr>
+          <p:style>
+            <a:lnRef idx="1">
+              <a:schemeClr val="accent1"/>
+            </a:lnRef>
+            <a:fillRef idx="3">
+              <a:schemeClr val="accent1"/>
+            </a:fillRef>
+            <a:effectRef idx="2">
+              <a:schemeClr val="accent1"/>
+            </a:effectRef>
+            <a:fontRef idx="minor">
+              <a:schemeClr val="lt1"/>
+            </a:fontRef>
+          </p:style>
+          <p:txBody>
+            <a:bodyPr rtlCol="0" anchor="ctr"/>
+            <a:lstStyle/>
+            <a:p>
+              <a:pPr algn="ctr"/>
+              <a:endParaRPr lang="en-US"/>
+            </a:p>
+          </p:txBody>
+        </p:sp>
+        <p:sp>
+          <p:nvSpPr>
+            <p:cNvPr id="66" name="Oval 65"/>
+            <p:cNvSpPr/>
+            <p:nvPr/>
+          </p:nvSpPr>
+          <p:spPr>
+            <a:xfrm>
+              <a:off x="7776941" y="830376"/>
+              <a:ext cx="45719" cy="45719"/>
+            </a:xfrm>
+            <a:prstGeom prst="ellipse">
+              <a:avLst/>
+            </a:prstGeom>
             <a:solidFill>
-              <a:srgbClr val="000000"/>
+              <a:schemeClr val="tx1"/>
             </a:solidFill>
-          </a:ln>
-        </p:spPr>
-        <p:style>
-          <a:lnRef idx="1">
-            <a:schemeClr val="accent1"/>
-          </a:lnRef>
-          <a:fillRef idx="3">
-            <a:schemeClr val="accent1"/>
-          </a:fillRef>
-          <a:effectRef idx="2">
-            <a:schemeClr val="accent1"/>
-          </a:effectRef>
-          <a:fontRef idx="minor">
-            <a:schemeClr val="lt1"/>
-          </a:fontRef>
-        </p:style>
-        <p:txBody>
-          <a:bodyPr rtlCol="0" anchor="ctr"/>
-          <a:lstStyle/>
-          <a:p>
-            <a:pPr algn="ctr"/>
-            <a:endParaRPr lang="en-US"/>
-          </a:p>
-        </p:txBody>
-      </p:sp>
-      <p:cxnSp>
-        <p:nvCxnSpPr>
-          <p:cNvPr id="8" name="Straight Arrow Connector 7"/>
-          <p:cNvCxnSpPr>
-            <a:stCxn id="58" idx="0"/>
-            <a:endCxn id="40" idx="3"/>
-          </p:cNvCxnSpPr>
-          <p:nvPr/>
-        </p:nvCxnSpPr>
-        <p:spPr>
-          <a:xfrm flipV="1">
-            <a:off x="6074421" y="1820676"/>
-            <a:ext cx="707750" cy="845320"/>
-          </a:xfrm>
-          <a:prstGeom prst="straightConnector1">
-            <a:avLst/>
-          </a:prstGeom>
-          <a:ln>
-            <a:headEnd type="arrow"/>
-            <a:tailEnd type="arrow"/>
-          </a:ln>
-        </p:spPr>
-        <p:style>
-          <a:lnRef idx="2">
-            <a:schemeClr val="accent1"/>
-          </a:lnRef>
-          <a:fillRef idx="0">
-            <a:schemeClr val="accent1"/>
-          </a:fillRef>
-          <a:effectRef idx="1">
-            <a:schemeClr val="accent1"/>
-          </a:effectRef>
-          <a:fontRef idx="minor">
-            <a:schemeClr val="tx1"/>
-          </a:fontRef>
-        </p:style>
-      </p:cxnSp>
-      <p:cxnSp>
-        <p:nvCxnSpPr>
-          <p:cNvPr id="67" name="Straight Arrow Connector 66"/>
-          <p:cNvCxnSpPr>
-            <a:stCxn id="60" idx="7"/>
-            <a:endCxn id="40" idx="4"/>
-          </p:cNvCxnSpPr>
-          <p:nvPr/>
-        </p:nvCxnSpPr>
-        <p:spPr>
-          <a:xfrm flipV="1">
-            <a:off x="6359775" y="1837190"/>
-            <a:ext cx="462264" cy="926641"/>
-          </a:xfrm>
-          <a:prstGeom prst="straightConnector1">
-            <a:avLst/>
-          </a:prstGeom>
-          <a:ln>
-            <a:headEnd type="arrow"/>
-            <a:tailEnd type="arrow"/>
-          </a:ln>
-        </p:spPr>
-        <p:style>
-          <a:lnRef idx="2">
-            <a:schemeClr val="accent1"/>
-          </a:lnRef>
-          <a:fillRef idx="0">
-            <a:schemeClr val="accent1"/>
-          </a:fillRef>
-          <a:effectRef idx="1">
-            <a:schemeClr val="accent1"/>
-          </a:effectRef>
-          <a:fontRef idx="minor">
-            <a:schemeClr val="tx1"/>
-          </a:fontRef>
-        </p:style>
-      </p:cxnSp>
-      <p:cxnSp>
-        <p:nvCxnSpPr>
-          <p:cNvPr id="68" name="Straight Arrow Connector 67"/>
-          <p:cNvCxnSpPr>
-            <a:stCxn id="59" idx="0"/>
-            <a:endCxn id="40" idx="4"/>
-          </p:cNvCxnSpPr>
-          <p:nvPr/>
-        </p:nvCxnSpPr>
-        <p:spPr>
-          <a:xfrm flipV="1">
-            <a:off x="6654141" y="1837190"/>
-            <a:ext cx="167898" cy="981206"/>
-          </a:xfrm>
-          <a:prstGeom prst="straightConnector1">
-            <a:avLst/>
-          </a:prstGeom>
-          <a:ln>
-            <a:headEnd type="arrow"/>
-            <a:tailEnd type="arrow"/>
-          </a:ln>
-        </p:spPr>
-        <p:style>
-          <a:lnRef idx="2">
-            <a:schemeClr val="accent1"/>
-          </a:lnRef>
-          <a:fillRef idx="0">
-            <a:schemeClr val="accent1"/>
-          </a:fillRef>
-          <a:effectRef idx="1">
-            <a:schemeClr val="accent1"/>
-          </a:effectRef>
-          <a:fontRef idx="minor">
-            <a:schemeClr val="tx1"/>
-          </a:fontRef>
-        </p:style>
-      </p:cxnSp>
-      <p:cxnSp>
-        <p:nvCxnSpPr>
-          <p:cNvPr id="69" name="Straight Arrow Connector 68"/>
-          <p:cNvCxnSpPr>
-            <a:stCxn id="40" idx="7"/>
-            <a:endCxn id="66" idx="3"/>
-          </p:cNvCxnSpPr>
-          <p:nvPr/>
-        </p:nvCxnSpPr>
-        <p:spPr>
-          <a:xfrm flipV="1">
-            <a:off x="6861906" y="869400"/>
-            <a:ext cx="921730" cy="871537"/>
-          </a:xfrm>
-          <a:prstGeom prst="straightConnector1">
-            <a:avLst/>
-          </a:prstGeom>
-          <a:ln>
-            <a:headEnd type="arrow"/>
-            <a:tailEnd type="arrow"/>
-          </a:ln>
-        </p:spPr>
-        <p:style>
-          <a:lnRef idx="2">
-            <a:schemeClr val="accent1"/>
-          </a:lnRef>
-          <a:fillRef idx="0">
-            <a:schemeClr val="accent1"/>
-          </a:fillRef>
-          <a:effectRef idx="1">
-            <a:schemeClr val="accent1"/>
-          </a:effectRef>
-          <a:fontRef idx="minor">
-            <a:schemeClr val="tx1"/>
-          </a:fontRef>
-        </p:style>
-      </p:cxnSp>
-      <p:cxnSp>
-        <p:nvCxnSpPr>
-          <p:cNvPr id="70" name="Straight Arrow Connector 69"/>
-          <p:cNvCxnSpPr>
-            <a:stCxn id="40" idx="6"/>
-            <a:endCxn id="65" idx="3"/>
-          </p:cNvCxnSpPr>
-          <p:nvPr/>
-        </p:nvCxnSpPr>
-        <p:spPr>
-          <a:xfrm flipV="1">
-            <a:off x="6878419" y="895050"/>
-            <a:ext cx="1666807" cy="885757"/>
-          </a:xfrm>
-          <a:prstGeom prst="straightConnector1">
-            <a:avLst/>
-          </a:prstGeom>
-          <a:ln>
-            <a:headEnd type="arrow"/>
-            <a:tailEnd type="arrow"/>
-          </a:ln>
-        </p:spPr>
-        <p:style>
-          <a:lnRef idx="2">
-            <a:schemeClr val="accent1"/>
-          </a:lnRef>
-          <a:fillRef idx="0">
-            <a:schemeClr val="accent1"/>
-          </a:fillRef>
-          <a:effectRef idx="1">
-            <a:schemeClr val="accent1"/>
-          </a:effectRef>
-          <a:fontRef idx="minor">
-            <a:schemeClr val="tx1"/>
-          </a:fontRef>
-        </p:style>
-      </p:cxnSp>
-      <p:cxnSp>
-        <p:nvCxnSpPr>
-          <p:cNvPr id="71" name="Straight Arrow Connector 70"/>
-          <p:cNvCxnSpPr>
-            <a:stCxn id="40" idx="6"/>
-            <a:endCxn id="64" idx="3"/>
-          </p:cNvCxnSpPr>
-          <p:nvPr/>
-        </p:nvCxnSpPr>
-        <p:spPr>
-          <a:xfrm flipV="1">
-            <a:off x="6878419" y="1490460"/>
-            <a:ext cx="1134567" cy="290347"/>
-          </a:xfrm>
-          <a:prstGeom prst="straightConnector1">
-            <a:avLst/>
-          </a:prstGeom>
-          <a:ln>
-            <a:headEnd type="arrow"/>
-            <a:tailEnd type="arrow"/>
-          </a:ln>
-        </p:spPr>
-        <p:style>
-          <a:lnRef idx="2">
-            <a:schemeClr val="accent1"/>
-          </a:lnRef>
-          <a:fillRef idx="0">
-            <a:schemeClr val="accent1"/>
-          </a:fillRef>
-          <a:effectRef idx="1">
-            <a:schemeClr val="accent1"/>
-          </a:effectRef>
-          <a:fontRef idx="minor">
-            <a:schemeClr val="tx1"/>
-          </a:fontRef>
-        </p:style>
-      </p:cxnSp>
-      <p:cxnSp>
-        <p:nvCxnSpPr>
-          <p:cNvPr id="72" name="Straight Arrow Connector 71"/>
-          <p:cNvCxnSpPr>
-            <a:stCxn id="62" idx="6"/>
-            <a:endCxn id="40" idx="2"/>
-          </p:cNvCxnSpPr>
-          <p:nvPr/>
-        </p:nvCxnSpPr>
-        <p:spPr>
-          <a:xfrm>
-            <a:off x="6149322" y="1653788"/>
-            <a:ext cx="616336" cy="127019"/>
-          </a:xfrm>
-          <a:prstGeom prst="straightConnector1">
-            <a:avLst/>
-          </a:prstGeom>
-          <a:ln>
-            <a:headEnd type="arrow"/>
-            <a:tailEnd type="arrow"/>
-          </a:ln>
-        </p:spPr>
-        <p:style>
-          <a:lnRef idx="2">
-            <a:schemeClr val="accent1"/>
-          </a:lnRef>
-          <a:fillRef idx="0">
-            <a:schemeClr val="accent1"/>
-          </a:fillRef>
-          <a:effectRef idx="1">
-            <a:schemeClr val="accent1"/>
-          </a:effectRef>
-          <a:fontRef idx="minor">
-            <a:schemeClr val="tx1"/>
-          </a:fontRef>
-        </p:style>
-      </p:cxnSp>
-      <p:cxnSp>
-        <p:nvCxnSpPr>
-          <p:cNvPr id="73" name="Straight Arrow Connector 72"/>
-          <p:cNvCxnSpPr>
-            <a:stCxn id="61" idx="5"/>
-            <a:endCxn id="40" idx="1"/>
-          </p:cNvCxnSpPr>
-          <p:nvPr/>
-        </p:nvCxnSpPr>
-        <p:spPr>
-          <a:xfrm>
-            <a:off x="6242985" y="1409280"/>
-            <a:ext cx="539186" cy="331657"/>
-          </a:xfrm>
-          <a:prstGeom prst="straightConnector1">
-            <a:avLst/>
-          </a:prstGeom>
-          <a:ln>
-            <a:headEnd type="arrow"/>
-            <a:tailEnd type="arrow"/>
-          </a:ln>
-        </p:spPr>
-        <p:style>
-          <a:lnRef idx="2">
-            <a:schemeClr val="accent1"/>
-          </a:lnRef>
-          <a:fillRef idx="0">
-            <a:schemeClr val="accent1"/>
-          </a:fillRef>
-          <a:effectRef idx="1">
-            <a:schemeClr val="accent1"/>
-          </a:effectRef>
-          <a:fontRef idx="minor">
-            <a:schemeClr val="tx1"/>
-          </a:fontRef>
-        </p:style>
-      </p:cxnSp>
-      <p:cxnSp>
-        <p:nvCxnSpPr>
-          <p:cNvPr id="74" name="Straight Arrow Connector 73"/>
-          <p:cNvCxnSpPr>
-            <a:stCxn id="63" idx="5"/>
-            <a:endCxn id="40" idx="1"/>
-          </p:cNvCxnSpPr>
-          <p:nvPr/>
-        </p:nvCxnSpPr>
-        <p:spPr>
-          <a:xfrm>
-            <a:off x="6512175" y="1500420"/>
-            <a:ext cx="269996" cy="240517"/>
-          </a:xfrm>
-          <a:prstGeom prst="straightConnector1">
-            <a:avLst/>
-          </a:prstGeom>
-          <a:ln>
-            <a:headEnd type="arrow"/>
-            <a:tailEnd type="arrow"/>
-          </a:ln>
-        </p:spPr>
-        <p:style>
-          <a:lnRef idx="2">
-            <a:schemeClr val="accent1"/>
-          </a:lnRef>
-          <a:fillRef idx="0">
-            <a:schemeClr val="accent1"/>
-          </a:fillRef>
-          <a:effectRef idx="1">
-            <a:schemeClr val="accent1"/>
-          </a:effectRef>
-          <a:fontRef idx="minor">
-            <a:schemeClr val="tx1"/>
-          </a:fontRef>
-        </p:style>
-      </p:cxnSp>
+            <a:ln>
+              <a:solidFill>
+                <a:srgbClr val="000000"/>
+              </a:solidFill>
+            </a:ln>
+          </p:spPr>
+          <p:style>
+            <a:lnRef idx="1">
+              <a:schemeClr val="accent1"/>
+            </a:lnRef>
+            <a:fillRef idx="3">
+              <a:schemeClr val="accent1"/>
+            </a:fillRef>
+            <a:effectRef idx="2">
+              <a:schemeClr val="accent1"/>
+            </a:effectRef>
+            <a:fontRef idx="minor">
+              <a:schemeClr val="lt1"/>
+            </a:fontRef>
+          </p:style>
+          <p:txBody>
+            <a:bodyPr rtlCol="0" anchor="ctr"/>
+            <a:lstStyle/>
+            <a:p>
+              <a:pPr algn="ctr"/>
+              <a:endParaRPr lang="en-US"/>
+            </a:p>
+          </p:txBody>
+        </p:sp>
+        <p:cxnSp>
+          <p:nvCxnSpPr>
+            <p:cNvPr id="8" name="Straight Arrow Connector 7"/>
+            <p:cNvCxnSpPr>
+              <a:cxnSpLocks/>
+              <a:stCxn id="58" idx="0"/>
+              <a:endCxn id="40" idx="3"/>
+            </p:cNvCxnSpPr>
+            <p:nvPr/>
+          </p:nvCxnSpPr>
+          <p:spPr>
+            <a:xfrm flipV="1">
+              <a:off x="6074421" y="1820676"/>
+              <a:ext cx="707750" cy="845320"/>
+            </a:xfrm>
+            <a:prstGeom prst="straightConnector1">
+              <a:avLst/>
+            </a:prstGeom>
+            <a:ln>
+              <a:headEnd type="arrow"/>
+              <a:tailEnd type="arrow"/>
+            </a:ln>
+          </p:spPr>
+          <p:style>
+            <a:lnRef idx="2">
+              <a:schemeClr val="accent1"/>
+            </a:lnRef>
+            <a:fillRef idx="0">
+              <a:schemeClr val="accent1"/>
+            </a:fillRef>
+            <a:effectRef idx="1">
+              <a:schemeClr val="accent1"/>
+            </a:effectRef>
+            <a:fontRef idx="minor">
+              <a:schemeClr val="tx1"/>
+            </a:fontRef>
+          </p:style>
+        </p:cxnSp>
+        <p:cxnSp>
+          <p:nvCxnSpPr>
+            <p:cNvPr id="67" name="Straight Arrow Connector 66"/>
+            <p:cNvCxnSpPr>
+              <a:cxnSpLocks/>
+              <a:stCxn id="60" idx="7"/>
+              <a:endCxn id="40" idx="4"/>
+            </p:cNvCxnSpPr>
+            <p:nvPr/>
+          </p:nvCxnSpPr>
+          <p:spPr>
+            <a:xfrm flipV="1">
+              <a:off x="6359775" y="1837190"/>
+              <a:ext cx="462264" cy="926641"/>
+            </a:xfrm>
+            <a:prstGeom prst="straightConnector1">
+              <a:avLst/>
+            </a:prstGeom>
+            <a:ln>
+              <a:headEnd type="arrow"/>
+              <a:tailEnd type="arrow"/>
+            </a:ln>
+          </p:spPr>
+          <p:style>
+            <a:lnRef idx="2">
+              <a:schemeClr val="accent1"/>
+            </a:lnRef>
+            <a:fillRef idx="0">
+              <a:schemeClr val="accent1"/>
+            </a:fillRef>
+            <a:effectRef idx="1">
+              <a:schemeClr val="accent1"/>
+            </a:effectRef>
+            <a:fontRef idx="minor">
+              <a:schemeClr val="tx1"/>
+            </a:fontRef>
+          </p:style>
+        </p:cxnSp>
+        <p:cxnSp>
+          <p:nvCxnSpPr>
+            <p:cNvPr id="68" name="Straight Arrow Connector 67"/>
+            <p:cNvCxnSpPr>
+              <a:cxnSpLocks/>
+              <a:stCxn id="59" idx="0"/>
+              <a:endCxn id="40" idx="4"/>
+            </p:cNvCxnSpPr>
+            <p:nvPr/>
+          </p:nvCxnSpPr>
+          <p:spPr>
+            <a:xfrm flipV="1">
+              <a:off x="6654141" y="1837190"/>
+              <a:ext cx="167898" cy="981206"/>
+            </a:xfrm>
+            <a:prstGeom prst="straightConnector1">
+              <a:avLst/>
+            </a:prstGeom>
+            <a:ln>
+              <a:headEnd type="arrow"/>
+              <a:tailEnd type="arrow"/>
+            </a:ln>
+          </p:spPr>
+          <p:style>
+            <a:lnRef idx="2">
+              <a:schemeClr val="accent1"/>
+            </a:lnRef>
+            <a:fillRef idx="0">
+              <a:schemeClr val="accent1"/>
+            </a:fillRef>
+            <a:effectRef idx="1">
+              <a:schemeClr val="accent1"/>
+            </a:effectRef>
+            <a:fontRef idx="minor">
+              <a:schemeClr val="tx1"/>
+            </a:fontRef>
+          </p:style>
+        </p:cxnSp>
+        <p:cxnSp>
+          <p:nvCxnSpPr>
+            <p:cNvPr id="69" name="Straight Arrow Connector 68"/>
+            <p:cNvCxnSpPr>
+              <a:cxnSpLocks/>
+              <a:stCxn id="40" idx="7"/>
+              <a:endCxn id="66" idx="3"/>
+            </p:cNvCxnSpPr>
+            <p:nvPr/>
+          </p:nvCxnSpPr>
+          <p:spPr>
+            <a:xfrm flipV="1">
+              <a:off x="6861906" y="869400"/>
+              <a:ext cx="921730" cy="871537"/>
+            </a:xfrm>
+            <a:prstGeom prst="straightConnector1">
+              <a:avLst/>
+            </a:prstGeom>
+            <a:ln>
+              <a:headEnd type="arrow"/>
+              <a:tailEnd type="arrow"/>
+            </a:ln>
+          </p:spPr>
+          <p:style>
+            <a:lnRef idx="2">
+              <a:schemeClr val="accent1"/>
+            </a:lnRef>
+            <a:fillRef idx="0">
+              <a:schemeClr val="accent1"/>
+            </a:fillRef>
+            <a:effectRef idx="1">
+              <a:schemeClr val="accent1"/>
+            </a:effectRef>
+            <a:fontRef idx="minor">
+              <a:schemeClr val="tx1"/>
+            </a:fontRef>
+          </p:style>
+        </p:cxnSp>
+        <p:cxnSp>
+          <p:nvCxnSpPr>
+            <p:cNvPr id="70" name="Straight Arrow Connector 69"/>
+            <p:cNvCxnSpPr>
+              <a:cxnSpLocks/>
+              <a:stCxn id="40" idx="6"/>
+              <a:endCxn id="65" idx="3"/>
+            </p:cNvCxnSpPr>
+            <p:nvPr/>
+          </p:nvCxnSpPr>
+          <p:spPr>
+            <a:xfrm flipV="1">
+              <a:off x="6878419" y="895050"/>
+              <a:ext cx="1666807" cy="885757"/>
+            </a:xfrm>
+            <a:prstGeom prst="straightConnector1">
+              <a:avLst/>
+            </a:prstGeom>
+            <a:ln>
+              <a:headEnd type="arrow"/>
+              <a:tailEnd type="arrow"/>
+            </a:ln>
+          </p:spPr>
+          <p:style>
+            <a:lnRef idx="2">
+              <a:schemeClr val="accent1"/>
+            </a:lnRef>
+            <a:fillRef idx="0">
+              <a:schemeClr val="accent1"/>
+            </a:fillRef>
+            <a:effectRef idx="1">
+              <a:schemeClr val="accent1"/>
+            </a:effectRef>
+            <a:fontRef idx="minor">
+              <a:schemeClr val="tx1"/>
+            </a:fontRef>
+          </p:style>
+        </p:cxnSp>
+        <p:cxnSp>
+          <p:nvCxnSpPr>
+            <p:cNvPr id="71" name="Straight Arrow Connector 70"/>
+            <p:cNvCxnSpPr>
+              <a:cxnSpLocks/>
+              <a:stCxn id="40" idx="6"/>
+              <a:endCxn id="64" idx="3"/>
+            </p:cNvCxnSpPr>
+            <p:nvPr/>
+          </p:nvCxnSpPr>
+          <p:spPr>
+            <a:xfrm flipV="1">
+              <a:off x="6878419" y="1490460"/>
+              <a:ext cx="1134567" cy="290347"/>
+            </a:xfrm>
+            <a:prstGeom prst="straightConnector1">
+              <a:avLst/>
+            </a:prstGeom>
+            <a:ln>
+              <a:headEnd type="arrow"/>
+              <a:tailEnd type="arrow"/>
+            </a:ln>
+          </p:spPr>
+          <p:style>
+            <a:lnRef idx="2">
+              <a:schemeClr val="accent1"/>
+            </a:lnRef>
+            <a:fillRef idx="0">
+              <a:schemeClr val="accent1"/>
+            </a:fillRef>
+            <a:effectRef idx="1">
+              <a:schemeClr val="accent1"/>
+            </a:effectRef>
+            <a:fontRef idx="minor">
+              <a:schemeClr val="tx1"/>
+            </a:fontRef>
+          </p:style>
+        </p:cxnSp>
+        <p:cxnSp>
+          <p:nvCxnSpPr>
+            <p:cNvPr id="72" name="Straight Arrow Connector 71"/>
+            <p:cNvCxnSpPr>
+              <a:cxnSpLocks/>
+              <a:stCxn id="62" idx="6"/>
+              <a:endCxn id="40" idx="2"/>
+            </p:cNvCxnSpPr>
+            <p:nvPr/>
+          </p:nvCxnSpPr>
+          <p:spPr>
+            <a:xfrm>
+              <a:off x="6149322" y="1653788"/>
+              <a:ext cx="616336" cy="127019"/>
+            </a:xfrm>
+            <a:prstGeom prst="straightConnector1">
+              <a:avLst/>
+            </a:prstGeom>
+            <a:ln>
+              <a:headEnd type="arrow"/>
+              <a:tailEnd type="arrow"/>
+            </a:ln>
+          </p:spPr>
+          <p:style>
+            <a:lnRef idx="2">
+              <a:schemeClr val="accent1"/>
+            </a:lnRef>
+            <a:fillRef idx="0">
+              <a:schemeClr val="accent1"/>
+            </a:fillRef>
+            <a:effectRef idx="1">
+              <a:schemeClr val="accent1"/>
+            </a:effectRef>
+            <a:fontRef idx="minor">
+              <a:schemeClr val="tx1"/>
+            </a:fontRef>
+          </p:style>
+        </p:cxnSp>
+        <p:cxnSp>
+          <p:nvCxnSpPr>
+            <p:cNvPr id="73" name="Straight Arrow Connector 72"/>
+            <p:cNvCxnSpPr>
+              <a:cxnSpLocks/>
+              <a:stCxn id="61" idx="5"/>
+              <a:endCxn id="40" idx="1"/>
+            </p:cNvCxnSpPr>
+            <p:nvPr/>
+          </p:nvCxnSpPr>
+          <p:spPr>
+            <a:xfrm>
+              <a:off x="6242985" y="1409280"/>
+              <a:ext cx="539186" cy="331657"/>
+            </a:xfrm>
+            <a:prstGeom prst="straightConnector1">
+              <a:avLst/>
+            </a:prstGeom>
+            <a:ln>
+              <a:headEnd type="arrow"/>
+              <a:tailEnd type="arrow"/>
+            </a:ln>
+          </p:spPr>
+          <p:style>
+            <a:lnRef idx="2">
+              <a:schemeClr val="accent1"/>
+            </a:lnRef>
+            <a:fillRef idx="0">
+              <a:schemeClr val="accent1"/>
+            </a:fillRef>
+            <a:effectRef idx="1">
+              <a:schemeClr val="accent1"/>
+            </a:effectRef>
+            <a:fontRef idx="minor">
+              <a:schemeClr val="tx1"/>
+            </a:fontRef>
+          </p:style>
+        </p:cxnSp>
+        <p:cxnSp>
+          <p:nvCxnSpPr>
+            <p:cNvPr id="74" name="Straight Arrow Connector 73"/>
+            <p:cNvCxnSpPr>
+              <a:cxnSpLocks/>
+              <a:stCxn id="63" idx="5"/>
+              <a:endCxn id="40" idx="1"/>
+            </p:cNvCxnSpPr>
+            <p:nvPr/>
+          </p:nvCxnSpPr>
+          <p:spPr>
+            <a:xfrm>
+              <a:off x="6512175" y="1500420"/>
+              <a:ext cx="269996" cy="240517"/>
+            </a:xfrm>
+            <a:prstGeom prst="straightConnector1">
+              <a:avLst/>
+            </a:prstGeom>
+            <a:ln>
+              <a:headEnd type="arrow"/>
+              <a:tailEnd type="arrow"/>
+            </a:ln>
+          </p:spPr>
+          <p:style>
+            <a:lnRef idx="2">
+              <a:schemeClr val="accent1"/>
+            </a:lnRef>
+            <a:fillRef idx="0">
+              <a:schemeClr val="accent1"/>
+            </a:fillRef>
+            <a:effectRef idx="1">
+              <a:schemeClr val="accent1"/>
+            </a:effectRef>
+            <a:fontRef idx="minor">
+              <a:schemeClr val="tx1"/>
+            </a:fontRef>
+          </p:style>
+        </p:cxnSp>
+      </p:grpSp>
       <p:graphicFrame>
         <p:nvGraphicFramePr>
           <p:cNvPr id="75" name="Object 74"/>
@@ -11318,63 +14886,6 @@
           </a:graphicData>
         </a:graphic>
       </p:graphicFrame>
-      <p:graphicFrame>
-        <p:nvGraphicFramePr>
-          <p:cNvPr id="61" name="Object 60"/>
-          <p:cNvGraphicFramePr>
-            <a:graphicFrameLocks noChangeAspect="1"/>
-          </p:cNvGraphicFramePr>
-          <p:nvPr>
-            <p:extLst>
-              <p:ext uri="{D42A27DB-BD31-4B8C-83A1-F6EECF244321}">
-                <p14:modId xmlns:p14="http://schemas.microsoft.com/office/powerpoint/2010/main" val="2426001008"/>
-              </p:ext>
-            </p:extLst>
-          </p:nvPr>
-        </p:nvGraphicFramePr>
-        <p:xfrm>
-          <a:off x="7405688" y="5781503"/>
-          <a:ext cx="1273175" cy="674688"/>
-        </p:xfrm>
-        <a:graphic>
-          <a:graphicData uri="http://schemas.openxmlformats.org/presentationml/2006/ole">
-            <mc:AlternateContent xmlns:mc="http://schemas.openxmlformats.org/markup-compatibility/2006">
-              <mc:Choice xmlns:v="urn:schemas-microsoft-com:vml" Requires="v">
-                <p:oleObj name="Equation" r:id="rId10" imgW="863600" imgH="457200" progId="Equation.3">
-                  <p:embed/>
-                </p:oleObj>
-              </mc:Choice>
-              <mc:Fallback>
-                <p:oleObj name="Equation" r:id="rId10" imgW="863600" imgH="457200" progId="Equation.3">
-                  <p:embed/>
-                  <p:pic>
-                    <p:nvPicPr>
-                      <p:cNvPr id="61" name="Object 60"/>
-                      <p:cNvPicPr/>
-                      <p:nvPr/>
-                    </p:nvPicPr>
-                    <p:blipFill>
-                      <a:blip r:embed="rId11"/>
-                      <a:stretch>
-                        <a:fillRect/>
-                      </a:stretch>
-                    </p:blipFill>
-                    <p:spPr>
-                      <a:xfrm>
-                        <a:off x="7405688" y="5781503"/>
-                        <a:ext cx="1273175" cy="674688"/>
-                      </a:xfrm>
-                      <a:prstGeom prst="rect">
-                        <a:avLst/>
-                      </a:prstGeom>
-                    </p:spPr>
-                  </p:pic>
-                </p:oleObj>
-              </mc:Fallback>
-            </mc:AlternateContent>
-          </a:graphicData>
-        </a:graphic>
-      </p:graphicFrame>
       <p:cxnSp>
         <p:nvCxnSpPr>
           <p:cNvPr id="63" name="Straight Arrow Connector 62"/>
@@ -11489,54 +15000,6 @@
                 <a:latin typeface=""/>
               </a:rPr>
               <a:t> 32-46 </a:t>
-            </a:r>
-          </a:p>
-        </p:txBody>
-      </p:sp>
-      <p:sp>
-        <p:nvSpPr>
-          <p:cNvPr id="66" name="TextBox 65"/>
-          <p:cNvSpPr txBox="1"/>
-          <p:nvPr/>
-        </p:nvSpPr>
-        <p:spPr>
-          <a:xfrm>
-            <a:off x="2357096" y="4077004"/>
-            <a:ext cx="2812432" cy="738664"/>
-          </a:xfrm>
-          <a:prstGeom prst="rect">
-            <a:avLst/>
-          </a:prstGeom>
-          <a:solidFill>
-            <a:schemeClr val="accent1">
-              <a:lumMod val="20000"/>
-              <a:lumOff val="80000"/>
-            </a:schemeClr>
-          </a:solidFill>
-          <a:effectLst>
-            <a:outerShdw blurRad="50800" dist="38100" dir="18900000" algn="bl" rotWithShape="0">
-              <a:prstClr val="black">
-                <a:alpha val="40000"/>
-              </a:prstClr>
-            </a:outerShdw>
-          </a:effectLst>
-        </p:spPr>
-        <p:txBody>
-          <a:bodyPr wrap="square" rtlCol="0">
-            <a:spAutoFit/>
-          </a:bodyPr>
-          <a:lstStyle/>
-          <a:p>
-            <a:r>
-              <a:rPr lang="en-US" sz="1400" dirty="0">
-                <a:solidFill>
-                  <a:schemeClr val="tx1">
-                    <a:lumMod val="75000"/>
-                    <a:lumOff val="25000"/>
-                  </a:schemeClr>
-                </a:solidFill>
-              </a:rPr>
-              <a:t>* If the reduced model is different, the coefficient of determination is evaluated using a null model</a:t>
             </a:r>
           </a:p>
         </p:txBody>
